--- a/presentation/split/3-Jonayed.pptx
+++ b/presentation/split/3-Jonayed.pptx
@@ -4,16 +4,20 @@
   <p:sldMasterIdLst>
     <p:sldMasterId id="2147483648" r:id="rId1"/>
   </p:sldMasterIdLst>
+  <p:notesMasterIdLst>
+    <p:notesMasterId r:id="rId11"/>
+  </p:notesMasterIdLst>
   <p:sldIdLst>
-    <p:sldId id="275" r:id="rId21"/>
-    <p:sldId id="276" r:id="rId22"/>
-    <p:sldId id="277" r:id="rId23"/>
-    <p:sldId id="278" r:id="rId24"/>
-    <p:sldId id="279" r:id="rId25"/>
+    <p:sldId id="275" r:id="rId2"/>
+    <p:sldId id="276" r:id="rId3"/>
+    <p:sldId id="280" r:id="rId4"/>
+    <p:sldId id="281" r:id="rId5"/>
+    <p:sldId id="277" r:id="rId6"/>
+    <p:sldId id="278" r:id="rId7"/>
+    <p:sldId id="279" r:id="rId8"/>
+    <p:sldId id="282" r:id="rId9"/>
+    <p:sldId id="283" r:id="rId10"/>
   </p:sldIdLst>
-  <p:notesMasterIdLst>
-    <p:notesMasterId r:id="rId39"/>
-  </p:notesMasterIdLst>
   <p:sldSz cx="12192000" cy="6858000"/>
   <p:notesSz cx="6858000" cy="12192000"/>
   <p:defaultTextStyle>
@@ -108,6 +112,11 @@
       </a:defRPr>
     </a:lvl9pPr>
   </p:defaultTextStyle>
+  <p:extLst>
+    <p:ext uri="{EFAFB233-063F-42B5-8137-9DF3F51BA10A}">
+      <p15:sldGuideLst xmlns:p15="http://schemas.microsoft.com/office/powerpoint/2012/main"/>
+    </p:ext>
+  </p:extLst>
 </p:presentation>
 </file>
 
@@ -133,234 +142,10 @@
           <a:chExt cx="0" cy="0"/>
         </a:xfrm>
       </p:grpSpPr>
-      <p:sp>
-        <p:nvSpPr>
-          <p:cNvPr id="2" name="Header Placeholder 1"/>
-          <p:cNvSpPr>
-            <a:spLocks noGrp="1"/>
-          </p:cNvSpPr>
-          <p:nvPr>
-            <p:ph type="hdr" sz="quarter"/>
-          </p:nvPr>
-        </p:nvSpPr>
-        <p:spPr>
-          <a:xfrm>
-            <a:off x="0" y="0"/>
-            <a:ext cx="2971800" cy="458788"/>
-          </a:xfrm>
-          <a:prstGeom prst="rect">
-            <a:avLst/>
-          </a:prstGeom>
-        </p:spPr>
-        <p:txBody>
-          <a:bodyPr vert="horz" lIns="91440" tIns="45720" rIns="91440" bIns="45720" rtlCol="0"/>
-          <a:lstStyle>
-            <a:lvl1pPr algn="l">
-              <a:defRPr sz="1200"/>
-            </a:lvl1pPr>
-          </a:lstStyle>
-          <a:p>
-            <a:endParaRPr lang="en-US"/>
-          </a:p>
-        </p:txBody>
-      </p:sp>
-      <p:sp>
-        <p:nvSpPr>
-          <p:cNvPr id="3" name="Date Placeholder 2"/>
-          <p:cNvSpPr>
-            <a:spLocks noGrp="1"/>
-          </p:cNvSpPr>
-          <p:nvPr>
-            <p:ph type="dt" idx="1"/>
-          </p:nvPr>
-        </p:nvSpPr>
-        <p:spPr>
-          <a:xfrm>
-            <a:off x="3884613" y="0"/>
-            <a:ext cx="2971800" cy="458788"/>
-          </a:xfrm>
-          <a:prstGeom prst="rect">
-            <a:avLst/>
-          </a:prstGeom>
-        </p:spPr>
-        <p:txBody>
-          <a:bodyPr vert="horz" lIns="91440" tIns="45720" rIns="91440" bIns="45720" rtlCol="0"/>
-          <a:lstStyle>
-            <a:lvl1pPr algn="r">
-              <a:defRPr sz="1200"/>
-            </a:lvl1pPr>
-          </a:lstStyle>
-          <a:p>
-            <a:fld id="{5282F153-3F37-0F45-9E97-73ACFA13230C}" type="datetimeFigureOut">
-              <a:rPr lang="en-US"/>
-              <a:t>7/23/19</a:t>
-            </a:fld>
-            <a:endParaRPr lang="en-US"/>
-          </a:p>
-        </p:txBody>
-      </p:sp>
-      <p:sp>
-        <p:nvSpPr>
-          <p:cNvPr id="4" name="Slide Image Placeholder 3"/>
-          <p:cNvSpPr>
-            <a:spLocks noGrp="1" noRot="1" noChangeAspect="1"/>
-          </p:cNvSpPr>
-          <p:nvPr>
-            <p:ph type="sldImg" idx="2"/>
-          </p:nvPr>
-        </p:nvSpPr>
-        <p:spPr>
-          <a:xfrm>
-            <a:off x="685800" y="1143000"/>
-            <a:ext cx="5486400" cy="3086100"/>
-          </a:xfrm>
-          <a:prstGeom prst="rect">
-            <a:avLst/>
-          </a:prstGeom>
-          <a:noFill/>
-          <a:ln w="12700">
-            <a:solidFill>
-              <a:prstClr val="black"/>
-            </a:solidFill>
-          </a:ln>
-        </p:spPr>
-        <p:txBody>
-          <a:bodyPr vert="horz" lIns="91440" tIns="45720" rIns="91440" bIns="45720" rtlCol="0" anchor="ctr"/>
-          <a:lstStyle/>
-          <a:p>
-            <a:endParaRPr lang="en-US"/>
-          </a:p>
-        </p:txBody>
-      </p:sp>
-      <p:sp>
-        <p:nvSpPr>
-          <p:cNvPr id="5" name="Notes Placeholder 4"/>
-          <p:cNvSpPr>
-            <a:spLocks noGrp="1"/>
-          </p:cNvSpPr>
-          <p:nvPr>
-            <p:ph type="body" sz="quarter" idx="3"/>
-          </p:nvPr>
-        </p:nvSpPr>
-        <p:spPr>
-          <a:xfrm>
-            <a:off x="685800" y="4400550"/>
-            <a:ext cx="5486400" cy="3600450"/>
-          </a:xfrm>
-          <a:prstGeom prst="rect">
-            <a:avLst/>
-          </a:prstGeom>
-        </p:spPr>
-        <p:txBody>
-          <a:bodyPr vert="horz" lIns="91440" tIns="45720" rIns="91440" bIns="45720" rtlCol="0"/>
-          <a:lstStyle/>
-          <a:p>
-            <a:pPr lvl="0"/>
-            <a:r>
-              <a:rPr lang="en-US"/>
-              <a:t>Click to edit Master text styles</a:t>
-            </a:r>
-          </a:p>
-          <a:p>
-            <a:pPr lvl="1"/>
-            <a:r>
-              <a:rPr lang="en-US"/>
-              <a:t>Second level</a:t>
-            </a:r>
-          </a:p>
-          <a:p>
-            <a:pPr lvl="2"/>
-            <a:r>
-              <a:rPr lang="en-US"/>
-              <a:t>Third level</a:t>
-            </a:r>
-          </a:p>
-          <a:p>
-            <a:pPr lvl="3"/>
-            <a:r>
-              <a:rPr lang="en-US"/>
-              <a:t>Fourth level</a:t>
-            </a:r>
-          </a:p>
-          <a:p>
-            <a:pPr lvl="4"/>
-            <a:r>
-              <a:rPr lang="en-US"/>
-              <a:t>Fifth level</a:t>
-            </a:r>
-          </a:p>
-        </p:txBody>
-      </p:sp>
-      <p:sp>
-        <p:nvSpPr>
-          <p:cNvPr id="6" name="Footer Placeholder 5"/>
-          <p:cNvSpPr>
-            <a:spLocks noGrp="1"/>
-          </p:cNvSpPr>
-          <p:nvPr>
-            <p:ph type="ftr" sz="quarter" idx="4"/>
-          </p:nvPr>
-        </p:nvSpPr>
-        <p:spPr>
-          <a:xfrm>
-            <a:off x="0" y="8685213"/>
-            <a:ext cx="2971800" cy="458787"/>
-          </a:xfrm>
-          <a:prstGeom prst="rect">
-            <a:avLst/>
-          </a:prstGeom>
-        </p:spPr>
-        <p:txBody>
-          <a:bodyPr vert="horz" lIns="91440" tIns="45720" rIns="91440" bIns="45720" rtlCol="0" anchor="b"/>
-          <a:lstStyle>
-            <a:lvl1pPr algn="l">
-              <a:defRPr sz="1200"/>
-            </a:lvl1pPr>
-          </a:lstStyle>
-          <a:p>
-            <a:endParaRPr lang="en-US"/>
-          </a:p>
-        </p:txBody>
-      </p:sp>
-      <p:sp>
-        <p:nvSpPr>
-          <p:cNvPr id="7" name="Slide Number Placeholder 6"/>
-          <p:cNvSpPr>
-            <a:spLocks noGrp="1"/>
-          </p:cNvSpPr>
-          <p:nvPr>
-            <p:ph type="sldNum" sz="quarter" idx="5"/>
-          </p:nvPr>
-        </p:nvSpPr>
-        <p:spPr>
-          <a:xfrm>
-            <a:off x="3884613" y="8685213"/>
-            <a:ext cx="2971800" cy="458787"/>
-          </a:xfrm>
-          <a:prstGeom prst="rect">
-            <a:avLst/>
-          </a:prstGeom>
-        </p:spPr>
-        <p:txBody>
-          <a:bodyPr vert="horz" lIns="91440" tIns="45720" rIns="91440" bIns="45720" rtlCol="0" anchor="b"/>
-          <a:lstStyle>
-            <a:lvl1pPr algn="r">
-              <a:defRPr sz="1200"/>
-            </a:lvl1pPr>
-          </a:lstStyle>
-          <a:p>
-            <a:fld id="{CE5E9CC1-C706-0F49-92D6-E571CC5EEA8F}" type="slidenum">
-              <a:rPr lang="en-US"/>
-              <a:t>‹#›</a:t>
-            </a:fld>
-            <a:endParaRPr lang="en-US"/>
-          </a:p>
-        </p:txBody>
-      </p:sp>
     </p:spTree>
     <p:extLst>
       <p:ext uri="{BB962C8B-B14F-4D97-AF65-F5344CB8AC3E}">
-        <p14:creationId xmlns:p14="http://schemas.microsoft.com/office/powerpoint/2010/main" val="1024086991"/>
+        <p14:creationId xmlns:p14="http://schemas.microsoft.com/office/powerpoint/2010/main" val="3753385336"/>
       </p:ext>
     </p:extLst>
   </p:cSld>
@@ -460,7 +245,7 @@
 </p:notesMaster>
 </file>
 
-<file path=ppt/notesSlides/notesSlide20.xml><?xml version="1.0" encoding="utf-8"?>
+<file path=ppt/notesSlides/notesSlide1.xml><?xml version="1.0" encoding="utf-8"?>
 <p:notes xmlns:a="http://schemas.openxmlformats.org/drawingml/2006/main" xmlns:r="http://schemas.openxmlformats.org/officeDocument/2006/relationships" xmlns:p="http://schemas.openxmlformats.org/presentationml/2006/main">
   <p:cSld>
     <p:spTree>
@@ -508,7 +293,6 @@
               <a:rPr lang="en-US" dirty="0"/>
               <a:t>About 40 seconds. The executor, which we also call the player, is the one component we did not build, so we chose it carefully. We surveyed the mobile GUI-agent benchmarks and then tried several executors hands-on, among them MUI, GeLab and MobileAgent-V3, before selecting mobilerun, also known as Droidrun. [Add one line per alternative on why it was not chosen.] What decided it was what our design needs: it works from a goal in plain language rather than a script, drives a real device through the accessibility tree and screenshots, lets us plug in our own model provider, saves a step-by-step trajectory for the investigator, and streams every screen it sees, which is how we build the map of the app.</a:t>
             </a:r>
-            <a:endParaRPr lang="en-US" dirty="0"/>
           </a:p>
         </p:txBody>
       </p:sp>
@@ -529,7 +313,7 @@
           <a:p>
             <a:fld id="{F7021451-1387-4CA6-816F-3879F97B5CBC}" type="slidenum">
               <a:rPr lang="en-US"/>
-              <a:t>20</a:t>
+              <a:t>1</a:t>
             </a:fld>
             <a:endParaRPr lang="en-US"/>
           </a:p>
@@ -548,7 +332,7 @@
 </p:notes>
 </file>
 
-<file path=ppt/notesSlides/notesSlide21.xml><?xml version="1.0" encoding="utf-8"?>
+<file path=ppt/notesSlides/notesSlide2.xml><?xml version="1.0" encoding="utf-8"?>
 <p:notes xmlns:a="http://schemas.openxmlformats.org/drawingml/2006/main" xmlns:r="http://schemas.openxmlformats.org/officeDocument/2006/relationships" xmlns:p="http://schemas.openxmlformats.org/presentationml/2006/main">
   <p:cSld>
     <p:spTree>
@@ -596,7 +380,6 @@
               <a:rPr lang="en-US" dirty="0"/>
               <a:t>About 45 seconds. The executor receives a goal, not a script: the planner's objective and screen hint, plus login and input details. It then loops: observe the screen through the accessibility tree and a screenshot, let the model decide the next action, and act, tapping, typing or swiping over adb. Up to 50 steps, about 20 seconds each. It returns a trajectory: every step's reasoning, action and result. The loop is mobilerun, but the harness around it is ours: building the goal from the test case, the on-device portal that makes typing reliable, resetting the app between tests and keeping the agent inside it, keeping login secrets out of the planner's prompt, streaming every screen into the live map, and surviving network loss mid-campaign.</a:t>
             </a:r>
-            <a:endParaRPr lang="en-US" dirty="0"/>
           </a:p>
         </p:txBody>
       </p:sp>
@@ -617,7 +400,7 @@
           <a:p>
             <a:fld id="{F7021451-1387-4CA6-816F-3879F97B5CBC}" type="slidenum">
               <a:rPr lang="en-US"/>
-              <a:t>21</a:t>
+              <a:t>2</a:t>
             </a:fld>
             <a:endParaRPr lang="en-US"/>
           </a:p>
@@ -636,7 +419,7 @@
 </p:notes>
 </file>
 
-<file path=ppt/notesSlides/notesSlide22.xml><?xml version="1.0" encoding="utf-8"?>
+<file path=ppt/notesSlides/notesSlide3.xml><?xml version="1.0" encoding="utf-8"?>
 <p:notes xmlns:a="http://schemas.openxmlformats.org/drawingml/2006/main" xmlns:r="http://schemas.openxmlformats.org/officeDocument/2006/relationships" xmlns:p="http://schemas.openxmlformats.org/presentationml/2006/main">
   <p:cSld>
     <p:spTree>
@@ -684,7 +467,6 @@
               <a:rPr lang="en-US" dirty="0"/>
               <a:t>About 40 seconds. Every screen the executor passes through is matched against the screens already seen, and this is how the agent builds its own map of an app with no documentation. The checks run cheapest first: an exact signature; then structural similarity, which tolerates counters and timestamps; then containment, for a screen captured before it finished drawing; and finally a perceptual hash of the screenshot, for screens whose accessibility tree says almost nothing. A match counts a visit; a miss creates a new screen and records how we got there. On the contacts app that is 79 distinct screens from over two thousand observations, and 797 transitions. The planner uses this map to ground its screen hints and find paths.</a:t>
             </a:r>
-            <a:endParaRPr lang="en-US" dirty="0"/>
           </a:p>
         </p:txBody>
       </p:sp>
@@ -705,7 +487,7 @@
           <a:p>
             <a:fld id="{F7021451-1387-4CA6-816F-3879F97B5CBC}" type="slidenum">
               <a:rPr lang="en-US"/>
-              <a:t>22</a:t>
+              <a:t>5</a:t>
             </a:fld>
             <a:endParaRPr lang="en-US"/>
           </a:p>
@@ -724,7 +506,7 @@
 </p:notes>
 </file>
 
-<file path=ppt/notesSlides/notesSlide23.xml><?xml version="1.0" encoding="utf-8"?>
+<file path=ppt/notesSlides/notesSlide4.xml><?xml version="1.0" encoding="utf-8"?>
 <p:notes xmlns:a="http://schemas.openxmlformats.org/drawingml/2006/main" xmlns:r="http://schemas.openxmlformats.org/officeDocument/2006/relationships" xmlns:p="http://schemas.openxmlformats.org/presentationml/2006/main">
   <p:cSld>
     <p:spTree>
@@ -772,7 +554,6 @@
               <a:rPr lang="en-US" dirty="0"/>
               <a:t>About 25 seconds; skip if short on time. The full screen-identity cascade, left to right. Each check exists because the previous one failed on a real case, and the grey notes say which. Structural similarity handles counters and timestamps. Containment handles a screen captured before it finished drawing, which similarity scores as different. Skeleton containment handles form fields, where typing changes the labels: one wizard once produced nine separate states. And the perceptual hash is the last resort for screens built with Compose, games or web views, whose accessibility tree says almost nothing.</a:t>
             </a:r>
-            <a:endParaRPr lang="en-US" dirty="0"/>
           </a:p>
         </p:txBody>
       </p:sp>
@@ -793,7 +574,7 @@
           <a:p>
             <a:fld id="{F7021451-1387-4CA6-816F-3879F97B5CBC}" type="slidenum">
               <a:rPr lang="en-US"/>
-              <a:t>23</a:t>
+              <a:t>6</a:t>
             </a:fld>
             <a:endParaRPr lang="en-US"/>
           </a:p>
@@ -812,7 +593,7 @@
 </p:notes>
 </file>
 
-<file path=ppt/notesSlides/notesSlide24.xml><?xml version="1.0" encoding="utf-8"?>
+<file path=ppt/notesSlides/notesSlide5.xml><?xml version="1.0" encoding="utf-8"?>
 <p:notes xmlns:a="http://schemas.openxmlformats.org/drawingml/2006/main" xmlns:r="http://schemas.openxmlformats.org/officeDocument/2006/relationships" xmlns:p="http://schemas.openxmlformats.org/presentationml/2006/main">
   <p:cSld>
     <p:spTree>
@@ -860,7 +641,6 @@
               <a:rPr lang="en-US" dirty="0"/>
               <a:t>About 35 seconds. This is the result of the screen matching on the previous slide, as it appears on our dashboard. Every circle is one distinct screen of the contacts app, 79 in all, joined by 797 recorded transitions. Nothing here came from documentation; it is only what the agent reached. Every execution stores the ordered list of screens it passed through, so we can pick any run and see exactly where it went: in orange, the path of TC-088, which imported a vCard of duplicates and then searched: from the contact list through Organize, the import screen and the close sheet, and back. Clicking a screen shows the screenshot we stored for it, here Contact List number 12, visited 19 times, with 14 controls. The same map is what the planner draws on when it looks up a screen or a route to one.</a:t>
             </a:r>
-            <a:endParaRPr lang="en-US" dirty="0"/>
           </a:p>
         </p:txBody>
       </p:sp>
@@ -881,7 +661,7 @@
           <a:p>
             <a:fld id="{F7021451-1387-4CA6-816F-3879F97B5CBC}" type="slidenum">
               <a:rPr lang="en-US"/>
-              <a:t>24</a:t>
+              <a:t>7</a:t>
             </a:fld>
             <a:endParaRPr lang="en-US"/>
           </a:p>
@@ -933,6 +713,11 @@
 <file path=ppt/slideMasters/slideMaster1.xml><?xml version="1.0" encoding="utf-8"?>
 <p:sldMaster xmlns:a="http://schemas.openxmlformats.org/drawingml/2006/main" xmlns:r="http://schemas.openxmlformats.org/officeDocument/2006/relationships" xmlns:p="http://schemas.openxmlformats.org/presentationml/2006/main">
   <p:cSld>
+    <p:bg>
+      <p:bgRef idx="1001">
+        <a:schemeClr val="bg1"/>
+      </p:bgRef>
+    </p:bg>
     <p:spTree>
       <p:nvGrpSpPr>
         <p:cNvPr id="1" name=""/>
@@ -1207,7 +992,7 @@
 </p:sldMaster>
 </file>
 
-<file path=ppt/slides/slide20.xml><?xml version="1.0" encoding="utf-8"?>
+<file path=ppt/slides/slide1.xml><?xml version="1.0" encoding="utf-8"?>
 <p:sld xmlns:a="http://schemas.openxmlformats.org/drawingml/2006/main" xmlns:r="http://schemas.openxmlformats.org/officeDocument/2006/relationships" xmlns:p="http://schemas.openxmlformats.org/presentationml/2006/main">
   <p:cSld name="Slide 20">
     <p:bg>
@@ -1215,6 +1000,7 @@
         <a:solidFill>
           <a:srgbClr val="F6F8F7"/>
         </a:solidFill>
+        <a:effectLst/>
       </p:bgPr>
     </p:bg>
     <p:spTree>
@@ -1240,7 +1026,7 @@
         <p:spPr>
           <a:xfrm>
             <a:off x="812800" y="812800"/>
-            <a:ext cx="10883392" cy="238720"/>
+            <a:ext cx="9646920" cy="238720"/>
           </a:xfrm>
           <a:prstGeom prst="rect">
             <a:avLst/>
@@ -1254,14 +1040,14 @@
           </a:bodyPr>
           <a:lstStyle/>
           <a:p>
-            <a:pPr algn="l" indent="0" marL="0">
+            <a:pPr marL="0" indent="0" algn="l">
               <a:lnSpc>
                 <a:spcPts val="1680"/>
               </a:lnSpc>
               <a:buNone/>
             </a:pPr>
             <a:r>
-              <a:rPr lang="en-US" sz="1200" b="1" spc="100" kern="0" dirty="0">
+              <a:rPr lang="en-US" sz="1200" b="1" kern="0" spc="100" dirty="0">
                 <a:solidFill>
                   <a:srgbClr val="0B6A8F"/>
                 </a:solidFill>
@@ -1284,7 +1070,7 @@
         <p:spPr>
           <a:xfrm>
             <a:off x="812800" y="1102320"/>
-            <a:ext cx="10883392" cy="444500"/>
+            <a:ext cx="9646920" cy="444500"/>
           </a:xfrm>
           <a:prstGeom prst="rect">
             <a:avLst/>
@@ -1298,7 +1084,7 @@
           </a:bodyPr>
           <a:lstStyle/>
           <a:p>
-            <a:pPr algn="l" indent="0" marL="0">
+            <a:pPr marL="0" indent="0" algn="l">
               <a:lnSpc>
                 <a:spcPts val="3300"/>
               </a:lnSpc>
@@ -1345,6 +1131,13 @@
             <a:prstDash val="solid"/>
           </a:ln>
         </p:spPr>
+        <p:txBody>
+          <a:bodyPr/>
+          <a:lstStyle/>
+          <a:p>
+            <a:endParaRPr lang="en-US"/>
+          </a:p>
+        </p:txBody>
       </p:sp>
       <p:sp>
         <p:nvSpPr>
@@ -1369,7 +1162,7 @@
           </a:bodyPr>
           <a:lstStyle/>
           <a:p>
-            <a:pPr algn="l" indent="0" marL="0">
+            <a:pPr marL="0" indent="0" algn="l">
               <a:lnSpc>
                 <a:spcPts val="1820"/>
               </a:lnSpc>
@@ -1412,6 +1205,13 @@
             <a:prstDash val="solid"/>
           </a:ln>
         </p:spPr>
+        <p:txBody>
+          <a:bodyPr/>
+          <a:lstStyle/>
+          <a:p>
+            <a:endParaRPr lang="en-US"/>
+          </a:p>
+        </p:txBody>
       </p:sp>
       <p:sp>
         <p:nvSpPr>
@@ -1436,7 +1236,7 @@
           </a:bodyPr>
           <a:lstStyle/>
           <a:p>
-            <a:pPr algn="l" indent="0" marL="0">
+            <a:pPr marL="0" indent="0" algn="l">
               <a:lnSpc>
                 <a:spcPts val="1960"/>
               </a:lnSpc>
@@ -1480,7 +1280,7 @@
           </a:bodyPr>
           <a:lstStyle/>
           <a:p>
-            <a:pPr algn="l" indent="0" marL="0">
+            <a:pPr marL="0" indent="0" algn="l">
               <a:lnSpc>
                 <a:spcPts val="1680"/>
               </a:lnSpc>
@@ -1523,6 +1323,13 @@
             <a:prstDash val="solid"/>
           </a:ln>
         </p:spPr>
+        <p:txBody>
+          <a:bodyPr/>
+          <a:lstStyle/>
+          <a:p>
+            <a:endParaRPr lang="en-US"/>
+          </a:p>
+        </p:txBody>
       </p:sp>
       <p:sp>
         <p:nvSpPr>
@@ -1547,7 +1354,7 @@
           </a:bodyPr>
           <a:lstStyle/>
           <a:p>
-            <a:pPr algn="l" indent="0" marL="0">
+            <a:pPr marL="0" indent="0" algn="l">
               <a:lnSpc>
                 <a:spcPts val="1960"/>
               </a:lnSpc>
@@ -1591,7 +1398,7 @@
           </a:bodyPr>
           <a:lstStyle/>
           <a:p>
-            <a:pPr algn="l" indent="0" marL="0">
+            <a:pPr marL="0" indent="0" algn="l">
               <a:lnSpc>
                 <a:spcPts val="1680"/>
               </a:lnSpc>
@@ -1634,6 +1441,13 @@
             <a:prstDash val="solid"/>
           </a:ln>
         </p:spPr>
+        <p:txBody>
+          <a:bodyPr/>
+          <a:lstStyle/>
+          <a:p>
+            <a:endParaRPr lang="en-US"/>
+          </a:p>
+        </p:txBody>
       </p:sp>
       <p:sp>
         <p:nvSpPr>
@@ -1658,7 +1472,7 @@
           </a:bodyPr>
           <a:lstStyle/>
           <a:p>
-            <a:pPr algn="l" indent="0" marL="0">
+            <a:pPr marL="0" indent="0" algn="l">
               <a:lnSpc>
                 <a:spcPts val="1960"/>
               </a:lnSpc>
@@ -1702,7 +1516,7 @@
           </a:bodyPr>
           <a:lstStyle/>
           <a:p>
-            <a:pPr algn="l" indent="0" marL="0">
+            <a:pPr marL="0" indent="0" algn="l">
               <a:lnSpc>
                 <a:spcPts val="1680"/>
               </a:lnSpc>
@@ -1746,7 +1560,7 @@
           </a:bodyPr>
           <a:lstStyle/>
           <a:p>
-            <a:pPr algn="l" indent="0" marL="0">
+            <a:pPr marL="0" indent="0" algn="l">
               <a:lnSpc>
                 <a:spcPts val="1960"/>
               </a:lnSpc>
@@ -1769,15 +1583,15 @@
       </p:sp>
       <p:pic>
         <p:nvPicPr>
-          <p:cNvPr id="16" name="Image 0" descr="CheckCircle">    </p:cNvPr>
+          <p:cNvPr id="16" name="Image 0" descr="CheckCircle"/>
           <p:cNvPicPr>
             <a:picLocks noChangeAspect="1"/>
           </p:cNvPicPr>
           <p:nvPr/>
         </p:nvPicPr>
         <p:blipFill>
-          <a:blip r:embed="rId1"/>
-          <a:srcRect l="0" r="0" t="0" b="0"/>
+          <a:blip r:embed="rId3"/>
+          <a:srcRect/>
           <a:stretch/>
         </p:blipFill>
         <p:spPr>
@@ -1813,7 +1627,7 @@
           </a:bodyPr>
           <a:lstStyle/>
           <a:p>
-            <a:pPr algn="l" indent="0" marL="0">
+            <a:pPr marL="0" indent="0" algn="l">
               <a:lnSpc>
                 <a:spcPts val="1680"/>
               </a:lnSpc>
@@ -1860,6 +1674,13 @@
             <a:prstDash val="solid"/>
           </a:ln>
         </p:spPr>
+        <p:txBody>
+          <a:bodyPr/>
+          <a:lstStyle/>
+          <a:p>
+            <a:endParaRPr lang="en-US"/>
+          </a:p>
+        </p:txBody>
       </p:sp>
       <p:sp>
         <p:nvSpPr>
@@ -1884,7 +1705,7 @@
           </a:bodyPr>
           <a:lstStyle/>
           <a:p>
-            <a:pPr algn="l" indent="0" marL="0">
+            <a:pPr marL="0" indent="0" algn="l">
               <a:lnSpc>
                 <a:spcPts val="1820"/>
               </a:lnSpc>
@@ -1928,7 +1749,7 @@
           </a:bodyPr>
           <a:lstStyle/>
           <a:p>
-            <a:pPr algn="l" marL="182880" indent="-155194">
+            <a:pPr marL="182880" indent="-155194" algn="l">
               <a:lnSpc>
                 <a:spcPts val="1740"/>
               </a:lnSpc>
@@ -1949,7 +1770,7 @@
             <a:endParaRPr lang="en-US" sz="1200" dirty="0"/>
           </a:p>
           <a:p>
-            <a:pPr algn="l" marL="182880" indent="-155194">
+            <a:pPr marL="182880" indent="-155194" algn="l">
               <a:lnSpc>
                 <a:spcPts val="1740"/>
               </a:lnSpc>
@@ -1970,7 +1791,7 @@
             <a:endParaRPr lang="en-US" sz="1200" dirty="0"/>
           </a:p>
           <a:p>
-            <a:pPr algn="l" marL="182880" indent="-155194">
+            <a:pPr marL="182880" indent="-155194" algn="l">
               <a:lnSpc>
                 <a:spcPts val="1740"/>
               </a:lnSpc>
@@ -1991,7 +1812,7 @@
             <a:endParaRPr lang="en-US" sz="1200" dirty="0"/>
           </a:p>
           <a:p>
-            <a:pPr algn="l" marL="182880" indent="-155194">
+            <a:pPr marL="182880" indent="-155194" algn="l">
               <a:lnSpc>
                 <a:spcPts val="1740"/>
               </a:lnSpc>
@@ -2012,7 +1833,7 @@
             <a:endParaRPr lang="en-US" sz="1200" dirty="0"/>
           </a:p>
           <a:p>
-            <a:pPr algn="l" marL="182880" indent="-155194">
+            <a:pPr marL="182880" indent="-155194" algn="l">
               <a:lnSpc>
                 <a:spcPts val="1740"/>
               </a:lnSpc>
@@ -2036,14 +1857,14 @@
       </p:sp>
       <p:sp>
         <p:nvSpPr>
-          <p:cNvPr id="21" name="Text 18"/>
-          <p:cNvSpPr/>
-          <p:nvPr/>
-        </p:nvSpPr>
-        <p:spPr>
-          <a:xfrm>
-            <a:off x="812800" y="4430861"/>
-            <a:ext cx="10883392" cy="238720"/>
+          <p:cNvPr id="22" name="Text 19"/>
+          <p:cNvSpPr/>
+          <p:nvPr/>
+        </p:nvSpPr>
+        <p:spPr>
+          <a:xfrm>
+            <a:off x="812800" y="6238280"/>
+            <a:ext cx="3459976" cy="238720"/>
           </a:xfrm>
           <a:prstGeom prst="rect">
             <a:avLst/>
@@ -2057,7 +1878,7 @@
           </a:bodyPr>
           <a:lstStyle/>
           <a:p>
-            <a:pPr algn="l" indent="0" marL="0">
+            <a:pPr marL="0" indent="0" algn="l">
               <a:lnSpc>
                 <a:spcPts val="1680"/>
               </a:lnSpc>
@@ -2072,7 +1893,7 @@
                 <a:ea typeface="IBM Plex Sans" pitchFamily="34" charset="-122"/>
                 <a:cs typeface="IBM Plex Sans" pitchFamily="34" charset="-120"/>
               </a:rPr>
-              <a:t>mobilerun is open source and third-party. Everything around it, on the next slides, is ours.</a:t>
+              <a:t>Exploratory Testing Automation · CSE 450 · BUET</a:t>
             </a:r>
             <a:endParaRPr lang="en-US" sz="1200" dirty="0"/>
           </a:p>
@@ -2080,14 +1901,14 @@
       </p:sp>
       <p:sp>
         <p:nvSpPr>
-          <p:cNvPr id="22" name="Text 19"/>
-          <p:cNvSpPr/>
-          <p:nvPr/>
-        </p:nvSpPr>
-        <p:spPr>
-          <a:xfrm>
-            <a:off x="812800" y="6238280"/>
-            <a:ext cx="3459976" cy="238720"/>
+          <p:cNvPr id="23" name="Text 20"/>
+          <p:cNvSpPr/>
+          <p:nvPr/>
+        </p:nvSpPr>
+        <p:spPr>
+          <a:xfrm>
+            <a:off x="11196290" y="6238280"/>
+            <a:ext cx="233710" cy="238720"/>
           </a:xfrm>
           <a:prstGeom prst="rect">
             <a:avLst/>
@@ -2101,7 +1922,7 @@
           </a:bodyPr>
           <a:lstStyle/>
           <a:p>
-            <a:pPr algn="l" indent="0" marL="0">
+            <a:pPr marL="0" indent="0" algn="l">
               <a:lnSpc>
                 <a:spcPts val="1680"/>
               </a:lnSpc>
@@ -2116,56 +1937,36 @@
                 <a:ea typeface="IBM Plex Sans" pitchFamily="34" charset="-122"/>
                 <a:cs typeface="IBM Plex Sans" pitchFamily="34" charset="-120"/>
               </a:rPr>
-              <a:t>Exploratory Testing Automation · CSE 450 · BUET</a:t>
+              <a:t>20</a:t>
             </a:r>
             <a:endParaRPr lang="en-US" sz="1200" dirty="0"/>
           </a:p>
         </p:txBody>
       </p:sp>
-      <p:sp>
-        <p:nvSpPr>
-          <p:cNvPr id="23" name="Text 20"/>
-          <p:cNvSpPr/>
-          <p:nvPr/>
-        </p:nvSpPr>
-        <p:spPr>
-          <a:xfrm>
-            <a:off x="11196290" y="6238280"/>
-            <a:ext cx="233710" cy="238720"/>
-          </a:xfrm>
-          <a:prstGeom prst="rect">
-            <a:avLst/>
-          </a:prstGeom>
-          <a:noFill/>
-          <a:ln/>
-        </p:spPr>
-        <p:txBody>
-          <a:bodyPr wrap="square" lIns="0" tIns="0" rIns="0" bIns="0" rtlCol="0" anchor="t">
-            <a:normAutofit/>
-          </a:bodyPr>
-          <a:lstStyle/>
-          <a:p>
-            <a:pPr algn="l" indent="0" marL="0">
-              <a:lnSpc>
-                <a:spcPts val="1680"/>
-              </a:lnSpc>
-              <a:buNone/>
-            </a:pPr>
-            <a:r>
-              <a:rPr lang="en-US" sz="1200" dirty="0">
-                <a:solidFill>
-                  <a:srgbClr val="55697A"/>
-                </a:solidFill>
-                <a:latin typeface="IBM Plex Sans" pitchFamily="34" charset="0"/>
-                <a:ea typeface="IBM Plex Sans" pitchFamily="34" charset="-122"/>
-                <a:cs typeface="IBM Plex Sans" pitchFamily="34" charset="-120"/>
-              </a:rPr>
-              <a:t>20</a:t>
-            </a:r>
-            <a:endParaRPr lang="en-US" sz="1200" dirty="0"/>
-          </a:p>
-        </p:txBody>
-      </p:sp>
+      <p:pic>
+        <p:nvPicPr>
+          <p:cNvPr id="24" name="Picture 23" descr="android.png"/>
+          <p:cNvPicPr>
+            <a:picLocks noChangeAspect="1"/>
+          </p:cNvPicPr>
+          <p:nvPr/>
+        </p:nvPicPr>
+        <p:blipFill>
+          <a:blip r:embed="rId4"/>
+          <a:stretch>
+            <a:fillRect/>
+          </a:stretch>
+        </p:blipFill>
+        <p:spPr>
+          <a:xfrm>
+            <a:off x="10716768" y="731520"/>
+            <a:ext cx="804672" cy="804672"/>
+          </a:xfrm>
+          <a:prstGeom prst="rect">
+            <a:avLst/>
+          </a:prstGeom>
+        </p:spPr>
+      </p:pic>
     </p:spTree>
   </p:cSld>
   <p:clrMapOvr>
@@ -2174,7 +1975,7 @@
 </p:sld>
 </file>
 
-<file path=ppt/slides/slide21.xml><?xml version="1.0" encoding="utf-8"?>
+<file path=ppt/slides/slide2.xml><?xml version="1.0" encoding="utf-8"?>
 <p:sld xmlns:a="http://schemas.openxmlformats.org/drawingml/2006/main" xmlns:r="http://schemas.openxmlformats.org/officeDocument/2006/relationships" xmlns:p="http://schemas.openxmlformats.org/presentationml/2006/main">
   <p:cSld name="Slide 21">
     <p:bg>
@@ -2182,6 +1983,7 @@
         <a:solidFill>
           <a:srgbClr val="F6F8F7"/>
         </a:solidFill>
+        <a:effectLst/>
       </p:bgPr>
     </p:bg>
     <p:spTree>
@@ -2221,14 +2023,14 @@
           </a:bodyPr>
           <a:lstStyle/>
           <a:p>
-            <a:pPr algn="l" indent="0" marL="0">
+            <a:pPr marL="0" indent="0" algn="l">
               <a:lnSpc>
                 <a:spcPts val="1680"/>
               </a:lnSpc>
               <a:buNone/>
             </a:pPr>
             <a:r>
-              <a:rPr lang="en-US" sz="1200" b="1" spc="100" kern="0" dirty="0">
+              <a:rPr lang="en-US" sz="1200" b="1" kern="0" spc="100" dirty="0">
                 <a:solidFill>
                   <a:srgbClr val="0B6A8F"/>
                 </a:solidFill>
@@ -2265,7 +2067,7 @@
           </a:bodyPr>
           <a:lstStyle/>
           <a:p>
-            <a:pPr algn="l" indent="0" marL="0">
+            <a:pPr marL="0" indent="0" algn="l">
               <a:lnSpc>
                 <a:spcPts val="3300"/>
               </a:lnSpc>
@@ -2312,6 +2114,13 @@
             <a:prstDash val="solid"/>
           </a:ln>
         </p:spPr>
+        <p:txBody>
+          <a:bodyPr/>
+          <a:lstStyle/>
+          <a:p>
+            <a:endParaRPr lang="en-US"/>
+          </a:p>
+        </p:txBody>
       </p:sp>
       <p:sp>
         <p:nvSpPr>
@@ -2336,7 +2145,7 @@
           </a:bodyPr>
           <a:lstStyle/>
           <a:p>
-            <a:pPr algn="l" indent="0" marL="0">
+            <a:pPr marL="0" indent="0" algn="l">
               <a:lnSpc>
                 <a:spcPts val="1820"/>
               </a:lnSpc>
@@ -2380,7 +2189,7 @@
           </a:bodyPr>
           <a:lstStyle/>
           <a:p>
-            <a:pPr algn="l" indent="0" marL="0">
+            <a:pPr marL="0" indent="0" algn="l">
               <a:lnSpc>
                 <a:spcPts val="1680"/>
               </a:lnSpc>
@@ -2427,6 +2236,13 @@
             <a:prstDash val="dash"/>
           </a:ln>
         </p:spPr>
+        <p:txBody>
+          <a:bodyPr/>
+          <a:lstStyle/>
+          <a:p>
+            <a:endParaRPr lang="en-US"/>
+          </a:p>
+        </p:txBody>
       </p:sp>
       <p:sp>
         <p:nvSpPr>
@@ -2449,6 +2265,13 @@
           </a:solidFill>
           <a:ln/>
         </p:spPr>
+        <p:txBody>
+          <a:bodyPr/>
+          <a:lstStyle/>
+          <a:p>
+            <a:endParaRPr lang="en-US"/>
+          </a:p>
+        </p:txBody>
       </p:sp>
       <p:sp>
         <p:nvSpPr>
@@ -2473,7 +2296,7 @@
           </a:bodyPr>
           <a:lstStyle/>
           <a:p>
-            <a:pPr algn="l" indent="0" marL="0">
+            <a:pPr marL="0" indent="0" algn="l">
               <a:lnSpc>
                 <a:spcPts val="1820"/>
               </a:lnSpc>
@@ -2517,7 +2340,7 @@
           </a:bodyPr>
           <a:lstStyle/>
           <a:p>
-            <a:pPr algn="l" indent="0" marL="0">
+            <a:pPr marL="0" indent="0" algn="l">
               <a:lnSpc>
                 <a:spcPts val="1680"/>
               </a:lnSpc>
@@ -2540,15 +2363,15 @@
       </p:sp>
       <p:pic>
         <p:nvPicPr>
-          <p:cNvPr id="11" name="Image 0" descr="arrow-right">    </p:cNvPr>
+          <p:cNvPr id="11" name="Image 0" descr="arrow-right"/>
           <p:cNvPicPr>
             <a:picLocks noChangeAspect="1"/>
           </p:cNvPicPr>
           <p:nvPr/>
         </p:nvPicPr>
         <p:blipFill>
-          <a:blip r:embed="rId1"/>
-          <a:srcRect l="0" r="0" t="0" b="0"/>
+          <a:blip r:embed="rId3"/>
+          <a:srcRect/>
           <a:stretch/>
         </p:blipFill>
         <p:spPr>
@@ -2582,6 +2405,13 @@
           </a:solidFill>
           <a:ln/>
         </p:spPr>
+        <p:txBody>
+          <a:bodyPr/>
+          <a:lstStyle/>
+          <a:p>
+            <a:endParaRPr lang="en-US"/>
+          </a:p>
+        </p:txBody>
       </p:sp>
       <p:sp>
         <p:nvSpPr>
@@ -2606,7 +2436,7 @@
           </a:bodyPr>
           <a:lstStyle/>
           <a:p>
-            <a:pPr algn="l" indent="0" marL="0">
+            <a:pPr marL="0" indent="0" algn="l">
               <a:lnSpc>
                 <a:spcPts val="1820"/>
               </a:lnSpc>
@@ -2650,7 +2480,7 @@
           </a:bodyPr>
           <a:lstStyle/>
           <a:p>
-            <a:pPr algn="l" indent="0" marL="0">
+            <a:pPr marL="0" indent="0" algn="l">
               <a:lnSpc>
                 <a:spcPts val="1680"/>
               </a:lnSpc>
@@ -2673,15 +2503,15 @@
       </p:sp>
       <p:pic>
         <p:nvPicPr>
-          <p:cNvPr id="15" name="Image 1" descr="arrow-right">    </p:cNvPr>
+          <p:cNvPr id="15" name="Image 1" descr="arrow-right"/>
           <p:cNvPicPr>
             <a:picLocks noChangeAspect="1"/>
           </p:cNvPicPr>
           <p:nvPr/>
         </p:nvPicPr>
         <p:blipFill>
-          <a:blip r:embed="rId2"/>
-          <a:srcRect l="0" r="0" t="0" b="0"/>
+          <a:blip r:embed="rId3"/>
+          <a:srcRect/>
           <a:stretch/>
         </p:blipFill>
         <p:spPr>
@@ -2715,6 +2545,13 @@
           </a:solidFill>
           <a:ln/>
         </p:spPr>
+        <p:txBody>
+          <a:bodyPr/>
+          <a:lstStyle/>
+          <a:p>
+            <a:endParaRPr lang="en-US"/>
+          </a:p>
+        </p:txBody>
       </p:sp>
       <p:sp>
         <p:nvSpPr>
@@ -2739,7 +2576,7 @@
           </a:bodyPr>
           <a:lstStyle/>
           <a:p>
-            <a:pPr algn="l" indent="0" marL="0">
+            <a:pPr marL="0" indent="0" algn="l">
               <a:lnSpc>
                 <a:spcPts val="1820"/>
               </a:lnSpc>
@@ -2783,7 +2620,7 @@
           </a:bodyPr>
           <a:lstStyle/>
           <a:p>
-            <a:pPr algn="l" indent="0" marL="0">
+            <a:pPr marL="0" indent="0" algn="l">
               <a:lnSpc>
                 <a:spcPts val="1680"/>
               </a:lnSpc>
@@ -2827,7 +2664,7 @@
           </a:bodyPr>
           <a:lstStyle/>
           <a:p>
-            <a:pPr algn="l" indent="0" marL="0">
+            <a:pPr marL="0" indent="0" algn="l">
               <a:lnSpc>
                 <a:spcPts val="1680"/>
               </a:lnSpc>
@@ -2874,6 +2711,13 @@
             <a:prstDash val="solid"/>
           </a:ln>
         </p:spPr>
+        <p:txBody>
+          <a:bodyPr/>
+          <a:lstStyle/>
+          <a:p>
+            <a:endParaRPr lang="en-US"/>
+          </a:p>
+        </p:txBody>
       </p:sp>
       <p:sp>
         <p:nvSpPr>
@@ -2898,7 +2742,7 @@
           </a:bodyPr>
           <a:lstStyle/>
           <a:p>
-            <a:pPr algn="l" indent="0" marL="0">
+            <a:pPr marL="0" indent="0" algn="l">
               <a:lnSpc>
                 <a:spcPts val="1820"/>
               </a:lnSpc>
@@ -2942,7 +2786,7 @@
           </a:bodyPr>
           <a:lstStyle/>
           <a:p>
-            <a:pPr algn="l" indent="0" marL="0">
+            <a:pPr marL="0" indent="0" algn="l">
               <a:lnSpc>
                 <a:spcPts val="1680"/>
               </a:lnSpc>
@@ -2965,15 +2809,15 @@
       </p:sp>
       <p:pic>
         <p:nvPicPr>
-          <p:cNvPr id="23" name="Image 2" descr="connector">    </p:cNvPr>
+          <p:cNvPr id="23" name="Image 2" descr="connector"/>
           <p:cNvPicPr>
             <a:picLocks noChangeAspect="1"/>
           </p:cNvPicPr>
           <p:nvPr/>
         </p:nvPicPr>
         <p:blipFill>
-          <a:blip r:embed="rId3"/>
-          <a:srcRect l="0" r="0" t="0" b="0"/>
+          <a:blip r:embed="rId4"/>
+          <a:srcRect/>
           <a:stretch/>
         </p:blipFill>
         <p:spPr>
@@ -2988,7 +2832,7 @@
       </p:pic>
       <p:pic>
         <p:nvPicPr>
-          <p:cNvPr id="24" name="Image 3" descr="connector">    </p:cNvPr>
+          <p:cNvPr id="24" name="Image 3" descr="connector"/>
           <p:cNvPicPr>
             <a:picLocks noChangeAspect="1"/>
           </p:cNvPicPr>
@@ -2996,7 +2840,7 @@
         </p:nvPicPr>
         <p:blipFill>
           <a:blip r:embed="rId4"/>
-          <a:srcRect l="0" r="0" t="0" b="0"/>
+          <a:srcRect/>
           <a:stretch/>
         </p:blipFill>
         <p:spPr>
@@ -3035,6 +2879,13 @@
             <a:prstDash val="solid"/>
           </a:ln>
         </p:spPr>
+        <p:txBody>
+          <a:bodyPr/>
+          <a:lstStyle/>
+          <a:p>
+            <a:endParaRPr lang="en-US"/>
+          </a:p>
+        </p:txBody>
       </p:sp>
       <p:sp>
         <p:nvSpPr>
@@ -3059,7 +2910,7 @@
           </a:bodyPr>
           <a:lstStyle/>
           <a:p>
-            <a:pPr algn="l" indent="0" marL="0">
+            <a:pPr marL="0" indent="0" algn="l">
               <a:lnSpc>
                 <a:spcPts val="1820"/>
               </a:lnSpc>
@@ -3103,7 +2954,7 @@
           </a:bodyPr>
           <a:lstStyle/>
           <a:p>
-            <a:pPr algn="l" indent="0" marL="0">
+            <a:pPr marL="0" indent="0" algn="l">
               <a:lnSpc>
                 <a:spcPts val="1680"/>
               </a:lnSpc>
@@ -3147,7 +2998,7 @@
           </a:bodyPr>
           <a:lstStyle/>
           <a:p>
-            <a:pPr algn="l" indent="0" marL="0">
+            <a:pPr marL="0" indent="0" algn="l">
               <a:lnSpc>
                 <a:spcPts val="1680"/>
               </a:lnSpc>
@@ -3191,7 +3042,7 @@
           </a:bodyPr>
           <a:lstStyle/>
           <a:p>
-            <a:pPr algn="l" indent="0" marL="0">
+            <a:pPr marL="0" indent="0" algn="l">
               <a:lnSpc>
                 <a:spcPts val="1680"/>
               </a:lnSpc>
@@ -3235,7 +3086,7 @@
           </a:bodyPr>
           <a:lstStyle/>
           <a:p>
-            <a:pPr algn="l" indent="0" marL="0">
+            <a:pPr marL="0" indent="0" algn="l">
               <a:lnSpc>
                 <a:spcPts val="1680"/>
               </a:lnSpc>
@@ -3279,7 +3130,7 @@
           </a:bodyPr>
           <a:lstStyle/>
           <a:p>
-            <a:pPr algn="l" indent="0" marL="0">
+            <a:pPr marL="0" indent="0" algn="l">
               <a:lnSpc>
                 <a:spcPts val="1680"/>
               </a:lnSpc>
@@ -3323,7 +3174,7 @@
           </a:bodyPr>
           <a:lstStyle/>
           <a:p>
-            <a:pPr algn="l" indent="0" marL="0">
+            <a:pPr marL="0" indent="0" algn="l">
               <a:lnSpc>
                 <a:spcPts val="1680"/>
               </a:lnSpc>
@@ -3367,7 +3218,7 @@
           </a:bodyPr>
           <a:lstStyle/>
           <a:p>
-            <a:pPr algn="l" indent="0" marL="0">
+            <a:pPr marL="0" indent="0" algn="l">
               <a:lnSpc>
                 <a:spcPts val="1680"/>
               </a:lnSpc>
@@ -3411,7 +3262,7 @@
           </a:bodyPr>
           <a:lstStyle/>
           <a:p>
-            <a:pPr algn="l" indent="0" marL="0">
+            <a:pPr marL="0" indent="0" algn="l">
               <a:lnSpc>
                 <a:spcPts val="1680"/>
               </a:lnSpc>
@@ -3440,14 +3291,15 @@
 </p:sld>
 </file>
 
-<file path=ppt/slides/slide22.xml><?xml version="1.0" encoding="utf-8"?>
+<file path=ppt/slides/slide3.xml><?xml version="1.0" encoding="utf-8"?>
 <p:sld xmlns:a="http://schemas.openxmlformats.org/drawingml/2006/main" xmlns:r="http://schemas.openxmlformats.org/officeDocument/2006/relationships" xmlns:p="http://schemas.openxmlformats.org/presentationml/2006/main">
-  <p:cSld name="Slide 22">
+  <p:cSld name="Slide 1">
     <p:bg>
       <p:bgPr>
         <a:solidFill>
           <a:srgbClr val="F6F8F7"/>
         </a:solidFill>
+        <a:effectLst/>
       </p:bgPr>
     </p:bg>
     <p:spTree>
@@ -3467,34 +3319,29 @@
       <p:sp>
         <p:nvSpPr>
           <p:cNvPr id="2" name="Text 0"/>
-          <p:cNvSpPr/>
-          <p:nvPr/>
-        </p:nvSpPr>
-        <p:spPr>
-          <a:xfrm>
-            <a:off x="812800" y="812800"/>
-            <a:ext cx="10883392" cy="238720"/>
-          </a:xfrm>
-          <a:prstGeom prst="rect">
-            <a:avLst/>
-          </a:prstGeom>
-          <a:noFill/>
-          <a:ln/>
-        </p:spPr>
-        <p:txBody>
-          <a:bodyPr wrap="square" lIns="0" tIns="0" rIns="0" bIns="0" rtlCol="0" anchor="t">
-            <a:normAutofit/>
-          </a:bodyPr>
-          <a:lstStyle/>
-          <a:p>
-            <a:pPr algn="l" indent="0" marL="0">
-              <a:lnSpc>
-                <a:spcPts val="1680"/>
-              </a:lnSpc>
-              <a:buNone/>
-            </a:pPr>
-            <a:r>
-              <a:rPr lang="en-US" sz="1200" b="1" spc="100" kern="0" dirty="0">
+          <p:cNvSpPr txBox="1"/>
+          <p:nvPr/>
+        </p:nvSpPr>
+        <p:spPr>
+          <a:xfrm>
+            <a:off x="813816" y="813816"/>
+            <a:ext cx="10881360" cy="237744"/>
+          </a:xfrm>
+          <a:prstGeom prst="rect">
+            <a:avLst/>
+          </a:prstGeom>
+          <a:noFill/>
+          <a:ln/>
+        </p:spPr>
+        <p:txBody>
+          <a:bodyPr wrap="square" lIns="0" tIns="0" rIns="0" bIns="0" rtlCol="0" anchor="ctr"/>
+          <a:lstStyle/>
+          <a:p>
+            <a:pPr marL="0" indent="0">
+              <a:buNone/>
+            </a:pPr>
+            <a:r>
+              <a:rPr lang="en-US" sz="1200" b="1" kern="0" spc="150" dirty="0">
                 <a:solidFill>
                   <a:srgbClr val="0B6A8F"/>
                 </a:solidFill>
@@ -3502,7 +3349,7 @@
                 <a:ea typeface="IBM Plex Sans" pitchFamily="34" charset="-122"/>
                 <a:cs typeface="IBM Plex Sans" pitchFamily="34" charset="-120"/>
               </a:rPr>
-              <a:t>EXECUTOR · MAPPING THE APP</a:t>
+              <a:t>EXECUTOR · THE INPUT</a:t>
             </a:r>
             <a:endParaRPr lang="en-US" sz="1200" dirty="0"/>
           </a:p>
@@ -3511,30 +3358,25 @@
       <p:sp>
         <p:nvSpPr>
           <p:cNvPr id="3" name="Text 1"/>
-          <p:cNvSpPr/>
-          <p:nvPr/>
-        </p:nvSpPr>
-        <p:spPr>
-          <a:xfrm>
-            <a:off x="812800" y="1102320"/>
-            <a:ext cx="10883392" cy="444500"/>
-          </a:xfrm>
-          <a:prstGeom prst="rect">
-            <a:avLst/>
-          </a:prstGeom>
-          <a:noFill/>
-          <a:ln/>
-        </p:spPr>
-        <p:txBody>
-          <a:bodyPr wrap="square" lIns="0" tIns="0" rIns="0" bIns="0" rtlCol="0" anchor="t">
-            <a:normAutofit/>
-          </a:bodyPr>
-          <a:lstStyle/>
-          <a:p>
-            <a:pPr algn="l" indent="0" marL="0">
-              <a:lnSpc>
-                <a:spcPts val="3300"/>
-              </a:lnSpc>
+          <p:cNvSpPr txBox="1"/>
+          <p:nvPr/>
+        </p:nvSpPr>
+        <p:spPr>
+          <a:xfrm>
+            <a:off x="813816" y="1106424"/>
+            <a:ext cx="10881360" cy="448056"/>
+          </a:xfrm>
+          <a:prstGeom prst="rect">
+            <a:avLst/>
+          </a:prstGeom>
+          <a:noFill/>
+          <a:ln/>
+        </p:spPr>
+        <p:txBody>
+          <a:bodyPr wrap="square" lIns="0" tIns="0" rIns="0" bIns="0" rtlCol="0" anchor="ctr"/>
+          <a:lstStyle/>
+          <a:p>
+            <a:pPr marL="0" indent="0">
               <a:buNone/>
             </a:pPr>
             <a:r>
@@ -3546,7 +3388,7 @@
                 <a:ea typeface="Source Serif 4" pitchFamily="34" charset="-122"/>
                 <a:cs typeface="Source Serif 4" pitchFamily="34" charset="-120"/>
               </a:rPr>
-              <a:t>Mapping the app while the tests run</a:t>
+              <a:t>What the executor is actually given</a:t>
             </a:r>
             <a:endParaRPr lang="en-US" sz="3000" dirty="0"/>
           </a:p>
@@ -3555,42 +3397,37 @@
       <p:sp>
         <p:nvSpPr>
           <p:cNvPr id="4" name="Text 2"/>
-          <p:cNvSpPr/>
-          <p:nvPr/>
-        </p:nvSpPr>
-        <p:spPr>
-          <a:xfrm>
-            <a:off x="812800" y="1775420"/>
-            <a:ext cx="6802120" cy="238720"/>
-          </a:xfrm>
-          <a:prstGeom prst="rect">
-            <a:avLst/>
-          </a:prstGeom>
-          <a:noFill/>
-          <a:ln/>
-        </p:spPr>
-        <p:txBody>
-          <a:bodyPr wrap="square" lIns="0" tIns="0" rIns="0" bIns="0" rtlCol="0" anchor="t">
-            <a:normAutofit/>
-          </a:bodyPr>
-          <a:lstStyle/>
-          <a:p>
-            <a:pPr algn="l" indent="0" marL="0">
-              <a:lnSpc>
-                <a:spcPts val="1680"/>
-              </a:lnSpc>
+          <p:cNvSpPr txBox="1"/>
+          <p:nvPr/>
+        </p:nvSpPr>
+        <p:spPr>
+          <a:xfrm>
+            <a:off x="813816" y="1645920"/>
+            <a:ext cx="10881360" cy="256032"/>
+          </a:xfrm>
+          <a:prstGeom prst="rect">
+            <a:avLst/>
+          </a:prstGeom>
+          <a:noFill/>
+          <a:ln/>
+        </p:spPr>
+        <p:txBody>
+          <a:bodyPr wrap="square" lIns="0" tIns="0" rIns="0" bIns="0" rtlCol="0" anchor="ctr"/>
+          <a:lstStyle/>
+          <a:p>
+            <a:pPr marL="0" indent="0">
               <a:buNone/>
             </a:pPr>
             <a:r>
               <a:rPr lang="en-US" sz="1200" dirty="0">
                 <a:solidFill>
-                  <a:srgbClr val="55697A"/>
-                </a:solidFill>
-                <a:latin typeface="IBM Plex Sans" pitchFamily="34" charset="0"/>
-                <a:ea typeface="IBM Plex Sans" pitchFamily="34" charset="-122"/>
-                <a:cs typeface="IBM Plex Sans" pitchFamily="34" charset="-120"/>
-              </a:rPr>
-              <a:t>Is this a screen we have seen? Checked in order, cheapest first:</a:t>
+                  <a:srgbClr val="46596A"/>
+                </a:solidFill>
+                <a:latin typeface="IBM Plex Sans" pitchFamily="34" charset="0"/>
+                <a:ea typeface="IBM Plex Sans" pitchFamily="34" charset="-122"/>
+                <a:cs typeface="IBM Plex Sans" pitchFamily="34" charset="-120"/>
+              </a:rPr>
+              <a:t>TC-002, contacts app. Assembled from the planner's test case and the target profile.</a:t>
             </a:r>
             <a:endParaRPr lang="en-US" sz="1200" dirty="0"/>
           </a:p>
@@ -3604,629 +3441,712 @@
         </p:nvSpPr>
         <p:spPr>
           <a:xfrm>
-            <a:off x="815975" y="2068116"/>
-            <a:ext cx="6597650" cy="697161"/>
-          </a:xfrm>
-          <a:prstGeom prst="roundRect">
-            <a:avLst>
-              <a:gd name="adj" fmla="val 12296"/>
-            </a:avLst>
+            <a:off x="813816" y="2057400"/>
+            <a:ext cx="6903720" cy="3794760"/>
+          </a:xfrm>
+          <a:prstGeom prst="rect">
+            <a:avLst/>
           </a:prstGeom>
           <a:solidFill>
-            <a:srgbClr val="FDFEFE"/>
+            <a:srgbClr val="14303D"/>
           </a:solidFill>
-          <a:ln w="6350">
+          <a:ln w="12700">
             <a:solidFill>
-              <a:srgbClr val="D6E1E6"/>
+              <a:srgbClr val="14303D"/>
             </a:solidFill>
             <a:prstDash val="solid"/>
           </a:ln>
         </p:spPr>
-      </p:sp>
-      <p:sp>
-        <p:nvSpPr>
-          <p:cNvPr id="6" name="Shape 4"/>
-          <p:cNvSpPr/>
-          <p:nvPr/>
-        </p:nvSpPr>
-        <p:spPr>
-          <a:xfrm>
-            <a:off x="971550" y="2284611"/>
-            <a:ext cx="294680" cy="264120"/>
-          </a:xfrm>
-          <a:prstGeom prst="roundRect">
-            <a:avLst>
-              <a:gd name="adj" fmla="val 50000"/>
-            </a:avLst>
+        <p:txBody>
+          <a:bodyPr/>
+          <a:lstStyle/>
+          <a:p>
+            <a:endParaRPr lang="en-US"/>
+          </a:p>
+        </p:txBody>
+      </p:sp>
+      <p:sp>
+        <p:nvSpPr>
+          <p:cNvPr id="6" name="Text 4"/>
+          <p:cNvSpPr txBox="1"/>
+          <p:nvPr/>
+        </p:nvSpPr>
+        <p:spPr>
+          <a:xfrm>
+            <a:off x="1069848" y="2286000"/>
+            <a:ext cx="6446520" cy="3383280"/>
+          </a:xfrm>
+          <a:prstGeom prst="rect">
+            <a:avLst/>
+          </a:prstGeom>
+          <a:noFill/>
+          <a:ln/>
+        </p:spPr>
+        <p:txBody>
+          <a:bodyPr wrap="square" lIns="0" tIns="0" rIns="0" bIns="0" rtlCol="0" anchor="ctr"/>
+          <a:lstStyle/>
+          <a:p>
+            <a:pPr marL="0" indent="0">
+              <a:lnSpc>
+                <a:spcPts val="1450"/>
+              </a:lnSpc>
+              <a:buNone/>
+            </a:pPr>
+            <a:r>
+              <a:rPr lang="en-US" sz="1050" dirty="0">
+                <a:solidFill>
+                  <a:srgbClr val="FDFEFE"/>
+                </a:solidFill>
+                <a:latin typeface="Courier New" pitchFamily="34" charset="0"/>
+                <a:ea typeface="Courier New" pitchFamily="34" charset="-122"/>
+                <a:cs typeface="Courier New" pitchFamily="34" charset="-120"/>
+              </a:rPr>
+              <a:t>Open the Contacts app on this device.</a:t>
+            </a:r>
+            <a:endParaRPr lang="en-US" sz="1050" dirty="0"/>
+          </a:p>
+          <a:p>
+            <a:pPr marL="0" indent="0">
+              <a:lnSpc>
+                <a:spcPts val="1450"/>
+              </a:lnSpc>
+              <a:buNone/>
+            </a:pPr>
+            <a:r>
+              <a:rPr lang="en-US" sz="1050" dirty="0">
+                <a:solidFill>
+                  <a:srgbClr val="FDFEFE"/>
+                </a:solidFill>
+                <a:latin typeface="Courier New" pitchFamily="34" charset="0"/>
+                <a:ea typeface="Courier New" pitchFamily="34" charset="-122"/>
+                <a:cs typeface="Courier New" pitchFamily="34" charset="-120"/>
+              </a:rPr>
+              <a:t>Navigate to the 'Search Results' screen if not already there.</a:t>
+            </a:r>
+            <a:endParaRPr lang="en-US" sz="1050" dirty="0"/>
+          </a:p>
+          <a:p>
+            <a:pPr marL="0" indent="0">
+              <a:lnSpc>
+                <a:spcPts val="1450"/>
+              </a:lnSpc>
+              <a:buNone/>
+            </a:pPr>
+            <a:endParaRPr lang="en-US" sz="1050" dirty="0"/>
+          </a:p>
+          <a:p>
+            <a:pPr marL="0" indent="0">
+              <a:lnSpc>
+                <a:spcPts val="1450"/>
+              </a:lnSpc>
+              <a:buNone/>
+            </a:pPr>
+            <a:r>
+              <a:rPr lang="en-US" sz="1050" dirty="0">
+                <a:solidFill>
+                  <a:srgbClr val="FDFEFE"/>
+                </a:solidFill>
+                <a:latin typeface="Courier New" pitchFamily="34" charset="0"/>
+                <a:ea typeface="Courier New" pitchFamily="34" charset="-122"/>
+                <a:cs typeface="Courier New" pitchFamily="34" charset="-120"/>
+              </a:rPr>
+              <a:t>Preconditions: App is open. No contacts exist.</a:t>
+            </a:r>
+            <a:endParaRPr lang="en-US" sz="1050" dirty="0"/>
+          </a:p>
+          <a:p>
+            <a:pPr marL="0" indent="0">
+              <a:lnSpc>
+                <a:spcPts val="1450"/>
+              </a:lnSpc>
+              <a:buNone/>
+            </a:pPr>
+            <a:endParaRPr lang="en-US" sz="1050" dirty="0"/>
+          </a:p>
+          <a:p>
+            <a:pPr marL="0" indent="0">
+              <a:lnSpc>
+                <a:spcPts val="1450"/>
+              </a:lnSpc>
+              <a:buNone/>
+            </a:pPr>
+            <a:r>
+              <a:rPr lang="en-US" sz="1050" dirty="0">
+                <a:solidFill>
+                  <a:srgbClr val="FDFEFE"/>
+                </a:solidFill>
+                <a:latin typeface="Courier New" pitchFamily="34" charset="0"/>
+                <a:ea typeface="Courier New" pitchFamily="34" charset="-122"/>
+                <a:cs typeface="Courier New" pitchFamily="34" charset="-120"/>
+              </a:rPr>
+              <a:t>Step 1: Navigate to 'Contacts List' screen.</a:t>
+            </a:r>
+            <a:endParaRPr lang="en-US" sz="1050" dirty="0"/>
+          </a:p>
+          <a:p>
+            <a:pPr marL="0" indent="0">
+              <a:lnSpc>
+                <a:spcPts val="1450"/>
+              </a:lnSpc>
+              <a:buNone/>
+            </a:pPr>
+            <a:r>
+              <a:rPr lang="en-US" sz="1050" dirty="0">
+                <a:solidFill>
+                  <a:srgbClr val="FDFEFE"/>
+                </a:solidFill>
+                <a:latin typeface="Courier New" pitchFamily="34" charset="0"/>
+                <a:ea typeface="Courier New" pitchFamily="34" charset="-122"/>
+                <a:cs typeface="Courier New" pitchFamily="34" charset="-120"/>
+              </a:rPr>
+              <a:t>Step 2: Tap 'FAB: Create Contact' to create a new contact.</a:t>
+            </a:r>
+            <a:endParaRPr lang="en-US" sz="1050" dirty="0"/>
+          </a:p>
+          <a:p>
+            <a:pPr marL="0" indent="0">
+              <a:lnSpc>
+                <a:spcPts val="1450"/>
+              </a:lnSpc>
+              <a:buNone/>
+            </a:pPr>
+            <a:r>
+              <a:rPr lang="en-US" sz="1050" dirty="0">
+                <a:solidFill>
+                  <a:srgbClr val="FDFEFE"/>
+                </a:solidFill>
+                <a:latin typeface="Courier New" pitchFamily="34" charset="0"/>
+                <a:ea typeface="Courier New" pitchFamily="34" charset="-122"/>
+                <a:cs typeface="Courier New" pitchFamily="34" charset="-120"/>
+              </a:rPr>
+              <a:t>Step 3: Enter 'First name' as 'Alice'.</a:t>
+            </a:r>
+            <a:endParaRPr lang="en-US" sz="1050" dirty="0"/>
+          </a:p>
+          <a:p>
+            <a:pPr marL="0" indent="0">
+              <a:lnSpc>
+                <a:spcPts val="1450"/>
+              </a:lnSpc>
+              <a:buNone/>
+            </a:pPr>
+            <a:r>
+              <a:rPr lang="en-US" sz="1050" dirty="0">
+                <a:solidFill>
+                  <a:srgbClr val="FDFEFE"/>
+                </a:solidFill>
+                <a:latin typeface="Courier New" pitchFamily="34" charset="0"/>
+                <a:ea typeface="Courier New" pitchFamily="34" charset="-122"/>
+                <a:cs typeface="Courier New" pitchFamily="34" charset="-120"/>
+              </a:rPr>
+              <a:t>Step 4: Tap 'Save' button.</a:t>
+            </a:r>
+            <a:endParaRPr lang="en-US" sz="1050" dirty="0"/>
+          </a:p>
+          <a:p>
+            <a:pPr marL="0" indent="0">
+              <a:lnSpc>
+                <a:spcPts val="1450"/>
+              </a:lnSpc>
+              <a:buNone/>
+            </a:pPr>
+            <a:r>
+              <a:rPr lang="en-US" sz="1050" dirty="0">
+                <a:solidFill>
+                  <a:srgbClr val="FDFEFE"/>
+                </a:solidFill>
+                <a:latin typeface="Courier New" pitchFamily="34" charset="0"/>
+                <a:ea typeface="Courier New" pitchFamily="34" charset="-122"/>
+                <a:cs typeface="Courier New" pitchFamily="34" charset="-120"/>
+              </a:rPr>
+              <a:t>Step 5: Navigate back to 'Contacts List'.</a:t>
+            </a:r>
+            <a:endParaRPr lang="en-US" sz="1050" dirty="0"/>
+          </a:p>
+          <a:p>
+            <a:pPr marL="0" indent="0">
+              <a:lnSpc>
+                <a:spcPts val="1450"/>
+              </a:lnSpc>
+              <a:buNone/>
+            </a:pPr>
+            <a:r>
+              <a:rPr lang="en-US" sz="1050" dirty="0">
+                <a:solidFill>
+                  <a:srgbClr val="FDFEFE"/>
+                </a:solidFill>
+                <a:latin typeface="Courier New" pitchFamily="34" charset="0"/>
+                <a:ea typeface="Courier New" pitchFamily="34" charset="-122"/>
+                <a:cs typeface="Courier New" pitchFamily="34" charset="-120"/>
+              </a:rPr>
+              <a:t>Step 6: Tap the search input field to focus.</a:t>
+            </a:r>
+            <a:endParaRPr lang="en-US" sz="1050" dirty="0"/>
+          </a:p>
+          <a:p>
+            <a:pPr marL="0" indent="0">
+              <a:lnSpc>
+                <a:spcPts val="1450"/>
+              </a:lnSpc>
+              <a:buNone/>
+            </a:pPr>
+            <a:r>
+              <a:rPr lang="en-US" sz="1050" dirty="0">
+                <a:solidFill>
+                  <a:srgbClr val="FDFEFE"/>
+                </a:solidFill>
+                <a:latin typeface="Courier New" pitchFamily="34" charset="0"/>
+                <a:ea typeface="Courier New" pitchFamily="34" charset="-122"/>
+                <a:cs typeface="Courier New" pitchFamily="34" charset="-120"/>
+              </a:rPr>
+              <a:t>Step 7: Type 'Bob' into the search input.</a:t>
+            </a:r>
+            <a:endParaRPr lang="en-US" sz="1050" dirty="0"/>
+          </a:p>
+          <a:p>
+            <a:pPr marL="0" indent="0">
+              <a:lnSpc>
+                <a:spcPts val="1450"/>
+              </a:lnSpc>
+              <a:buNone/>
+            </a:pPr>
+            <a:r>
+              <a:rPr lang="en-US" sz="1050" dirty="0">
+                <a:solidFill>
+                  <a:srgbClr val="FDFEFE"/>
+                </a:solidFill>
+                <a:latin typeface="Courier New" pitchFamily="34" charset="0"/>
+                <a:ea typeface="Courier New" pitchFamily="34" charset="-122"/>
+                <a:cs typeface="Courier New" pitchFamily="34" charset="-120"/>
+              </a:rPr>
+              <a:t>Step 8: Observe the search results area.</a:t>
+            </a:r>
+            <a:endParaRPr lang="en-US" sz="1050" dirty="0"/>
+          </a:p>
+          <a:p>
+            <a:pPr marL="0" indent="0">
+              <a:lnSpc>
+                <a:spcPts val="1450"/>
+              </a:lnSpc>
+              <a:buNone/>
+            </a:pPr>
+            <a:endParaRPr lang="en-US" sz="1050" dirty="0"/>
+          </a:p>
+          <a:p>
+            <a:pPr marL="0" indent="0">
+              <a:lnSpc>
+                <a:spcPts val="1450"/>
+              </a:lnSpc>
+              <a:buNone/>
+            </a:pPr>
+            <a:r>
+              <a:rPr lang="en-US" sz="1050" dirty="0">
+                <a:solidFill>
+                  <a:srgbClr val="FDFEFE"/>
+                </a:solidFill>
+                <a:latin typeface="Courier New" pitchFamily="34" charset="0"/>
+                <a:ea typeface="Courier New" pitchFamily="34" charset="-122"/>
+                <a:cs typeface="Courier New" pitchFamily="34" charset="-120"/>
+              </a:rPr>
+              <a:t>Expected result: Search results should be empty. The app should</a:t>
+            </a:r>
+            <a:endParaRPr lang="en-US" sz="1050" dirty="0"/>
+          </a:p>
+          <a:p>
+            <a:pPr marL="0" indent="0">
+              <a:lnSpc>
+                <a:spcPts val="1450"/>
+              </a:lnSpc>
+              <a:buNone/>
+            </a:pPr>
+            <a:r>
+              <a:rPr lang="en-US" sz="1050" dirty="0">
+                <a:solidFill>
+                  <a:srgbClr val="FDFEFE"/>
+                </a:solidFill>
+                <a:latin typeface="Courier New" pitchFamily="34" charset="0"/>
+                <a:ea typeface="Courier New" pitchFamily="34" charset="-122"/>
+                <a:cs typeface="Courier New" pitchFamily="34" charset="-120"/>
+              </a:rPr>
+              <a:t>show an empty state and not crash or show any error.</a:t>
+            </a:r>
+            <a:endParaRPr lang="en-US" sz="1050" dirty="0"/>
+          </a:p>
+        </p:txBody>
+      </p:sp>
+      <p:sp>
+        <p:nvSpPr>
+          <p:cNvPr id="7" name="Shape 5"/>
+          <p:cNvSpPr/>
+          <p:nvPr/>
+        </p:nvSpPr>
+        <p:spPr>
+          <a:xfrm>
+            <a:off x="8001000" y="2057400"/>
+            <a:ext cx="3383280" cy="1188720"/>
+          </a:xfrm>
+          <a:prstGeom prst="rect">
+            <a:avLst/>
           </a:prstGeom>
           <a:solidFill>
-            <a:srgbClr val="0F7EA8"/>
+            <a:srgbClr val="FFFFFF"/>
           </a:solidFill>
-          <a:ln/>
-        </p:spPr>
-      </p:sp>
-      <p:sp>
-        <p:nvSpPr>
-          <p:cNvPr id="7" name="Text 5"/>
-          <p:cNvSpPr/>
-          <p:nvPr/>
-        </p:nvSpPr>
-        <p:spPr>
-          <a:xfrm>
-            <a:off x="1073150" y="2310011"/>
-            <a:ext cx="142280" cy="238720"/>
-          </a:xfrm>
-          <a:prstGeom prst="rect">
-            <a:avLst/>
-          </a:prstGeom>
-          <a:noFill/>
-          <a:ln/>
-        </p:spPr>
-        <p:txBody>
-          <a:bodyPr wrap="square" lIns="0" tIns="0" rIns="0" bIns="0" rtlCol="0" anchor="t">
-            <a:normAutofit/>
-          </a:bodyPr>
-          <a:lstStyle/>
-          <a:p>
-            <a:pPr algn="l" indent="0" marL="0">
-              <a:lnSpc>
-                <a:spcPts val="1680"/>
-              </a:lnSpc>
-              <a:buNone/>
-            </a:pPr>
-            <a:r>
-              <a:rPr lang="en-US" sz="1200" b="1" dirty="0">
-                <a:solidFill>
-                  <a:srgbClr val="F6F8F7"/>
-                </a:solidFill>
-                <a:latin typeface="IBM Plex Sans" pitchFamily="34" charset="0"/>
-                <a:ea typeface="IBM Plex Sans" pitchFamily="34" charset="-122"/>
-                <a:cs typeface="IBM Plex Sans" pitchFamily="34" charset="-120"/>
-              </a:rPr>
-              <a:t>1</a:t>
-            </a:r>
-            <a:endParaRPr lang="en-US" sz="1200" dirty="0"/>
-          </a:p>
-        </p:txBody>
-      </p:sp>
-      <p:sp>
-        <p:nvSpPr>
-          <p:cNvPr id="8" name="Text 6"/>
-          <p:cNvSpPr/>
-          <p:nvPr/>
-        </p:nvSpPr>
-        <p:spPr>
-          <a:xfrm>
-            <a:off x="1393230" y="2185591"/>
-            <a:ext cx="6040765" cy="274290"/>
-          </a:xfrm>
-          <a:prstGeom prst="rect">
-            <a:avLst/>
-          </a:prstGeom>
-          <a:noFill/>
-          <a:ln/>
-        </p:spPr>
-        <p:txBody>
-          <a:bodyPr wrap="square" lIns="0" tIns="0" rIns="0" bIns="0" rtlCol="0" anchor="t">
-            <a:normAutofit/>
-          </a:bodyPr>
-          <a:lstStyle/>
-          <a:p>
-            <a:pPr algn="l" indent="0" marL="0">
-              <a:lnSpc>
-                <a:spcPts val="1960"/>
-              </a:lnSpc>
-              <a:buNone/>
-            </a:pPr>
-            <a:r>
-              <a:rPr lang="en-US" sz="1400" b="1" dirty="0">
-                <a:solidFill>
-                  <a:srgbClr val="14303D"/>
-                </a:solidFill>
-                <a:latin typeface="IBM Plex Sans" pitchFamily="34" charset="0"/>
-                <a:ea typeface="IBM Plex Sans" pitchFamily="34" charset="-122"/>
-                <a:cs typeface="IBM Plex Sans" pitchFamily="34" charset="-120"/>
-              </a:rPr>
-              <a:t>Exact signature</a:t>
-            </a:r>
-            <a:endParaRPr lang="en-US" sz="1400" dirty="0"/>
-          </a:p>
-        </p:txBody>
-      </p:sp>
-      <p:sp>
-        <p:nvSpPr>
-          <p:cNvPr id="9" name="Text 7"/>
-          <p:cNvSpPr/>
-          <p:nvPr/>
-        </p:nvSpPr>
-        <p:spPr>
-          <a:xfrm>
-            <a:off x="1393230" y="2434481"/>
-            <a:ext cx="6040765" cy="238720"/>
-          </a:xfrm>
-          <a:prstGeom prst="rect">
-            <a:avLst/>
-          </a:prstGeom>
-          <a:noFill/>
-          <a:ln/>
-        </p:spPr>
-        <p:txBody>
-          <a:bodyPr wrap="square" lIns="0" tIns="0" rIns="0" bIns="0" rtlCol="0" anchor="t">
-            <a:normAutofit/>
-          </a:bodyPr>
-          <a:lstStyle/>
-          <a:p>
-            <a:pPr algn="l" indent="0" marL="0">
-              <a:lnSpc>
-                <a:spcPts val="1680"/>
-              </a:lnSpc>
-              <a:buNone/>
-            </a:pPr>
-            <a:r>
-              <a:rPr lang="en-US" sz="1200" dirty="0">
-                <a:solidFill>
-                  <a:srgbClr val="46596A"/>
-                </a:solidFill>
-                <a:latin typeface="IBM Plex Sans" pitchFamily="34" charset="0"/>
-                <a:ea typeface="IBM Plex Sans" pitchFamily="34" charset="-122"/>
-                <a:cs typeface="IBM Plex Sans" pitchFamily="34" charset="-120"/>
-              </a:rPr>
-              <a:t>same package, activity, controls and dialog</a:t>
-            </a:r>
-            <a:endParaRPr lang="en-US" sz="1200" dirty="0"/>
-          </a:p>
-        </p:txBody>
-      </p:sp>
-      <p:sp>
-        <p:nvSpPr>
-          <p:cNvPr id="10" name="Shape 8"/>
-          <p:cNvSpPr/>
-          <p:nvPr/>
-        </p:nvSpPr>
-        <p:spPr>
-          <a:xfrm>
-            <a:off x="815975" y="2847826"/>
-            <a:ext cx="6597650" cy="697161"/>
-          </a:xfrm>
-          <a:prstGeom prst="roundRect">
-            <a:avLst>
-              <a:gd name="adj" fmla="val 12296"/>
-            </a:avLst>
-          </a:prstGeom>
-          <a:solidFill>
-            <a:srgbClr val="FDFEFE"/>
-          </a:solidFill>
-          <a:ln w="6350">
+          <a:ln w="12700">
             <a:solidFill>
-              <a:srgbClr val="D6E1E6"/>
+              <a:srgbClr val="D5E0E5"/>
             </a:solidFill>
             <a:prstDash val="solid"/>
           </a:ln>
         </p:spPr>
-      </p:sp>
-      <p:sp>
-        <p:nvSpPr>
-          <p:cNvPr id="11" name="Shape 9"/>
-          <p:cNvSpPr/>
-          <p:nvPr/>
-        </p:nvSpPr>
-        <p:spPr>
-          <a:xfrm>
-            <a:off x="971550" y="3064321"/>
-            <a:ext cx="294680" cy="264120"/>
-          </a:xfrm>
-          <a:prstGeom prst="roundRect">
-            <a:avLst>
-              <a:gd name="adj" fmla="val 50000"/>
-            </a:avLst>
+        <p:txBody>
+          <a:bodyPr/>
+          <a:lstStyle/>
+          <a:p>
+            <a:endParaRPr lang="en-US"/>
+          </a:p>
+        </p:txBody>
+      </p:sp>
+      <p:sp>
+        <p:nvSpPr>
+          <p:cNvPr id="8" name="Text 6"/>
+          <p:cNvSpPr txBox="1"/>
+          <p:nvPr/>
+        </p:nvSpPr>
+        <p:spPr>
+          <a:xfrm>
+            <a:off x="8229600" y="2221992"/>
+            <a:ext cx="2971800" cy="274320"/>
+          </a:xfrm>
+          <a:prstGeom prst="rect">
+            <a:avLst/>
+          </a:prstGeom>
+          <a:noFill/>
+          <a:ln/>
+        </p:spPr>
+        <p:txBody>
+          <a:bodyPr wrap="square" lIns="0" tIns="0" rIns="0" bIns="0" rtlCol="0" anchor="ctr"/>
+          <a:lstStyle/>
+          <a:p>
+            <a:pPr marL="0" indent="0">
+              <a:buNone/>
+            </a:pPr>
+            <a:r>
+              <a:rPr lang="en-US" sz="1300" b="1" dirty="0">
+                <a:solidFill>
+                  <a:srgbClr val="14303D"/>
+                </a:solidFill>
+                <a:latin typeface="IBM Plex Sans" pitchFamily="34" charset="0"/>
+                <a:ea typeface="IBM Plex Sans" pitchFamily="34" charset="-122"/>
+                <a:cs typeface="IBM Plex Sans" pitchFamily="34" charset="-120"/>
+              </a:rPr>
+              <a:t>Plain language, never coordinates</a:t>
+            </a:r>
+            <a:endParaRPr lang="en-US" sz="1300" dirty="0"/>
+          </a:p>
+        </p:txBody>
+      </p:sp>
+      <p:sp>
+        <p:nvSpPr>
+          <p:cNvPr id="9" name="Text 7"/>
+          <p:cNvSpPr txBox="1"/>
+          <p:nvPr/>
+        </p:nvSpPr>
+        <p:spPr>
+          <a:xfrm>
+            <a:off x="8229600" y="2532888"/>
+            <a:ext cx="2971800" cy="603504"/>
+          </a:xfrm>
+          <a:prstGeom prst="rect">
+            <a:avLst/>
+          </a:prstGeom>
+          <a:noFill/>
+          <a:ln/>
+        </p:spPr>
+        <p:txBody>
+          <a:bodyPr wrap="square" lIns="0" tIns="0" rIns="0" bIns="0" rtlCol="0" anchor="ctr"/>
+          <a:lstStyle/>
+          <a:p>
+            <a:pPr marL="0" indent="0">
+              <a:lnSpc>
+                <a:spcPts val="1300"/>
+              </a:lnSpc>
+              <a:buNone/>
+            </a:pPr>
+            <a:r>
+              <a:rPr lang="en-US" sz="1050" dirty="0">
+                <a:solidFill>
+                  <a:srgbClr val="46596A"/>
+                </a:solidFill>
+                <a:latin typeface="IBM Plex Sans" pitchFamily="34" charset="0"/>
+                <a:ea typeface="IBM Plex Sans" pitchFamily="34" charset="-122"/>
+                <a:cs typeface="IBM Plex Sans" pitchFamily="34" charset="-120"/>
+              </a:rPr>
+              <a:t>The planner cannot see the screen, so it states intent. The executor resolves every control at runtime.</a:t>
+            </a:r>
+            <a:endParaRPr lang="en-US" sz="1050" dirty="0"/>
+          </a:p>
+        </p:txBody>
+      </p:sp>
+      <p:sp>
+        <p:nvSpPr>
+          <p:cNvPr id="10" name="Shape 8"/>
+          <p:cNvSpPr/>
+          <p:nvPr/>
+        </p:nvSpPr>
+        <p:spPr>
+          <a:xfrm>
+            <a:off x="8001000" y="3364992"/>
+            <a:ext cx="3383280" cy="1188720"/>
+          </a:xfrm>
+          <a:prstGeom prst="rect">
+            <a:avLst/>
           </a:prstGeom>
           <a:solidFill>
-            <a:srgbClr val="0F7EA8"/>
+            <a:srgbClr val="FFFFFF"/>
           </a:solidFill>
-          <a:ln/>
-        </p:spPr>
-      </p:sp>
-      <p:sp>
-        <p:nvSpPr>
-          <p:cNvPr id="12" name="Text 10"/>
-          <p:cNvSpPr/>
-          <p:nvPr/>
-        </p:nvSpPr>
-        <p:spPr>
-          <a:xfrm>
-            <a:off x="1073150" y="3089721"/>
-            <a:ext cx="142280" cy="238720"/>
-          </a:xfrm>
-          <a:prstGeom prst="rect">
-            <a:avLst/>
-          </a:prstGeom>
-          <a:noFill/>
-          <a:ln/>
-        </p:spPr>
-        <p:txBody>
-          <a:bodyPr wrap="square" lIns="0" tIns="0" rIns="0" bIns="0" rtlCol="0" anchor="t">
-            <a:normAutofit/>
-          </a:bodyPr>
-          <a:lstStyle/>
-          <a:p>
-            <a:pPr algn="l" indent="0" marL="0">
-              <a:lnSpc>
-                <a:spcPts val="1680"/>
-              </a:lnSpc>
-              <a:buNone/>
-            </a:pPr>
-            <a:r>
-              <a:rPr lang="en-US" sz="1200" b="1" dirty="0">
-                <a:solidFill>
-                  <a:srgbClr val="F6F8F7"/>
-                </a:solidFill>
-                <a:latin typeface="IBM Plex Sans" pitchFamily="34" charset="0"/>
-                <a:ea typeface="IBM Plex Sans" pitchFamily="34" charset="-122"/>
-                <a:cs typeface="IBM Plex Sans" pitchFamily="34" charset="-120"/>
-              </a:rPr>
-              <a:t>2</a:t>
-            </a:r>
-            <a:endParaRPr lang="en-US" sz="1200" dirty="0"/>
-          </a:p>
-        </p:txBody>
-      </p:sp>
-      <p:sp>
-        <p:nvSpPr>
-          <p:cNvPr id="13" name="Text 11"/>
-          <p:cNvSpPr/>
-          <p:nvPr/>
-        </p:nvSpPr>
-        <p:spPr>
-          <a:xfrm>
-            <a:off x="1393230" y="2965301"/>
-            <a:ext cx="6040765" cy="274290"/>
-          </a:xfrm>
-          <a:prstGeom prst="rect">
-            <a:avLst/>
-          </a:prstGeom>
-          <a:noFill/>
-          <a:ln/>
-        </p:spPr>
-        <p:txBody>
-          <a:bodyPr wrap="square" lIns="0" tIns="0" rIns="0" bIns="0" rtlCol="0" anchor="t">
-            <a:normAutofit/>
-          </a:bodyPr>
-          <a:lstStyle/>
-          <a:p>
-            <a:pPr algn="l" indent="0" marL="0">
-              <a:lnSpc>
-                <a:spcPts val="1960"/>
-              </a:lnSpc>
-              <a:buNone/>
-            </a:pPr>
-            <a:r>
-              <a:rPr lang="en-US" sz="1400" b="1" dirty="0">
-                <a:solidFill>
-                  <a:srgbClr val="14303D"/>
-                </a:solidFill>
-                <a:latin typeface="IBM Plex Sans" pitchFamily="34" charset="0"/>
-                <a:ea typeface="IBM Plex Sans" pitchFamily="34" charset="-122"/>
-                <a:cs typeface="IBM Plex Sans" pitchFamily="34" charset="-120"/>
-              </a:rPr>
-              <a:t>Structural similarity of at least 0.90</a:t>
-            </a:r>
-            <a:endParaRPr lang="en-US" sz="1400" dirty="0"/>
-          </a:p>
-        </p:txBody>
-      </p:sp>
-      <p:sp>
-        <p:nvSpPr>
-          <p:cNvPr id="14" name="Text 12"/>
-          <p:cNvSpPr/>
-          <p:nvPr/>
-        </p:nvSpPr>
-        <p:spPr>
-          <a:xfrm>
-            <a:off x="1393230" y="3214191"/>
-            <a:ext cx="6040765" cy="238720"/>
-          </a:xfrm>
-          <a:prstGeom prst="rect">
-            <a:avLst/>
-          </a:prstGeom>
-          <a:noFill/>
-          <a:ln/>
-        </p:spPr>
-        <p:txBody>
-          <a:bodyPr wrap="square" lIns="0" tIns="0" rIns="0" bIns="0" rtlCol="0" anchor="t">
-            <a:normAutofit/>
-          </a:bodyPr>
-          <a:lstStyle/>
-          <a:p>
-            <a:pPr algn="l" indent="0" marL="0">
-              <a:lnSpc>
-                <a:spcPts val="1680"/>
-              </a:lnSpc>
-              <a:buNone/>
-            </a:pPr>
-            <a:r>
-              <a:rPr lang="en-US" sz="1200" dirty="0">
-                <a:solidFill>
-                  <a:srgbClr val="46596A"/>
-                </a:solidFill>
-                <a:latin typeface="IBM Plex Sans" pitchFamily="34" charset="0"/>
-                <a:ea typeface="IBM Plex Sans" pitchFamily="34" charset="-122"/>
-                <a:cs typeface="IBM Plex Sans" pitchFamily="34" charset="-120"/>
-              </a:rPr>
-              <a:t>tolerates counters, timestamps and changing list data</a:t>
-            </a:r>
-            <a:endParaRPr lang="en-US" sz="1200" dirty="0"/>
-          </a:p>
-        </p:txBody>
-      </p:sp>
-      <p:sp>
-        <p:nvSpPr>
-          <p:cNvPr id="15" name="Shape 13"/>
-          <p:cNvSpPr/>
-          <p:nvPr/>
-        </p:nvSpPr>
-        <p:spPr>
-          <a:xfrm>
-            <a:off x="815975" y="3627537"/>
-            <a:ext cx="6597650" cy="697161"/>
-          </a:xfrm>
-          <a:prstGeom prst="roundRect">
-            <a:avLst>
-              <a:gd name="adj" fmla="val 12296"/>
-            </a:avLst>
-          </a:prstGeom>
-          <a:solidFill>
-            <a:srgbClr val="FDFEFE"/>
-          </a:solidFill>
-          <a:ln w="6350">
+          <a:ln w="12700">
             <a:solidFill>
-              <a:srgbClr val="D6E1E6"/>
+              <a:srgbClr val="D5E0E5"/>
             </a:solidFill>
             <a:prstDash val="solid"/>
           </a:ln>
         </p:spPr>
-      </p:sp>
-      <p:sp>
-        <p:nvSpPr>
-          <p:cNvPr id="16" name="Shape 14"/>
-          <p:cNvSpPr/>
-          <p:nvPr/>
-        </p:nvSpPr>
-        <p:spPr>
-          <a:xfrm>
-            <a:off x="971550" y="3844032"/>
-            <a:ext cx="294680" cy="264120"/>
-          </a:xfrm>
-          <a:prstGeom prst="roundRect">
-            <a:avLst>
-              <a:gd name="adj" fmla="val 50000"/>
-            </a:avLst>
+        <p:txBody>
+          <a:bodyPr/>
+          <a:lstStyle/>
+          <a:p>
+            <a:endParaRPr lang="en-US"/>
+          </a:p>
+        </p:txBody>
+      </p:sp>
+      <p:sp>
+        <p:nvSpPr>
+          <p:cNvPr id="11" name="Text 9"/>
+          <p:cNvSpPr txBox="1"/>
+          <p:nvPr/>
+        </p:nvSpPr>
+        <p:spPr>
+          <a:xfrm>
+            <a:off x="8229600" y="3529584"/>
+            <a:ext cx="2971800" cy="274320"/>
+          </a:xfrm>
+          <a:prstGeom prst="rect">
+            <a:avLst/>
+          </a:prstGeom>
+          <a:noFill/>
+          <a:ln/>
+        </p:spPr>
+        <p:txBody>
+          <a:bodyPr wrap="square" lIns="0" tIns="0" rIns="0" bIns="0" rtlCol="0" anchor="ctr"/>
+          <a:lstStyle/>
+          <a:p>
+            <a:pPr marL="0" indent="0">
+              <a:buNone/>
+            </a:pPr>
+            <a:r>
+              <a:rPr lang="en-US" sz="1300" b="1" dirty="0">
+                <a:solidFill>
+                  <a:srgbClr val="14303D"/>
+                </a:solidFill>
+                <a:latin typeface="IBM Plex Sans" pitchFamily="34" charset="0"/>
+                <a:ea typeface="IBM Plex Sans" pitchFamily="34" charset="-122"/>
+                <a:cs typeface="IBM Plex Sans" pitchFamily="34" charset="-120"/>
+              </a:rPr>
+              <a:t>Preconditions come with it</a:t>
+            </a:r>
+            <a:endParaRPr lang="en-US" sz="1300" dirty="0"/>
+          </a:p>
+        </p:txBody>
+      </p:sp>
+      <p:sp>
+        <p:nvSpPr>
+          <p:cNvPr id="12" name="Text 10"/>
+          <p:cNvSpPr txBox="1"/>
+          <p:nvPr/>
+        </p:nvSpPr>
+        <p:spPr>
+          <a:xfrm>
+            <a:off x="8229600" y="3840480"/>
+            <a:ext cx="2971800" cy="603504"/>
+          </a:xfrm>
+          <a:prstGeom prst="rect">
+            <a:avLst/>
+          </a:prstGeom>
+          <a:noFill/>
+          <a:ln/>
+        </p:spPr>
+        <p:txBody>
+          <a:bodyPr wrap="square" lIns="0" tIns="0" rIns="0" bIns="0" rtlCol="0" anchor="ctr"/>
+          <a:lstStyle/>
+          <a:p>
+            <a:pPr marL="0" indent="0">
+              <a:lnSpc>
+                <a:spcPts val="1300"/>
+              </a:lnSpc>
+              <a:buNone/>
+            </a:pPr>
+            <a:r>
+              <a:rPr lang="en-US" sz="1050" dirty="0">
+                <a:solidFill>
+                  <a:srgbClr val="46596A"/>
+                </a:solidFill>
+                <a:latin typeface="IBM Plex Sans" pitchFamily="34" charset="0"/>
+                <a:ea typeface="IBM Plex Sans" pitchFamily="34" charset="-122"/>
+                <a:cs typeface="IBM Plex Sans" pitchFamily="34" charset="-120"/>
+              </a:rPr>
+              <a:t>If they cannot be created, the run stops and is attributed to the environment, not the app.</a:t>
+            </a:r>
+            <a:endParaRPr lang="en-US" sz="1050" dirty="0"/>
+          </a:p>
+        </p:txBody>
+      </p:sp>
+      <p:sp>
+        <p:nvSpPr>
+          <p:cNvPr id="13" name="Shape 11"/>
+          <p:cNvSpPr/>
+          <p:nvPr/>
+        </p:nvSpPr>
+        <p:spPr>
+          <a:xfrm>
+            <a:off x="8001000" y="4672584"/>
+            <a:ext cx="3383280" cy="1188720"/>
+          </a:xfrm>
+          <a:prstGeom prst="rect">
+            <a:avLst/>
           </a:prstGeom>
           <a:solidFill>
-            <a:srgbClr val="0F7EA8"/>
+            <a:srgbClr val="FFFFFF"/>
           </a:solidFill>
-          <a:ln/>
-        </p:spPr>
-      </p:sp>
-      <p:sp>
-        <p:nvSpPr>
-          <p:cNvPr id="17" name="Text 15"/>
-          <p:cNvSpPr/>
-          <p:nvPr/>
-        </p:nvSpPr>
-        <p:spPr>
-          <a:xfrm>
-            <a:off x="1073150" y="3869432"/>
-            <a:ext cx="142280" cy="238720"/>
-          </a:xfrm>
-          <a:prstGeom prst="rect">
-            <a:avLst/>
-          </a:prstGeom>
-          <a:noFill/>
-          <a:ln/>
-        </p:spPr>
-        <p:txBody>
-          <a:bodyPr wrap="square" lIns="0" tIns="0" rIns="0" bIns="0" rtlCol="0" anchor="t">
-            <a:normAutofit/>
-          </a:bodyPr>
-          <a:lstStyle/>
-          <a:p>
-            <a:pPr algn="l" indent="0" marL="0">
-              <a:lnSpc>
-                <a:spcPts val="1680"/>
-              </a:lnSpc>
-              <a:buNone/>
-            </a:pPr>
-            <a:r>
-              <a:rPr lang="en-US" sz="1200" b="1" dirty="0">
-                <a:solidFill>
-                  <a:srgbClr val="F6F8F7"/>
-                </a:solidFill>
-                <a:latin typeface="IBM Plex Sans" pitchFamily="34" charset="0"/>
-                <a:ea typeface="IBM Plex Sans" pitchFamily="34" charset="-122"/>
-                <a:cs typeface="IBM Plex Sans" pitchFamily="34" charset="-120"/>
-              </a:rPr>
-              <a:t>3</a:t>
-            </a:r>
-            <a:endParaRPr lang="en-US" sz="1200" dirty="0"/>
-          </a:p>
-        </p:txBody>
-      </p:sp>
-      <p:sp>
-        <p:nvSpPr>
-          <p:cNvPr id="18" name="Text 16"/>
-          <p:cNvSpPr/>
-          <p:nvPr/>
-        </p:nvSpPr>
-        <p:spPr>
-          <a:xfrm>
-            <a:off x="1393230" y="3745012"/>
-            <a:ext cx="6040765" cy="274290"/>
-          </a:xfrm>
-          <a:prstGeom prst="rect">
-            <a:avLst/>
-          </a:prstGeom>
-          <a:noFill/>
-          <a:ln/>
-        </p:spPr>
-        <p:txBody>
-          <a:bodyPr wrap="square" lIns="0" tIns="0" rIns="0" bIns="0" rtlCol="0" anchor="t">
-            <a:normAutofit/>
-          </a:bodyPr>
-          <a:lstStyle/>
-          <a:p>
-            <a:pPr algn="l" indent="0" marL="0">
-              <a:lnSpc>
-                <a:spcPts val="1960"/>
-              </a:lnSpc>
-              <a:buNone/>
-            </a:pPr>
-            <a:r>
-              <a:rPr lang="en-US" sz="1400" b="1" dirty="0">
-                <a:solidFill>
-                  <a:srgbClr val="14303D"/>
-                </a:solidFill>
-                <a:latin typeface="IBM Plex Sans" pitchFamily="34" charset="0"/>
-                <a:ea typeface="IBM Plex Sans" pitchFamily="34" charset="-122"/>
-                <a:cs typeface="IBM Plex Sans" pitchFamily="34" charset="-120"/>
-              </a:rPr>
-              <a:t>Containment of at least 0.95</a:t>
-            </a:r>
-            <a:endParaRPr lang="en-US" sz="1400" dirty="0"/>
-          </a:p>
-        </p:txBody>
-      </p:sp>
-      <p:sp>
-        <p:nvSpPr>
-          <p:cNvPr id="19" name="Text 17"/>
-          <p:cNvSpPr/>
-          <p:nvPr/>
-        </p:nvSpPr>
-        <p:spPr>
-          <a:xfrm>
-            <a:off x="1393230" y="3993902"/>
-            <a:ext cx="6040765" cy="238720"/>
-          </a:xfrm>
-          <a:prstGeom prst="rect">
-            <a:avLst/>
-          </a:prstGeom>
-          <a:noFill/>
-          <a:ln/>
-        </p:spPr>
-        <p:txBody>
-          <a:bodyPr wrap="square" lIns="0" tIns="0" rIns="0" bIns="0" rtlCol="0" anchor="t">
-            <a:normAutofit/>
-          </a:bodyPr>
-          <a:lstStyle/>
-          <a:p>
-            <a:pPr algn="l" indent="0" marL="0">
-              <a:lnSpc>
-                <a:spcPts val="1680"/>
-              </a:lnSpc>
-              <a:buNone/>
-            </a:pPr>
-            <a:r>
-              <a:rPr lang="en-US" sz="1200" dirty="0">
-                <a:solidFill>
-                  <a:srgbClr val="46596A"/>
-                </a:solidFill>
-                <a:latin typeface="IBM Plex Sans" pitchFamily="34" charset="0"/>
-                <a:ea typeface="IBM Plex Sans" pitchFamily="34" charset="-122"/>
-                <a:cs typeface="IBM Plex Sans" pitchFamily="34" charset="-120"/>
-              </a:rPr>
-              <a:t>a screen captured before it finished drawing</a:t>
-            </a:r>
-            <a:endParaRPr lang="en-US" sz="1200" dirty="0"/>
-          </a:p>
-        </p:txBody>
-      </p:sp>
-      <p:sp>
-        <p:nvSpPr>
-          <p:cNvPr id="20" name="Shape 18"/>
-          <p:cNvSpPr/>
-          <p:nvPr/>
-        </p:nvSpPr>
-        <p:spPr>
-          <a:xfrm>
-            <a:off x="815975" y="4407247"/>
-            <a:ext cx="6597650" cy="697161"/>
-          </a:xfrm>
-          <a:prstGeom prst="roundRect">
-            <a:avLst>
-              <a:gd name="adj" fmla="val 12296"/>
-            </a:avLst>
-          </a:prstGeom>
-          <a:solidFill>
-            <a:srgbClr val="FDFEFE"/>
-          </a:solidFill>
-          <a:ln w="6350">
+          <a:ln w="12700">
             <a:solidFill>
-              <a:srgbClr val="D6E1E6"/>
+              <a:srgbClr val="D5E0E5"/>
             </a:solidFill>
             <a:prstDash val="solid"/>
           </a:ln>
         </p:spPr>
-      </p:sp>
-      <p:sp>
-        <p:nvSpPr>
-          <p:cNvPr id="21" name="Shape 19"/>
-          <p:cNvSpPr/>
-          <p:nvPr/>
-        </p:nvSpPr>
-        <p:spPr>
-          <a:xfrm>
-            <a:off x="971550" y="4623743"/>
-            <a:ext cx="294680" cy="264120"/>
-          </a:xfrm>
-          <a:prstGeom prst="roundRect">
-            <a:avLst>
-              <a:gd name="adj" fmla="val 50000"/>
-            </a:avLst>
-          </a:prstGeom>
-          <a:solidFill>
-            <a:srgbClr val="0F7EA8"/>
-          </a:solidFill>
-          <a:ln/>
-        </p:spPr>
-      </p:sp>
-      <p:sp>
-        <p:nvSpPr>
-          <p:cNvPr id="22" name="Text 20"/>
-          <p:cNvSpPr/>
-          <p:nvPr/>
-        </p:nvSpPr>
-        <p:spPr>
-          <a:xfrm>
-            <a:off x="1073150" y="4649143"/>
-            <a:ext cx="142280" cy="238720"/>
-          </a:xfrm>
-          <a:prstGeom prst="rect">
-            <a:avLst/>
-          </a:prstGeom>
-          <a:noFill/>
-          <a:ln/>
-        </p:spPr>
-        <p:txBody>
-          <a:bodyPr wrap="square" lIns="0" tIns="0" rIns="0" bIns="0" rtlCol="0" anchor="t">
-            <a:normAutofit/>
-          </a:bodyPr>
-          <a:lstStyle/>
-          <a:p>
-            <a:pPr algn="l" indent="0" marL="0">
-              <a:lnSpc>
-                <a:spcPts val="1680"/>
-              </a:lnSpc>
-              <a:buNone/>
-            </a:pPr>
-            <a:r>
-              <a:rPr lang="en-US" sz="1200" b="1" dirty="0">
-                <a:solidFill>
-                  <a:srgbClr val="F6F8F7"/>
-                </a:solidFill>
-                <a:latin typeface="IBM Plex Sans" pitchFamily="34" charset="0"/>
-                <a:ea typeface="IBM Plex Sans" pitchFamily="34" charset="-122"/>
-                <a:cs typeface="IBM Plex Sans" pitchFamily="34" charset="-120"/>
-              </a:rPr>
-              <a:t>4</a:t>
+        <p:txBody>
+          <a:bodyPr/>
+          <a:lstStyle/>
+          <a:p>
+            <a:endParaRPr lang="en-US"/>
+          </a:p>
+        </p:txBody>
+      </p:sp>
+      <p:sp>
+        <p:nvSpPr>
+          <p:cNvPr id="14" name="Text 12"/>
+          <p:cNvSpPr txBox="1"/>
+          <p:nvPr/>
+        </p:nvSpPr>
+        <p:spPr>
+          <a:xfrm>
+            <a:off x="8229600" y="4837176"/>
+            <a:ext cx="2971800" cy="274320"/>
+          </a:xfrm>
+          <a:prstGeom prst="rect">
+            <a:avLst/>
+          </a:prstGeom>
+          <a:noFill/>
+          <a:ln/>
+        </p:spPr>
+        <p:txBody>
+          <a:bodyPr wrap="square" lIns="0" tIns="0" rIns="0" bIns="0" rtlCol="0" anchor="ctr"/>
+          <a:lstStyle/>
+          <a:p>
+            <a:pPr marL="0" indent="0">
+              <a:buNone/>
+            </a:pPr>
+            <a:r>
+              <a:rPr lang="en-US" sz="1300" b="1" dirty="0">
+                <a:solidFill>
+                  <a:srgbClr val="14303D"/>
+                </a:solidFill>
+                <a:latin typeface="IBM Plex Sans" pitchFamily="34" charset="0"/>
+                <a:ea typeface="IBM Plex Sans" pitchFamily="34" charset="-122"/>
+                <a:cs typeface="IBM Plex Sans" pitchFamily="34" charset="-120"/>
+              </a:rPr>
+              <a:t>Secrets are added here</a:t>
+            </a:r>
+            <a:endParaRPr lang="en-US" sz="1300" dirty="0"/>
+          </a:p>
+        </p:txBody>
+      </p:sp>
+      <p:sp>
+        <p:nvSpPr>
+          <p:cNvPr id="15" name="Text 13"/>
+          <p:cNvSpPr txBox="1"/>
+          <p:nvPr/>
+        </p:nvSpPr>
+        <p:spPr>
+          <a:xfrm>
+            <a:off x="8229600" y="5148072"/>
+            <a:ext cx="2971800" cy="603504"/>
+          </a:xfrm>
+          <a:prstGeom prst="rect">
+            <a:avLst/>
+          </a:prstGeom>
+          <a:noFill/>
+          <a:ln/>
+        </p:spPr>
+        <p:txBody>
+          <a:bodyPr wrap="square" lIns="0" tIns="0" rIns="0" bIns="0" rtlCol="0" anchor="ctr"/>
+          <a:lstStyle/>
+          <a:p>
+            <a:pPr marL="0" indent="0">
+              <a:lnSpc>
+                <a:spcPts val="1300"/>
+              </a:lnSpc>
+              <a:buNone/>
+            </a:pPr>
+            <a:r>
+              <a:rPr lang="en-US" sz="1050" dirty="0">
+                <a:solidFill>
+                  <a:srgbClr val="46596A"/>
+                </a:solidFill>
+                <a:latin typeface="IBM Plex Sans" pitchFamily="34" charset="0"/>
+                <a:ea typeface="IBM Plex Sans" pitchFamily="34" charset="-122"/>
+                <a:cs typeface="IBM Plex Sans" pitchFamily="34" charset="-120"/>
+              </a:rPr>
+              <a:t>Login details come from the target profile and reach the executor only. The planner never sees them.</a:t>
+            </a:r>
+            <a:endParaRPr lang="en-US" sz="1050" dirty="0"/>
+          </a:p>
+        </p:txBody>
+      </p:sp>
+      <p:sp>
+        <p:nvSpPr>
+          <p:cNvPr id="16" name="Text 14"/>
+          <p:cNvSpPr txBox="1"/>
+          <p:nvPr/>
+        </p:nvSpPr>
+        <p:spPr>
+          <a:xfrm>
+            <a:off x="813816" y="6236208"/>
+            <a:ext cx="3456432" cy="237744"/>
+          </a:xfrm>
+          <a:prstGeom prst="rect">
+            <a:avLst/>
+          </a:prstGeom>
+          <a:noFill/>
+          <a:ln/>
+        </p:spPr>
+        <p:txBody>
+          <a:bodyPr wrap="square" lIns="0" tIns="0" rIns="0" bIns="0" rtlCol="0" anchor="ctr"/>
+          <a:lstStyle/>
+          <a:p>
+            <a:pPr marL="0" indent="0">
+              <a:buNone/>
+            </a:pPr>
+            <a:r>
+              <a:rPr lang="en-US" sz="1200" dirty="0">
+                <a:solidFill>
+                  <a:srgbClr val="55697A"/>
+                </a:solidFill>
+                <a:latin typeface="IBM Plex Sans" pitchFamily="34" charset="0"/>
+                <a:ea typeface="IBM Plex Sans" pitchFamily="34" charset="-122"/>
+                <a:cs typeface="IBM Plex Sans" pitchFamily="34" charset="-120"/>
+              </a:rPr>
+              <a:t>Exploratory Testing Automation · CSE 450 · BUET</a:t>
             </a:r>
             <a:endParaRPr lang="en-US" sz="1200" dirty="0"/>
           </a:p>
@@ -4234,504 +4154,26 @@
       </p:sp>
       <p:sp>
         <p:nvSpPr>
-          <p:cNvPr id="23" name="Text 21"/>
-          <p:cNvSpPr/>
-          <p:nvPr/>
-        </p:nvSpPr>
-        <p:spPr>
-          <a:xfrm>
-            <a:off x="1393230" y="4524722"/>
-            <a:ext cx="6040765" cy="274290"/>
-          </a:xfrm>
-          <a:prstGeom prst="rect">
-            <a:avLst/>
-          </a:prstGeom>
-          <a:noFill/>
-          <a:ln/>
-        </p:spPr>
-        <p:txBody>
-          <a:bodyPr wrap="square" lIns="0" tIns="0" rIns="0" bIns="0" rtlCol="0" anchor="t">
-            <a:normAutofit/>
-          </a:bodyPr>
-          <a:lstStyle/>
-          <a:p>
-            <a:pPr algn="l" indent="0" marL="0">
-              <a:lnSpc>
-                <a:spcPts val="1960"/>
-              </a:lnSpc>
-              <a:buNone/>
-            </a:pPr>
-            <a:r>
-              <a:rPr lang="en-US" sz="1400" b="1" dirty="0">
-                <a:solidFill>
-                  <a:srgbClr val="14303D"/>
-                </a:solidFill>
-                <a:latin typeface="IBM Plex Sans" pitchFamily="34" charset="0"/>
-                <a:ea typeface="IBM Plex Sans" pitchFamily="34" charset="-122"/>
-                <a:cs typeface="IBM Plex Sans" pitchFamily="34" charset="-120"/>
-              </a:rPr>
-              <a:t>Perceptual image hash, distance of 6 or less</a:t>
-            </a:r>
-            <a:endParaRPr lang="en-US" sz="1400" dirty="0"/>
-          </a:p>
-        </p:txBody>
-      </p:sp>
-      <p:sp>
-        <p:nvSpPr>
-          <p:cNvPr id="24" name="Text 22"/>
-          <p:cNvSpPr/>
-          <p:nvPr/>
-        </p:nvSpPr>
-        <p:spPr>
-          <a:xfrm>
-            <a:off x="1393230" y="4773613"/>
-            <a:ext cx="6040765" cy="238720"/>
-          </a:xfrm>
-          <a:prstGeom prst="rect">
-            <a:avLst/>
-          </a:prstGeom>
-          <a:noFill/>
-          <a:ln/>
-        </p:spPr>
-        <p:txBody>
-          <a:bodyPr wrap="square" lIns="0" tIns="0" rIns="0" bIns="0" rtlCol="0" anchor="t">
-            <a:normAutofit/>
-          </a:bodyPr>
-          <a:lstStyle/>
-          <a:p>
-            <a:pPr algn="l" indent="0" marL="0">
-              <a:lnSpc>
-                <a:spcPts val="1680"/>
-              </a:lnSpc>
-              <a:buNone/>
-            </a:pPr>
-            <a:r>
-              <a:rPr lang="en-US" sz="1200" dirty="0">
-                <a:solidFill>
-                  <a:srgbClr val="46596A"/>
-                </a:solidFill>
-                <a:latin typeface="IBM Plex Sans" pitchFamily="34" charset="0"/>
-                <a:ea typeface="IBM Plex Sans" pitchFamily="34" charset="-122"/>
-                <a:cs typeface="IBM Plex Sans" pitchFamily="34" charset="-120"/>
-              </a:rPr>
-              <a:t>the last resort when the accessibility tree is thin</a:t>
-            </a:r>
-            <a:endParaRPr lang="en-US" sz="1200" dirty="0"/>
-          </a:p>
-        </p:txBody>
-      </p:sp>
-      <p:sp>
-        <p:nvSpPr>
-          <p:cNvPr id="25" name="Text 23"/>
-          <p:cNvSpPr/>
-          <p:nvPr/>
-        </p:nvSpPr>
-        <p:spPr>
-          <a:xfrm>
-            <a:off x="812800" y="5183783"/>
-            <a:ext cx="6802120" cy="452041"/>
-          </a:xfrm>
-          <a:prstGeom prst="rect">
-            <a:avLst/>
-          </a:prstGeom>
-          <a:noFill/>
-          <a:ln/>
-        </p:spPr>
-        <p:txBody>
-          <a:bodyPr wrap="square" lIns="0" tIns="0" rIns="0" bIns="0" rtlCol="0" anchor="t">
-            <a:normAutofit/>
-          </a:bodyPr>
-          <a:lstStyle/>
-          <a:p>
-            <a:pPr algn="l" indent="0" marL="0">
-              <a:lnSpc>
-                <a:spcPts val="1680"/>
-              </a:lnSpc>
-              <a:buNone/>
-            </a:pPr>
-            <a:r>
-              <a:rPr lang="en-US" sz="1200" b="1" dirty="0">
-                <a:solidFill>
-                  <a:srgbClr val="46596A"/>
-                </a:solidFill>
-                <a:latin typeface="IBM Plex Sans" pitchFamily="34" charset="0"/>
-                <a:ea typeface="IBM Plex Sans" pitchFamily="34" charset="-122"/>
-                <a:cs typeface="IBM Plex Sans" pitchFamily="34" charset="-120"/>
-              </a:rPr>
-              <a:t>Match:</a:t>
-            </a:r>
-            <a:r>
-              <a:rPr lang="en-US" sz="1200" dirty="0">
-                <a:solidFill>
-                  <a:srgbClr val="46596A"/>
-                </a:solidFill>
-                <a:latin typeface="IBM Plex Sans" pitchFamily="34" charset="0"/>
-                <a:ea typeface="IBM Plex Sans" pitchFamily="34" charset="-122"/>
-                <a:cs typeface="IBM Plex Sans" pitchFamily="34" charset="-120"/>
-              </a:rPr>
-              <a:t> a known screen, its visit counted. </a:t>
-            </a:r>
-            <a:r>
-              <a:rPr lang="en-US" sz="1200" b="1" dirty="0">
-                <a:solidFill>
-                  <a:srgbClr val="46596A"/>
-                </a:solidFill>
-                <a:latin typeface="IBM Plex Sans" pitchFamily="34" charset="0"/>
-                <a:ea typeface="IBM Plex Sans" pitchFamily="34" charset="-122"/>
-                <a:cs typeface="IBM Plex Sans" pitchFamily="34" charset="-120"/>
-              </a:rPr>
-              <a:t>No match:</a:t>
-            </a:r>
-            <a:r>
-              <a:rPr lang="en-US" sz="1200" dirty="0">
-                <a:solidFill>
-                  <a:srgbClr val="46596A"/>
-                </a:solidFill>
-                <a:latin typeface="IBM Plex Sans" pitchFamily="34" charset="0"/>
-                <a:ea typeface="IBM Plex Sans" pitchFamily="34" charset="-122"/>
-                <a:cs typeface="IBM Plex Sans" pitchFamily="34" charset="-120"/>
-              </a:rPr>
-              <a:t> a new screen, with its screenshot and the transition that led to it.</a:t>
-            </a:r>
-            <a:endParaRPr lang="en-US" sz="1200" dirty="0"/>
-          </a:p>
-        </p:txBody>
-      </p:sp>
-      <p:sp>
-        <p:nvSpPr>
-          <p:cNvPr id="26" name="Text 24"/>
-          <p:cNvSpPr/>
-          <p:nvPr/>
-        </p:nvSpPr>
-        <p:spPr>
-          <a:xfrm>
-            <a:off x="7721600" y="1775420"/>
-            <a:ext cx="3767328" cy="772120"/>
-          </a:xfrm>
-          <a:prstGeom prst="rect">
-            <a:avLst/>
-          </a:prstGeom>
-          <a:noFill/>
-          <a:ln/>
-        </p:spPr>
-        <p:txBody>
-          <a:bodyPr wrap="square" lIns="0" tIns="0" rIns="0" bIns="0" rtlCol="0" anchor="t">
-            <a:normAutofit/>
-          </a:bodyPr>
-          <a:lstStyle/>
-          <a:p>
-            <a:pPr algn="l" indent="0" marL="0">
-              <a:lnSpc>
-                <a:spcPts val="5880"/>
-              </a:lnSpc>
-              <a:buNone/>
-            </a:pPr>
-            <a:r>
-              <a:rPr lang="en-US" sz="5600" b="1" dirty="0">
-                <a:solidFill>
-                  <a:srgbClr val="0F7EA8"/>
-                </a:solidFill>
-                <a:latin typeface="Source Serif 4" pitchFamily="34" charset="0"/>
-                <a:ea typeface="Source Serif 4" pitchFamily="34" charset="-122"/>
-                <a:cs typeface="Source Serif 4" pitchFamily="34" charset="-120"/>
-              </a:rPr>
-              <a:t>79</a:t>
-            </a:r>
-            <a:endParaRPr lang="en-US" sz="5600" dirty="0"/>
-          </a:p>
-        </p:txBody>
-      </p:sp>
-      <p:sp>
-        <p:nvSpPr>
-          <p:cNvPr id="27" name="Text 25"/>
-          <p:cNvSpPr/>
-          <p:nvPr/>
-        </p:nvSpPr>
-        <p:spPr>
-          <a:xfrm>
-            <a:off x="7721600" y="2522141"/>
-            <a:ext cx="3767328" cy="238720"/>
-          </a:xfrm>
-          <a:prstGeom prst="rect">
-            <a:avLst/>
-          </a:prstGeom>
-          <a:noFill/>
-          <a:ln/>
-        </p:spPr>
-        <p:txBody>
-          <a:bodyPr wrap="square" lIns="0" tIns="0" rIns="0" bIns="0" rtlCol="0" anchor="t">
-            <a:normAutofit/>
-          </a:bodyPr>
-          <a:lstStyle/>
-          <a:p>
-            <a:pPr algn="l" indent="0" marL="0">
-              <a:lnSpc>
-                <a:spcPts val="1680"/>
-              </a:lnSpc>
-              <a:buNone/>
-            </a:pPr>
-            <a:r>
-              <a:rPr lang="en-US" sz="1200" dirty="0">
-                <a:solidFill>
-                  <a:srgbClr val="46596A"/>
-                </a:solidFill>
-                <a:latin typeface="IBM Plex Sans" pitchFamily="34" charset="0"/>
-                <a:ea typeface="IBM Plex Sans" pitchFamily="34" charset="-122"/>
-                <a:cs typeface="IBM Plex Sans" pitchFamily="34" charset="-120"/>
-              </a:rPr>
-              <a:t>distinct screens</a:t>
-            </a:r>
-            <a:endParaRPr lang="en-US" sz="1200" dirty="0"/>
-          </a:p>
-        </p:txBody>
-      </p:sp>
-      <p:sp>
-        <p:nvSpPr>
-          <p:cNvPr id="28" name="Text 26"/>
-          <p:cNvSpPr/>
-          <p:nvPr/>
-        </p:nvSpPr>
-        <p:spPr>
-          <a:xfrm>
-            <a:off x="7721600" y="2887861"/>
-            <a:ext cx="3767328" cy="772120"/>
-          </a:xfrm>
-          <a:prstGeom prst="rect">
-            <a:avLst/>
-          </a:prstGeom>
-          <a:noFill/>
-          <a:ln/>
-        </p:spPr>
-        <p:txBody>
-          <a:bodyPr wrap="square" lIns="0" tIns="0" rIns="0" bIns="0" rtlCol="0" anchor="t">
-            <a:normAutofit/>
-          </a:bodyPr>
-          <a:lstStyle/>
-          <a:p>
-            <a:pPr algn="l" indent="0" marL="0">
-              <a:lnSpc>
-                <a:spcPts val="5880"/>
-              </a:lnSpc>
-              <a:buNone/>
-            </a:pPr>
-            <a:r>
-              <a:rPr lang="en-US" sz="5600" b="1" dirty="0">
-                <a:solidFill>
-                  <a:srgbClr val="14303D"/>
-                </a:solidFill>
-                <a:latin typeface="Source Serif 4" pitchFamily="34" charset="0"/>
-                <a:ea typeface="Source Serif 4" pitchFamily="34" charset="-122"/>
-                <a:cs typeface="Source Serif 4" pitchFamily="34" charset="-120"/>
-              </a:rPr>
-              <a:t>2,149</a:t>
-            </a:r>
-            <a:endParaRPr lang="en-US" sz="5600" dirty="0"/>
-          </a:p>
-        </p:txBody>
-      </p:sp>
-      <p:sp>
-        <p:nvSpPr>
-          <p:cNvPr id="29" name="Text 27"/>
-          <p:cNvSpPr/>
-          <p:nvPr/>
-        </p:nvSpPr>
-        <p:spPr>
-          <a:xfrm>
-            <a:off x="7721600" y="3634581"/>
-            <a:ext cx="3767328" cy="238720"/>
-          </a:xfrm>
-          <a:prstGeom prst="rect">
-            <a:avLst/>
-          </a:prstGeom>
-          <a:noFill/>
-          <a:ln/>
-        </p:spPr>
-        <p:txBody>
-          <a:bodyPr wrap="square" lIns="0" tIns="0" rIns="0" bIns="0" rtlCol="0" anchor="t">
-            <a:normAutofit/>
-          </a:bodyPr>
-          <a:lstStyle/>
-          <a:p>
-            <a:pPr algn="l" indent="0" marL="0">
-              <a:lnSpc>
-                <a:spcPts val="1680"/>
-              </a:lnSpc>
-              <a:buNone/>
-            </a:pPr>
-            <a:r>
-              <a:rPr lang="en-US" sz="1200" dirty="0">
-                <a:solidFill>
-                  <a:srgbClr val="46596A"/>
-                </a:solidFill>
-                <a:latin typeface="IBM Plex Sans" pitchFamily="34" charset="0"/>
-                <a:ea typeface="IBM Plex Sans" pitchFamily="34" charset="-122"/>
-                <a:cs typeface="IBM Plex Sans" pitchFamily="34" charset="-120"/>
-              </a:rPr>
-              <a:t>screen observations</a:t>
-            </a:r>
-            <a:endParaRPr lang="en-US" sz="1200" dirty="0"/>
-          </a:p>
-        </p:txBody>
-      </p:sp>
-      <p:sp>
-        <p:nvSpPr>
-          <p:cNvPr id="30" name="Text 28"/>
-          <p:cNvSpPr/>
-          <p:nvPr/>
-        </p:nvSpPr>
-        <p:spPr>
-          <a:xfrm>
-            <a:off x="7721600" y="4000302"/>
-            <a:ext cx="3767328" cy="772120"/>
-          </a:xfrm>
-          <a:prstGeom prst="rect">
-            <a:avLst/>
-          </a:prstGeom>
-          <a:noFill/>
-          <a:ln/>
-        </p:spPr>
-        <p:txBody>
-          <a:bodyPr wrap="square" lIns="0" tIns="0" rIns="0" bIns="0" rtlCol="0" anchor="t">
-            <a:normAutofit/>
-          </a:bodyPr>
-          <a:lstStyle/>
-          <a:p>
-            <a:pPr algn="l" indent="0" marL="0">
-              <a:lnSpc>
-                <a:spcPts val="5880"/>
-              </a:lnSpc>
-              <a:buNone/>
-            </a:pPr>
-            <a:r>
-              <a:rPr lang="en-US" sz="5600" b="1" dirty="0">
-                <a:solidFill>
-                  <a:srgbClr val="14303D"/>
-                </a:solidFill>
-                <a:latin typeface="Source Serif 4" pitchFamily="34" charset="0"/>
-                <a:ea typeface="Source Serif 4" pitchFamily="34" charset="-122"/>
-                <a:cs typeface="Source Serif 4" pitchFamily="34" charset="-120"/>
-              </a:rPr>
-              <a:t>797</a:t>
-            </a:r>
-            <a:endParaRPr lang="en-US" sz="5600" dirty="0"/>
-          </a:p>
-        </p:txBody>
-      </p:sp>
-      <p:sp>
-        <p:nvSpPr>
-          <p:cNvPr id="31" name="Text 29"/>
-          <p:cNvSpPr/>
-          <p:nvPr/>
-        </p:nvSpPr>
-        <p:spPr>
-          <a:xfrm>
-            <a:off x="7721600" y="4747022"/>
-            <a:ext cx="3767328" cy="238720"/>
-          </a:xfrm>
-          <a:prstGeom prst="rect">
-            <a:avLst/>
-          </a:prstGeom>
-          <a:noFill/>
-          <a:ln/>
-        </p:spPr>
-        <p:txBody>
-          <a:bodyPr wrap="square" lIns="0" tIns="0" rIns="0" bIns="0" rtlCol="0" anchor="t">
-            <a:normAutofit/>
-          </a:bodyPr>
-          <a:lstStyle/>
-          <a:p>
-            <a:pPr algn="l" indent="0" marL="0">
-              <a:lnSpc>
-                <a:spcPts val="1680"/>
-              </a:lnSpc>
-              <a:buNone/>
-            </a:pPr>
-            <a:r>
-              <a:rPr lang="en-US" sz="1200" dirty="0">
-                <a:solidFill>
-                  <a:srgbClr val="46596A"/>
-                </a:solidFill>
-                <a:latin typeface="IBM Plex Sans" pitchFamily="34" charset="0"/>
-                <a:ea typeface="IBM Plex Sans" pitchFamily="34" charset="-122"/>
-                <a:cs typeface="IBM Plex Sans" pitchFamily="34" charset="-120"/>
-              </a:rPr>
-              <a:t>transitions between screens · contacts app</a:t>
-            </a:r>
-            <a:endParaRPr lang="en-US" sz="1200" dirty="0"/>
-          </a:p>
-        </p:txBody>
-      </p:sp>
-      <p:sp>
-        <p:nvSpPr>
-          <p:cNvPr id="32" name="Text 30"/>
-          <p:cNvSpPr/>
-          <p:nvPr/>
-        </p:nvSpPr>
-        <p:spPr>
-          <a:xfrm>
-            <a:off x="812800" y="6238280"/>
-            <a:ext cx="3459976" cy="238720"/>
-          </a:xfrm>
-          <a:prstGeom prst="rect">
-            <a:avLst/>
-          </a:prstGeom>
-          <a:noFill/>
-          <a:ln/>
-        </p:spPr>
-        <p:txBody>
-          <a:bodyPr wrap="square" lIns="0" tIns="0" rIns="0" bIns="0" rtlCol="0" anchor="t">
-            <a:normAutofit/>
-          </a:bodyPr>
-          <a:lstStyle/>
-          <a:p>
-            <a:pPr algn="l" indent="0" marL="0">
-              <a:lnSpc>
-                <a:spcPts val="1680"/>
-              </a:lnSpc>
-              <a:buNone/>
-            </a:pPr>
-            <a:r>
-              <a:rPr lang="en-US" sz="1200" dirty="0">
-                <a:solidFill>
-                  <a:srgbClr val="55697A"/>
-                </a:solidFill>
-                <a:latin typeface="IBM Plex Sans" pitchFamily="34" charset="0"/>
-                <a:ea typeface="IBM Plex Sans" pitchFamily="34" charset="-122"/>
-                <a:cs typeface="IBM Plex Sans" pitchFamily="34" charset="-120"/>
-              </a:rPr>
-              <a:t>Exploratory Testing Automation · CSE 450 · BUET</a:t>
-            </a:r>
-            <a:endParaRPr lang="en-US" sz="1200" dirty="0"/>
-          </a:p>
-        </p:txBody>
-      </p:sp>
-      <p:sp>
-        <p:nvSpPr>
-          <p:cNvPr id="33" name="Text 31"/>
-          <p:cNvSpPr/>
-          <p:nvPr/>
-        </p:nvSpPr>
-        <p:spPr>
-          <a:xfrm>
-            <a:off x="11196290" y="6238280"/>
-            <a:ext cx="233710" cy="238720"/>
-          </a:xfrm>
-          <a:prstGeom prst="rect">
-            <a:avLst/>
-          </a:prstGeom>
-          <a:noFill/>
-          <a:ln/>
-        </p:spPr>
-        <p:txBody>
-          <a:bodyPr wrap="square" lIns="0" tIns="0" rIns="0" bIns="0" rtlCol="0" anchor="t">
-            <a:normAutofit/>
-          </a:bodyPr>
-          <a:lstStyle/>
-          <a:p>
-            <a:pPr algn="l" indent="0" marL="0">
-              <a:lnSpc>
-                <a:spcPts val="1680"/>
-              </a:lnSpc>
+          <p:cNvPr id="17" name="Text 15"/>
+          <p:cNvSpPr txBox="1"/>
+          <p:nvPr/>
+        </p:nvSpPr>
+        <p:spPr>
+          <a:xfrm>
+            <a:off x="11201400" y="6236208"/>
+            <a:ext cx="228600" cy="256032"/>
+          </a:xfrm>
+          <a:prstGeom prst="rect">
+            <a:avLst/>
+          </a:prstGeom>
+          <a:noFill/>
+          <a:ln/>
+        </p:spPr>
+        <p:txBody>
+          <a:bodyPr wrap="square" lIns="0" tIns="0" rIns="0" bIns="0" rtlCol="0" anchor="ctr"/>
+          <a:lstStyle/>
+          <a:p>
+            <a:pPr marL="0" indent="0" algn="r">
               <a:buNone/>
             </a:pPr>
             <a:r>
@@ -4757,14 +4199,15 @@
 </p:sld>
 </file>
 
-<file path=ppt/slides/slide23.xml><?xml version="1.0" encoding="utf-8"?>
+<file path=ppt/slides/slide4.xml><?xml version="1.0" encoding="utf-8"?>
 <p:sld xmlns:a="http://schemas.openxmlformats.org/drawingml/2006/main" xmlns:r="http://schemas.openxmlformats.org/officeDocument/2006/relationships" xmlns:p="http://schemas.openxmlformats.org/presentationml/2006/main">
-  <p:cSld name="Slide 23">
+  <p:cSld name="Slide 2">
     <p:bg>
       <p:bgPr>
         <a:solidFill>
-          <a:srgbClr val="EDF2F4"/>
+          <a:srgbClr val="F6F8F7"/>
         </a:solidFill>
+        <a:effectLst/>
       </p:bgPr>
     </p:bg>
     <p:spTree>
@@ -4784,34 +4227,29 @@
       <p:sp>
         <p:nvSpPr>
           <p:cNvPr id="2" name="Text 0"/>
-          <p:cNvSpPr/>
-          <p:nvPr/>
-        </p:nvSpPr>
-        <p:spPr>
-          <a:xfrm>
-            <a:off x="812800" y="812800"/>
-            <a:ext cx="10883392" cy="234603"/>
-          </a:xfrm>
-          <a:prstGeom prst="rect">
-            <a:avLst/>
-          </a:prstGeom>
-          <a:noFill/>
-          <a:ln/>
-        </p:spPr>
-        <p:txBody>
-          <a:bodyPr wrap="square" lIns="0" tIns="0" rIns="0" bIns="0" rtlCol="0" anchor="t">
-            <a:normAutofit/>
-          </a:bodyPr>
-          <a:lstStyle/>
-          <a:p>
-            <a:pPr algn="l" indent="0" marL="0">
-              <a:lnSpc>
-                <a:spcPts val="1675"/>
-              </a:lnSpc>
-              <a:buNone/>
-            </a:pPr>
-            <a:r>
-              <a:rPr lang="en-US" sz="1196" b="1" spc="100" kern="0" dirty="0">
+          <p:cNvSpPr txBox="1"/>
+          <p:nvPr/>
+        </p:nvSpPr>
+        <p:spPr>
+          <a:xfrm>
+            <a:off x="813816" y="813816"/>
+            <a:ext cx="10881360" cy="237744"/>
+          </a:xfrm>
+          <a:prstGeom prst="rect">
+            <a:avLst/>
+          </a:prstGeom>
+          <a:noFill/>
+          <a:ln/>
+        </p:spPr>
+        <p:txBody>
+          <a:bodyPr wrap="square" lIns="0" tIns="0" rIns="0" bIns="0" rtlCol="0" anchor="ctr"/>
+          <a:lstStyle/>
+          <a:p>
+            <a:pPr marL="0" indent="0">
+              <a:buNone/>
+            </a:pPr>
+            <a:r>
+              <a:rPr lang="en-US" sz="1200" b="1" kern="0" spc="150" dirty="0">
                 <a:solidFill>
                   <a:srgbClr val="0B6A8F"/>
                 </a:solidFill>
@@ -4819,43 +4257,38 @@
                 <a:ea typeface="IBM Plex Sans" pitchFamily="34" charset="-122"/>
                 <a:cs typeface="IBM Plex Sans" pitchFamily="34" charset="-120"/>
               </a:rPr>
-              <a:t>EXECUTOR · IN DETAIL</a:t>
-            </a:r>
-            <a:endParaRPr lang="en-US" sz="1196" dirty="0"/>
+              <a:t>EXECUTOR · THE TRACE</a:t>
+            </a:r>
+            <a:endParaRPr lang="en-US" sz="1200" dirty="0"/>
           </a:p>
         </p:txBody>
       </p:sp>
       <p:sp>
         <p:nvSpPr>
           <p:cNvPr id="3" name="Text 1"/>
-          <p:cNvSpPr/>
-          <p:nvPr/>
-        </p:nvSpPr>
-        <p:spPr>
-          <a:xfrm>
-            <a:off x="812800" y="1098203"/>
-            <a:ext cx="10883392" cy="436364"/>
-          </a:xfrm>
-          <a:prstGeom prst="rect">
-            <a:avLst/>
-          </a:prstGeom>
-          <a:noFill/>
-          <a:ln/>
-        </p:spPr>
-        <p:txBody>
-          <a:bodyPr wrap="square" lIns="0" tIns="0" rIns="0" bIns="0" rtlCol="0" anchor="t">
-            <a:normAutofit/>
-          </a:bodyPr>
-          <a:lstStyle/>
-          <a:p>
-            <a:pPr algn="l" indent="0" marL="0">
-              <a:lnSpc>
-                <a:spcPts val="3269"/>
-              </a:lnSpc>
-              <a:buNone/>
-            </a:pPr>
-            <a:r>
-              <a:rPr lang="en-US" sz="2972" b="1" dirty="0">
+          <p:cNvSpPr txBox="1"/>
+          <p:nvPr/>
+        </p:nvSpPr>
+        <p:spPr>
+          <a:xfrm>
+            <a:off x="813816" y="1106424"/>
+            <a:ext cx="10881360" cy="448056"/>
+          </a:xfrm>
+          <a:prstGeom prst="rect">
+            <a:avLst/>
+          </a:prstGeom>
+          <a:noFill/>
+          <a:ln/>
+        </p:spPr>
+        <p:txBody>
+          <a:bodyPr wrap="square" lIns="0" tIns="0" rIns="0" bIns="0" rtlCol="0" anchor="ctr"/>
+          <a:lstStyle/>
+          <a:p>
+            <a:pPr marL="0" indent="0">
+              <a:buNone/>
+            </a:pPr>
+            <a:r>
+              <a:rPr lang="en-US" sz="3000" b="1" dirty="0">
                 <a:solidFill>
                   <a:srgbClr val="14303D"/>
                 </a:solidFill>
@@ -4863,114 +4296,728 @@
                 <a:ea typeface="Source Serif 4" pitchFamily="34" charset="-122"/>
                 <a:cs typeface="Source Serif 4" pitchFamily="34" charset="-120"/>
               </a:rPr>
-              <a:t>Is this a screen we have seen?</a:t>
-            </a:r>
-            <a:endParaRPr lang="en-US" sz="2972" dirty="0"/>
-          </a:p>
-        </p:txBody>
-      </p:sp>
-      <p:sp>
-        <p:nvSpPr>
-          <p:cNvPr id="4" name="Shape 2"/>
-          <p:cNvSpPr/>
-          <p:nvPr/>
-        </p:nvSpPr>
-        <p:spPr>
-          <a:xfrm>
-            <a:off x="812800" y="1712367"/>
-            <a:ext cx="10566400" cy="3507184"/>
-          </a:xfrm>
-          <a:prstGeom prst="roundRect">
-            <a:avLst>
-              <a:gd name="adj" fmla="val 2897"/>
-            </a:avLst>
+              <a:t>Thought, action, outcome, every step</a:t>
+            </a:r>
+            <a:endParaRPr lang="en-US" sz="3000" dirty="0"/>
+          </a:p>
+        </p:txBody>
+      </p:sp>
+      <p:sp>
+        <p:nvSpPr>
+          <p:cNvPr id="4" name="Text 2"/>
+          <p:cNvSpPr txBox="1"/>
+          <p:nvPr/>
+        </p:nvSpPr>
+        <p:spPr>
+          <a:xfrm>
+            <a:off x="813816" y="1645920"/>
+            <a:ext cx="10881360" cy="256032"/>
+          </a:xfrm>
+          <a:prstGeom prst="rect">
+            <a:avLst/>
+          </a:prstGeom>
+          <a:noFill/>
+          <a:ln/>
+        </p:spPr>
+        <p:txBody>
+          <a:bodyPr wrap="square" lIns="0" tIns="0" rIns="0" bIns="0" rtlCol="0" anchor="ctr"/>
+          <a:lstStyle/>
+          <a:p>
+            <a:pPr marL="0" indent="0">
+              <a:buNone/>
+            </a:pPr>
+            <a:r>
+              <a:rPr lang="en-US" sz="1200" dirty="0">
+                <a:solidFill>
+                  <a:srgbClr val="46596A"/>
+                </a:solidFill>
+                <a:latin typeface="IBM Plex Sans" pitchFamily="34" charset="0"/>
+                <a:ea typeface="IBM Plex Sans" pitchFamily="34" charset="-122"/>
+                <a:cs typeface="IBM Plex Sans" pitchFamily="34" charset="-120"/>
+              </a:rPr>
+              <a:t>The same run on a physical device. Every line below is from the trajectory log.</a:t>
+            </a:r>
+            <a:endParaRPr lang="en-US" sz="1200" dirty="0"/>
+          </a:p>
+        </p:txBody>
+      </p:sp>
+      <p:sp>
+        <p:nvSpPr>
+          <p:cNvPr id="5" name="Shape 3"/>
+          <p:cNvSpPr/>
+          <p:nvPr/>
+        </p:nvSpPr>
+        <p:spPr>
+          <a:xfrm>
+            <a:off x="813816" y="2057400"/>
+            <a:ext cx="6903720" cy="3246120"/>
+          </a:xfrm>
+          <a:prstGeom prst="rect">
+            <a:avLst/>
           </a:prstGeom>
           <a:solidFill>
-            <a:srgbClr val="FDFEFE"/>
+            <a:srgbClr val="14303D"/>
           </a:solidFill>
-          <a:ln/>
-        </p:spPr>
-      </p:sp>
-      <p:pic>
-        <p:nvPicPr>
-          <p:cNvPr id="5" name="Image 0" descr="Screen identity cascade, left to right: an observation is tested by exact signature, then structural Jaccard of at least 0.9, containment of at least 0.95, skeleton containment, and a perceptual hash within Hamming distance 6; any match is a known state, otherwise a new state is stored with its transition">    </p:cNvPr>
-          <p:cNvPicPr>
-            <a:picLocks noChangeAspect="1"/>
-          </p:cNvPicPr>
-          <p:nvPr/>
-        </p:nvPicPr>
-        <p:blipFill>
-          <a:blip r:embed="rId1"/>
-          <a:stretch>
-            <a:fillRect/>
-          </a:stretch>
-        </p:blipFill>
-        <p:spPr>
-          <a:xfrm>
-            <a:off x="928050" y="1718717"/>
-            <a:ext cx="10335900" cy="3494484"/>
-          </a:xfrm>
-          <a:prstGeom prst="rect">
-            <a:avLst/>
-          </a:prstGeom>
-        </p:spPr>
-      </p:pic>
-      <p:sp>
-        <p:nvSpPr>
-          <p:cNvPr id="6" name="Shape 3"/>
-          <p:cNvSpPr/>
-          <p:nvPr/>
-        </p:nvSpPr>
-        <p:spPr>
-          <a:xfrm>
-            <a:off x="815975" y="1715542"/>
-            <a:ext cx="10560050" cy="3500834"/>
-          </a:xfrm>
-          <a:prstGeom prst="roundRect">
-            <a:avLst>
-              <a:gd name="adj" fmla="val 2811"/>
-            </a:avLst>
-          </a:prstGeom>
-          <a:noFill/>
-          <a:ln w="6350">
+          <a:ln w="12700">
             <a:solidFill>
-              <a:srgbClr val="D6E1E6"/>
+              <a:srgbClr val="14303D"/>
             </a:solidFill>
             <a:prstDash val="solid"/>
           </a:ln>
         </p:spPr>
-      </p:sp>
-      <p:sp>
-        <p:nvSpPr>
-          <p:cNvPr id="7" name="Text 4"/>
-          <p:cNvSpPr/>
-          <p:nvPr/>
-        </p:nvSpPr>
-        <p:spPr>
-          <a:xfrm>
-            <a:off x="812800" y="5422751"/>
-            <a:ext cx="10883392" cy="444649"/>
-          </a:xfrm>
-          <a:prstGeom prst="rect">
-            <a:avLst/>
-          </a:prstGeom>
-          <a:noFill/>
-          <a:ln/>
-        </p:spPr>
-        <p:txBody>
-          <a:bodyPr wrap="square" lIns="0" tIns="0" rIns="0" bIns="0" rtlCol="0" anchor="t">
-            <a:normAutofit/>
-          </a:bodyPr>
-          <a:lstStyle/>
-          <a:p>
-            <a:pPr algn="l" indent="0" marL="0">
-              <a:lnSpc>
-                <a:spcPts val="1659"/>
-              </a:lnSpc>
-              <a:buNone/>
-            </a:pPr>
-            <a:r>
-              <a:rPr lang="en-US" sz="1185" dirty="0">
+        <p:txBody>
+          <a:bodyPr/>
+          <a:lstStyle/>
+          <a:p>
+            <a:endParaRPr lang="en-US"/>
+          </a:p>
+        </p:txBody>
+      </p:sp>
+      <p:sp>
+        <p:nvSpPr>
+          <p:cNvPr id="6" name="Text 4"/>
+          <p:cNvSpPr txBox="1"/>
+          <p:nvPr/>
+        </p:nvSpPr>
+        <p:spPr>
+          <a:xfrm>
+            <a:off x="1069848" y="2267712"/>
+            <a:ext cx="6446520" cy="2834640"/>
+          </a:xfrm>
+          <a:prstGeom prst="rect">
+            <a:avLst/>
+          </a:prstGeom>
+          <a:noFill/>
+          <a:ln/>
+        </p:spPr>
+        <p:txBody>
+          <a:bodyPr wrap="square" lIns="0" tIns="0" rIns="0" bIns="0" rtlCol="0" anchor="ctr"/>
+          <a:lstStyle/>
+          <a:p>
+            <a:pPr marL="0" indent="0">
+              <a:lnSpc>
+                <a:spcPts val="1450"/>
+              </a:lnSpc>
+              <a:buNone/>
+            </a:pPr>
+            <a:r>
+              <a:rPr lang="en-US" sz="1050" dirty="0">
+                <a:solidFill>
+                  <a:srgbClr val="FDFEFE"/>
+                </a:solidFill>
+                <a:latin typeface="Courier New" pitchFamily="34" charset="0"/>
+                <a:ea typeface="Courier New" pitchFamily="34" charset="-122"/>
+                <a:cs typeface="Courier New" pitchFamily="34" charset="-120"/>
+              </a:rPr>
+              <a:t>Step 1/30  "I'm on a contact detail page for 'john doe'</a:t>
+            </a:r>
+            <a:endParaRPr lang="en-US" sz="1050" dirty="0"/>
+          </a:p>
+          <a:p>
+            <a:pPr marL="0" indent="0">
+              <a:lnSpc>
+                <a:spcPts val="1450"/>
+              </a:lnSpc>
+              <a:buNone/>
+            </a:pPr>
+            <a:r>
+              <a:rPr lang="en-US" sz="1050" dirty="0">
+                <a:solidFill>
+                  <a:srgbClr val="FDFEFE"/>
+                </a:solidFill>
+                <a:latin typeface="Courier New" pitchFamily="34" charset="0"/>
+                <a:ea typeface="Courier New" pitchFamily="34" charset="-122"/>
+                <a:cs typeface="Courier New" pitchFamily="34" charset="-120"/>
+              </a:rPr>
+              <a:t>            instead of the Contacts List."</a:t>
+            </a:r>
+            <a:endParaRPr lang="en-US" sz="1050" dirty="0"/>
+          </a:p>
+          <a:p>
+            <a:pPr marL="0" indent="0">
+              <a:lnSpc>
+                <a:spcPts val="1450"/>
+              </a:lnSpc>
+              <a:buNone/>
+            </a:pPr>
+            <a:r>
+              <a:rPr lang="en-US" sz="1050" dirty="0">
+                <a:solidFill>
+                  <a:srgbClr val="FDFEFE"/>
+                </a:solidFill>
+                <a:latin typeface="Courier New" pitchFamily="34" charset="0"/>
+                <a:ea typeface="Courier New" pitchFamily="34" charset="-122"/>
+                <a:cs typeface="Courier New" pitchFamily="34" charset="-120"/>
+              </a:rPr>
+              <a:t>   click(index=21)  -&gt;  'Navigate up' | Button | (74, 226)</a:t>
+            </a:r>
+            <a:endParaRPr lang="en-US" sz="1050" dirty="0"/>
+          </a:p>
+          <a:p>
+            <a:pPr marL="0" indent="0">
+              <a:lnSpc>
+                <a:spcPts val="1450"/>
+              </a:lnSpc>
+              <a:buNone/>
+            </a:pPr>
+            <a:endParaRPr lang="en-US" sz="1050" dirty="0"/>
+          </a:p>
+          <a:p>
+            <a:pPr marL="0" indent="0">
+              <a:lnSpc>
+                <a:spcPts val="1450"/>
+              </a:lnSpc>
+              <a:buNone/>
+            </a:pPr>
+            <a:r>
+              <a:rPr lang="en-US" sz="1050" dirty="0">
+                <a:solidFill>
+                  <a:srgbClr val="FDFEFE"/>
+                </a:solidFill>
+                <a:latin typeface="Courier New" pitchFamily="34" charset="0"/>
+                <a:ea typeface="Courier New" pitchFamily="34" charset="-122"/>
+                <a:cs typeface="Courier New" pitchFamily="34" charset="-120"/>
+              </a:rPr>
+              <a:t>Step 2/30  "I can see the FAB 'Create contact' at index 76."</a:t>
+            </a:r>
+            <a:endParaRPr lang="en-US" sz="1050" dirty="0"/>
+          </a:p>
+          <a:p>
+            <a:pPr marL="0" indent="0">
+              <a:lnSpc>
+                <a:spcPts val="1450"/>
+              </a:lnSpc>
+              <a:buNone/>
+            </a:pPr>
+            <a:r>
+              <a:rPr lang="en-US" sz="1050" dirty="0">
+                <a:solidFill>
+                  <a:srgbClr val="FDFEFE"/>
+                </a:solidFill>
+                <a:latin typeface="Courier New" pitchFamily="34" charset="0"/>
+                <a:ea typeface="Courier New" pitchFamily="34" charset="-122"/>
+                <a:cs typeface="Courier New" pitchFamily="34" charset="-120"/>
+              </a:rPr>
+              <a:t>   click(index=76)  -&gt;  'Create contact' | FAB | (943, 2076)</a:t>
+            </a:r>
+            <a:endParaRPr lang="en-US" sz="1050" dirty="0"/>
+          </a:p>
+          <a:p>
+            <a:pPr marL="0" indent="0">
+              <a:lnSpc>
+                <a:spcPts val="1450"/>
+              </a:lnSpc>
+              <a:buNone/>
+            </a:pPr>
+            <a:endParaRPr lang="en-US" sz="1050" dirty="0"/>
+          </a:p>
+          <a:p>
+            <a:pPr marL="0" indent="0">
+              <a:lnSpc>
+                <a:spcPts val="1450"/>
+              </a:lnSpc>
+              <a:buNone/>
+            </a:pPr>
+            <a:r>
+              <a:rPr lang="en-US" sz="1050" dirty="0">
+                <a:solidFill>
+                  <a:srgbClr val="FDFEFE"/>
+                </a:solidFill>
+                <a:latin typeface="Courier New" pitchFamily="34" charset="0"/>
+                <a:ea typeface="Courier New" pitchFamily="34" charset="-122"/>
+                <a:cs typeface="Courier New" pitchFamily="34" charset="-120"/>
+              </a:rPr>
+              <a:t>Step 3/30  "'First name' EditText is at index 30."</a:t>
+            </a:r>
+            <a:endParaRPr lang="en-US" sz="1050" dirty="0"/>
+          </a:p>
+          <a:p>
+            <a:pPr marL="0" indent="0">
+              <a:lnSpc>
+                <a:spcPts val="1450"/>
+              </a:lnSpc>
+              <a:buNone/>
+            </a:pPr>
+            <a:r>
+              <a:rPr lang="en-US" sz="1050" dirty="0">
+                <a:solidFill>
+                  <a:srgbClr val="FDFEFE"/>
+                </a:solidFill>
+                <a:latin typeface="Courier New" pitchFamily="34" charset="0"/>
+                <a:ea typeface="Courier New" pitchFamily="34" charset="-122"/>
+                <a:cs typeface="Courier New" pitchFamily="34" charset="-120"/>
+              </a:rPr>
+              <a:t>   click(index=30)  -&gt;  focused, then typed 'Alice'</a:t>
+            </a:r>
+            <a:endParaRPr lang="en-US" sz="1050" dirty="0"/>
+          </a:p>
+        </p:txBody>
+      </p:sp>
+      <p:sp>
+        <p:nvSpPr>
+          <p:cNvPr id="7" name="Shape 5"/>
+          <p:cNvSpPr/>
+          <p:nvPr/>
+        </p:nvSpPr>
+        <p:spPr>
+          <a:xfrm>
+            <a:off x="813816" y="5440680"/>
+            <a:ext cx="6903720" cy="731520"/>
+          </a:xfrm>
+          <a:prstGeom prst="rect">
+            <a:avLst/>
+          </a:prstGeom>
+          <a:solidFill>
+            <a:srgbClr val="FFFFFF"/>
+          </a:solidFill>
+          <a:ln w="12700">
+            <a:solidFill>
+              <a:srgbClr val="D5E0E5"/>
+            </a:solidFill>
+            <a:prstDash val="solid"/>
+          </a:ln>
+        </p:spPr>
+        <p:txBody>
+          <a:bodyPr/>
+          <a:lstStyle/>
+          <a:p>
+            <a:endParaRPr lang="en-US"/>
+          </a:p>
+        </p:txBody>
+      </p:sp>
+      <p:sp>
+        <p:nvSpPr>
+          <p:cNvPr id="8" name="Text 6"/>
+          <p:cNvSpPr txBox="1"/>
+          <p:nvPr/>
+        </p:nvSpPr>
+        <p:spPr>
+          <a:xfrm>
+            <a:off x="1069848" y="5440680"/>
+            <a:ext cx="6446520" cy="731520"/>
+          </a:xfrm>
+          <a:prstGeom prst="rect">
+            <a:avLst/>
+          </a:prstGeom>
+          <a:noFill/>
+          <a:ln/>
+        </p:spPr>
+        <p:txBody>
+          <a:bodyPr wrap="square" lIns="0" tIns="0" rIns="0" bIns="0" rtlCol="0" anchor="ctr"/>
+          <a:lstStyle/>
+          <a:p>
+            <a:pPr marL="0" indent="0">
+              <a:lnSpc>
+                <a:spcPts val="1500"/>
+              </a:lnSpc>
+              <a:buNone/>
+            </a:pPr>
+            <a:r>
+              <a:rPr lang="en-US" sz="1150" dirty="0">
+                <a:solidFill>
+                  <a:srgbClr val="14303D"/>
+                </a:solidFill>
+                <a:latin typeface="IBM Plex Sans" pitchFamily="34" charset="0"/>
+                <a:ea typeface="IBM Plex Sans" pitchFamily="34" charset="-122"/>
+                <a:cs typeface="IBM Plex Sans" pitchFamily="34" charset="-120"/>
+              </a:rPr>
+              <a:t>Result: the search area is empty, no contacts matching "Bob". The app did not crash and no error occurred.</a:t>
+            </a:r>
+            <a:endParaRPr lang="en-US" sz="1150" dirty="0"/>
+          </a:p>
+        </p:txBody>
+      </p:sp>
+      <p:sp>
+        <p:nvSpPr>
+          <p:cNvPr id="9" name="Shape 7"/>
+          <p:cNvSpPr/>
+          <p:nvPr/>
+        </p:nvSpPr>
+        <p:spPr>
+          <a:xfrm>
+            <a:off x="8001000" y="2057400"/>
+            <a:ext cx="3383280" cy="960120"/>
+          </a:xfrm>
+          <a:prstGeom prst="rect">
+            <a:avLst/>
+          </a:prstGeom>
+          <a:solidFill>
+            <a:srgbClr val="FFFFFF"/>
+          </a:solidFill>
+          <a:ln w="12700">
+            <a:solidFill>
+              <a:srgbClr val="D5E0E5"/>
+            </a:solidFill>
+            <a:prstDash val="solid"/>
+          </a:ln>
+        </p:spPr>
+        <p:txBody>
+          <a:bodyPr/>
+          <a:lstStyle/>
+          <a:p>
+            <a:endParaRPr lang="en-US"/>
+          </a:p>
+        </p:txBody>
+      </p:sp>
+      <p:sp>
+        <p:nvSpPr>
+          <p:cNvPr id="10" name="Text 8"/>
+          <p:cNvSpPr txBox="1"/>
+          <p:nvPr/>
+        </p:nvSpPr>
+        <p:spPr>
+          <a:xfrm>
+            <a:off x="8229600" y="2203704"/>
+            <a:ext cx="2971800" cy="237744"/>
+          </a:xfrm>
+          <a:prstGeom prst="rect">
+            <a:avLst/>
+          </a:prstGeom>
+          <a:noFill/>
+          <a:ln/>
+        </p:spPr>
+        <p:txBody>
+          <a:bodyPr wrap="square" lIns="0" tIns="0" rIns="0" bIns="0" rtlCol="0" anchor="ctr"/>
+          <a:lstStyle/>
+          <a:p>
+            <a:pPr marL="0" indent="0">
+              <a:buNone/>
+            </a:pPr>
+            <a:r>
+              <a:rPr lang="en-US" sz="1050" b="1" kern="0" spc="120" dirty="0">
+                <a:solidFill>
+                  <a:srgbClr val="55697A"/>
+                </a:solidFill>
+                <a:latin typeface="IBM Plex Sans" pitchFamily="34" charset="0"/>
+                <a:ea typeface="IBM Plex Sans" pitchFamily="34" charset="-122"/>
+                <a:cs typeface="IBM Plex Sans" pitchFamily="34" charset="-120"/>
+              </a:rPr>
+              <a:t>VERDICT</a:t>
+            </a:r>
+            <a:endParaRPr lang="en-US" sz="1050" dirty="0"/>
+          </a:p>
+        </p:txBody>
+      </p:sp>
+      <p:sp>
+        <p:nvSpPr>
+          <p:cNvPr id="11" name="Text 9"/>
+          <p:cNvSpPr txBox="1"/>
+          <p:nvPr/>
+        </p:nvSpPr>
+        <p:spPr>
+          <a:xfrm>
+            <a:off x="8229600" y="2478024"/>
+            <a:ext cx="2971800" cy="384048"/>
+          </a:xfrm>
+          <a:prstGeom prst="rect">
+            <a:avLst/>
+          </a:prstGeom>
+          <a:noFill/>
+          <a:ln/>
+        </p:spPr>
+        <p:txBody>
+          <a:bodyPr wrap="square" lIns="0" tIns="0" rIns="0" bIns="0" rtlCol="0" anchor="ctr"/>
+          <a:lstStyle/>
+          <a:p>
+            <a:pPr marL="0" indent="0">
+              <a:buNone/>
+            </a:pPr>
+            <a:r>
+              <a:rPr lang="en-US" sz="1900" b="1" dirty="0">
+                <a:solidFill>
+                  <a:srgbClr val="1E6B45"/>
+                </a:solidFill>
+                <a:latin typeface="Source Serif 4" pitchFamily="34" charset="0"/>
+                <a:ea typeface="Source Serif 4" pitchFamily="34" charset="-122"/>
+                <a:cs typeface="Source Serif 4" pitchFamily="34" charset="-120"/>
+              </a:rPr>
+              <a:t>pass</a:t>
+            </a:r>
+            <a:endParaRPr lang="en-US" sz="1900" dirty="0"/>
+          </a:p>
+        </p:txBody>
+      </p:sp>
+      <p:sp>
+        <p:nvSpPr>
+          <p:cNvPr id="12" name="Shape 10"/>
+          <p:cNvSpPr/>
+          <p:nvPr/>
+        </p:nvSpPr>
+        <p:spPr>
+          <a:xfrm>
+            <a:off x="8001000" y="3136392"/>
+            <a:ext cx="3383280" cy="960120"/>
+          </a:xfrm>
+          <a:prstGeom prst="rect">
+            <a:avLst/>
+          </a:prstGeom>
+          <a:solidFill>
+            <a:srgbClr val="FFFFFF"/>
+          </a:solidFill>
+          <a:ln w="12700">
+            <a:solidFill>
+              <a:srgbClr val="D5E0E5"/>
+            </a:solidFill>
+            <a:prstDash val="solid"/>
+          </a:ln>
+        </p:spPr>
+        <p:txBody>
+          <a:bodyPr/>
+          <a:lstStyle/>
+          <a:p>
+            <a:endParaRPr lang="en-US"/>
+          </a:p>
+        </p:txBody>
+      </p:sp>
+      <p:sp>
+        <p:nvSpPr>
+          <p:cNvPr id="13" name="Text 11"/>
+          <p:cNvSpPr txBox="1"/>
+          <p:nvPr/>
+        </p:nvSpPr>
+        <p:spPr>
+          <a:xfrm>
+            <a:off x="8229600" y="3282696"/>
+            <a:ext cx="2971800" cy="237744"/>
+          </a:xfrm>
+          <a:prstGeom prst="rect">
+            <a:avLst/>
+          </a:prstGeom>
+          <a:noFill/>
+          <a:ln/>
+        </p:spPr>
+        <p:txBody>
+          <a:bodyPr wrap="square" lIns="0" tIns="0" rIns="0" bIns="0" rtlCol="0" anchor="ctr"/>
+          <a:lstStyle/>
+          <a:p>
+            <a:pPr marL="0" indent="0">
+              <a:buNone/>
+            </a:pPr>
+            <a:r>
+              <a:rPr lang="en-US" sz="1050" b="1" kern="0" spc="120" dirty="0">
+                <a:solidFill>
+                  <a:srgbClr val="55697A"/>
+                </a:solidFill>
+                <a:latin typeface="IBM Plex Sans" pitchFamily="34" charset="0"/>
+                <a:ea typeface="IBM Plex Sans" pitchFamily="34" charset="-122"/>
+                <a:cs typeface="IBM Plex Sans" pitchFamily="34" charset="-120"/>
+              </a:rPr>
+              <a:t>STEPS USED</a:t>
+            </a:r>
+            <a:endParaRPr lang="en-US" sz="1050" dirty="0"/>
+          </a:p>
+        </p:txBody>
+      </p:sp>
+      <p:sp>
+        <p:nvSpPr>
+          <p:cNvPr id="14" name="Text 12"/>
+          <p:cNvSpPr txBox="1"/>
+          <p:nvPr/>
+        </p:nvSpPr>
+        <p:spPr>
+          <a:xfrm>
+            <a:off x="8229600" y="3557016"/>
+            <a:ext cx="2971800" cy="384048"/>
+          </a:xfrm>
+          <a:prstGeom prst="rect">
+            <a:avLst/>
+          </a:prstGeom>
+          <a:noFill/>
+          <a:ln/>
+        </p:spPr>
+        <p:txBody>
+          <a:bodyPr wrap="square" lIns="0" tIns="0" rIns="0" bIns="0" rtlCol="0" anchor="ctr"/>
+          <a:lstStyle/>
+          <a:p>
+            <a:pPr marL="0" indent="0">
+              <a:buNone/>
+            </a:pPr>
+            <a:r>
+              <a:rPr lang="en-US" sz="1900" b="1" dirty="0">
+                <a:solidFill>
+                  <a:srgbClr val="0B6A8F"/>
+                </a:solidFill>
+                <a:latin typeface="Source Serif 4" pitchFamily="34" charset="0"/>
+                <a:ea typeface="Source Serif 4" pitchFamily="34" charset="-122"/>
+                <a:cs typeface="Source Serif 4" pitchFamily="34" charset="-120"/>
+              </a:rPr>
+              <a:t>8 of 30</a:t>
+            </a:r>
+            <a:endParaRPr lang="en-US" sz="1900" dirty="0"/>
+          </a:p>
+        </p:txBody>
+      </p:sp>
+      <p:sp>
+        <p:nvSpPr>
+          <p:cNvPr id="15" name="Shape 13"/>
+          <p:cNvSpPr/>
+          <p:nvPr/>
+        </p:nvSpPr>
+        <p:spPr>
+          <a:xfrm>
+            <a:off x="8001000" y="4215384"/>
+            <a:ext cx="3383280" cy="960120"/>
+          </a:xfrm>
+          <a:prstGeom prst="rect">
+            <a:avLst/>
+          </a:prstGeom>
+          <a:solidFill>
+            <a:srgbClr val="FFFFFF"/>
+          </a:solidFill>
+          <a:ln w="12700">
+            <a:solidFill>
+              <a:srgbClr val="D5E0E5"/>
+            </a:solidFill>
+            <a:prstDash val="solid"/>
+          </a:ln>
+        </p:spPr>
+        <p:txBody>
+          <a:bodyPr/>
+          <a:lstStyle/>
+          <a:p>
+            <a:endParaRPr lang="en-US"/>
+          </a:p>
+        </p:txBody>
+      </p:sp>
+      <p:sp>
+        <p:nvSpPr>
+          <p:cNvPr id="16" name="Text 14"/>
+          <p:cNvSpPr txBox="1"/>
+          <p:nvPr/>
+        </p:nvSpPr>
+        <p:spPr>
+          <a:xfrm>
+            <a:off x="8229600" y="4361688"/>
+            <a:ext cx="2971800" cy="237744"/>
+          </a:xfrm>
+          <a:prstGeom prst="rect">
+            <a:avLst/>
+          </a:prstGeom>
+          <a:noFill/>
+          <a:ln/>
+        </p:spPr>
+        <p:txBody>
+          <a:bodyPr wrap="square" lIns="0" tIns="0" rIns="0" bIns="0" rtlCol="0" anchor="ctr"/>
+          <a:lstStyle/>
+          <a:p>
+            <a:pPr marL="0" indent="0">
+              <a:buNone/>
+            </a:pPr>
+            <a:r>
+              <a:rPr lang="en-US" sz="1050" b="1" kern="0" spc="120" dirty="0">
+                <a:solidFill>
+                  <a:srgbClr val="55697A"/>
+                </a:solidFill>
+                <a:latin typeface="IBM Plex Sans" pitchFamily="34" charset="0"/>
+                <a:ea typeface="IBM Plex Sans" pitchFamily="34" charset="-122"/>
+                <a:cs typeface="IBM Plex Sans" pitchFamily="34" charset="-120"/>
+              </a:rPr>
+              <a:t>ATTRIBUTION</a:t>
+            </a:r>
+            <a:endParaRPr lang="en-US" sz="1050" dirty="0"/>
+          </a:p>
+        </p:txBody>
+      </p:sp>
+      <p:sp>
+        <p:nvSpPr>
+          <p:cNvPr id="17" name="Text 15"/>
+          <p:cNvSpPr txBox="1"/>
+          <p:nvPr/>
+        </p:nvSpPr>
+        <p:spPr>
+          <a:xfrm>
+            <a:off x="8229600" y="4636008"/>
+            <a:ext cx="2971800" cy="384048"/>
+          </a:xfrm>
+          <a:prstGeom prst="rect">
+            <a:avLst/>
+          </a:prstGeom>
+          <a:noFill/>
+          <a:ln/>
+        </p:spPr>
+        <p:txBody>
+          <a:bodyPr wrap="square" lIns="0" tIns="0" rIns="0" bIns="0" rtlCol="0" anchor="ctr"/>
+          <a:lstStyle/>
+          <a:p>
+            <a:pPr marL="0" indent="0">
+              <a:buNone/>
+            </a:pPr>
+            <a:r>
+              <a:rPr lang="en-US" sz="1900" b="1" dirty="0">
+                <a:solidFill>
+                  <a:srgbClr val="0B6A8F"/>
+                </a:solidFill>
+                <a:latin typeface="Source Serif 4" pitchFamily="34" charset="0"/>
+                <a:ea typeface="Source Serif 4" pitchFamily="34" charset="-122"/>
+                <a:cs typeface="Source Serif 4" pitchFamily="34" charset="-120"/>
+              </a:rPr>
+              <a:t>none, the app behaved</a:t>
+            </a:r>
+            <a:endParaRPr lang="en-US" sz="1900" dirty="0"/>
+          </a:p>
+        </p:txBody>
+      </p:sp>
+      <p:sp>
+        <p:nvSpPr>
+          <p:cNvPr id="18" name="Shape 16"/>
+          <p:cNvSpPr/>
+          <p:nvPr/>
+        </p:nvSpPr>
+        <p:spPr>
+          <a:xfrm>
+            <a:off x="8001000" y="5294376"/>
+            <a:ext cx="3383280" cy="877824"/>
+          </a:xfrm>
+          <a:prstGeom prst="rect">
+            <a:avLst/>
+          </a:prstGeom>
+          <a:solidFill>
+            <a:srgbClr val="FFFFFF"/>
+          </a:solidFill>
+          <a:ln w="12700">
+            <a:solidFill>
+              <a:srgbClr val="D5E0E5"/>
+            </a:solidFill>
+            <a:prstDash val="solid"/>
+          </a:ln>
+        </p:spPr>
+        <p:txBody>
+          <a:bodyPr/>
+          <a:lstStyle/>
+          <a:p>
+            <a:endParaRPr lang="en-US"/>
+          </a:p>
+        </p:txBody>
+      </p:sp>
+      <p:sp>
+        <p:nvSpPr>
+          <p:cNvPr id="19" name="Text 17"/>
+          <p:cNvSpPr txBox="1"/>
+          <p:nvPr/>
+        </p:nvSpPr>
+        <p:spPr>
+          <a:xfrm>
+            <a:off x="8229600" y="5294376"/>
+            <a:ext cx="2971800" cy="877824"/>
+          </a:xfrm>
+          <a:prstGeom prst="rect">
+            <a:avLst/>
+          </a:prstGeom>
+          <a:noFill/>
+          <a:ln/>
+        </p:spPr>
+        <p:txBody>
+          <a:bodyPr wrap="square" lIns="0" tIns="0" rIns="0" bIns="0" rtlCol="0" anchor="ctr"/>
+          <a:lstStyle/>
+          <a:p>
+            <a:pPr marL="0" indent="0">
+              <a:lnSpc>
+                <a:spcPts val="1300"/>
+              </a:lnSpc>
+              <a:buNone/>
+            </a:pPr>
+            <a:r>
+              <a:rPr lang="en-US" sz="1050" dirty="0">
                 <a:solidFill>
                   <a:srgbClr val="46596A"/>
                 </a:solidFill>
@@ -4978,39 +5025,34 @@
                 <a:ea typeface="IBM Plex Sans" pitchFamily="34" charset="-122"/>
                 <a:cs typeface="IBM Plex Sans" pitchFamily="34" charset="-120"/>
               </a:rPr>
-              <a:t>Checked left to right, cheapest first. Any match counts a visit to a known screen; no match stores a new screen and the transition that led to it. The grey notes say why each check exists.</a:t>
-            </a:r>
-            <a:endParaRPr lang="en-US" sz="1185" dirty="0"/>
-          </a:p>
-        </p:txBody>
-      </p:sp>
-      <p:sp>
-        <p:nvSpPr>
-          <p:cNvPr id="8" name="Text 5"/>
-          <p:cNvSpPr/>
-          <p:nvPr/>
-        </p:nvSpPr>
-        <p:spPr>
-          <a:xfrm>
-            <a:off x="812800" y="6238280"/>
-            <a:ext cx="3459976" cy="238720"/>
-          </a:xfrm>
-          <a:prstGeom prst="rect">
-            <a:avLst/>
-          </a:prstGeom>
-          <a:noFill/>
-          <a:ln/>
-        </p:spPr>
-        <p:txBody>
-          <a:bodyPr wrap="square" lIns="0" tIns="0" rIns="0" bIns="0" rtlCol="0" anchor="t">
-            <a:normAutofit/>
-          </a:bodyPr>
-          <a:lstStyle/>
-          <a:p>
-            <a:pPr algn="l" indent="0" marL="0">
-              <a:lnSpc>
-                <a:spcPts val="1680"/>
-              </a:lnSpc>
+              <a:t>Every step, screenshot and UI tree is written to a trajectory folder, replayable after the run.</a:t>
+            </a:r>
+            <a:endParaRPr lang="en-US" sz="1050" dirty="0"/>
+          </a:p>
+        </p:txBody>
+      </p:sp>
+      <p:sp>
+        <p:nvSpPr>
+          <p:cNvPr id="20" name="Text 18"/>
+          <p:cNvSpPr txBox="1"/>
+          <p:nvPr/>
+        </p:nvSpPr>
+        <p:spPr>
+          <a:xfrm>
+            <a:off x="813816" y="6236208"/>
+            <a:ext cx="3456432" cy="237744"/>
+          </a:xfrm>
+          <a:prstGeom prst="rect">
+            <a:avLst/>
+          </a:prstGeom>
+          <a:noFill/>
+          <a:ln/>
+        </p:spPr>
+        <p:txBody>
+          <a:bodyPr wrap="square" lIns="0" tIns="0" rIns="0" bIns="0" rtlCol="0" anchor="ctr"/>
+          <a:lstStyle/>
+          <a:p>
+            <a:pPr marL="0" indent="0">
               <a:buNone/>
             </a:pPr>
             <a:r>
@@ -5030,31 +5072,26 @@
       </p:sp>
       <p:sp>
         <p:nvSpPr>
-          <p:cNvPr id="9" name="Text 6"/>
-          <p:cNvSpPr/>
-          <p:nvPr/>
-        </p:nvSpPr>
-        <p:spPr>
-          <a:xfrm>
-            <a:off x="11196290" y="6238280"/>
-            <a:ext cx="233710" cy="238720"/>
-          </a:xfrm>
-          <a:prstGeom prst="rect">
-            <a:avLst/>
-          </a:prstGeom>
-          <a:noFill/>
-          <a:ln/>
-        </p:spPr>
-        <p:txBody>
-          <a:bodyPr wrap="square" lIns="0" tIns="0" rIns="0" bIns="0" rtlCol="0" anchor="t">
-            <a:normAutofit/>
-          </a:bodyPr>
-          <a:lstStyle/>
-          <a:p>
-            <a:pPr algn="l" indent="0" marL="0">
-              <a:lnSpc>
-                <a:spcPts val="1680"/>
-              </a:lnSpc>
+          <p:cNvPr id="21" name="Text 19"/>
+          <p:cNvSpPr txBox="1"/>
+          <p:nvPr/>
+        </p:nvSpPr>
+        <p:spPr>
+          <a:xfrm>
+            <a:off x="11115923" y="6236208"/>
+            <a:ext cx="314077" cy="237744"/>
+          </a:xfrm>
+          <a:prstGeom prst="rect">
+            <a:avLst/>
+          </a:prstGeom>
+          <a:noFill/>
+          <a:ln/>
+        </p:spPr>
+        <p:txBody>
+          <a:bodyPr wrap="square" lIns="0" tIns="0" rIns="0" bIns="0" rtlCol="0" anchor="ctr"/>
+          <a:lstStyle/>
+          <a:p>
+            <a:pPr marL="0" indent="0" algn="r">
               <a:buNone/>
             </a:pPr>
             <a:r>
@@ -5080,14 +5117,15 @@
 </p:sld>
 </file>
 
-<file path=ppt/slides/slide24.xml><?xml version="1.0" encoding="utf-8"?>
+<file path=ppt/slides/slide5.xml><?xml version="1.0" encoding="utf-8"?>
 <p:sld xmlns:a="http://schemas.openxmlformats.org/drawingml/2006/main" xmlns:r="http://schemas.openxmlformats.org/officeDocument/2006/relationships" xmlns:p="http://schemas.openxmlformats.org/presentationml/2006/main">
-  <p:cSld name="Slide 24">
+  <p:cSld name="Slide 22">
     <p:bg>
       <p:bgPr>
         <a:solidFill>
-          <a:srgbClr val="EDF2F4"/>
+          <a:srgbClr val="F6F8F7"/>
         </a:solidFill>
+        <a:effectLst/>
       </p:bgPr>
     </p:bg>
     <p:spTree>
@@ -5112,8 +5150,8 @@
         </p:nvSpPr>
         <p:spPr>
           <a:xfrm>
-            <a:off x="812800" y="508000"/>
-            <a:ext cx="10883392" cy="234454"/>
+            <a:off x="812800" y="812800"/>
+            <a:ext cx="10883392" cy="238720"/>
           </a:xfrm>
           <a:prstGeom prst="rect">
             <a:avLst/>
@@ -5127,14 +5165,14 @@
           </a:bodyPr>
           <a:lstStyle/>
           <a:p>
-            <a:pPr algn="l" indent="0" marL="0">
-              <a:lnSpc>
-                <a:spcPts val="1675"/>
-              </a:lnSpc>
-              <a:buNone/>
-            </a:pPr>
-            <a:r>
-              <a:rPr lang="en-US" sz="1196" b="1" spc="100" kern="0" dirty="0">
+            <a:pPr marL="0" indent="0" algn="l">
+              <a:lnSpc>
+                <a:spcPts val="1680"/>
+              </a:lnSpc>
+              <a:buNone/>
+            </a:pPr>
+            <a:r>
+              <a:rPr lang="en-US" sz="1200" b="1" kern="0" spc="100" dirty="0">
                 <a:solidFill>
                   <a:srgbClr val="0B6A8F"/>
                 </a:solidFill>
@@ -5142,9 +5180,9 @@
                 <a:ea typeface="IBM Plex Sans" pitchFamily="34" charset="-122"/>
                 <a:cs typeface="IBM Plex Sans" pitchFamily="34" charset="-120"/>
               </a:rPr>
-              <a:t>EXECUTOR · THE APP MAP</a:t>
-            </a:r>
-            <a:endParaRPr lang="en-US" sz="1196" dirty="0"/>
+              <a:t>EXECUTOR · MAPPING THE APP</a:t>
+            </a:r>
+            <a:endParaRPr lang="en-US" sz="1200" dirty="0"/>
           </a:p>
         </p:txBody>
       </p:sp>
@@ -5156,8 +5194,8 @@
         </p:nvSpPr>
         <p:spPr>
           <a:xfrm>
-            <a:off x="812800" y="793254"/>
-            <a:ext cx="10883392" cy="436066"/>
+            <a:off x="812800" y="1102320"/>
+            <a:ext cx="10883392" cy="444500"/>
           </a:xfrm>
           <a:prstGeom prst="rect">
             <a:avLst/>
@@ -5171,14 +5209,14 @@
           </a:bodyPr>
           <a:lstStyle/>
           <a:p>
-            <a:pPr algn="l" indent="0" marL="0">
-              <a:lnSpc>
-                <a:spcPts val="3269"/>
-              </a:lnSpc>
-              <a:buNone/>
-            </a:pPr>
-            <a:r>
-              <a:rPr lang="en-US" sz="2972" b="1" dirty="0">
+            <a:pPr marL="0" indent="0" algn="l">
+              <a:lnSpc>
+                <a:spcPts val="3300"/>
+              </a:lnSpc>
+              <a:buNone/>
+            </a:pPr>
+            <a:r>
+              <a:rPr lang="en-US" sz="3000" b="1" dirty="0">
                 <a:solidFill>
                   <a:srgbClr val="14303D"/>
                 </a:solidFill>
@@ -5186,75 +5224,75 @@
                 <a:ea typeface="Source Serif 4" pitchFamily="34" charset="-122"/>
                 <a:cs typeface="Source Serif 4" pitchFamily="34" charset="-120"/>
               </a:rPr>
-              <a:t>Every run's path through the map</a:t>
-            </a:r>
-            <a:endParaRPr lang="en-US" sz="2972" dirty="0"/>
-          </a:p>
-        </p:txBody>
-      </p:sp>
-      <p:sp>
-        <p:nvSpPr>
-          <p:cNvPr id="4" name="Shape 2"/>
-          <p:cNvSpPr/>
-          <p:nvPr/>
-        </p:nvSpPr>
-        <p:spPr>
-          <a:xfrm>
-            <a:off x="812800" y="1313160"/>
-            <a:ext cx="6350000" cy="4826000"/>
+              <a:t>Mapping the app while the tests run</a:t>
+            </a:r>
+            <a:endParaRPr lang="en-US" sz="3000" dirty="0"/>
+          </a:p>
+        </p:txBody>
+      </p:sp>
+      <p:sp>
+        <p:nvSpPr>
+          <p:cNvPr id="4" name="Text 2"/>
+          <p:cNvSpPr/>
+          <p:nvPr/>
+        </p:nvSpPr>
+        <p:spPr>
+          <a:xfrm>
+            <a:off x="812800" y="1775420"/>
+            <a:ext cx="6802120" cy="238720"/>
+          </a:xfrm>
+          <a:prstGeom prst="rect">
+            <a:avLst/>
+          </a:prstGeom>
+          <a:noFill/>
+          <a:ln/>
+        </p:spPr>
+        <p:txBody>
+          <a:bodyPr wrap="square" lIns="0" tIns="0" rIns="0" bIns="0" rtlCol="0" anchor="t">
+            <a:normAutofit/>
+          </a:bodyPr>
+          <a:lstStyle/>
+          <a:p>
+            <a:pPr marL="0" indent="0" algn="l">
+              <a:lnSpc>
+                <a:spcPts val="1680"/>
+              </a:lnSpc>
+              <a:buNone/>
+            </a:pPr>
+            <a:r>
+              <a:rPr lang="en-US" sz="1200" dirty="0">
+                <a:solidFill>
+                  <a:srgbClr val="55697A"/>
+                </a:solidFill>
+                <a:latin typeface="IBM Plex Sans" pitchFamily="34" charset="0"/>
+                <a:ea typeface="IBM Plex Sans" pitchFamily="34" charset="-122"/>
+                <a:cs typeface="IBM Plex Sans" pitchFamily="34" charset="-120"/>
+              </a:rPr>
+              <a:t>Is this a screen we have seen? Checked in order, cheapest first:</a:t>
+            </a:r>
+            <a:endParaRPr lang="en-US" sz="1200" dirty="0"/>
+          </a:p>
+        </p:txBody>
+      </p:sp>
+      <p:sp>
+        <p:nvSpPr>
+          <p:cNvPr id="5" name="Shape 3"/>
+          <p:cNvSpPr/>
+          <p:nvPr/>
+        </p:nvSpPr>
+        <p:spPr>
+          <a:xfrm>
+            <a:off x="815975" y="2068116"/>
+            <a:ext cx="6597650" cy="697161"/>
           </a:xfrm>
           <a:prstGeom prst="roundRect">
             <a:avLst>
-              <a:gd name="adj" fmla="val 2105"/>
+              <a:gd name="adj" fmla="val 12296"/>
             </a:avLst>
           </a:prstGeom>
           <a:solidFill>
             <a:srgbClr val="FDFEFE"/>
           </a:solidFill>
-          <a:ln/>
-        </p:spPr>
-      </p:sp>
-      <p:pic>
-        <p:nvPicPr>
-          <p:cNvPr id="5" name="Image 0" descr="Dashboard panel Live App Model, 79 states and 797 transitions: a graph of screens with the path of test TC-088 highlighted in orange through Contact List, Option Menu Search, Organize, Import 88 contacts and Close sheet, and beside it the stored screenshot of Contact List number 12, 19 visits and 14 controls">    </p:cNvPr>
-          <p:cNvPicPr>
-            <a:picLocks noChangeAspect="1"/>
-          </p:cNvPicPr>
-          <p:nvPr/>
-        </p:nvPicPr>
-        <p:blipFill>
-          <a:blip r:embed="rId1"/>
-          <a:stretch>
-            <a:fillRect/>
-          </a:stretch>
-        </p:blipFill>
-        <p:spPr>
-          <a:xfrm>
-            <a:off x="937117" y="1319510"/>
-            <a:ext cx="6101366" cy="4813300"/>
-          </a:xfrm>
-          <a:prstGeom prst="rect">
-            <a:avLst/>
-          </a:prstGeom>
-        </p:spPr>
-      </p:pic>
-      <p:sp>
-        <p:nvSpPr>
-          <p:cNvPr id="6" name="Shape 3"/>
-          <p:cNvSpPr/>
-          <p:nvPr/>
-        </p:nvSpPr>
-        <p:spPr>
-          <a:xfrm>
-            <a:off x="815975" y="1316335"/>
-            <a:ext cx="6343650" cy="4819650"/>
-          </a:xfrm>
-          <a:prstGeom prst="roundRect">
-            <a:avLst>
-              <a:gd name="adj" fmla="val 2042"/>
-            </a:avLst>
-          </a:prstGeom>
-          <a:noFill/>
           <a:ln w="6350">
             <a:solidFill>
               <a:srgbClr val="D6E1E6"/>
@@ -5262,17 +5300,53 @@
             <a:prstDash val="solid"/>
           </a:ln>
         </p:spPr>
-      </p:sp>
-      <p:sp>
-        <p:nvSpPr>
-          <p:cNvPr id="7" name="Text 4"/>
-          <p:cNvSpPr/>
-          <p:nvPr/>
-        </p:nvSpPr>
-        <p:spPr>
-          <a:xfrm>
-            <a:off x="7416800" y="2496939"/>
-            <a:ext cx="4081272" cy="274290"/>
+        <p:txBody>
+          <a:bodyPr/>
+          <a:lstStyle/>
+          <a:p>
+            <a:endParaRPr lang="en-US"/>
+          </a:p>
+        </p:txBody>
+      </p:sp>
+      <p:sp>
+        <p:nvSpPr>
+          <p:cNvPr id="6" name="Shape 4"/>
+          <p:cNvSpPr/>
+          <p:nvPr/>
+        </p:nvSpPr>
+        <p:spPr>
+          <a:xfrm>
+            <a:off x="971550" y="2284611"/>
+            <a:ext cx="294680" cy="264120"/>
+          </a:xfrm>
+          <a:prstGeom prst="roundRect">
+            <a:avLst>
+              <a:gd name="adj" fmla="val 50000"/>
+            </a:avLst>
+          </a:prstGeom>
+          <a:solidFill>
+            <a:srgbClr val="0F7EA8"/>
+          </a:solidFill>
+          <a:ln/>
+        </p:spPr>
+        <p:txBody>
+          <a:bodyPr/>
+          <a:lstStyle/>
+          <a:p>
+            <a:endParaRPr lang="en-US"/>
+          </a:p>
+        </p:txBody>
+      </p:sp>
+      <p:sp>
+        <p:nvSpPr>
+          <p:cNvPr id="7" name="Text 5"/>
+          <p:cNvSpPr/>
+          <p:nvPr/>
+        </p:nvSpPr>
+        <p:spPr>
+          <a:xfrm>
+            <a:off x="1073150" y="2310011"/>
+            <a:ext cx="142280" cy="238720"/>
           </a:xfrm>
           <a:prstGeom prst="rect">
             <a:avLst/>
@@ -5286,37 +5360,37 @@
           </a:bodyPr>
           <a:lstStyle/>
           <a:p>
-            <a:pPr algn="l" indent="0" marL="0">
-              <a:lnSpc>
-                <a:spcPts val="1960"/>
-              </a:lnSpc>
-              <a:buNone/>
-            </a:pPr>
-            <a:r>
-              <a:rPr lang="en-US" sz="1400" b="1" dirty="0">
-                <a:solidFill>
-                  <a:srgbClr val="0B6A8F"/>
-                </a:solidFill>
-                <a:latin typeface="IBM Plex Sans" pitchFamily="34" charset="0"/>
-                <a:ea typeface="IBM Plex Sans" pitchFamily="34" charset="-122"/>
-                <a:cs typeface="IBM Plex Sans" pitchFamily="34" charset="-120"/>
-              </a:rPr>
-              <a:t>79 screens · 797 transitions</a:t>
-            </a:r>
-            <a:endParaRPr lang="en-US" sz="1400" dirty="0"/>
-          </a:p>
-        </p:txBody>
-      </p:sp>
-      <p:sp>
-        <p:nvSpPr>
-          <p:cNvPr id="8" name="Text 5"/>
-          <p:cNvSpPr/>
-          <p:nvPr/>
-        </p:nvSpPr>
-        <p:spPr>
-          <a:xfrm>
-            <a:off x="7416800" y="2771229"/>
-            <a:ext cx="4081272" cy="452041"/>
+            <a:pPr marL="0" indent="0" algn="l">
+              <a:lnSpc>
+                <a:spcPts val="1680"/>
+              </a:lnSpc>
+              <a:buNone/>
+            </a:pPr>
+            <a:r>
+              <a:rPr lang="en-US" sz="1200" b="1" dirty="0">
+                <a:solidFill>
+                  <a:srgbClr val="F6F8F7"/>
+                </a:solidFill>
+                <a:latin typeface="IBM Plex Sans" pitchFamily="34" charset="0"/>
+                <a:ea typeface="IBM Plex Sans" pitchFamily="34" charset="-122"/>
+                <a:cs typeface="IBM Plex Sans" pitchFamily="34" charset="-120"/>
+              </a:rPr>
+              <a:t>1</a:t>
+            </a:r>
+            <a:endParaRPr lang="en-US" sz="1200" dirty="0"/>
+          </a:p>
+        </p:txBody>
+      </p:sp>
+      <p:sp>
+        <p:nvSpPr>
+          <p:cNvPr id="8" name="Text 6"/>
+          <p:cNvSpPr/>
+          <p:nvPr/>
+        </p:nvSpPr>
+        <p:spPr>
+          <a:xfrm>
+            <a:off x="1393230" y="2185591"/>
+            <a:ext cx="6040765" cy="274290"/>
           </a:xfrm>
           <a:prstGeom prst="rect">
             <a:avLst/>
@@ -5330,37 +5404,37 @@
           </a:bodyPr>
           <a:lstStyle/>
           <a:p>
-            <a:pPr algn="l" indent="0" marL="0">
-              <a:lnSpc>
-                <a:spcPts val="1680"/>
-              </a:lnSpc>
-              <a:buNone/>
-            </a:pPr>
-            <a:r>
-              <a:rPr lang="en-US" sz="1200" dirty="0">
-                <a:solidFill>
-                  <a:srgbClr val="46596A"/>
-                </a:solidFill>
-                <a:latin typeface="IBM Plex Sans" pitchFamily="34" charset="0"/>
-                <a:ea typeface="IBM Plex Sans" pitchFamily="34" charset="-122"/>
-                <a:cs typeface="IBM Plex Sans" pitchFamily="34" charset="-120"/>
-              </a:rPr>
-              <a:t>The contacts app, mapped only from screens the agent actually reached.</a:t>
-            </a:r>
-            <a:endParaRPr lang="en-US" sz="1200" dirty="0"/>
-          </a:p>
-        </p:txBody>
-      </p:sp>
-      <p:sp>
-        <p:nvSpPr>
-          <p:cNvPr id="9" name="Text 6"/>
-          <p:cNvSpPr/>
-          <p:nvPr/>
-        </p:nvSpPr>
-        <p:spPr>
-          <a:xfrm>
-            <a:off x="7416800" y="3375670"/>
-            <a:ext cx="4081272" cy="274290"/>
+            <a:pPr marL="0" indent="0" algn="l">
+              <a:lnSpc>
+                <a:spcPts val="1960"/>
+              </a:lnSpc>
+              <a:buNone/>
+            </a:pPr>
+            <a:r>
+              <a:rPr lang="en-US" sz="1400" b="1" dirty="0">
+                <a:solidFill>
+                  <a:srgbClr val="14303D"/>
+                </a:solidFill>
+                <a:latin typeface="IBM Plex Sans" pitchFamily="34" charset="0"/>
+                <a:ea typeface="IBM Plex Sans" pitchFamily="34" charset="-122"/>
+                <a:cs typeface="IBM Plex Sans" pitchFamily="34" charset="-120"/>
+              </a:rPr>
+              <a:t>Exact signature</a:t>
+            </a:r>
+            <a:endParaRPr lang="en-US" sz="1400" dirty="0"/>
+          </a:p>
+        </p:txBody>
+      </p:sp>
+      <p:sp>
+        <p:nvSpPr>
+          <p:cNvPr id="9" name="Text 7"/>
+          <p:cNvSpPr/>
+          <p:nvPr/>
+        </p:nvSpPr>
+        <p:spPr>
+          <a:xfrm>
+            <a:off x="1393230" y="2434481"/>
+            <a:ext cx="6040765" cy="238720"/>
           </a:xfrm>
           <a:prstGeom prst="rect">
             <a:avLst/>
@@ -5374,37 +5448,100 @@
           </a:bodyPr>
           <a:lstStyle/>
           <a:p>
-            <a:pPr algn="l" indent="0" marL="0">
-              <a:lnSpc>
-                <a:spcPts val="1960"/>
-              </a:lnSpc>
-              <a:buNone/>
-            </a:pPr>
-            <a:r>
-              <a:rPr lang="en-US" sz="1400" b="1" dirty="0">
-                <a:solidFill>
-                  <a:srgbClr val="0B6A8F"/>
-                </a:solidFill>
-                <a:latin typeface="IBM Plex Sans" pitchFamily="34" charset="0"/>
-                <a:ea typeface="IBM Plex Sans" pitchFamily="34" charset="-122"/>
-                <a:cs typeface="IBM Plex Sans" pitchFamily="34" charset="-120"/>
-              </a:rPr>
-              <a:t>Pick a run, see its path</a:t>
-            </a:r>
-            <a:endParaRPr lang="en-US" sz="1400" dirty="0"/>
-          </a:p>
-        </p:txBody>
-      </p:sp>
-      <p:sp>
-        <p:nvSpPr>
-          <p:cNvPr id="10" name="Text 7"/>
-          <p:cNvSpPr/>
-          <p:nvPr/>
-        </p:nvSpPr>
-        <p:spPr>
-          <a:xfrm>
-            <a:off x="7416800" y="3649960"/>
-            <a:ext cx="4081272" cy="452041"/>
+            <a:pPr marL="0" indent="0" algn="l">
+              <a:lnSpc>
+                <a:spcPts val="1680"/>
+              </a:lnSpc>
+              <a:buNone/>
+            </a:pPr>
+            <a:r>
+              <a:rPr lang="en-US" sz="1200" dirty="0">
+                <a:solidFill>
+                  <a:srgbClr val="46596A"/>
+                </a:solidFill>
+                <a:latin typeface="IBM Plex Sans" pitchFamily="34" charset="0"/>
+                <a:ea typeface="IBM Plex Sans" pitchFamily="34" charset="-122"/>
+                <a:cs typeface="IBM Plex Sans" pitchFamily="34" charset="-120"/>
+              </a:rPr>
+              <a:t>same package, activity, controls and dialog</a:t>
+            </a:r>
+            <a:endParaRPr lang="en-US" sz="1200" dirty="0"/>
+          </a:p>
+        </p:txBody>
+      </p:sp>
+      <p:sp>
+        <p:nvSpPr>
+          <p:cNvPr id="10" name="Shape 8"/>
+          <p:cNvSpPr/>
+          <p:nvPr/>
+        </p:nvSpPr>
+        <p:spPr>
+          <a:xfrm>
+            <a:off x="815975" y="2847826"/>
+            <a:ext cx="6597650" cy="697161"/>
+          </a:xfrm>
+          <a:prstGeom prst="roundRect">
+            <a:avLst>
+              <a:gd name="adj" fmla="val 12296"/>
+            </a:avLst>
+          </a:prstGeom>
+          <a:solidFill>
+            <a:srgbClr val="FDFEFE"/>
+          </a:solidFill>
+          <a:ln w="6350">
+            <a:solidFill>
+              <a:srgbClr val="D6E1E6"/>
+            </a:solidFill>
+            <a:prstDash val="solid"/>
+          </a:ln>
+        </p:spPr>
+        <p:txBody>
+          <a:bodyPr/>
+          <a:lstStyle/>
+          <a:p>
+            <a:endParaRPr lang="en-US"/>
+          </a:p>
+        </p:txBody>
+      </p:sp>
+      <p:sp>
+        <p:nvSpPr>
+          <p:cNvPr id="11" name="Shape 9"/>
+          <p:cNvSpPr/>
+          <p:nvPr/>
+        </p:nvSpPr>
+        <p:spPr>
+          <a:xfrm>
+            <a:off x="971550" y="3064321"/>
+            <a:ext cx="294680" cy="264120"/>
+          </a:xfrm>
+          <a:prstGeom prst="roundRect">
+            <a:avLst>
+              <a:gd name="adj" fmla="val 50000"/>
+            </a:avLst>
+          </a:prstGeom>
+          <a:solidFill>
+            <a:srgbClr val="0F7EA8"/>
+          </a:solidFill>
+          <a:ln/>
+        </p:spPr>
+        <p:txBody>
+          <a:bodyPr/>
+          <a:lstStyle/>
+          <a:p>
+            <a:endParaRPr lang="en-US"/>
+          </a:p>
+        </p:txBody>
+      </p:sp>
+      <p:sp>
+        <p:nvSpPr>
+          <p:cNvPr id="12" name="Text 10"/>
+          <p:cNvSpPr/>
+          <p:nvPr/>
+        </p:nvSpPr>
+        <p:spPr>
+          <a:xfrm>
+            <a:off x="1073150" y="3089721"/>
+            <a:ext cx="142280" cy="238720"/>
           </a:xfrm>
           <a:prstGeom prst="rect">
             <a:avLst/>
@@ -5418,22 +5555,22 @@
           </a:bodyPr>
           <a:lstStyle/>
           <a:p>
-            <a:pPr algn="l" indent="0" marL="0">
+            <a:pPr marL="0" indent="0" algn="l">
               <a:lnSpc>
                 <a:spcPts val="1680"/>
               </a:lnSpc>
               <a:buNone/>
             </a:pPr>
             <a:r>
-              <a:rPr lang="en-US" sz="1200" dirty="0">
-                <a:solidFill>
-                  <a:srgbClr val="46596A"/>
-                </a:solidFill>
-                <a:latin typeface="IBM Plex Sans" pitchFamily="34" charset="0"/>
-                <a:ea typeface="IBM Plex Sans" pitchFamily="34" charset="-122"/>
-                <a:cs typeface="IBM Plex Sans" pitchFamily="34" charset="-120"/>
-              </a:rPr>
-              <a:t>In orange, the screens TC-088 visited, in order, read from that run's log.</a:t>
+              <a:rPr lang="en-US" sz="1200" b="1" dirty="0">
+                <a:solidFill>
+                  <a:srgbClr val="F6F8F7"/>
+                </a:solidFill>
+                <a:latin typeface="IBM Plex Sans" pitchFamily="34" charset="0"/>
+                <a:ea typeface="IBM Plex Sans" pitchFamily="34" charset="-122"/>
+                <a:cs typeface="IBM Plex Sans" pitchFamily="34" charset="-120"/>
+              </a:rPr>
+              <a:t>2</a:t>
             </a:r>
             <a:endParaRPr lang="en-US" sz="1200" dirty="0"/>
           </a:p>
@@ -5441,14 +5578,14 @@
       </p:sp>
       <p:sp>
         <p:nvSpPr>
-          <p:cNvPr id="11" name="Text 8"/>
-          <p:cNvSpPr/>
-          <p:nvPr/>
-        </p:nvSpPr>
-        <p:spPr>
-          <a:xfrm>
-            <a:off x="7416800" y="4254401"/>
-            <a:ext cx="4081272" cy="274290"/>
+          <p:cNvPr id="13" name="Text 11"/>
+          <p:cNvSpPr/>
+          <p:nvPr/>
+        </p:nvSpPr>
+        <p:spPr>
+          <a:xfrm>
+            <a:off x="1393230" y="2965301"/>
+            <a:ext cx="6040765" cy="274290"/>
           </a:xfrm>
           <a:prstGeom prst="rect">
             <a:avLst/>
@@ -5462,7 +5599,7 @@
           </a:bodyPr>
           <a:lstStyle/>
           <a:p>
-            <a:pPr algn="l" indent="0" marL="0">
+            <a:pPr marL="0" indent="0" algn="l">
               <a:lnSpc>
                 <a:spcPts val="1960"/>
               </a:lnSpc>
@@ -5471,13 +5608,13 @@
             <a:r>
               <a:rPr lang="en-US" sz="1400" b="1" dirty="0">
                 <a:solidFill>
-                  <a:srgbClr val="0B6A8F"/>
-                </a:solidFill>
-                <a:latin typeface="IBM Plex Sans" pitchFamily="34" charset="0"/>
-                <a:ea typeface="IBM Plex Sans" pitchFamily="34" charset="-122"/>
-                <a:cs typeface="IBM Plex Sans" pitchFamily="34" charset="-120"/>
-              </a:rPr>
-              <a:t>Click a screen</a:t>
+                  <a:srgbClr val="14303D"/>
+                </a:solidFill>
+                <a:latin typeface="IBM Plex Sans" pitchFamily="34" charset="0"/>
+                <a:ea typeface="IBM Plex Sans" pitchFamily="34" charset="-122"/>
+                <a:cs typeface="IBM Plex Sans" pitchFamily="34" charset="-120"/>
+              </a:rPr>
+              <a:t>Structural similarity of at least 0.90</a:t>
             </a:r>
             <a:endParaRPr lang="en-US" sz="1400" dirty="0"/>
           </a:p>
@@ -5485,14 +5622,14 @@
       </p:sp>
       <p:sp>
         <p:nvSpPr>
-          <p:cNvPr id="12" name="Text 9"/>
-          <p:cNvSpPr/>
-          <p:nvPr/>
-        </p:nvSpPr>
-        <p:spPr>
-          <a:xfrm>
-            <a:off x="7416800" y="4528691"/>
-            <a:ext cx="4081272" cy="452041"/>
+          <p:cNvPr id="14" name="Text 12"/>
+          <p:cNvSpPr/>
+          <p:nvPr/>
+        </p:nvSpPr>
+        <p:spPr>
+          <a:xfrm>
+            <a:off x="1393230" y="3214191"/>
+            <a:ext cx="6040765" cy="238720"/>
           </a:xfrm>
           <a:prstGeom prst="rect">
             <a:avLst/>
@@ -5506,7 +5643,7 @@
           </a:bodyPr>
           <a:lstStyle/>
           <a:p>
-            <a:pPr algn="l" indent="0" marL="0">
+            <a:pPr marL="0" indent="0" algn="l">
               <a:lnSpc>
                 <a:spcPts val="1680"/>
               </a:lnSpc>
@@ -5521,7 +5658,7 @@
                 <a:ea typeface="IBM Plex Sans" pitchFamily="34" charset="-122"/>
                 <a:cs typeface="IBM Plex Sans" pitchFamily="34" charset="-120"/>
               </a:rPr>
-              <a:t>Its stored screenshot, how often it was visited, and its controls.</a:t>
+              <a:t>tolerates counters, timestamps and changing list data</a:t>
             </a:r>
             <a:endParaRPr lang="en-US" sz="1200" dirty="0"/>
           </a:p>
@@ -5529,14 +5666,77 @@
       </p:sp>
       <p:sp>
         <p:nvSpPr>
-          <p:cNvPr id="13" name="Text 10"/>
-          <p:cNvSpPr/>
-          <p:nvPr/>
-        </p:nvSpPr>
-        <p:spPr>
-          <a:xfrm>
-            <a:off x="812800" y="6238280"/>
-            <a:ext cx="3459976" cy="238720"/>
+          <p:cNvPr id="15" name="Shape 13"/>
+          <p:cNvSpPr/>
+          <p:nvPr/>
+        </p:nvSpPr>
+        <p:spPr>
+          <a:xfrm>
+            <a:off x="815975" y="3627537"/>
+            <a:ext cx="6597650" cy="697161"/>
+          </a:xfrm>
+          <a:prstGeom prst="roundRect">
+            <a:avLst>
+              <a:gd name="adj" fmla="val 12296"/>
+            </a:avLst>
+          </a:prstGeom>
+          <a:solidFill>
+            <a:srgbClr val="FDFEFE"/>
+          </a:solidFill>
+          <a:ln w="6350">
+            <a:solidFill>
+              <a:srgbClr val="D6E1E6"/>
+            </a:solidFill>
+            <a:prstDash val="solid"/>
+          </a:ln>
+        </p:spPr>
+        <p:txBody>
+          <a:bodyPr/>
+          <a:lstStyle/>
+          <a:p>
+            <a:endParaRPr lang="en-US"/>
+          </a:p>
+        </p:txBody>
+      </p:sp>
+      <p:sp>
+        <p:nvSpPr>
+          <p:cNvPr id="16" name="Shape 14"/>
+          <p:cNvSpPr/>
+          <p:nvPr/>
+        </p:nvSpPr>
+        <p:spPr>
+          <a:xfrm>
+            <a:off x="971550" y="3844032"/>
+            <a:ext cx="294680" cy="264120"/>
+          </a:xfrm>
+          <a:prstGeom prst="roundRect">
+            <a:avLst>
+              <a:gd name="adj" fmla="val 50000"/>
+            </a:avLst>
+          </a:prstGeom>
+          <a:solidFill>
+            <a:srgbClr val="0F7EA8"/>
+          </a:solidFill>
+          <a:ln/>
+        </p:spPr>
+        <p:txBody>
+          <a:bodyPr/>
+          <a:lstStyle/>
+          <a:p>
+            <a:endParaRPr lang="en-US"/>
+          </a:p>
+        </p:txBody>
+      </p:sp>
+      <p:sp>
+        <p:nvSpPr>
+          <p:cNvPr id="17" name="Text 15"/>
+          <p:cNvSpPr/>
+          <p:nvPr/>
+        </p:nvSpPr>
+        <p:spPr>
+          <a:xfrm>
+            <a:off x="1073150" y="3869432"/>
+            <a:ext cx="142280" cy="238720"/>
           </a:xfrm>
           <a:prstGeom prst="rect">
             <a:avLst/>
@@ -5550,22 +5750,22 @@
           </a:bodyPr>
           <a:lstStyle/>
           <a:p>
-            <a:pPr algn="l" indent="0" marL="0">
+            <a:pPr marL="0" indent="0" algn="l">
               <a:lnSpc>
                 <a:spcPts val="1680"/>
               </a:lnSpc>
               <a:buNone/>
             </a:pPr>
             <a:r>
-              <a:rPr lang="en-US" sz="1200" dirty="0">
-                <a:solidFill>
-                  <a:srgbClr val="55697A"/>
-                </a:solidFill>
-                <a:latin typeface="IBM Plex Sans" pitchFamily="34" charset="0"/>
-                <a:ea typeface="IBM Plex Sans" pitchFamily="34" charset="-122"/>
-                <a:cs typeface="IBM Plex Sans" pitchFamily="34" charset="-120"/>
-              </a:rPr>
-              <a:t>Exploratory Testing Automation · CSE 450 · BUET</a:t>
+              <a:rPr lang="en-US" sz="1200" b="1" dirty="0">
+                <a:solidFill>
+                  <a:srgbClr val="F6F8F7"/>
+                </a:solidFill>
+                <a:latin typeface="IBM Plex Sans" pitchFamily="34" charset="0"/>
+                <a:ea typeface="IBM Plex Sans" pitchFamily="34" charset="-122"/>
+                <a:cs typeface="IBM Plex Sans" pitchFamily="34" charset="-120"/>
+              </a:rPr>
+              <a:t>3</a:t>
             </a:r>
             <a:endParaRPr lang="en-US" sz="1200" dirty="0"/>
           </a:p>
@@ -5573,14 +5773,14 @@
       </p:sp>
       <p:sp>
         <p:nvSpPr>
-          <p:cNvPr id="14" name="Text 11"/>
-          <p:cNvSpPr/>
-          <p:nvPr/>
-        </p:nvSpPr>
-        <p:spPr>
-          <a:xfrm>
-            <a:off x="11196290" y="6238280"/>
-            <a:ext cx="233710" cy="238720"/>
+          <p:cNvPr id="18" name="Text 16"/>
+          <p:cNvSpPr/>
+          <p:nvPr/>
+        </p:nvSpPr>
+        <p:spPr>
+          <a:xfrm>
+            <a:off x="1393230" y="3745012"/>
+            <a:ext cx="6040765" cy="274290"/>
           </a:xfrm>
           <a:prstGeom prst="rect">
             <a:avLst/>
@@ -5594,7 +5794,51 @@
           </a:bodyPr>
           <a:lstStyle/>
           <a:p>
-            <a:pPr algn="l" indent="0" marL="0">
+            <a:pPr marL="0" indent="0" algn="l">
+              <a:lnSpc>
+                <a:spcPts val="1960"/>
+              </a:lnSpc>
+              <a:buNone/>
+            </a:pPr>
+            <a:r>
+              <a:rPr lang="en-US" sz="1400" b="1" dirty="0">
+                <a:solidFill>
+                  <a:srgbClr val="14303D"/>
+                </a:solidFill>
+                <a:latin typeface="IBM Plex Sans" pitchFamily="34" charset="0"/>
+                <a:ea typeface="IBM Plex Sans" pitchFamily="34" charset="-122"/>
+                <a:cs typeface="IBM Plex Sans" pitchFamily="34" charset="-120"/>
+              </a:rPr>
+              <a:t>Containment of at least 0.95</a:t>
+            </a:r>
+            <a:endParaRPr lang="en-US" sz="1400" dirty="0"/>
+          </a:p>
+        </p:txBody>
+      </p:sp>
+      <p:sp>
+        <p:nvSpPr>
+          <p:cNvPr id="19" name="Text 17"/>
+          <p:cNvSpPr/>
+          <p:nvPr/>
+        </p:nvSpPr>
+        <p:spPr>
+          <a:xfrm>
+            <a:off x="1393230" y="3993902"/>
+            <a:ext cx="6040765" cy="238720"/>
+          </a:xfrm>
+          <a:prstGeom prst="rect">
+            <a:avLst/>
+          </a:prstGeom>
+          <a:noFill/>
+          <a:ln/>
+        </p:spPr>
+        <p:txBody>
+          <a:bodyPr wrap="square" lIns="0" tIns="0" rIns="0" bIns="0" rtlCol="0" anchor="t">
+            <a:normAutofit/>
+          </a:bodyPr>
+          <a:lstStyle/>
+          <a:p>
+            <a:pPr marL="0" indent="0" algn="l">
               <a:lnSpc>
                 <a:spcPts val="1680"/>
               </a:lnSpc>
@@ -5603,13 +5847,3316 @@
             <a:r>
               <a:rPr lang="en-US" sz="1200" dirty="0">
                 <a:solidFill>
+                  <a:srgbClr val="46596A"/>
+                </a:solidFill>
+                <a:latin typeface="IBM Plex Sans" pitchFamily="34" charset="0"/>
+                <a:ea typeface="IBM Plex Sans" pitchFamily="34" charset="-122"/>
+                <a:cs typeface="IBM Plex Sans" pitchFamily="34" charset="-120"/>
+              </a:rPr>
+              <a:t>a screen captured before it finished drawing</a:t>
+            </a:r>
+            <a:endParaRPr lang="en-US" sz="1200" dirty="0"/>
+          </a:p>
+        </p:txBody>
+      </p:sp>
+      <p:sp>
+        <p:nvSpPr>
+          <p:cNvPr id="20" name="Shape 18"/>
+          <p:cNvSpPr/>
+          <p:nvPr/>
+        </p:nvSpPr>
+        <p:spPr>
+          <a:xfrm>
+            <a:off x="815975" y="4407247"/>
+            <a:ext cx="6597650" cy="697161"/>
+          </a:xfrm>
+          <a:prstGeom prst="roundRect">
+            <a:avLst>
+              <a:gd name="adj" fmla="val 12296"/>
+            </a:avLst>
+          </a:prstGeom>
+          <a:solidFill>
+            <a:srgbClr val="FDFEFE"/>
+          </a:solidFill>
+          <a:ln w="6350">
+            <a:solidFill>
+              <a:srgbClr val="D6E1E6"/>
+            </a:solidFill>
+            <a:prstDash val="solid"/>
+          </a:ln>
+        </p:spPr>
+        <p:txBody>
+          <a:bodyPr/>
+          <a:lstStyle/>
+          <a:p>
+            <a:endParaRPr lang="en-US"/>
+          </a:p>
+        </p:txBody>
+      </p:sp>
+      <p:sp>
+        <p:nvSpPr>
+          <p:cNvPr id="21" name="Shape 19"/>
+          <p:cNvSpPr/>
+          <p:nvPr/>
+        </p:nvSpPr>
+        <p:spPr>
+          <a:xfrm>
+            <a:off x="971550" y="4623743"/>
+            <a:ext cx="294680" cy="264120"/>
+          </a:xfrm>
+          <a:prstGeom prst="roundRect">
+            <a:avLst>
+              <a:gd name="adj" fmla="val 50000"/>
+            </a:avLst>
+          </a:prstGeom>
+          <a:solidFill>
+            <a:srgbClr val="0F7EA8"/>
+          </a:solidFill>
+          <a:ln/>
+        </p:spPr>
+        <p:txBody>
+          <a:bodyPr/>
+          <a:lstStyle/>
+          <a:p>
+            <a:endParaRPr lang="en-US"/>
+          </a:p>
+        </p:txBody>
+      </p:sp>
+      <p:sp>
+        <p:nvSpPr>
+          <p:cNvPr id="22" name="Text 20"/>
+          <p:cNvSpPr/>
+          <p:nvPr/>
+        </p:nvSpPr>
+        <p:spPr>
+          <a:xfrm>
+            <a:off x="1073150" y="4649143"/>
+            <a:ext cx="142280" cy="238720"/>
+          </a:xfrm>
+          <a:prstGeom prst="rect">
+            <a:avLst/>
+          </a:prstGeom>
+          <a:noFill/>
+          <a:ln/>
+        </p:spPr>
+        <p:txBody>
+          <a:bodyPr wrap="square" lIns="0" tIns="0" rIns="0" bIns="0" rtlCol="0" anchor="t">
+            <a:normAutofit/>
+          </a:bodyPr>
+          <a:lstStyle/>
+          <a:p>
+            <a:pPr marL="0" indent="0" algn="l">
+              <a:lnSpc>
+                <a:spcPts val="1680"/>
+              </a:lnSpc>
+              <a:buNone/>
+            </a:pPr>
+            <a:r>
+              <a:rPr lang="en-US" sz="1200" b="1" dirty="0">
+                <a:solidFill>
+                  <a:srgbClr val="F6F8F7"/>
+                </a:solidFill>
+                <a:latin typeface="IBM Plex Sans" pitchFamily="34" charset="0"/>
+                <a:ea typeface="IBM Plex Sans" pitchFamily="34" charset="-122"/>
+                <a:cs typeface="IBM Plex Sans" pitchFamily="34" charset="-120"/>
+              </a:rPr>
+              <a:t>4</a:t>
+            </a:r>
+            <a:endParaRPr lang="en-US" sz="1200" dirty="0"/>
+          </a:p>
+        </p:txBody>
+      </p:sp>
+      <p:sp>
+        <p:nvSpPr>
+          <p:cNvPr id="23" name="Text 21"/>
+          <p:cNvSpPr/>
+          <p:nvPr/>
+        </p:nvSpPr>
+        <p:spPr>
+          <a:xfrm>
+            <a:off x="1393230" y="4524722"/>
+            <a:ext cx="6040765" cy="274290"/>
+          </a:xfrm>
+          <a:prstGeom prst="rect">
+            <a:avLst/>
+          </a:prstGeom>
+          <a:noFill/>
+          <a:ln/>
+        </p:spPr>
+        <p:txBody>
+          <a:bodyPr wrap="square" lIns="0" tIns="0" rIns="0" bIns="0" rtlCol="0" anchor="t">
+            <a:normAutofit/>
+          </a:bodyPr>
+          <a:lstStyle/>
+          <a:p>
+            <a:pPr marL="0" indent="0" algn="l">
+              <a:lnSpc>
+                <a:spcPts val="1960"/>
+              </a:lnSpc>
+              <a:buNone/>
+            </a:pPr>
+            <a:r>
+              <a:rPr lang="en-US" sz="1400" b="1" dirty="0">
+                <a:solidFill>
+                  <a:srgbClr val="14303D"/>
+                </a:solidFill>
+                <a:latin typeface="IBM Plex Sans" pitchFamily="34" charset="0"/>
+                <a:ea typeface="IBM Plex Sans" pitchFamily="34" charset="-122"/>
+                <a:cs typeface="IBM Plex Sans" pitchFamily="34" charset="-120"/>
+              </a:rPr>
+              <a:t>Perceptual image hash, distance of 6 or less</a:t>
+            </a:r>
+            <a:endParaRPr lang="en-US" sz="1400" dirty="0"/>
+          </a:p>
+        </p:txBody>
+      </p:sp>
+      <p:sp>
+        <p:nvSpPr>
+          <p:cNvPr id="24" name="Text 22"/>
+          <p:cNvSpPr/>
+          <p:nvPr/>
+        </p:nvSpPr>
+        <p:spPr>
+          <a:xfrm>
+            <a:off x="1393230" y="4773613"/>
+            <a:ext cx="6040765" cy="238720"/>
+          </a:xfrm>
+          <a:prstGeom prst="rect">
+            <a:avLst/>
+          </a:prstGeom>
+          <a:noFill/>
+          <a:ln/>
+        </p:spPr>
+        <p:txBody>
+          <a:bodyPr wrap="square" lIns="0" tIns="0" rIns="0" bIns="0" rtlCol="0" anchor="t">
+            <a:normAutofit/>
+          </a:bodyPr>
+          <a:lstStyle/>
+          <a:p>
+            <a:pPr marL="0" indent="0" algn="l">
+              <a:lnSpc>
+                <a:spcPts val="1680"/>
+              </a:lnSpc>
+              <a:buNone/>
+            </a:pPr>
+            <a:r>
+              <a:rPr lang="en-US" sz="1200" dirty="0">
+                <a:solidFill>
+                  <a:srgbClr val="46596A"/>
+                </a:solidFill>
+                <a:latin typeface="IBM Plex Sans" pitchFamily="34" charset="0"/>
+                <a:ea typeface="IBM Plex Sans" pitchFamily="34" charset="-122"/>
+                <a:cs typeface="IBM Plex Sans" pitchFamily="34" charset="-120"/>
+              </a:rPr>
+              <a:t>the last resort when the accessibility tree is thin</a:t>
+            </a:r>
+            <a:endParaRPr lang="en-US" sz="1200" dirty="0"/>
+          </a:p>
+        </p:txBody>
+      </p:sp>
+      <p:sp>
+        <p:nvSpPr>
+          <p:cNvPr id="25" name="Text 23"/>
+          <p:cNvSpPr/>
+          <p:nvPr/>
+        </p:nvSpPr>
+        <p:spPr>
+          <a:xfrm>
+            <a:off x="812800" y="5183783"/>
+            <a:ext cx="6802120" cy="452041"/>
+          </a:xfrm>
+          <a:prstGeom prst="rect">
+            <a:avLst/>
+          </a:prstGeom>
+          <a:noFill/>
+          <a:ln/>
+        </p:spPr>
+        <p:txBody>
+          <a:bodyPr wrap="square" lIns="0" tIns="0" rIns="0" bIns="0" rtlCol="0" anchor="t">
+            <a:normAutofit/>
+          </a:bodyPr>
+          <a:lstStyle/>
+          <a:p>
+            <a:pPr marL="0" indent="0" algn="l">
+              <a:lnSpc>
+                <a:spcPts val="1680"/>
+              </a:lnSpc>
+              <a:buNone/>
+            </a:pPr>
+            <a:r>
+              <a:rPr lang="en-US" sz="1200" b="1" dirty="0">
+                <a:solidFill>
+                  <a:srgbClr val="46596A"/>
+                </a:solidFill>
+                <a:latin typeface="IBM Plex Sans" pitchFamily="34" charset="0"/>
+                <a:ea typeface="IBM Plex Sans" pitchFamily="34" charset="-122"/>
+                <a:cs typeface="IBM Plex Sans" pitchFamily="34" charset="-120"/>
+              </a:rPr>
+              <a:t>Match:</a:t>
+            </a:r>
+            <a:r>
+              <a:rPr lang="en-US" sz="1200" dirty="0">
+                <a:solidFill>
+                  <a:srgbClr val="46596A"/>
+                </a:solidFill>
+                <a:latin typeface="IBM Plex Sans" pitchFamily="34" charset="0"/>
+                <a:ea typeface="IBM Plex Sans" pitchFamily="34" charset="-122"/>
+                <a:cs typeface="IBM Plex Sans" pitchFamily="34" charset="-120"/>
+              </a:rPr>
+              <a:t> a known screen, its visit counted. </a:t>
+            </a:r>
+            <a:r>
+              <a:rPr lang="en-US" sz="1200" b="1" dirty="0">
+                <a:solidFill>
+                  <a:srgbClr val="46596A"/>
+                </a:solidFill>
+                <a:latin typeface="IBM Plex Sans" pitchFamily="34" charset="0"/>
+                <a:ea typeface="IBM Plex Sans" pitchFamily="34" charset="-122"/>
+                <a:cs typeface="IBM Plex Sans" pitchFamily="34" charset="-120"/>
+              </a:rPr>
+              <a:t>No match:</a:t>
+            </a:r>
+            <a:r>
+              <a:rPr lang="en-US" sz="1200" dirty="0">
+                <a:solidFill>
+                  <a:srgbClr val="46596A"/>
+                </a:solidFill>
+                <a:latin typeface="IBM Plex Sans" pitchFamily="34" charset="0"/>
+                <a:ea typeface="IBM Plex Sans" pitchFamily="34" charset="-122"/>
+                <a:cs typeface="IBM Plex Sans" pitchFamily="34" charset="-120"/>
+              </a:rPr>
+              <a:t> a new screen, with its screenshot and the transition that led to it.</a:t>
+            </a:r>
+            <a:endParaRPr lang="en-US" sz="1200" dirty="0"/>
+          </a:p>
+        </p:txBody>
+      </p:sp>
+      <p:sp>
+        <p:nvSpPr>
+          <p:cNvPr id="26" name="Text 24"/>
+          <p:cNvSpPr/>
+          <p:nvPr/>
+        </p:nvSpPr>
+        <p:spPr>
+          <a:xfrm>
+            <a:off x="7721600" y="1775420"/>
+            <a:ext cx="3767328" cy="772120"/>
+          </a:xfrm>
+          <a:prstGeom prst="rect">
+            <a:avLst/>
+          </a:prstGeom>
+          <a:noFill/>
+          <a:ln/>
+        </p:spPr>
+        <p:txBody>
+          <a:bodyPr wrap="square" lIns="0" tIns="0" rIns="0" bIns="0" rtlCol="0" anchor="t">
+            <a:normAutofit/>
+          </a:bodyPr>
+          <a:lstStyle/>
+          <a:p>
+            <a:pPr marL="0" indent="0" algn="l">
+              <a:lnSpc>
+                <a:spcPts val="5880"/>
+              </a:lnSpc>
+              <a:buNone/>
+            </a:pPr>
+            <a:r>
+              <a:rPr lang="en-US" sz="5600" b="1" dirty="0">
+                <a:solidFill>
+                  <a:srgbClr val="0F7EA8"/>
+                </a:solidFill>
+                <a:latin typeface="Source Serif 4" pitchFamily="34" charset="0"/>
+                <a:ea typeface="Source Serif 4" pitchFamily="34" charset="-122"/>
+                <a:cs typeface="Source Serif 4" pitchFamily="34" charset="-120"/>
+              </a:rPr>
+              <a:t>79</a:t>
+            </a:r>
+            <a:endParaRPr lang="en-US" sz="5600" dirty="0"/>
+          </a:p>
+        </p:txBody>
+      </p:sp>
+      <p:sp>
+        <p:nvSpPr>
+          <p:cNvPr id="27" name="Text 25"/>
+          <p:cNvSpPr/>
+          <p:nvPr/>
+        </p:nvSpPr>
+        <p:spPr>
+          <a:xfrm>
+            <a:off x="7721600" y="2522141"/>
+            <a:ext cx="3767328" cy="238720"/>
+          </a:xfrm>
+          <a:prstGeom prst="rect">
+            <a:avLst/>
+          </a:prstGeom>
+          <a:noFill/>
+          <a:ln/>
+        </p:spPr>
+        <p:txBody>
+          <a:bodyPr wrap="square" lIns="0" tIns="0" rIns="0" bIns="0" rtlCol="0" anchor="t">
+            <a:normAutofit/>
+          </a:bodyPr>
+          <a:lstStyle/>
+          <a:p>
+            <a:pPr marL="0" indent="0" algn="l">
+              <a:lnSpc>
+                <a:spcPts val="1680"/>
+              </a:lnSpc>
+              <a:buNone/>
+            </a:pPr>
+            <a:r>
+              <a:rPr lang="en-US" sz="1200" dirty="0">
+                <a:solidFill>
+                  <a:srgbClr val="46596A"/>
+                </a:solidFill>
+                <a:latin typeface="IBM Plex Sans" pitchFamily="34" charset="0"/>
+                <a:ea typeface="IBM Plex Sans" pitchFamily="34" charset="-122"/>
+                <a:cs typeface="IBM Plex Sans" pitchFamily="34" charset="-120"/>
+              </a:rPr>
+              <a:t>distinct screens</a:t>
+            </a:r>
+            <a:endParaRPr lang="en-US" sz="1200" dirty="0"/>
+          </a:p>
+        </p:txBody>
+      </p:sp>
+      <p:sp>
+        <p:nvSpPr>
+          <p:cNvPr id="28" name="Text 26"/>
+          <p:cNvSpPr/>
+          <p:nvPr/>
+        </p:nvSpPr>
+        <p:spPr>
+          <a:xfrm>
+            <a:off x="7721600" y="2887861"/>
+            <a:ext cx="3767328" cy="772120"/>
+          </a:xfrm>
+          <a:prstGeom prst="rect">
+            <a:avLst/>
+          </a:prstGeom>
+          <a:noFill/>
+          <a:ln/>
+        </p:spPr>
+        <p:txBody>
+          <a:bodyPr wrap="square" lIns="0" tIns="0" rIns="0" bIns="0" rtlCol="0" anchor="t">
+            <a:normAutofit/>
+          </a:bodyPr>
+          <a:lstStyle/>
+          <a:p>
+            <a:pPr marL="0" indent="0" algn="l">
+              <a:lnSpc>
+                <a:spcPts val="5880"/>
+              </a:lnSpc>
+              <a:buNone/>
+            </a:pPr>
+            <a:r>
+              <a:rPr lang="en-US" sz="5600" b="1" dirty="0">
+                <a:solidFill>
+                  <a:srgbClr val="14303D"/>
+                </a:solidFill>
+                <a:latin typeface="Source Serif 4" pitchFamily="34" charset="0"/>
+                <a:ea typeface="Source Serif 4" pitchFamily="34" charset="-122"/>
+                <a:cs typeface="Source Serif 4" pitchFamily="34" charset="-120"/>
+              </a:rPr>
+              <a:t>2,149</a:t>
+            </a:r>
+            <a:endParaRPr lang="en-US" sz="5600" dirty="0"/>
+          </a:p>
+        </p:txBody>
+      </p:sp>
+      <p:sp>
+        <p:nvSpPr>
+          <p:cNvPr id="29" name="Text 27"/>
+          <p:cNvSpPr/>
+          <p:nvPr/>
+        </p:nvSpPr>
+        <p:spPr>
+          <a:xfrm>
+            <a:off x="7721600" y="3634581"/>
+            <a:ext cx="3767328" cy="238720"/>
+          </a:xfrm>
+          <a:prstGeom prst="rect">
+            <a:avLst/>
+          </a:prstGeom>
+          <a:noFill/>
+          <a:ln/>
+        </p:spPr>
+        <p:txBody>
+          <a:bodyPr wrap="square" lIns="0" tIns="0" rIns="0" bIns="0" rtlCol="0" anchor="t">
+            <a:normAutofit/>
+          </a:bodyPr>
+          <a:lstStyle/>
+          <a:p>
+            <a:pPr marL="0" indent="0" algn="l">
+              <a:lnSpc>
+                <a:spcPts val="1680"/>
+              </a:lnSpc>
+              <a:buNone/>
+            </a:pPr>
+            <a:r>
+              <a:rPr lang="en-US" sz="1200" dirty="0">
+                <a:solidFill>
+                  <a:srgbClr val="46596A"/>
+                </a:solidFill>
+                <a:latin typeface="IBM Plex Sans" pitchFamily="34" charset="0"/>
+                <a:ea typeface="IBM Plex Sans" pitchFamily="34" charset="-122"/>
+                <a:cs typeface="IBM Plex Sans" pitchFamily="34" charset="-120"/>
+              </a:rPr>
+              <a:t>screen observations</a:t>
+            </a:r>
+            <a:endParaRPr lang="en-US" sz="1200" dirty="0"/>
+          </a:p>
+        </p:txBody>
+      </p:sp>
+      <p:sp>
+        <p:nvSpPr>
+          <p:cNvPr id="30" name="Text 28"/>
+          <p:cNvSpPr/>
+          <p:nvPr/>
+        </p:nvSpPr>
+        <p:spPr>
+          <a:xfrm>
+            <a:off x="7721600" y="4000302"/>
+            <a:ext cx="3767328" cy="772120"/>
+          </a:xfrm>
+          <a:prstGeom prst="rect">
+            <a:avLst/>
+          </a:prstGeom>
+          <a:noFill/>
+          <a:ln/>
+        </p:spPr>
+        <p:txBody>
+          <a:bodyPr wrap="square" lIns="0" tIns="0" rIns="0" bIns="0" rtlCol="0" anchor="t">
+            <a:normAutofit/>
+          </a:bodyPr>
+          <a:lstStyle/>
+          <a:p>
+            <a:pPr marL="0" indent="0" algn="l">
+              <a:lnSpc>
+                <a:spcPts val="5880"/>
+              </a:lnSpc>
+              <a:buNone/>
+            </a:pPr>
+            <a:r>
+              <a:rPr lang="en-US" sz="5600" b="1" dirty="0">
+                <a:solidFill>
+                  <a:srgbClr val="14303D"/>
+                </a:solidFill>
+                <a:latin typeface="Source Serif 4" pitchFamily="34" charset="0"/>
+                <a:ea typeface="Source Serif 4" pitchFamily="34" charset="-122"/>
+                <a:cs typeface="Source Serif 4" pitchFamily="34" charset="-120"/>
+              </a:rPr>
+              <a:t>797</a:t>
+            </a:r>
+            <a:endParaRPr lang="en-US" sz="5600" dirty="0"/>
+          </a:p>
+        </p:txBody>
+      </p:sp>
+      <p:sp>
+        <p:nvSpPr>
+          <p:cNvPr id="31" name="Text 29"/>
+          <p:cNvSpPr/>
+          <p:nvPr/>
+        </p:nvSpPr>
+        <p:spPr>
+          <a:xfrm>
+            <a:off x="7721600" y="4747022"/>
+            <a:ext cx="3767328" cy="238720"/>
+          </a:xfrm>
+          <a:prstGeom prst="rect">
+            <a:avLst/>
+          </a:prstGeom>
+          <a:noFill/>
+          <a:ln/>
+        </p:spPr>
+        <p:txBody>
+          <a:bodyPr wrap="square" lIns="0" tIns="0" rIns="0" bIns="0" rtlCol="0" anchor="t">
+            <a:normAutofit/>
+          </a:bodyPr>
+          <a:lstStyle/>
+          <a:p>
+            <a:pPr marL="0" indent="0" algn="l">
+              <a:lnSpc>
+                <a:spcPts val="1680"/>
+              </a:lnSpc>
+              <a:buNone/>
+            </a:pPr>
+            <a:r>
+              <a:rPr lang="en-US" sz="1200" dirty="0">
+                <a:solidFill>
+                  <a:srgbClr val="46596A"/>
+                </a:solidFill>
+                <a:latin typeface="IBM Plex Sans" pitchFamily="34" charset="0"/>
+                <a:ea typeface="IBM Plex Sans" pitchFamily="34" charset="-122"/>
+                <a:cs typeface="IBM Plex Sans" pitchFamily="34" charset="-120"/>
+              </a:rPr>
+              <a:t>transitions between screens · contacts app</a:t>
+            </a:r>
+            <a:endParaRPr lang="en-US" sz="1200" dirty="0"/>
+          </a:p>
+        </p:txBody>
+      </p:sp>
+      <p:sp>
+        <p:nvSpPr>
+          <p:cNvPr id="32" name="Text 30"/>
+          <p:cNvSpPr/>
+          <p:nvPr/>
+        </p:nvSpPr>
+        <p:spPr>
+          <a:xfrm>
+            <a:off x="812800" y="6238280"/>
+            <a:ext cx="3459976" cy="238720"/>
+          </a:xfrm>
+          <a:prstGeom prst="rect">
+            <a:avLst/>
+          </a:prstGeom>
+          <a:noFill/>
+          <a:ln/>
+        </p:spPr>
+        <p:txBody>
+          <a:bodyPr wrap="square" lIns="0" tIns="0" rIns="0" bIns="0" rtlCol="0" anchor="t">
+            <a:normAutofit/>
+          </a:bodyPr>
+          <a:lstStyle/>
+          <a:p>
+            <a:pPr marL="0" indent="0" algn="l">
+              <a:lnSpc>
+                <a:spcPts val="1680"/>
+              </a:lnSpc>
+              <a:buNone/>
+            </a:pPr>
+            <a:r>
+              <a:rPr lang="en-US" sz="1200" dirty="0">
+                <a:solidFill>
                   <a:srgbClr val="55697A"/>
                 </a:solidFill>
                 <a:latin typeface="IBM Plex Sans" pitchFamily="34" charset="0"/>
                 <a:ea typeface="IBM Plex Sans" pitchFamily="34" charset="-122"/>
                 <a:cs typeface="IBM Plex Sans" pitchFamily="34" charset="-120"/>
               </a:rPr>
+              <a:t>Exploratory Testing Automation · CSE 450 · BUET</a:t>
+            </a:r>
+            <a:endParaRPr lang="en-US" sz="1200" dirty="0"/>
+          </a:p>
+        </p:txBody>
+      </p:sp>
+      <p:sp>
+        <p:nvSpPr>
+          <p:cNvPr id="33" name="Text 31"/>
+          <p:cNvSpPr/>
+          <p:nvPr/>
+        </p:nvSpPr>
+        <p:spPr>
+          <a:xfrm>
+            <a:off x="11196290" y="6238280"/>
+            <a:ext cx="233710" cy="238720"/>
+          </a:xfrm>
+          <a:prstGeom prst="rect">
+            <a:avLst/>
+          </a:prstGeom>
+          <a:noFill/>
+          <a:ln/>
+        </p:spPr>
+        <p:txBody>
+          <a:bodyPr wrap="square" lIns="0" tIns="0" rIns="0" bIns="0" rtlCol="0" anchor="t">
+            <a:normAutofit/>
+          </a:bodyPr>
+          <a:lstStyle/>
+          <a:p>
+            <a:pPr marL="0" indent="0" algn="l">
+              <a:lnSpc>
+                <a:spcPts val="1680"/>
+              </a:lnSpc>
+              <a:buNone/>
+            </a:pPr>
+            <a:r>
+              <a:rPr lang="en-US" sz="1200" dirty="0">
+                <a:solidFill>
+                  <a:srgbClr val="55697A"/>
+                </a:solidFill>
+                <a:latin typeface="IBM Plex Sans" pitchFamily="34" charset="0"/>
+                <a:ea typeface="IBM Plex Sans" pitchFamily="34" charset="-122"/>
+                <a:cs typeface="IBM Plex Sans" pitchFamily="34" charset="-120"/>
+              </a:rPr>
               <a:t>24</a:t>
+            </a:r>
+            <a:endParaRPr lang="en-US" sz="1200" dirty="0"/>
+          </a:p>
+        </p:txBody>
+      </p:sp>
+    </p:spTree>
+  </p:cSld>
+  <p:clrMapOvr>
+    <a:masterClrMapping/>
+  </p:clrMapOvr>
+</p:sld>
+</file>
+
+<file path=ppt/slides/slide6.xml><?xml version="1.0" encoding="utf-8"?>
+<p:sld xmlns:a="http://schemas.openxmlformats.org/drawingml/2006/main" xmlns:r="http://schemas.openxmlformats.org/officeDocument/2006/relationships" xmlns:p="http://schemas.openxmlformats.org/presentationml/2006/main">
+  <p:cSld name="Slide 23">
+    <p:bg>
+      <p:bgPr>
+        <a:solidFill>
+          <a:srgbClr val="EDF2F4"/>
+        </a:solidFill>
+        <a:effectLst/>
+      </p:bgPr>
+    </p:bg>
+    <p:spTree>
+      <p:nvGrpSpPr>
+        <p:cNvPr id="1" name=""/>
+        <p:cNvGrpSpPr/>
+        <p:nvPr/>
+      </p:nvGrpSpPr>
+      <p:grpSpPr>
+        <a:xfrm>
+          <a:off x="0" y="0"/>
+          <a:ext cx="0" cy="0"/>
+          <a:chOff x="0" y="0"/>
+          <a:chExt cx="0" cy="0"/>
+        </a:xfrm>
+      </p:grpSpPr>
+      <p:sp>
+        <p:nvSpPr>
+          <p:cNvPr id="2" name="Text 0"/>
+          <p:cNvSpPr/>
+          <p:nvPr/>
+        </p:nvSpPr>
+        <p:spPr>
+          <a:xfrm>
+            <a:off x="812800" y="812800"/>
+            <a:ext cx="10883392" cy="234603"/>
+          </a:xfrm>
+          <a:prstGeom prst="rect">
+            <a:avLst/>
+          </a:prstGeom>
+          <a:noFill/>
+          <a:ln/>
+        </p:spPr>
+        <p:txBody>
+          <a:bodyPr wrap="square" lIns="0" tIns="0" rIns="0" bIns="0" rtlCol="0" anchor="t">
+            <a:normAutofit/>
+          </a:bodyPr>
+          <a:lstStyle/>
+          <a:p>
+            <a:pPr marL="0" indent="0" algn="l">
+              <a:lnSpc>
+                <a:spcPts val="1675"/>
+              </a:lnSpc>
+              <a:buNone/>
+            </a:pPr>
+            <a:r>
+              <a:rPr lang="en-US" sz="1196" b="1" kern="0" spc="100" dirty="0">
+                <a:solidFill>
+                  <a:srgbClr val="0B6A8F"/>
+                </a:solidFill>
+                <a:latin typeface="IBM Plex Sans" pitchFamily="34" charset="0"/>
+                <a:ea typeface="IBM Plex Sans" pitchFamily="34" charset="-122"/>
+                <a:cs typeface="IBM Plex Sans" pitchFamily="34" charset="-120"/>
+              </a:rPr>
+              <a:t>EXECUTOR · IN DETAIL</a:t>
+            </a:r>
+            <a:endParaRPr lang="en-US" sz="1196" dirty="0"/>
+          </a:p>
+        </p:txBody>
+      </p:sp>
+      <p:sp>
+        <p:nvSpPr>
+          <p:cNvPr id="3" name="Text 1"/>
+          <p:cNvSpPr/>
+          <p:nvPr/>
+        </p:nvSpPr>
+        <p:spPr>
+          <a:xfrm>
+            <a:off x="812800" y="1098203"/>
+            <a:ext cx="10883392" cy="436364"/>
+          </a:xfrm>
+          <a:prstGeom prst="rect">
+            <a:avLst/>
+          </a:prstGeom>
+          <a:noFill/>
+          <a:ln/>
+        </p:spPr>
+        <p:txBody>
+          <a:bodyPr wrap="square" lIns="0" tIns="0" rIns="0" bIns="0" rtlCol="0" anchor="t">
+            <a:normAutofit/>
+          </a:bodyPr>
+          <a:lstStyle/>
+          <a:p>
+            <a:pPr marL="0" indent="0" algn="l">
+              <a:lnSpc>
+                <a:spcPts val="3269"/>
+              </a:lnSpc>
+              <a:buNone/>
+            </a:pPr>
+            <a:r>
+              <a:rPr lang="en-US" sz="2972" b="1" dirty="0">
+                <a:solidFill>
+                  <a:srgbClr val="14303D"/>
+                </a:solidFill>
+                <a:latin typeface="Source Serif 4" pitchFamily="34" charset="0"/>
+                <a:ea typeface="Source Serif 4" pitchFamily="34" charset="-122"/>
+                <a:cs typeface="Source Serif 4" pitchFamily="34" charset="-120"/>
+              </a:rPr>
+              <a:t>Is this a screen we have seen?</a:t>
+            </a:r>
+            <a:endParaRPr lang="en-US" sz="2972" dirty="0"/>
+          </a:p>
+        </p:txBody>
+      </p:sp>
+      <p:sp>
+        <p:nvSpPr>
+          <p:cNvPr id="4" name="Shape 2"/>
+          <p:cNvSpPr/>
+          <p:nvPr/>
+        </p:nvSpPr>
+        <p:spPr>
+          <a:xfrm>
+            <a:off x="812800" y="1712367"/>
+            <a:ext cx="10566400" cy="3507184"/>
+          </a:xfrm>
+          <a:prstGeom prst="roundRect">
+            <a:avLst>
+              <a:gd name="adj" fmla="val 2897"/>
+            </a:avLst>
+          </a:prstGeom>
+          <a:solidFill>
+            <a:srgbClr val="FDFEFE"/>
+          </a:solidFill>
+          <a:ln/>
+        </p:spPr>
+        <p:txBody>
+          <a:bodyPr/>
+          <a:lstStyle/>
+          <a:p>
+            <a:endParaRPr lang="en-US"/>
+          </a:p>
+        </p:txBody>
+      </p:sp>
+      <p:pic>
+        <p:nvPicPr>
+          <p:cNvPr id="5" name="Image 0" descr="Screen identity cascade, left to right: an observation is tested by exact signature, then structural Jaccard of at least 0.9, containment of at least 0.95, skeleton containment, and a perceptual hash within Hamming distance 6; any match is a known state, otherwise a new state is stored with its transition"/>
+          <p:cNvPicPr>
+            <a:picLocks noChangeAspect="1"/>
+          </p:cNvPicPr>
+          <p:nvPr/>
+        </p:nvPicPr>
+        <p:blipFill>
+          <a:blip r:embed="rId3"/>
+          <a:stretch>
+            <a:fillRect/>
+          </a:stretch>
+        </p:blipFill>
+        <p:spPr>
+          <a:xfrm>
+            <a:off x="928050" y="1718717"/>
+            <a:ext cx="10335900" cy="3494484"/>
+          </a:xfrm>
+          <a:prstGeom prst="rect">
+            <a:avLst/>
+          </a:prstGeom>
+        </p:spPr>
+      </p:pic>
+      <p:sp>
+        <p:nvSpPr>
+          <p:cNvPr id="6" name="Shape 3"/>
+          <p:cNvSpPr/>
+          <p:nvPr/>
+        </p:nvSpPr>
+        <p:spPr>
+          <a:xfrm>
+            <a:off x="815975" y="1715542"/>
+            <a:ext cx="10560050" cy="3500834"/>
+          </a:xfrm>
+          <a:prstGeom prst="roundRect">
+            <a:avLst>
+              <a:gd name="adj" fmla="val 2811"/>
+            </a:avLst>
+          </a:prstGeom>
+          <a:noFill/>
+          <a:ln w="6350">
+            <a:solidFill>
+              <a:srgbClr val="D6E1E6"/>
+            </a:solidFill>
+            <a:prstDash val="solid"/>
+          </a:ln>
+        </p:spPr>
+        <p:txBody>
+          <a:bodyPr/>
+          <a:lstStyle/>
+          <a:p>
+            <a:endParaRPr lang="en-US"/>
+          </a:p>
+        </p:txBody>
+      </p:sp>
+      <p:sp>
+        <p:nvSpPr>
+          <p:cNvPr id="7" name="Text 4"/>
+          <p:cNvSpPr/>
+          <p:nvPr/>
+        </p:nvSpPr>
+        <p:spPr>
+          <a:xfrm>
+            <a:off x="812800" y="5422751"/>
+            <a:ext cx="10883392" cy="444649"/>
+          </a:xfrm>
+          <a:prstGeom prst="rect">
+            <a:avLst/>
+          </a:prstGeom>
+          <a:noFill/>
+          <a:ln/>
+        </p:spPr>
+        <p:txBody>
+          <a:bodyPr wrap="square" lIns="0" tIns="0" rIns="0" bIns="0" rtlCol="0" anchor="t">
+            <a:normAutofit/>
+          </a:bodyPr>
+          <a:lstStyle/>
+          <a:p>
+            <a:pPr marL="0" indent="0" algn="l">
+              <a:lnSpc>
+                <a:spcPts val="1659"/>
+              </a:lnSpc>
+              <a:buNone/>
+            </a:pPr>
+            <a:r>
+              <a:rPr lang="en-US" sz="1185" dirty="0">
+                <a:solidFill>
+                  <a:srgbClr val="46596A"/>
+                </a:solidFill>
+                <a:latin typeface="IBM Plex Sans" pitchFamily="34" charset="0"/>
+                <a:ea typeface="IBM Plex Sans" pitchFamily="34" charset="-122"/>
+                <a:cs typeface="IBM Plex Sans" pitchFamily="34" charset="-120"/>
+              </a:rPr>
+              <a:t>Checked left to right, cheapest first. Any match counts a visit to a known screen; no match stores a new screen and the transition that led to it. The grey notes say why each check exists.</a:t>
+            </a:r>
+            <a:endParaRPr lang="en-US" sz="1185" dirty="0"/>
+          </a:p>
+        </p:txBody>
+      </p:sp>
+      <p:sp>
+        <p:nvSpPr>
+          <p:cNvPr id="8" name="Text 5"/>
+          <p:cNvSpPr/>
+          <p:nvPr/>
+        </p:nvSpPr>
+        <p:spPr>
+          <a:xfrm>
+            <a:off x="812800" y="6238280"/>
+            <a:ext cx="3459976" cy="238720"/>
+          </a:xfrm>
+          <a:prstGeom prst="rect">
+            <a:avLst/>
+          </a:prstGeom>
+          <a:noFill/>
+          <a:ln/>
+        </p:spPr>
+        <p:txBody>
+          <a:bodyPr wrap="square" lIns="0" tIns="0" rIns="0" bIns="0" rtlCol="0" anchor="t">
+            <a:normAutofit/>
+          </a:bodyPr>
+          <a:lstStyle/>
+          <a:p>
+            <a:pPr marL="0" indent="0" algn="l">
+              <a:lnSpc>
+                <a:spcPts val="1680"/>
+              </a:lnSpc>
+              <a:buNone/>
+            </a:pPr>
+            <a:r>
+              <a:rPr lang="en-US" sz="1200" dirty="0">
+                <a:solidFill>
+                  <a:srgbClr val="55697A"/>
+                </a:solidFill>
+                <a:latin typeface="IBM Plex Sans" pitchFamily="34" charset="0"/>
+                <a:ea typeface="IBM Plex Sans" pitchFamily="34" charset="-122"/>
+                <a:cs typeface="IBM Plex Sans" pitchFamily="34" charset="-120"/>
+              </a:rPr>
+              <a:t>Exploratory Testing Automation · CSE 450 · BUET</a:t>
+            </a:r>
+            <a:endParaRPr lang="en-US" sz="1200" dirty="0"/>
+          </a:p>
+        </p:txBody>
+      </p:sp>
+      <p:sp>
+        <p:nvSpPr>
+          <p:cNvPr id="9" name="Text 6"/>
+          <p:cNvSpPr/>
+          <p:nvPr/>
+        </p:nvSpPr>
+        <p:spPr>
+          <a:xfrm>
+            <a:off x="11196290" y="6238280"/>
+            <a:ext cx="233710" cy="238720"/>
+          </a:xfrm>
+          <a:prstGeom prst="rect">
+            <a:avLst/>
+          </a:prstGeom>
+          <a:noFill/>
+          <a:ln/>
+        </p:spPr>
+        <p:txBody>
+          <a:bodyPr wrap="square" lIns="0" tIns="0" rIns="0" bIns="0" rtlCol="0" anchor="t">
+            <a:normAutofit/>
+          </a:bodyPr>
+          <a:lstStyle/>
+          <a:p>
+            <a:pPr marL="0" indent="0" algn="l">
+              <a:lnSpc>
+                <a:spcPts val="1680"/>
+              </a:lnSpc>
+              <a:buNone/>
+            </a:pPr>
+            <a:r>
+              <a:rPr lang="en-US" sz="1200" dirty="0">
+                <a:solidFill>
+                  <a:srgbClr val="55697A"/>
+                </a:solidFill>
+                <a:latin typeface="IBM Plex Sans" pitchFamily="34" charset="0"/>
+                <a:ea typeface="IBM Plex Sans" pitchFamily="34" charset="-122"/>
+                <a:cs typeface="IBM Plex Sans" pitchFamily="34" charset="-120"/>
+              </a:rPr>
+              <a:t>25</a:t>
+            </a:r>
+            <a:endParaRPr lang="en-US" sz="1200" dirty="0"/>
+          </a:p>
+        </p:txBody>
+      </p:sp>
+    </p:spTree>
+  </p:cSld>
+  <p:clrMapOvr>
+    <a:masterClrMapping/>
+  </p:clrMapOvr>
+</p:sld>
+</file>
+
+<file path=ppt/slides/slide7.xml><?xml version="1.0" encoding="utf-8"?>
+<p:sld xmlns:a="http://schemas.openxmlformats.org/drawingml/2006/main" xmlns:r="http://schemas.openxmlformats.org/officeDocument/2006/relationships" xmlns:p="http://schemas.openxmlformats.org/presentationml/2006/main">
+  <p:cSld name="Slide 24">
+    <p:bg>
+      <p:bgPr>
+        <a:solidFill>
+          <a:srgbClr val="EDF2F4"/>
+        </a:solidFill>
+        <a:effectLst/>
+      </p:bgPr>
+    </p:bg>
+    <p:spTree>
+      <p:nvGrpSpPr>
+        <p:cNvPr id="1" name=""/>
+        <p:cNvGrpSpPr/>
+        <p:nvPr/>
+      </p:nvGrpSpPr>
+      <p:grpSpPr>
+        <a:xfrm>
+          <a:off x="0" y="0"/>
+          <a:ext cx="0" cy="0"/>
+          <a:chOff x="0" y="0"/>
+          <a:chExt cx="0" cy="0"/>
+        </a:xfrm>
+      </p:grpSpPr>
+      <p:sp>
+        <p:nvSpPr>
+          <p:cNvPr id="2" name="Text 0"/>
+          <p:cNvSpPr/>
+          <p:nvPr/>
+        </p:nvSpPr>
+        <p:spPr>
+          <a:xfrm>
+            <a:off x="812800" y="508000"/>
+            <a:ext cx="10883392" cy="234454"/>
+          </a:xfrm>
+          <a:prstGeom prst="rect">
+            <a:avLst/>
+          </a:prstGeom>
+          <a:noFill/>
+          <a:ln/>
+        </p:spPr>
+        <p:txBody>
+          <a:bodyPr wrap="square" lIns="0" tIns="0" rIns="0" bIns="0" rtlCol="0" anchor="t">
+            <a:normAutofit/>
+          </a:bodyPr>
+          <a:lstStyle/>
+          <a:p>
+            <a:pPr marL="0" indent="0" algn="l">
+              <a:lnSpc>
+                <a:spcPts val="1675"/>
+              </a:lnSpc>
+              <a:buNone/>
+            </a:pPr>
+            <a:r>
+              <a:rPr lang="en-US" sz="1196" b="1" kern="0" spc="100" dirty="0">
+                <a:solidFill>
+                  <a:srgbClr val="0B6A8F"/>
+                </a:solidFill>
+                <a:latin typeface="IBM Plex Sans" pitchFamily="34" charset="0"/>
+                <a:ea typeface="IBM Plex Sans" pitchFamily="34" charset="-122"/>
+                <a:cs typeface="IBM Plex Sans" pitchFamily="34" charset="-120"/>
+              </a:rPr>
+              <a:t>EXECUTOR · THE APP MAP</a:t>
+            </a:r>
+            <a:endParaRPr lang="en-US" sz="1196" dirty="0"/>
+          </a:p>
+        </p:txBody>
+      </p:sp>
+      <p:sp>
+        <p:nvSpPr>
+          <p:cNvPr id="3" name="Text 1"/>
+          <p:cNvSpPr/>
+          <p:nvPr/>
+        </p:nvSpPr>
+        <p:spPr>
+          <a:xfrm>
+            <a:off x="812800" y="793254"/>
+            <a:ext cx="10883392" cy="436066"/>
+          </a:xfrm>
+          <a:prstGeom prst="rect">
+            <a:avLst/>
+          </a:prstGeom>
+          <a:noFill/>
+          <a:ln/>
+        </p:spPr>
+        <p:txBody>
+          <a:bodyPr wrap="square" lIns="0" tIns="0" rIns="0" bIns="0" rtlCol="0" anchor="t">
+            <a:normAutofit/>
+          </a:bodyPr>
+          <a:lstStyle/>
+          <a:p>
+            <a:pPr marL="0" indent="0" algn="l">
+              <a:lnSpc>
+                <a:spcPts val="3269"/>
+              </a:lnSpc>
+              <a:buNone/>
+            </a:pPr>
+            <a:r>
+              <a:rPr lang="en-US" sz="2972" b="1" dirty="0">
+                <a:solidFill>
+                  <a:srgbClr val="14303D"/>
+                </a:solidFill>
+                <a:latin typeface="Source Serif 4" pitchFamily="34" charset="0"/>
+                <a:ea typeface="Source Serif 4" pitchFamily="34" charset="-122"/>
+                <a:cs typeface="Source Serif 4" pitchFamily="34" charset="-120"/>
+              </a:rPr>
+              <a:t>Every run's path through the map</a:t>
+            </a:r>
+            <a:endParaRPr lang="en-US" sz="2972" dirty="0"/>
+          </a:p>
+        </p:txBody>
+      </p:sp>
+      <p:sp>
+        <p:nvSpPr>
+          <p:cNvPr id="4" name="Shape 2"/>
+          <p:cNvSpPr/>
+          <p:nvPr/>
+        </p:nvSpPr>
+        <p:spPr>
+          <a:xfrm>
+            <a:off x="812800" y="1313160"/>
+            <a:ext cx="6350000" cy="4826000"/>
+          </a:xfrm>
+          <a:prstGeom prst="roundRect">
+            <a:avLst>
+              <a:gd name="adj" fmla="val 2105"/>
+            </a:avLst>
+          </a:prstGeom>
+          <a:solidFill>
+            <a:srgbClr val="FDFEFE"/>
+          </a:solidFill>
+          <a:ln/>
+        </p:spPr>
+        <p:txBody>
+          <a:bodyPr/>
+          <a:lstStyle/>
+          <a:p>
+            <a:endParaRPr lang="en-US"/>
+          </a:p>
+        </p:txBody>
+      </p:sp>
+      <p:pic>
+        <p:nvPicPr>
+          <p:cNvPr id="5" name="Image 0" descr="Dashboard panel Live App Model, 79 states and 797 transitions: a graph of screens with the path of test TC-088 highlighted in orange through Contact List, Option Menu Search, Organize, Import 88 contacts and Close sheet, and beside it the stored screenshot of Contact List number 12, 19 visits and 14 controls"/>
+          <p:cNvPicPr>
+            <a:picLocks noChangeAspect="1"/>
+          </p:cNvPicPr>
+          <p:nvPr/>
+        </p:nvPicPr>
+        <p:blipFill>
+          <a:blip r:embed="rId3"/>
+          <a:stretch>
+            <a:fillRect/>
+          </a:stretch>
+        </p:blipFill>
+        <p:spPr>
+          <a:xfrm>
+            <a:off x="937117" y="1319510"/>
+            <a:ext cx="6101366" cy="4813300"/>
+          </a:xfrm>
+          <a:prstGeom prst="rect">
+            <a:avLst/>
+          </a:prstGeom>
+        </p:spPr>
+      </p:pic>
+      <p:sp>
+        <p:nvSpPr>
+          <p:cNvPr id="6" name="Shape 3"/>
+          <p:cNvSpPr/>
+          <p:nvPr/>
+        </p:nvSpPr>
+        <p:spPr>
+          <a:xfrm>
+            <a:off x="815975" y="1316335"/>
+            <a:ext cx="6343650" cy="4819650"/>
+          </a:xfrm>
+          <a:prstGeom prst="roundRect">
+            <a:avLst>
+              <a:gd name="adj" fmla="val 2042"/>
+            </a:avLst>
+          </a:prstGeom>
+          <a:noFill/>
+          <a:ln w="6350">
+            <a:solidFill>
+              <a:srgbClr val="D6E1E6"/>
+            </a:solidFill>
+            <a:prstDash val="solid"/>
+          </a:ln>
+        </p:spPr>
+        <p:txBody>
+          <a:bodyPr/>
+          <a:lstStyle/>
+          <a:p>
+            <a:endParaRPr lang="en-US"/>
+          </a:p>
+        </p:txBody>
+      </p:sp>
+      <p:sp>
+        <p:nvSpPr>
+          <p:cNvPr id="7" name="Text 4"/>
+          <p:cNvSpPr/>
+          <p:nvPr/>
+        </p:nvSpPr>
+        <p:spPr>
+          <a:xfrm>
+            <a:off x="7416800" y="2496939"/>
+            <a:ext cx="4081272" cy="274290"/>
+          </a:xfrm>
+          <a:prstGeom prst="rect">
+            <a:avLst/>
+          </a:prstGeom>
+          <a:noFill/>
+          <a:ln/>
+        </p:spPr>
+        <p:txBody>
+          <a:bodyPr wrap="square" lIns="0" tIns="0" rIns="0" bIns="0" rtlCol="0" anchor="t">
+            <a:normAutofit/>
+          </a:bodyPr>
+          <a:lstStyle/>
+          <a:p>
+            <a:pPr marL="0" indent="0" algn="l">
+              <a:lnSpc>
+                <a:spcPts val="1960"/>
+              </a:lnSpc>
+              <a:buNone/>
+            </a:pPr>
+            <a:r>
+              <a:rPr lang="en-US" sz="1400" b="1" dirty="0">
+                <a:solidFill>
+                  <a:srgbClr val="0B6A8F"/>
+                </a:solidFill>
+                <a:latin typeface="IBM Plex Sans" pitchFamily="34" charset="0"/>
+                <a:ea typeface="IBM Plex Sans" pitchFamily="34" charset="-122"/>
+                <a:cs typeface="IBM Plex Sans" pitchFamily="34" charset="-120"/>
+              </a:rPr>
+              <a:t>79 screens · 797 transitions</a:t>
+            </a:r>
+            <a:endParaRPr lang="en-US" sz="1400" dirty="0"/>
+          </a:p>
+        </p:txBody>
+      </p:sp>
+      <p:sp>
+        <p:nvSpPr>
+          <p:cNvPr id="8" name="Text 5"/>
+          <p:cNvSpPr/>
+          <p:nvPr/>
+        </p:nvSpPr>
+        <p:spPr>
+          <a:xfrm>
+            <a:off x="7416800" y="2771229"/>
+            <a:ext cx="4081272" cy="452041"/>
+          </a:xfrm>
+          <a:prstGeom prst="rect">
+            <a:avLst/>
+          </a:prstGeom>
+          <a:noFill/>
+          <a:ln/>
+        </p:spPr>
+        <p:txBody>
+          <a:bodyPr wrap="square" lIns="0" tIns="0" rIns="0" bIns="0" rtlCol="0" anchor="t">
+            <a:normAutofit/>
+          </a:bodyPr>
+          <a:lstStyle/>
+          <a:p>
+            <a:pPr marL="0" indent="0" algn="l">
+              <a:lnSpc>
+                <a:spcPts val="1680"/>
+              </a:lnSpc>
+              <a:buNone/>
+            </a:pPr>
+            <a:r>
+              <a:rPr lang="en-US" sz="1200" dirty="0">
+                <a:solidFill>
+                  <a:srgbClr val="46596A"/>
+                </a:solidFill>
+                <a:latin typeface="IBM Plex Sans" pitchFamily="34" charset="0"/>
+                <a:ea typeface="IBM Plex Sans" pitchFamily="34" charset="-122"/>
+                <a:cs typeface="IBM Plex Sans" pitchFamily="34" charset="-120"/>
+              </a:rPr>
+              <a:t>The contacts app, mapped only from screens the agent actually reached.</a:t>
+            </a:r>
+            <a:endParaRPr lang="en-US" sz="1200" dirty="0"/>
+          </a:p>
+        </p:txBody>
+      </p:sp>
+      <p:sp>
+        <p:nvSpPr>
+          <p:cNvPr id="9" name="Text 6"/>
+          <p:cNvSpPr/>
+          <p:nvPr/>
+        </p:nvSpPr>
+        <p:spPr>
+          <a:xfrm>
+            <a:off x="7416800" y="3375670"/>
+            <a:ext cx="4081272" cy="274290"/>
+          </a:xfrm>
+          <a:prstGeom prst="rect">
+            <a:avLst/>
+          </a:prstGeom>
+          <a:noFill/>
+          <a:ln/>
+        </p:spPr>
+        <p:txBody>
+          <a:bodyPr wrap="square" lIns="0" tIns="0" rIns="0" bIns="0" rtlCol="0" anchor="t">
+            <a:normAutofit/>
+          </a:bodyPr>
+          <a:lstStyle/>
+          <a:p>
+            <a:pPr marL="0" indent="0" algn="l">
+              <a:lnSpc>
+                <a:spcPts val="1960"/>
+              </a:lnSpc>
+              <a:buNone/>
+            </a:pPr>
+            <a:r>
+              <a:rPr lang="en-US" sz="1400" b="1" dirty="0">
+                <a:solidFill>
+                  <a:srgbClr val="0B6A8F"/>
+                </a:solidFill>
+                <a:latin typeface="IBM Plex Sans" pitchFamily="34" charset="0"/>
+                <a:ea typeface="IBM Plex Sans" pitchFamily="34" charset="-122"/>
+                <a:cs typeface="IBM Plex Sans" pitchFamily="34" charset="-120"/>
+              </a:rPr>
+              <a:t>Pick a run, see its path</a:t>
+            </a:r>
+            <a:endParaRPr lang="en-US" sz="1400" dirty="0"/>
+          </a:p>
+        </p:txBody>
+      </p:sp>
+      <p:sp>
+        <p:nvSpPr>
+          <p:cNvPr id="10" name="Text 7"/>
+          <p:cNvSpPr/>
+          <p:nvPr/>
+        </p:nvSpPr>
+        <p:spPr>
+          <a:xfrm>
+            <a:off x="7416800" y="3649960"/>
+            <a:ext cx="4081272" cy="452041"/>
+          </a:xfrm>
+          <a:prstGeom prst="rect">
+            <a:avLst/>
+          </a:prstGeom>
+          <a:noFill/>
+          <a:ln/>
+        </p:spPr>
+        <p:txBody>
+          <a:bodyPr wrap="square" lIns="0" tIns="0" rIns="0" bIns="0" rtlCol="0" anchor="t">
+            <a:normAutofit/>
+          </a:bodyPr>
+          <a:lstStyle/>
+          <a:p>
+            <a:pPr marL="0" indent="0" algn="l">
+              <a:lnSpc>
+                <a:spcPts val="1680"/>
+              </a:lnSpc>
+              <a:buNone/>
+            </a:pPr>
+            <a:r>
+              <a:rPr lang="en-US" sz="1200" dirty="0">
+                <a:solidFill>
+                  <a:srgbClr val="46596A"/>
+                </a:solidFill>
+                <a:latin typeface="IBM Plex Sans" pitchFamily="34" charset="0"/>
+                <a:ea typeface="IBM Plex Sans" pitchFamily="34" charset="-122"/>
+                <a:cs typeface="IBM Plex Sans" pitchFamily="34" charset="-120"/>
+              </a:rPr>
+              <a:t>In orange, the screens TC-088 visited, in order, read from that run's log.</a:t>
+            </a:r>
+            <a:endParaRPr lang="en-US" sz="1200" dirty="0"/>
+          </a:p>
+        </p:txBody>
+      </p:sp>
+      <p:sp>
+        <p:nvSpPr>
+          <p:cNvPr id="11" name="Text 8"/>
+          <p:cNvSpPr/>
+          <p:nvPr/>
+        </p:nvSpPr>
+        <p:spPr>
+          <a:xfrm>
+            <a:off x="7416800" y="4254401"/>
+            <a:ext cx="4081272" cy="274290"/>
+          </a:xfrm>
+          <a:prstGeom prst="rect">
+            <a:avLst/>
+          </a:prstGeom>
+          <a:noFill/>
+          <a:ln/>
+        </p:spPr>
+        <p:txBody>
+          <a:bodyPr wrap="square" lIns="0" tIns="0" rIns="0" bIns="0" rtlCol="0" anchor="t">
+            <a:normAutofit/>
+          </a:bodyPr>
+          <a:lstStyle/>
+          <a:p>
+            <a:pPr marL="0" indent="0" algn="l">
+              <a:lnSpc>
+                <a:spcPts val="1960"/>
+              </a:lnSpc>
+              <a:buNone/>
+            </a:pPr>
+            <a:r>
+              <a:rPr lang="en-US" sz="1400" b="1" dirty="0">
+                <a:solidFill>
+                  <a:srgbClr val="0B6A8F"/>
+                </a:solidFill>
+                <a:latin typeface="IBM Plex Sans" pitchFamily="34" charset="0"/>
+                <a:ea typeface="IBM Plex Sans" pitchFamily="34" charset="-122"/>
+                <a:cs typeface="IBM Plex Sans" pitchFamily="34" charset="-120"/>
+              </a:rPr>
+              <a:t>Click a screen</a:t>
+            </a:r>
+            <a:endParaRPr lang="en-US" sz="1400" dirty="0"/>
+          </a:p>
+        </p:txBody>
+      </p:sp>
+      <p:sp>
+        <p:nvSpPr>
+          <p:cNvPr id="12" name="Text 9"/>
+          <p:cNvSpPr/>
+          <p:nvPr/>
+        </p:nvSpPr>
+        <p:spPr>
+          <a:xfrm>
+            <a:off x="7416800" y="4528691"/>
+            <a:ext cx="4081272" cy="452041"/>
+          </a:xfrm>
+          <a:prstGeom prst="rect">
+            <a:avLst/>
+          </a:prstGeom>
+          <a:noFill/>
+          <a:ln/>
+        </p:spPr>
+        <p:txBody>
+          <a:bodyPr wrap="square" lIns="0" tIns="0" rIns="0" bIns="0" rtlCol="0" anchor="t">
+            <a:normAutofit/>
+          </a:bodyPr>
+          <a:lstStyle/>
+          <a:p>
+            <a:pPr marL="0" indent="0" algn="l">
+              <a:lnSpc>
+                <a:spcPts val="1680"/>
+              </a:lnSpc>
+              <a:buNone/>
+            </a:pPr>
+            <a:r>
+              <a:rPr lang="en-US" sz="1200" dirty="0">
+                <a:solidFill>
+                  <a:srgbClr val="46596A"/>
+                </a:solidFill>
+                <a:latin typeface="IBM Plex Sans" pitchFamily="34" charset="0"/>
+                <a:ea typeface="IBM Plex Sans" pitchFamily="34" charset="-122"/>
+                <a:cs typeface="IBM Plex Sans" pitchFamily="34" charset="-120"/>
+              </a:rPr>
+              <a:t>Its stored screenshot, how often it was visited, and its controls.</a:t>
+            </a:r>
+            <a:endParaRPr lang="en-US" sz="1200" dirty="0"/>
+          </a:p>
+        </p:txBody>
+      </p:sp>
+      <p:sp>
+        <p:nvSpPr>
+          <p:cNvPr id="13" name="Text 10"/>
+          <p:cNvSpPr/>
+          <p:nvPr/>
+        </p:nvSpPr>
+        <p:spPr>
+          <a:xfrm>
+            <a:off x="812800" y="6238280"/>
+            <a:ext cx="3459976" cy="238720"/>
+          </a:xfrm>
+          <a:prstGeom prst="rect">
+            <a:avLst/>
+          </a:prstGeom>
+          <a:noFill/>
+          <a:ln/>
+        </p:spPr>
+        <p:txBody>
+          <a:bodyPr wrap="square" lIns="0" tIns="0" rIns="0" bIns="0" rtlCol="0" anchor="t">
+            <a:normAutofit/>
+          </a:bodyPr>
+          <a:lstStyle/>
+          <a:p>
+            <a:pPr marL="0" indent="0" algn="l">
+              <a:lnSpc>
+                <a:spcPts val="1680"/>
+              </a:lnSpc>
+              <a:buNone/>
+            </a:pPr>
+            <a:r>
+              <a:rPr lang="en-US" sz="1200" dirty="0">
+                <a:solidFill>
+                  <a:srgbClr val="55697A"/>
+                </a:solidFill>
+                <a:latin typeface="IBM Plex Sans" pitchFamily="34" charset="0"/>
+                <a:ea typeface="IBM Plex Sans" pitchFamily="34" charset="-122"/>
+                <a:cs typeface="IBM Plex Sans" pitchFamily="34" charset="-120"/>
+              </a:rPr>
+              <a:t>Exploratory Testing Automation · CSE 450 · BUET</a:t>
+            </a:r>
+            <a:endParaRPr lang="en-US" sz="1200" dirty="0"/>
+          </a:p>
+        </p:txBody>
+      </p:sp>
+      <p:sp>
+        <p:nvSpPr>
+          <p:cNvPr id="14" name="Text 11"/>
+          <p:cNvSpPr/>
+          <p:nvPr/>
+        </p:nvSpPr>
+        <p:spPr>
+          <a:xfrm>
+            <a:off x="11196290" y="6238280"/>
+            <a:ext cx="233710" cy="238720"/>
+          </a:xfrm>
+          <a:prstGeom prst="rect">
+            <a:avLst/>
+          </a:prstGeom>
+          <a:noFill/>
+          <a:ln/>
+        </p:spPr>
+        <p:txBody>
+          <a:bodyPr wrap="square" lIns="0" tIns="0" rIns="0" bIns="0" rtlCol="0" anchor="t">
+            <a:normAutofit/>
+          </a:bodyPr>
+          <a:lstStyle/>
+          <a:p>
+            <a:pPr marL="0" indent="0" algn="l">
+              <a:lnSpc>
+                <a:spcPts val="1680"/>
+              </a:lnSpc>
+              <a:buNone/>
+            </a:pPr>
+            <a:r>
+              <a:rPr lang="en-US" sz="1200" dirty="0">
+                <a:solidFill>
+                  <a:srgbClr val="55697A"/>
+                </a:solidFill>
+                <a:latin typeface="IBM Plex Sans" pitchFamily="34" charset="0"/>
+                <a:ea typeface="IBM Plex Sans" pitchFamily="34" charset="-122"/>
+                <a:cs typeface="IBM Plex Sans" pitchFamily="34" charset="-120"/>
+              </a:rPr>
+              <a:t>26</a:t>
+            </a:r>
+            <a:endParaRPr lang="en-US" sz="1200" dirty="0"/>
+          </a:p>
+        </p:txBody>
+      </p:sp>
+    </p:spTree>
+  </p:cSld>
+  <p:clrMapOvr>
+    <a:masterClrMapping/>
+  </p:clrMapOvr>
+</p:sld>
+</file>
+
+<file path=ppt/slides/slide8.xml><?xml version="1.0" encoding="utf-8"?>
+<p:sld xmlns:a="http://schemas.openxmlformats.org/drawingml/2006/main" xmlns:r="http://schemas.openxmlformats.org/officeDocument/2006/relationships" xmlns:p="http://schemas.openxmlformats.org/presentationml/2006/main">
+  <p:cSld name="Slide 3">
+    <p:bg>
+      <p:bgPr>
+        <a:solidFill>
+          <a:srgbClr val="F6F8F7"/>
+        </a:solidFill>
+        <a:effectLst/>
+      </p:bgPr>
+    </p:bg>
+    <p:spTree>
+      <p:nvGrpSpPr>
+        <p:cNvPr id="1" name=""/>
+        <p:cNvGrpSpPr/>
+        <p:nvPr/>
+      </p:nvGrpSpPr>
+      <p:grpSpPr>
+        <a:xfrm>
+          <a:off x="0" y="0"/>
+          <a:ext cx="0" cy="0"/>
+          <a:chOff x="0" y="0"/>
+          <a:chExt cx="0" cy="0"/>
+        </a:xfrm>
+      </p:grpSpPr>
+      <p:sp>
+        <p:nvSpPr>
+          <p:cNvPr id="2" name="Text 0"/>
+          <p:cNvSpPr txBox="1"/>
+          <p:nvPr/>
+        </p:nvSpPr>
+        <p:spPr>
+          <a:xfrm>
+            <a:off x="813816" y="813816"/>
+            <a:ext cx="9646920" cy="237744"/>
+          </a:xfrm>
+          <a:prstGeom prst="rect">
+            <a:avLst/>
+          </a:prstGeom>
+          <a:noFill/>
+          <a:ln/>
+        </p:spPr>
+        <p:txBody>
+          <a:bodyPr wrap="square" lIns="0" tIns="0" rIns="0" bIns="0" rtlCol="0" anchor="ctr"/>
+          <a:lstStyle/>
+          <a:p>
+            <a:pPr marL="0" indent="0">
+              <a:buNone/>
+            </a:pPr>
+            <a:r>
+              <a:rPr lang="en-US" sz="1200" b="1" kern="0" spc="150" dirty="0">
+                <a:solidFill>
+                  <a:srgbClr val="0B6A8F"/>
+                </a:solidFill>
+                <a:latin typeface="IBM Plex Sans" pitchFamily="34" charset="0"/>
+                <a:ea typeface="IBM Plex Sans" pitchFamily="34" charset="-122"/>
+                <a:cs typeface="IBM Plex Sans" pitchFamily="34" charset="-120"/>
+              </a:rPr>
+              <a:t>WEB EXECUTOR · PLAYWRIGHT</a:t>
+            </a:r>
+            <a:endParaRPr lang="en-US" sz="1200" dirty="0"/>
+          </a:p>
+        </p:txBody>
+      </p:sp>
+      <p:sp>
+        <p:nvSpPr>
+          <p:cNvPr id="3" name="Text 1"/>
+          <p:cNvSpPr txBox="1"/>
+          <p:nvPr/>
+        </p:nvSpPr>
+        <p:spPr>
+          <a:xfrm>
+            <a:off x="813816" y="1106424"/>
+            <a:ext cx="9646920" cy="448056"/>
+          </a:xfrm>
+          <a:prstGeom prst="rect">
+            <a:avLst/>
+          </a:prstGeom>
+          <a:noFill/>
+          <a:ln/>
+        </p:spPr>
+        <p:txBody>
+          <a:bodyPr wrap="square" lIns="0" tIns="0" rIns="0" bIns="0" rtlCol="0" anchor="ctr"/>
+          <a:lstStyle/>
+          <a:p>
+            <a:pPr marL="0" indent="0">
+              <a:buNone/>
+            </a:pPr>
+            <a:r>
+              <a:rPr lang="en-US" sz="3000" b="1" dirty="0">
+                <a:solidFill>
+                  <a:srgbClr val="14303D"/>
+                </a:solidFill>
+                <a:latin typeface="Source Serif 4" pitchFamily="34" charset="0"/>
+                <a:ea typeface="Source Serif 4" pitchFamily="34" charset="-122"/>
+                <a:cs typeface="Source Serif 4" pitchFamily="34" charset="-120"/>
+              </a:rPr>
+              <a:t>The same planner, a browser instead of a device</a:t>
+            </a:r>
+            <a:endParaRPr lang="en-US" sz="3000" dirty="0"/>
+          </a:p>
+        </p:txBody>
+      </p:sp>
+      <p:sp>
+        <p:nvSpPr>
+          <p:cNvPr id="4" name="Text 2"/>
+          <p:cNvSpPr txBox="1"/>
+          <p:nvPr/>
+        </p:nvSpPr>
+        <p:spPr>
+          <a:xfrm>
+            <a:off x="813816" y="1645920"/>
+            <a:ext cx="9646920" cy="256032"/>
+          </a:xfrm>
+          <a:prstGeom prst="rect">
+            <a:avLst/>
+          </a:prstGeom>
+          <a:noFill/>
+          <a:ln/>
+        </p:spPr>
+        <p:txBody>
+          <a:bodyPr wrap="square" lIns="0" tIns="0" rIns="0" bIns="0" rtlCol="0" anchor="ctr"/>
+          <a:lstStyle/>
+          <a:p>
+            <a:pPr marL="0" indent="0">
+              <a:buNone/>
+            </a:pPr>
+            <a:r>
+              <a:rPr lang="en-US" sz="1200" dirty="0">
+                <a:solidFill>
+                  <a:srgbClr val="46596A"/>
+                </a:solidFill>
+                <a:latin typeface="IBM Plex Sans" pitchFamily="34" charset="0"/>
+                <a:ea typeface="IBM Plex Sans" pitchFamily="34" charset="-122"/>
+                <a:cs typeface="IBM Plex Sans" pitchFamily="34" charset="-120"/>
+              </a:rPr>
+              <a:t>A second executor behind the same contract. The planner does not know which one will run.</a:t>
+            </a:r>
+            <a:endParaRPr lang="en-US" sz="1200" dirty="0"/>
+          </a:p>
+        </p:txBody>
+      </p:sp>
+      <p:sp>
+        <p:nvSpPr>
+          <p:cNvPr id="5" name="Shape 3"/>
+          <p:cNvSpPr/>
+          <p:nvPr/>
+        </p:nvSpPr>
+        <p:spPr>
+          <a:xfrm>
+            <a:off x="813816" y="2057400"/>
+            <a:ext cx="3401568" cy="3246120"/>
+          </a:xfrm>
+          <a:prstGeom prst="rect">
+            <a:avLst/>
+          </a:prstGeom>
+          <a:solidFill>
+            <a:srgbClr val="FFFFFF"/>
+          </a:solidFill>
+          <a:ln w="12700">
+            <a:solidFill>
+              <a:srgbClr val="D5E0E5"/>
+            </a:solidFill>
+            <a:prstDash val="solid"/>
+          </a:ln>
+        </p:spPr>
+        <p:txBody>
+          <a:bodyPr/>
+          <a:lstStyle/>
+          <a:p>
+            <a:endParaRPr lang="en-US"/>
+          </a:p>
+        </p:txBody>
+      </p:sp>
+      <p:sp>
+        <p:nvSpPr>
+          <p:cNvPr id="6" name="Text 4"/>
+          <p:cNvSpPr txBox="1"/>
+          <p:nvPr/>
+        </p:nvSpPr>
+        <p:spPr>
+          <a:xfrm>
+            <a:off x="1051560" y="2267712"/>
+            <a:ext cx="2926080" cy="292608"/>
+          </a:xfrm>
+          <a:prstGeom prst="rect">
+            <a:avLst/>
+          </a:prstGeom>
+          <a:noFill/>
+          <a:ln/>
+        </p:spPr>
+        <p:txBody>
+          <a:bodyPr wrap="square" lIns="0" tIns="0" rIns="0" bIns="0" rtlCol="0" anchor="ctr"/>
+          <a:lstStyle/>
+          <a:p>
+            <a:pPr marL="0" indent="0">
+              <a:buNone/>
+            </a:pPr>
+            <a:r>
+              <a:rPr lang="en-US" sz="1350" b="1" dirty="0">
+                <a:solidFill>
+                  <a:srgbClr val="0B6A8F"/>
+                </a:solidFill>
+                <a:latin typeface="IBM Plex Sans" pitchFamily="34" charset="0"/>
+                <a:ea typeface="IBM Plex Sans" pitchFamily="34" charset="-122"/>
+                <a:cs typeface="IBM Plex Sans" pitchFamily="34" charset="-120"/>
+              </a:rPr>
+              <a:t>What it observes</a:t>
+            </a:r>
+            <a:endParaRPr lang="en-US" sz="1350" dirty="0"/>
+          </a:p>
+        </p:txBody>
+      </p:sp>
+      <p:sp>
+        <p:nvSpPr>
+          <p:cNvPr id="7" name="Text 5"/>
+          <p:cNvSpPr txBox="1"/>
+          <p:nvPr/>
+        </p:nvSpPr>
+        <p:spPr>
+          <a:xfrm>
+            <a:off x="1088136" y="2633472"/>
+            <a:ext cx="2880360" cy="2514600"/>
+          </a:xfrm>
+          <a:prstGeom prst="rect">
+            <a:avLst/>
+          </a:prstGeom>
+          <a:noFill/>
+          <a:ln/>
+        </p:spPr>
+        <p:txBody>
+          <a:bodyPr wrap="square" lIns="0" tIns="0" rIns="0" bIns="0" rtlCol="0" anchor="ctr"/>
+          <a:lstStyle/>
+          <a:p>
+            <a:pPr marL="342900" indent="-342900">
+              <a:spcAft>
+                <a:spcPts val="800"/>
+              </a:spcAft>
+              <a:buSzPct val="100000"/>
+              <a:buChar char="•"/>
+            </a:pPr>
+            <a:r>
+              <a:rPr lang="en-US" sz="1600" dirty="0">
+                <a:solidFill>
+                  <a:srgbClr val="46596A"/>
+                </a:solidFill>
+                <a:latin typeface="IBM Plex Sans" pitchFamily="34" charset="0"/>
+                <a:ea typeface="IBM Plex Sans" pitchFamily="34" charset="-122"/>
+                <a:cs typeface="IBM Plex Sans" pitchFamily="34" charset="-120"/>
+              </a:rPr>
+              <a:t>An accessibility style description of the DOM, not screenshots</a:t>
+            </a:r>
+            <a:endParaRPr lang="en-US" sz="1600" dirty="0"/>
+          </a:p>
+          <a:p>
+            <a:pPr marL="342900" indent="-342900">
+              <a:spcAft>
+                <a:spcPts val="800"/>
+              </a:spcAft>
+              <a:buSzPct val="100000"/>
+              <a:buChar char="•"/>
+            </a:pPr>
+            <a:r>
+              <a:rPr lang="en-US" sz="1600" dirty="0">
+                <a:solidFill>
+                  <a:srgbClr val="46596A"/>
+                </a:solidFill>
+                <a:latin typeface="IBM Plex Sans" pitchFamily="34" charset="0"/>
+                <a:ea typeface="IBM Plex Sans" pitchFamily="34" charset="-122"/>
+                <a:cs typeface="IBM Plex Sans" pitchFamily="34" charset="-120"/>
+              </a:rPr>
+              <a:t>role and name, the same vocabulary the Android executor uses</a:t>
+            </a:r>
+            <a:endParaRPr lang="en-US" sz="1600" dirty="0"/>
+          </a:p>
+          <a:p>
+            <a:pPr marL="342900" indent="-342900">
+              <a:spcAft>
+                <a:spcPts val="800"/>
+              </a:spcAft>
+              <a:buSzPct val="100000"/>
+              <a:buChar char="•"/>
+            </a:pPr>
+            <a:r>
+              <a:rPr lang="en-US" sz="1600" dirty="0">
+                <a:solidFill>
+                  <a:srgbClr val="46596A"/>
+                </a:solidFill>
+                <a:latin typeface="IBM Plex Sans" pitchFamily="34" charset="0"/>
+                <a:ea typeface="IBM Plex Sans" pitchFamily="34" charset="-122"/>
+                <a:cs typeface="IBM Plex Sans" pitchFamily="34" charset="-120"/>
+              </a:rPr>
+              <a:t>native HTML5 validation, including the browser's own message</a:t>
+            </a:r>
+            <a:endParaRPr lang="en-US" sz="1600" dirty="0"/>
+          </a:p>
+        </p:txBody>
+      </p:sp>
+      <p:sp>
+        <p:nvSpPr>
+          <p:cNvPr id="8" name="Shape 6"/>
+          <p:cNvSpPr/>
+          <p:nvPr/>
+        </p:nvSpPr>
+        <p:spPr>
+          <a:xfrm>
+            <a:off x="4379976" y="2057400"/>
+            <a:ext cx="3401568" cy="3246120"/>
+          </a:xfrm>
+          <a:prstGeom prst="rect">
+            <a:avLst/>
+          </a:prstGeom>
+          <a:solidFill>
+            <a:srgbClr val="FFFFFF"/>
+          </a:solidFill>
+          <a:ln w="12700">
+            <a:solidFill>
+              <a:srgbClr val="D5E0E5"/>
+            </a:solidFill>
+            <a:prstDash val="solid"/>
+          </a:ln>
+        </p:spPr>
+        <p:txBody>
+          <a:bodyPr/>
+          <a:lstStyle/>
+          <a:p>
+            <a:endParaRPr lang="en-US"/>
+          </a:p>
+        </p:txBody>
+      </p:sp>
+      <p:sp>
+        <p:nvSpPr>
+          <p:cNvPr id="9" name="Text 7"/>
+          <p:cNvSpPr txBox="1"/>
+          <p:nvPr/>
+        </p:nvSpPr>
+        <p:spPr>
+          <a:xfrm>
+            <a:off x="4617720" y="2267712"/>
+            <a:ext cx="2926080" cy="292608"/>
+          </a:xfrm>
+          <a:prstGeom prst="rect">
+            <a:avLst/>
+          </a:prstGeom>
+          <a:noFill/>
+          <a:ln/>
+        </p:spPr>
+        <p:txBody>
+          <a:bodyPr wrap="square" lIns="0" tIns="0" rIns="0" bIns="0" rtlCol="0" anchor="ctr"/>
+          <a:lstStyle/>
+          <a:p>
+            <a:pPr marL="0" indent="0">
+              <a:buNone/>
+            </a:pPr>
+            <a:r>
+              <a:rPr lang="en-US" sz="1350" b="1" dirty="0">
+                <a:solidFill>
+                  <a:srgbClr val="14303D"/>
+                </a:solidFill>
+                <a:latin typeface="IBM Plex Sans" pitchFamily="34" charset="0"/>
+                <a:ea typeface="IBM Plex Sans" pitchFamily="34" charset="-122"/>
+                <a:cs typeface="IBM Plex Sans" pitchFamily="34" charset="-120"/>
+              </a:rPr>
+              <a:t>What it can do</a:t>
+            </a:r>
+            <a:endParaRPr lang="en-US" sz="1350" dirty="0"/>
+          </a:p>
+        </p:txBody>
+      </p:sp>
+      <p:sp>
+        <p:nvSpPr>
+          <p:cNvPr id="10" name="Text 8"/>
+          <p:cNvSpPr txBox="1"/>
+          <p:nvPr/>
+        </p:nvSpPr>
+        <p:spPr>
+          <a:xfrm>
+            <a:off x="4654296" y="2633472"/>
+            <a:ext cx="2880360" cy="2514600"/>
+          </a:xfrm>
+          <a:prstGeom prst="rect">
+            <a:avLst/>
+          </a:prstGeom>
+          <a:noFill/>
+          <a:ln/>
+        </p:spPr>
+        <p:txBody>
+          <a:bodyPr wrap="square" lIns="0" tIns="0" rIns="0" bIns="0" rtlCol="0" anchor="ctr"/>
+          <a:lstStyle/>
+          <a:p>
+            <a:pPr marL="342900" indent="-342900">
+              <a:spcAft>
+                <a:spcPts val="800"/>
+              </a:spcAft>
+              <a:buSzPct val="100000"/>
+              <a:buChar char="•"/>
+            </a:pPr>
+            <a:r>
+              <a:rPr lang="en-US" sz="1600" dirty="0">
+                <a:solidFill>
+                  <a:srgbClr val="46596A"/>
+                </a:solidFill>
+                <a:latin typeface="IBM Plex Sans" pitchFamily="34" charset="0"/>
+                <a:ea typeface="IBM Plex Sans" pitchFamily="34" charset="-122"/>
+                <a:cs typeface="IBM Plex Sans" pitchFamily="34" charset="-120"/>
+              </a:rPr>
+              <a:t>Click, fill, press, select</a:t>
+            </a:r>
+            <a:r>
+              <a:rPr lang="en-US" sz="1600" dirty="0"/>
+              <a:t>, </a:t>
+            </a:r>
+            <a:r>
+              <a:rPr lang="en-US" sz="1600" dirty="0" err="1">
+                <a:solidFill>
+                  <a:srgbClr val="46596A"/>
+                </a:solidFill>
+                <a:latin typeface="IBM Plex Sans" pitchFamily="34" charset="0"/>
+              </a:rPr>
+              <a:t>g</a:t>
+            </a:r>
+            <a:r>
+              <a:rPr lang="en-US" sz="1600" dirty="0" err="1">
+                <a:solidFill>
+                  <a:srgbClr val="46596A"/>
+                </a:solidFill>
+                <a:latin typeface="IBM Plex Sans" pitchFamily="34" charset="0"/>
+                <a:ea typeface="IBM Plex Sans" pitchFamily="34" charset="-122"/>
+                <a:cs typeface="IBM Plex Sans" pitchFamily="34" charset="-120"/>
+              </a:rPr>
+              <a:t>oto</a:t>
+            </a:r>
+            <a:r>
+              <a:rPr lang="en-US" sz="1600" dirty="0">
+                <a:solidFill>
+                  <a:srgbClr val="46596A"/>
+                </a:solidFill>
+                <a:latin typeface="IBM Plex Sans" pitchFamily="34" charset="0"/>
+                <a:ea typeface="IBM Plex Sans" pitchFamily="34" charset="-122"/>
+                <a:cs typeface="IBM Plex Sans" pitchFamily="34" charset="-120"/>
+              </a:rPr>
+              <a:t>, back, scroll, wait, finish</a:t>
+            </a:r>
+            <a:endParaRPr lang="en-US" sz="1600" dirty="0"/>
+          </a:p>
+          <a:p>
+            <a:pPr marL="342900" indent="-342900">
+              <a:spcAft>
+                <a:spcPts val="800"/>
+              </a:spcAft>
+              <a:buSzPct val="100000"/>
+              <a:buChar char="•"/>
+            </a:pPr>
+            <a:r>
+              <a:rPr lang="en-US" sz="1600" dirty="0">
+                <a:solidFill>
+                  <a:srgbClr val="46596A"/>
+                </a:solidFill>
+                <a:latin typeface="IBM Plex Sans" pitchFamily="34" charset="0"/>
+                <a:ea typeface="IBM Plex Sans" pitchFamily="34" charset="-122"/>
+                <a:cs typeface="IBM Plex Sans" pitchFamily="34" charset="-120"/>
+              </a:rPr>
+              <a:t>9 actions</a:t>
+            </a:r>
+          </a:p>
+          <a:p>
+            <a:pPr marL="342900" indent="-342900">
+              <a:spcAft>
+                <a:spcPts val="800"/>
+              </a:spcAft>
+              <a:buSzPct val="100000"/>
+              <a:buChar char="•"/>
+            </a:pPr>
+            <a:r>
+              <a:rPr lang="en-US" sz="1600" dirty="0">
+                <a:solidFill>
+                  <a:srgbClr val="46596A"/>
+                </a:solidFill>
+                <a:latin typeface="IBM Plex Sans" pitchFamily="34" charset="0"/>
+                <a:ea typeface="IBM Plex Sans" pitchFamily="34" charset="-122"/>
+                <a:cs typeface="IBM Plex Sans" pitchFamily="34" charset="-120"/>
+              </a:rPr>
+              <a:t>CAPTCHA escalates to a person</a:t>
+            </a:r>
+            <a:endParaRPr lang="en-US" sz="1600" dirty="0"/>
+          </a:p>
+        </p:txBody>
+      </p:sp>
+      <p:sp>
+        <p:nvSpPr>
+          <p:cNvPr id="11" name="Shape 9"/>
+          <p:cNvSpPr/>
+          <p:nvPr/>
+        </p:nvSpPr>
+        <p:spPr>
+          <a:xfrm>
+            <a:off x="7946136" y="2057400"/>
+            <a:ext cx="3401568" cy="3246120"/>
+          </a:xfrm>
+          <a:prstGeom prst="rect">
+            <a:avLst/>
+          </a:prstGeom>
+          <a:solidFill>
+            <a:srgbClr val="FFFFFF"/>
+          </a:solidFill>
+          <a:ln w="12700">
+            <a:solidFill>
+              <a:srgbClr val="D5E0E5"/>
+            </a:solidFill>
+            <a:prstDash val="solid"/>
+          </a:ln>
+        </p:spPr>
+        <p:txBody>
+          <a:bodyPr/>
+          <a:lstStyle/>
+          <a:p>
+            <a:endParaRPr lang="en-US"/>
+          </a:p>
+        </p:txBody>
+      </p:sp>
+      <p:sp>
+        <p:nvSpPr>
+          <p:cNvPr id="12" name="Text 10"/>
+          <p:cNvSpPr txBox="1"/>
+          <p:nvPr/>
+        </p:nvSpPr>
+        <p:spPr>
+          <a:xfrm>
+            <a:off x="8183880" y="2267712"/>
+            <a:ext cx="2926080" cy="292608"/>
+          </a:xfrm>
+          <a:prstGeom prst="rect">
+            <a:avLst/>
+          </a:prstGeom>
+          <a:noFill/>
+          <a:ln/>
+        </p:spPr>
+        <p:txBody>
+          <a:bodyPr wrap="square" lIns="0" tIns="0" rIns="0" bIns="0" rtlCol="0" anchor="ctr"/>
+          <a:lstStyle/>
+          <a:p>
+            <a:pPr marL="0" indent="0">
+              <a:buNone/>
+            </a:pPr>
+            <a:r>
+              <a:rPr lang="en-US" sz="1350" b="1" dirty="0">
+                <a:solidFill>
+                  <a:srgbClr val="A9502C"/>
+                </a:solidFill>
+                <a:latin typeface="IBM Plex Sans" pitchFamily="34" charset="0"/>
+                <a:ea typeface="IBM Plex Sans" pitchFamily="34" charset="-122"/>
+                <a:cs typeface="IBM Plex Sans" pitchFamily="34" charset="-120"/>
+              </a:rPr>
+              <a:t>How it knows something broke</a:t>
+            </a:r>
+            <a:endParaRPr lang="en-US" sz="1350" dirty="0"/>
+          </a:p>
+        </p:txBody>
+      </p:sp>
+      <p:sp>
+        <p:nvSpPr>
+          <p:cNvPr id="13" name="Text 11"/>
+          <p:cNvSpPr txBox="1"/>
+          <p:nvPr/>
+        </p:nvSpPr>
+        <p:spPr>
+          <a:xfrm>
+            <a:off x="8220456" y="2633472"/>
+            <a:ext cx="2880360" cy="2514600"/>
+          </a:xfrm>
+          <a:prstGeom prst="rect">
+            <a:avLst/>
+          </a:prstGeom>
+          <a:noFill/>
+          <a:ln/>
+        </p:spPr>
+        <p:txBody>
+          <a:bodyPr wrap="square" lIns="0" tIns="0" rIns="0" bIns="0" rtlCol="0" anchor="ctr"/>
+          <a:lstStyle/>
+          <a:p>
+            <a:pPr marL="342900" indent="-342900">
+              <a:spcAft>
+                <a:spcPts val="800"/>
+              </a:spcAft>
+              <a:buSzPct val="100000"/>
+              <a:buChar char="•"/>
+            </a:pPr>
+            <a:r>
+              <a:rPr lang="en-US" sz="1600" dirty="0">
+                <a:solidFill>
+                  <a:srgbClr val="46596A"/>
+                </a:solidFill>
+                <a:latin typeface="IBM Plex Sans" pitchFamily="34" charset="0"/>
+                <a:ea typeface="IBM Plex Sans" pitchFamily="34" charset="-122"/>
+                <a:cs typeface="IBM Plex Sans" pitchFamily="34" charset="-120"/>
+              </a:rPr>
+              <a:t>console errors</a:t>
+            </a:r>
+            <a:endParaRPr lang="en-US" sz="1600" dirty="0"/>
+          </a:p>
+          <a:p>
+            <a:pPr marL="342900" indent="-342900">
+              <a:spcAft>
+                <a:spcPts val="800"/>
+              </a:spcAft>
+              <a:buSzPct val="100000"/>
+              <a:buChar char="•"/>
+            </a:pPr>
+            <a:r>
+              <a:rPr lang="en-US" sz="1600" dirty="0">
+                <a:solidFill>
+                  <a:srgbClr val="46596A"/>
+                </a:solidFill>
+                <a:latin typeface="IBM Plex Sans" pitchFamily="34" charset="0"/>
+                <a:ea typeface="IBM Plex Sans" pitchFamily="34" charset="-122"/>
+                <a:cs typeface="IBM Plex Sans" pitchFamily="34" charset="-120"/>
+              </a:rPr>
+              <a:t>uncaught page errors</a:t>
+            </a:r>
+            <a:endParaRPr lang="en-US" sz="1600" dirty="0"/>
+          </a:p>
+          <a:p>
+            <a:pPr marL="342900" indent="-342900">
+              <a:spcAft>
+                <a:spcPts val="800"/>
+              </a:spcAft>
+              <a:buSzPct val="100000"/>
+              <a:buChar char="•"/>
+            </a:pPr>
+            <a:r>
+              <a:rPr lang="en-US" sz="1600" dirty="0">
+                <a:solidFill>
+                  <a:srgbClr val="46596A"/>
+                </a:solidFill>
+                <a:latin typeface="IBM Plex Sans" pitchFamily="34" charset="0"/>
+                <a:ea typeface="IBM Plex Sans" pitchFamily="34" charset="-122"/>
+                <a:cs typeface="IBM Plex Sans" pitchFamily="34" charset="-120"/>
+              </a:rPr>
+              <a:t>HTTP 4xx and 5xx responses</a:t>
+            </a:r>
+            <a:endParaRPr lang="en-US" sz="1600" dirty="0"/>
+          </a:p>
+          <a:p>
+            <a:pPr marL="342900" indent="-342900">
+              <a:spcAft>
+                <a:spcPts val="800"/>
+              </a:spcAft>
+              <a:buSzPct val="100000"/>
+              <a:buChar char="•"/>
+            </a:pPr>
+            <a:r>
+              <a:rPr lang="en-US" sz="1600" dirty="0">
+                <a:solidFill>
+                  <a:srgbClr val="46596A"/>
+                </a:solidFill>
+                <a:latin typeface="IBM Plex Sans" pitchFamily="34" charset="0"/>
+                <a:ea typeface="IBM Plex Sans" pitchFamily="34" charset="-122"/>
+                <a:cs typeface="IBM Plex Sans" pitchFamily="34" charset="-120"/>
+              </a:rPr>
+              <a:t>dialogs the page never showed</a:t>
+            </a:r>
+            <a:endParaRPr lang="en-US" sz="1600" dirty="0"/>
+          </a:p>
+        </p:txBody>
+      </p:sp>
+      <p:sp>
+        <p:nvSpPr>
+          <p:cNvPr id="14" name="Shape 12"/>
+          <p:cNvSpPr/>
+          <p:nvPr/>
+        </p:nvSpPr>
+        <p:spPr>
+          <a:xfrm>
+            <a:off x="813816" y="5440680"/>
+            <a:ext cx="10570464" cy="731520"/>
+          </a:xfrm>
+          <a:prstGeom prst="rect">
+            <a:avLst/>
+          </a:prstGeom>
+          <a:solidFill>
+            <a:srgbClr val="14303D"/>
+          </a:solidFill>
+          <a:ln w="12700">
+            <a:solidFill>
+              <a:srgbClr val="14303D"/>
+            </a:solidFill>
+            <a:prstDash val="solid"/>
+          </a:ln>
+        </p:spPr>
+        <p:txBody>
+          <a:bodyPr/>
+          <a:lstStyle/>
+          <a:p>
+            <a:endParaRPr lang="en-US"/>
+          </a:p>
+        </p:txBody>
+      </p:sp>
+      <p:sp>
+        <p:nvSpPr>
+          <p:cNvPr id="15" name="Text 13"/>
+          <p:cNvSpPr txBox="1"/>
+          <p:nvPr/>
+        </p:nvSpPr>
+        <p:spPr>
+          <a:xfrm>
+            <a:off x="1069848" y="5440680"/>
+            <a:ext cx="10058400" cy="731520"/>
+          </a:xfrm>
+          <a:prstGeom prst="rect">
+            <a:avLst/>
+          </a:prstGeom>
+          <a:noFill/>
+          <a:ln/>
+        </p:spPr>
+        <p:txBody>
+          <a:bodyPr wrap="square" lIns="0" tIns="0" rIns="0" bIns="0" rtlCol="0" anchor="ctr"/>
+          <a:lstStyle/>
+          <a:p>
+            <a:pPr marL="0" indent="0">
+              <a:buNone/>
+            </a:pPr>
+            <a:r>
+              <a:rPr lang="en-US" sz="1250" dirty="0">
+                <a:solidFill>
+                  <a:srgbClr val="FDFEFE"/>
+                </a:solidFill>
+                <a:latin typeface="IBM Plex Sans" pitchFamily="34" charset="0"/>
+                <a:ea typeface="IBM Plex Sans" pitchFamily="34" charset="-122"/>
+                <a:cs typeface="IBM Plex Sans" pitchFamily="34" charset="-120"/>
+              </a:rPr>
+              <a:t>Those signals are collected independently of anything the agent claims, so a 5xx can override a claimed pass. On the live site this caught a real HTTP 500.</a:t>
+            </a:r>
+            <a:endParaRPr lang="en-US" sz="1250" dirty="0"/>
+          </a:p>
+        </p:txBody>
+      </p:sp>
+      <p:sp>
+        <p:nvSpPr>
+          <p:cNvPr id="16" name="Text 14"/>
+          <p:cNvSpPr txBox="1"/>
+          <p:nvPr/>
+        </p:nvSpPr>
+        <p:spPr>
+          <a:xfrm>
+            <a:off x="813816" y="6236208"/>
+            <a:ext cx="3456432" cy="237744"/>
+          </a:xfrm>
+          <a:prstGeom prst="rect">
+            <a:avLst/>
+          </a:prstGeom>
+          <a:noFill/>
+          <a:ln/>
+        </p:spPr>
+        <p:txBody>
+          <a:bodyPr wrap="square" lIns="0" tIns="0" rIns="0" bIns="0" rtlCol="0" anchor="ctr"/>
+          <a:lstStyle/>
+          <a:p>
+            <a:pPr marL="0" indent="0">
+              <a:buNone/>
+            </a:pPr>
+            <a:r>
+              <a:rPr lang="en-US" sz="1200" dirty="0">
+                <a:solidFill>
+                  <a:srgbClr val="55697A"/>
+                </a:solidFill>
+                <a:latin typeface="IBM Plex Sans" pitchFamily="34" charset="0"/>
+                <a:ea typeface="IBM Plex Sans" pitchFamily="34" charset="-122"/>
+                <a:cs typeface="IBM Plex Sans" pitchFamily="34" charset="-120"/>
+              </a:rPr>
+              <a:t>Exploratory Testing Automation · CSE 450 · BUET</a:t>
+            </a:r>
+            <a:endParaRPr lang="en-US" sz="1200" dirty="0"/>
+          </a:p>
+        </p:txBody>
+      </p:sp>
+      <p:sp>
+        <p:nvSpPr>
+          <p:cNvPr id="17" name="Text 15"/>
+          <p:cNvSpPr txBox="1"/>
+          <p:nvPr/>
+        </p:nvSpPr>
+        <p:spPr>
+          <a:xfrm>
+            <a:off x="11128248" y="6236208"/>
+            <a:ext cx="301752" cy="237744"/>
+          </a:xfrm>
+          <a:prstGeom prst="rect">
+            <a:avLst/>
+          </a:prstGeom>
+          <a:noFill/>
+          <a:ln/>
+        </p:spPr>
+        <p:txBody>
+          <a:bodyPr wrap="square" lIns="0" tIns="0" rIns="0" bIns="0" rtlCol="0" anchor="ctr"/>
+          <a:lstStyle/>
+          <a:p>
+            <a:pPr marL="0" indent="0" algn="r">
+              <a:buNone/>
+            </a:pPr>
+            <a:r>
+              <a:rPr lang="en-US" sz="1200" dirty="0">
+                <a:solidFill>
+                  <a:srgbClr val="55697A"/>
+                </a:solidFill>
+                <a:latin typeface="IBM Plex Sans" pitchFamily="34" charset="0"/>
+                <a:ea typeface="IBM Plex Sans" pitchFamily="34" charset="-122"/>
+                <a:cs typeface="IBM Plex Sans" pitchFamily="34" charset="-120"/>
+              </a:rPr>
+              <a:t>27</a:t>
+            </a:r>
+            <a:endParaRPr lang="en-US" sz="1200" dirty="0"/>
+          </a:p>
+        </p:txBody>
+      </p:sp>
+      <p:pic>
+        <p:nvPicPr>
+          <p:cNvPr id="18" name="Picture 17" descr="chrome.png"/>
+          <p:cNvPicPr>
+            <a:picLocks noChangeAspect="1"/>
+          </p:cNvPicPr>
+          <p:nvPr/>
+        </p:nvPicPr>
+        <p:blipFill>
+          <a:blip r:embed="rId2"/>
+          <a:stretch>
+            <a:fillRect/>
+          </a:stretch>
+        </p:blipFill>
+        <p:spPr>
+          <a:xfrm>
+            <a:off x="10716768" y="731520"/>
+            <a:ext cx="804672" cy="804672"/>
+          </a:xfrm>
+          <a:prstGeom prst="rect">
+            <a:avLst/>
+          </a:prstGeom>
+        </p:spPr>
+      </p:pic>
+    </p:spTree>
+  </p:cSld>
+  <p:clrMapOvr>
+    <a:masterClrMapping/>
+  </p:clrMapOvr>
+</p:sld>
+</file>
+
+<file path=ppt/slides/slide9.xml><?xml version="1.0" encoding="utf-8"?>
+<p:sld xmlns:a="http://schemas.openxmlformats.org/drawingml/2006/main" xmlns:r="http://schemas.openxmlformats.org/officeDocument/2006/relationships" xmlns:p="http://schemas.openxmlformats.org/presentationml/2006/main">
+  <p:cSld name="Slide 4">
+    <p:bg>
+      <p:bgPr>
+        <a:solidFill>
+          <a:srgbClr val="F6F8F7"/>
+        </a:solidFill>
+        <a:effectLst/>
+      </p:bgPr>
+    </p:bg>
+    <p:spTree>
+      <p:nvGrpSpPr>
+        <p:cNvPr id="1" name=""/>
+        <p:cNvGrpSpPr/>
+        <p:nvPr/>
+      </p:nvGrpSpPr>
+      <p:grpSpPr>
+        <a:xfrm>
+          <a:off x="0" y="0"/>
+          <a:ext cx="0" cy="0"/>
+          <a:chOff x="0" y="0"/>
+          <a:chExt cx="0" cy="0"/>
+        </a:xfrm>
+      </p:grpSpPr>
+      <p:sp>
+        <p:nvSpPr>
+          <p:cNvPr id="2" name="Text 0"/>
+          <p:cNvSpPr txBox="1"/>
+          <p:nvPr/>
+        </p:nvSpPr>
+        <p:spPr>
+          <a:xfrm>
+            <a:off x="813816" y="813816"/>
+            <a:ext cx="10881360" cy="237744"/>
+          </a:xfrm>
+          <a:prstGeom prst="rect">
+            <a:avLst/>
+          </a:prstGeom>
+          <a:noFill/>
+          <a:ln/>
+        </p:spPr>
+        <p:txBody>
+          <a:bodyPr wrap="square" lIns="0" tIns="0" rIns="0" bIns="0" rtlCol="0" anchor="ctr"/>
+          <a:lstStyle/>
+          <a:p>
+            <a:pPr marL="0" indent="0">
+              <a:buNone/>
+            </a:pPr>
+            <a:r>
+              <a:rPr lang="en-US" sz="1200" b="1" kern="0" spc="150" dirty="0">
+                <a:solidFill>
+                  <a:srgbClr val="0B6A8F"/>
+                </a:solidFill>
+                <a:latin typeface="IBM Plex Sans" pitchFamily="34" charset="0"/>
+                <a:ea typeface="IBM Plex Sans" pitchFamily="34" charset="-122"/>
+                <a:cs typeface="IBM Plex Sans" pitchFamily="34" charset="-120"/>
+              </a:rPr>
+              <a:t>WEB EXECUTOR · A REAL RUN</a:t>
+            </a:r>
+            <a:endParaRPr lang="en-US" sz="1200" dirty="0"/>
+          </a:p>
+        </p:txBody>
+      </p:sp>
+      <p:sp>
+        <p:nvSpPr>
+          <p:cNvPr id="3" name="Text 1"/>
+          <p:cNvSpPr txBox="1"/>
+          <p:nvPr/>
+        </p:nvSpPr>
+        <p:spPr>
+          <a:xfrm>
+            <a:off x="813816" y="1106424"/>
+            <a:ext cx="10881360" cy="448056"/>
+          </a:xfrm>
+          <a:prstGeom prst="rect">
+            <a:avLst/>
+          </a:prstGeom>
+          <a:noFill/>
+          <a:ln/>
+        </p:spPr>
+        <p:txBody>
+          <a:bodyPr wrap="square" lIns="0" tIns="0" rIns="0" bIns="0" rtlCol="0" anchor="ctr"/>
+          <a:lstStyle/>
+          <a:p>
+            <a:pPr marL="0" indent="0">
+              <a:buNone/>
+            </a:pPr>
+            <a:r>
+              <a:rPr lang="en-US" sz="3000" b="1" dirty="0">
+                <a:solidFill>
+                  <a:srgbClr val="14303D"/>
+                </a:solidFill>
+                <a:latin typeface="Source Serif 4" pitchFamily="34" charset="0"/>
+                <a:ea typeface="Source Serif 4" pitchFamily="34" charset="-122"/>
+                <a:cs typeface="Source Serif 4" pitchFamily="34" charset="-120"/>
+              </a:rPr>
+              <a:t>Testing Bangla text on a live survey platform</a:t>
+            </a:r>
+            <a:endParaRPr lang="en-US" sz="3000" dirty="0"/>
+          </a:p>
+        </p:txBody>
+      </p:sp>
+      <p:sp>
+        <p:nvSpPr>
+          <p:cNvPr id="4" name="Text 2"/>
+          <p:cNvSpPr txBox="1"/>
+          <p:nvPr/>
+        </p:nvSpPr>
+        <p:spPr>
+          <a:xfrm>
+            <a:off x="813816" y="1645920"/>
+            <a:ext cx="10881360" cy="256032"/>
+          </a:xfrm>
+          <a:prstGeom prst="rect">
+            <a:avLst/>
+          </a:prstGeom>
+          <a:noFill/>
+          <a:ln/>
+        </p:spPr>
+        <p:txBody>
+          <a:bodyPr wrap="square" lIns="0" tIns="0" rIns="0" bIns="0" rtlCol="0" anchor="ctr"/>
+          <a:lstStyle/>
+          <a:p>
+            <a:pPr marL="0" indent="0">
+              <a:buNone/>
+            </a:pPr>
+            <a:r>
+              <a:rPr lang="en-US" sz="1200" dirty="0">
+                <a:solidFill>
+                  <a:srgbClr val="46596A"/>
+                </a:solidFill>
+                <a:latin typeface="IBM Plex Sans" pitchFamily="34" charset="0"/>
+                <a:ea typeface="IBM Plex Sans" pitchFamily="34" charset="-122"/>
+                <a:cs typeface="IBM Plex Sans" pitchFamily="34" charset="-120"/>
+              </a:rPr>
+              <a:t>TC-001 on DataGhurhi. The same thought, action, outcome loop, over the DOM.</a:t>
+            </a:r>
+            <a:endParaRPr lang="en-US" sz="1200" dirty="0"/>
+          </a:p>
+        </p:txBody>
+      </p:sp>
+      <p:sp>
+        <p:nvSpPr>
+          <p:cNvPr id="5" name="Shape 3"/>
+          <p:cNvSpPr/>
+          <p:nvPr/>
+        </p:nvSpPr>
+        <p:spPr>
+          <a:xfrm>
+            <a:off x="813816" y="2057400"/>
+            <a:ext cx="7178040" cy="3566160"/>
+          </a:xfrm>
+          <a:prstGeom prst="rect">
+            <a:avLst/>
+          </a:prstGeom>
+          <a:solidFill>
+            <a:srgbClr val="14303D"/>
+          </a:solidFill>
+          <a:ln w="12700">
+            <a:solidFill>
+              <a:srgbClr val="14303D"/>
+            </a:solidFill>
+            <a:prstDash val="solid"/>
+          </a:ln>
+        </p:spPr>
+        <p:txBody>
+          <a:bodyPr/>
+          <a:lstStyle/>
+          <a:p>
+            <a:endParaRPr lang="en-US"/>
+          </a:p>
+        </p:txBody>
+      </p:sp>
+      <p:sp>
+        <p:nvSpPr>
+          <p:cNvPr id="6" name="Text 4"/>
+          <p:cNvSpPr txBox="1"/>
+          <p:nvPr/>
+        </p:nvSpPr>
+        <p:spPr>
+          <a:xfrm>
+            <a:off x="1069848" y="2267712"/>
+            <a:ext cx="6675120" cy="3154680"/>
+          </a:xfrm>
+          <a:prstGeom prst="rect">
+            <a:avLst/>
+          </a:prstGeom>
+          <a:noFill/>
+          <a:ln/>
+        </p:spPr>
+        <p:txBody>
+          <a:bodyPr wrap="square" lIns="0" tIns="0" rIns="0" bIns="0" rtlCol="0" anchor="ctr"/>
+          <a:lstStyle/>
+          <a:p>
+            <a:pPr marL="0" indent="0">
+              <a:lnSpc>
+                <a:spcPts val="1350"/>
+              </a:lnSpc>
+              <a:buNone/>
+            </a:pPr>
+            <a:r>
+              <a:rPr lang="en-US" sz="1000" dirty="0">
+                <a:solidFill>
+                  <a:srgbClr val="FDFEFE"/>
+                </a:solidFill>
+                <a:latin typeface="Courier New" pitchFamily="34" charset="0"/>
+                <a:ea typeface="Courier New" pitchFamily="34" charset="-122"/>
+                <a:cs typeface="Courier New" pitchFamily="34" charset="-120"/>
+              </a:rPr>
+              <a:t>[1/80] dataghurhi.cse.buet.ac.bd</a:t>
+            </a:r>
+            <a:endParaRPr lang="en-US" sz="1000" dirty="0"/>
+          </a:p>
+          <a:p>
+            <a:pPr marL="0" indent="0">
+              <a:lnSpc>
+                <a:spcPts val="1350"/>
+              </a:lnSpc>
+              <a:buNone/>
+            </a:pPr>
+            <a:r>
+              <a:rPr lang="en-US" sz="1000" dirty="0">
+                <a:solidFill>
+                  <a:srgbClr val="FDFEFE"/>
+                </a:solidFill>
+                <a:latin typeface="Courier New" pitchFamily="34" charset="0"/>
+                <a:ea typeface="Courier New" pitchFamily="34" charset="-122"/>
+                <a:cs typeface="Courier New" pitchFamily="34" charset="-120"/>
+              </a:rPr>
+              <a:t>  think: find a survey with a text question to test</a:t>
+            </a:r>
+            <a:endParaRPr lang="en-US" sz="1000" dirty="0"/>
+          </a:p>
+          <a:p>
+            <a:pPr marL="0" indent="0">
+              <a:lnSpc>
+                <a:spcPts val="1350"/>
+              </a:lnSpc>
+              <a:buNone/>
+            </a:pPr>
+            <a:r>
+              <a:rPr lang="en-US" sz="1000" dirty="0">
+                <a:solidFill>
+                  <a:srgbClr val="FDFEFE"/>
+                </a:solidFill>
+                <a:latin typeface="Courier New" pitchFamily="34" charset="0"/>
+                <a:ea typeface="Courier New" pitchFamily="34" charset="-122"/>
+                <a:cs typeface="Courier New" pitchFamily="34" charset="-120"/>
+              </a:rPr>
+              <a:t>         Bangla Unicode input</a:t>
+            </a:r>
+            <a:endParaRPr lang="en-US" sz="1000" dirty="0"/>
+          </a:p>
+          <a:p>
+            <a:pPr marL="0" indent="0">
+              <a:lnSpc>
+                <a:spcPts val="1350"/>
+              </a:lnSpc>
+              <a:buNone/>
+            </a:pPr>
+            <a:r>
+              <a:rPr lang="en-US" sz="1000" dirty="0">
+                <a:solidFill>
+                  <a:srgbClr val="FDFEFE"/>
+                </a:solidFill>
+                <a:latin typeface="Courier New" pitchFamily="34" charset="0"/>
+                <a:ea typeface="Courier New" pitchFamily="34" charset="-122"/>
+                <a:cs typeface="Courier New" pitchFamily="34" charset="-120"/>
+              </a:rPr>
+              <a:t>  act:   {"action":"click","ref":"e9"}</a:t>
+            </a:r>
+            <a:endParaRPr lang="en-US" sz="1000" dirty="0"/>
+          </a:p>
+          <a:p>
+            <a:pPr marL="0" indent="0">
+              <a:lnSpc>
+                <a:spcPts val="1350"/>
+              </a:lnSpc>
+              <a:buNone/>
+            </a:pPr>
+            <a:r>
+              <a:rPr lang="en-US" sz="1000" dirty="0">
+                <a:solidFill>
+                  <a:srgbClr val="FDFEFE"/>
+                </a:solidFill>
+                <a:latin typeface="Courier New" pitchFamily="34" charset="0"/>
+                <a:ea typeface="Courier New" pitchFamily="34" charset="-122"/>
+                <a:cs typeface="Courier New" pitchFamily="34" charset="-120"/>
+              </a:rPr>
+              <a:t>  -&gt;     clicked [e9] button "Test Project for Survey"</a:t>
+            </a:r>
+            <a:endParaRPr lang="en-US" sz="1000" dirty="0"/>
+          </a:p>
+          <a:p>
+            <a:pPr marL="0" indent="0">
+              <a:lnSpc>
+                <a:spcPts val="1350"/>
+              </a:lnSpc>
+              <a:buNone/>
+            </a:pPr>
+            <a:endParaRPr lang="en-US" sz="1000" dirty="0"/>
+          </a:p>
+          <a:p>
+            <a:pPr marL="0" indent="0">
+              <a:lnSpc>
+                <a:spcPts val="1350"/>
+              </a:lnSpc>
+              <a:buNone/>
+            </a:pPr>
+            <a:r>
+              <a:rPr lang="en-US" sz="1000" dirty="0">
+                <a:solidFill>
+                  <a:srgbClr val="FDFEFE"/>
+                </a:solidFill>
+                <a:latin typeface="Courier New" pitchFamily="34" charset="0"/>
+                <a:ea typeface="Courier New" pitchFamily="34" charset="-122"/>
+                <a:cs typeface="Courier New" pitchFamily="34" charset="-120"/>
+              </a:rPr>
+              <a:t>[4/80] /view-survey/601</a:t>
+            </a:r>
+            <a:endParaRPr lang="en-US" sz="1000" dirty="0"/>
+          </a:p>
+          <a:p>
+            <a:pPr marL="0" indent="0">
+              <a:lnSpc>
+                <a:spcPts val="1350"/>
+              </a:lnSpc>
+              <a:buNone/>
+            </a:pPr>
+            <a:r>
+              <a:rPr lang="en-US" sz="1000" dirty="0">
+                <a:solidFill>
+                  <a:srgbClr val="FDFEFE"/>
+                </a:solidFill>
+                <a:latin typeface="Courier New" pitchFamily="34" charset="0"/>
+                <a:ea typeface="Courier New" pitchFamily="34" charset="-122"/>
+                <a:cs typeface="Courier New" pitchFamily="34" charset="-120"/>
+              </a:rPr>
+              <a:t>  act:   {"action":"scroll","direction":"down"}</a:t>
+            </a:r>
+            <a:endParaRPr lang="en-US" sz="1000" dirty="0"/>
+          </a:p>
+          <a:p>
+            <a:pPr marL="0" indent="0">
+              <a:lnSpc>
+                <a:spcPts val="1350"/>
+              </a:lnSpc>
+              <a:buNone/>
+            </a:pPr>
+            <a:r>
+              <a:rPr lang="en-US" sz="1000" dirty="0">
+                <a:solidFill>
+                  <a:srgbClr val="FDFEFE"/>
+                </a:solidFill>
+                <a:latin typeface="Courier New" pitchFamily="34" charset="0"/>
+                <a:ea typeface="Courier New" pitchFamily="34" charset="-122"/>
+                <a:cs typeface="Courier New" pitchFamily="34" charset="-120"/>
+              </a:rPr>
+              <a:t>  -&gt;     scrolled down          page: 56 controls</a:t>
+            </a:r>
+            <a:endParaRPr lang="en-US" sz="1000" dirty="0"/>
+          </a:p>
+          <a:p>
+            <a:pPr marL="0" indent="0">
+              <a:lnSpc>
+                <a:spcPts val="1350"/>
+              </a:lnSpc>
+              <a:buNone/>
+            </a:pPr>
+            <a:endParaRPr lang="en-US" sz="1000" dirty="0"/>
+          </a:p>
+          <a:p>
+            <a:pPr marL="0" indent="0">
+              <a:lnSpc>
+                <a:spcPts val="1350"/>
+              </a:lnSpc>
+              <a:buNone/>
+            </a:pPr>
+            <a:r>
+              <a:rPr lang="en-US" sz="1000" dirty="0">
+                <a:solidFill>
+                  <a:srgbClr val="FDFEFE"/>
+                </a:solidFill>
+                <a:latin typeface="Courier New" pitchFamily="34" charset="0"/>
+                <a:ea typeface="Courier New" pitchFamily="34" charset="-122"/>
+                <a:cs typeface="Courier New" pitchFamily="34" charset="-120"/>
+              </a:rPr>
+              <a:t>[5/80] /view-survey/601</a:t>
+            </a:r>
+            <a:endParaRPr lang="en-US" sz="1000" dirty="0"/>
+          </a:p>
+          <a:p>
+            <a:pPr marL="0" indent="0">
+              <a:lnSpc>
+                <a:spcPts val="1350"/>
+              </a:lnSpc>
+              <a:buNone/>
+            </a:pPr>
+            <a:r>
+              <a:rPr lang="en-US" sz="1000" dirty="0">
+                <a:solidFill>
+                  <a:srgbClr val="FDFEFE"/>
+                </a:solidFill>
+                <a:latin typeface="Courier New" pitchFamily="34" charset="0"/>
+                <a:ea typeface="Courier New" pitchFamily="34" charset="-122"/>
+                <a:cs typeface="Courier New" pitchFamily="34" charset="-120"/>
+              </a:rPr>
+              <a:t>  act:   {"action":"select","ref":"e20","value":"Text"}</a:t>
+            </a:r>
+            <a:endParaRPr lang="en-US" sz="1000" dirty="0"/>
+          </a:p>
+          <a:p>
+            <a:pPr marL="0" indent="0">
+              <a:lnSpc>
+                <a:spcPts val="1350"/>
+              </a:lnSpc>
+              <a:buNone/>
+            </a:pPr>
+            <a:r>
+              <a:rPr lang="en-US" sz="1000" dirty="0">
+                <a:solidFill>
+                  <a:srgbClr val="FDFEFE"/>
+                </a:solidFill>
+                <a:latin typeface="Courier New" pitchFamily="34" charset="0"/>
+                <a:ea typeface="Courier New" pitchFamily="34" charset="-122"/>
+                <a:cs typeface="Courier New" pitchFamily="34" charset="-120"/>
+              </a:rPr>
+              <a:t>  -&gt;     selected 'Text' in the question type dropdown</a:t>
+            </a:r>
+            <a:endParaRPr lang="en-US" sz="1000" dirty="0"/>
+          </a:p>
+          <a:p>
+            <a:pPr marL="0" indent="0">
+              <a:lnSpc>
+                <a:spcPts val="1350"/>
+              </a:lnSpc>
+              <a:buNone/>
+            </a:pPr>
+            <a:endParaRPr lang="en-US" sz="1000" dirty="0"/>
+          </a:p>
+          <a:p>
+            <a:pPr marL="0" indent="0">
+              <a:lnSpc>
+                <a:spcPts val="1350"/>
+              </a:lnSpc>
+              <a:buNone/>
+            </a:pPr>
+            <a:r>
+              <a:rPr lang="en-US" sz="1000" dirty="0">
+                <a:solidFill>
+                  <a:srgbClr val="FDFEFE"/>
+                </a:solidFill>
+                <a:latin typeface="Courier New" pitchFamily="34" charset="0"/>
+                <a:ea typeface="Courier New" pitchFamily="34" charset="-122"/>
+                <a:cs typeface="Courier New" pitchFamily="34" charset="-120"/>
+              </a:rPr>
+              <a:t>[7/80] /view-survey/601</a:t>
+            </a:r>
+            <a:endParaRPr lang="en-US" sz="1000" dirty="0"/>
+          </a:p>
+          <a:p>
+            <a:pPr marL="0" indent="0">
+              <a:lnSpc>
+                <a:spcPts val="1350"/>
+              </a:lnSpc>
+              <a:buNone/>
+            </a:pPr>
+            <a:r>
+              <a:rPr lang="en-US" sz="1000" dirty="0">
+                <a:solidFill>
+                  <a:srgbClr val="FDFEFE"/>
+                </a:solidFill>
+                <a:latin typeface="Courier New" pitchFamily="34" charset="0"/>
+                <a:ea typeface="Courier New" pitchFamily="34" charset="-122"/>
+                <a:cs typeface="Courier New" pitchFamily="34" charset="-120"/>
+              </a:rPr>
+              <a:t>  act:   {"action":"fill","ref":"e19","text":"আপনার নাম লিখুন"}</a:t>
+            </a:r>
+            <a:endParaRPr lang="en-US" sz="1000" dirty="0"/>
+          </a:p>
+          <a:p>
+            <a:pPr marL="0" indent="0">
+              <a:lnSpc>
+                <a:spcPts val="1350"/>
+              </a:lnSpc>
+              <a:buNone/>
+            </a:pPr>
+            <a:r>
+              <a:rPr lang="en-US" sz="1000" dirty="0">
+                <a:solidFill>
+                  <a:srgbClr val="FDFEFE"/>
+                </a:solidFill>
+                <a:latin typeface="Courier New" pitchFamily="34" charset="0"/>
+                <a:ea typeface="Courier New" pitchFamily="34" charset="-122"/>
+                <a:cs typeface="Courier New" pitchFamily="34" charset="-120"/>
+              </a:rPr>
+              <a:t>  -&gt;     filled "Enter your question here"</a:t>
+            </a:r>
+            <a:endParaRPr lang="en-US" sz="1000" dirty="0"/>
+          </a:p>
+        </p:txBody>
+      </p:sp>
+      <p:sp>
+        <p:nvSpPr>
+          <p:cNvPr id="7" name="Shape 5"/>
+          <p:cNvSpPr/>
+          <p:nvPr/>
+        </p:nvSpPr>
+        <p:spPr>
+          <a:xfrm>
+            <a:off x="8275320" y="2057400"/>
+            <a:ext cx="3108960" cy="1143000"/>
+          </a:xfrm>
+          <a:prstGeom prst="rect">
+            <a:avLst/>
+          </a:prstGeom>
+          <a:solidFill>
+            <a:srgbClr val="FFFFFF"/>
+          </a:solidFill>
+          <a:ln w="12700">
+            <a:solidFill>
+              <a:srgbClr val="D5E0E5"/>
+            </a:solidFill>
+            <a:prstDash val="solid"/>
+          </a:ln>
+        </p:spPr>
+        <p:txBody>
+          <a:bodyPr/>
+          <a:lstStyle/>
+          <a:p>
+            <a:endParaRPr lang="en-US"/>
+          </a:p>
+        </p:txBody>
+      </p:sp>
+      <p:sp>
+        <p:nvSpPr>
+          <p:cNvPr id="8" name="Text 6"/>
+          <p:cNvSpPr txBox="1"/>
+          <p:nvPr/>
+        </p:nvSpPr>
+        <p:spPr>
+          <a:xfrm>
+            <a:off x="8485632" y="2203704"/>
+            <a:ext cx="2697480" cy="420624"/>
+          </a:xfrm>
+          <a:prstGeom prst="rect">
+            <a:avLst/>
+          </a:prstGeom>
+          <a:noFill/>
+          <a:ln/>
+        </p:spPr>
+        <p:txBody>
+          <a:bodyPr wrap="square" lIns="0" tIns="0" rIns="0" bIns="0" rtlCol="0" anchor="ctr"/>
+          <a:lstStyle/>
+          <a:p>
+            <a:pPr marL="0" indent="0">
+              <a:lnSpc>
+                <a:spcPts val="1500"/>
+              </a:lnSpc>
+              <a:buNone/>
+            </a:pPr>
+            <a:r>
+              <a:rPr lang="en-US" sz="1250" b="1" dirty="0">
+                <a:solidFill>
+                  <a:srgbClr val="14303D"/>
+                </a:solidFill>
+                <a:latin typeface="IBM Plex Sans" pitchFamily="34" charset="0"/>
+                <a:ea typeface="IBM Plex Sans" pitchFamily="34" charset="-122"/>
+                <a:cs typeface="IBM Plex Sans" pitchFamily="34" charset="-120"/>
+              </a:rPr>
+              <a:t>Controls by reference, not pixels</a:t>
+            </a:r>
+            <a:endParaRPr lang="en-US" sz="1250" dirty="0"/>
+          </a:p>
+        </p:txBody>
+      </p:sp>
+      <p:sp>
+        <p:nvSpPr>
+          <p:cNvPr id="9" name="Shape 7"/>
+          <p:cNvSpPr/>
+          <p:nvPr/>
+        </p:nvSpPr>
+        <p:spPr>
+          <a:xfrm>
+            <a:off x="8275320" y="3319272"/>
+            <a:ext cx="3108960" cy="1143000"/>
+          </a:xfrm>
+          <a:prstGeom prst="rect">
+            <a:avLst/>
+          </a:prstGeom>
+          <a:solidFill>
+            <a:srgbClr val="FFFFFF"/>
+          </a:solidFill>
+          <a:ln w="12700">
+            <a:solidFill>
+              <a:srgbClr val="D5E0E5"/>
+            </a:solidFill>
+            <a:prstDash val="solid"/>
+          </a:ln>
+        </p:spPr>
+        <p:txBody>
+          <a:bodyPr/>
+          <a:lstStyle/>
+          <a:p>
+            <a:endParaRPr lang="en-US"/>
+          </a:p>
+        </p:txBody>
+      </p:sp>
+      <p:sp>
+        <p:nvSpPr>
+          <p:cNvPr id="10" name="Text 8"/>
+          <p:cNvSpPr txBox="1"/>
+          <p:nvPr/>
+        </p:nvSpPr>
+        <p:spPr>
+          <a:xfrm>
+            <a:off x="8485632" y="3465576"/>
+            <a:ext cx="2697480" cy="420624"/>
+          </a:xfrm>
+          <a:prstGeom prst="rect">
+            <a:avLst/>
+          </a:prstGeom>
+          <a:noFill/>
+          <a:ln/>
+        </p:spPr>
+        <p:txBody>
+          <a:bodyPr wrap="square" lIns="0" tIns="0" rIns="0" bIns="0" rtlCol="0" anchor="ctr"/>
+          <a:lstStyle/>
+          <a:p>
+            <a:pPr marL="0" indent="0">
+              <a:lnSpc>
+                <a:spcPts val="1500"/>
+              </a:lnSpc>
+              <a:buNone/>
+            </a:pPr>
+            <a:r>
+              <a:rPr lang="en-US" sz="1250" b="1" dirty="0">
+                <a:solidFill>
+                  <a:srgbClr val="14303D"/>
+                </a:solidFill>
+                <a:latin typeface="IBM Plex Sans" pitchFamily="34" charset="0"/>
+                <a:ea typeface="IBM Plex Sans" pitchFamily="34" charset="-122"/>
+                <a:cs typeface="IBM Plex Sans" pitchFamily="34" charset="-120"/>
+              </a:rPr>
+              <a:t>Non Latin text end to end</a:t>
+            </a:r>
+            <a:endParaRPr lang="en-US" sz="1250" dirty="0"/>
+          </a:p>
+        </p:txBody>
+      </p:sp>
+      <p:sp>
+        <p:nvSpPr>
+          <p:cNvPr id="11" name="Shape 9"/>
+          <p:cNvSpPr/>
+          <p:nvPr/>
+        </p:nvSpPr>
+        <p:spPr>
+          <a:xfrm>
+            <a:off x="8275320" y="4581144"/>
+            <a:ext cx="3108960" cy="1143000"/>
+          </a:xfrm>
+          <a:prstGeom prst="rect">
+            <a:avLst/>
+          </a:prstGeom>
+          <a:solidFill>
+            <a:srgbClr val="FFFFFF"/>
+          </a:solidFill>
+          <a:ln w="12700">
+            <a:solidFill>
+              <a:srgbClr val="D5E0E5"/>
+            </a:solidFill>
+            <a:prstDash val="solid"/>
+          </a:ln>
+        </p:spPr>
+        <p:txBody>
+          <a:bodyPr/>
+          <a:lstStyle/>
+          <a:p>
+            <a:endParaRPr lang="en-US"/>
+          </a:p>
+        </p:txBody>
+      </p:sp>
+      <p:sp>
+        <p:nvSpPr>
+          <p:cNvPr id="12" name="Text 10"/>
+          <p:cNvSpPr txBox="1"/>
+          <p:nvPr/>
+        </p:nvSpPr>
+        <p:spPr>
+          <a:xfrm>
+            <a:off x="8485632" y="4727448"/>
+            <a:ext cx="2697480" cy="420624"/>
+          </a:xfrm>
+          <a:prstGeom prst="rect">
+            <a:avLst/>
+          </a:prstGeom>
+          <a:noFill/>
+          <a:ln/>
+        </p:spPr>
+        <p:txBody>
+          <a:bodyPr wrap="square" lIns="0" tIns="0" rIns="0" bIns="0" rtlCol="0" anchor="ctr"/>
+          <a:lstStyle/>
+          <a:p>
+            <a:pPr marL="0" indent="0">
+              <a:lnSpc>
+                <a:spcPts val="1500"/>
+              </a:lnSpc>
+              <a:buNone/>
+            </a:pPr>
+            <a:r>
+              <a:rPr lang="en-US" sz="1250" b="1" dirty="0">
+                <a:solidFill>
+                  <a:srgbClr val="14303D"/>
+                </a:solidFill>
+                <a:latin typeface="IBM Plex Sans" pitchFamily="34" charset="0"/>
+                <a:ea typeface="IBM Plex Sans" pitchFamily="34" charset="-122"/>
+                <a:cs typeface="IBM Plex Sans" pitchFamily="34" charset="-120"/>
+              </a:rPr>
+              <a:t>Bounded like the device runs</a:t>
+            </a:r>
+            <a:endParaRPr lang="en-US" sz="1250" dirty="0"/>
+          </a:p>
+        </p:txBody>
+      </p:sp>
+      <p:sp>
+        <p:nvSpPr>
+          <p:cNvPr id="13" name="Text 11"/>
+          <p:cNvSpPr txBox="1"/>
+          <p:nvPr/>
+        </p:nvSpPr>
+        <p:spPr>
+          <a:xfrm>
+            <a:off x="8485632" y="2624328"/>
+            <a:ext cx="2697480" cy="512064"/>
+          </a:xfrm>
+          <a:prstGeom prst="rect">
+            <a:avLst/>
+          </a:prstGeom>
+          <a:noFill/>
+          <a:ln/>
+        </p:spPr>
+        <p:txBody>
+          <a:bodyPr wrap="square" lIns="0" tIns="0" rIns="0" bIns="0" rtlCol="0" anchor="ctr"/>
+          <a:lstStyle/>
+          <a:p>
+            <a:pPr marL="0" indent="0">
+              <a:lnSpc>
+                <a:spcPts val="1300"/>
+              </a:lnSpc>
+              <a:buNone/>
+            </a:pPr>
+            <a:r>
+              <a:rPr lang="en-US" sz="1050" dirty="0">
+                <a:solidFill>
+                  <a:srgbClr val="46596A"/>
+                </a:solidFill>
+                <a:latin typeface="IBM Plex Sans" pitchFamily="34" charset="0"/>
+                <a:ea typeface="IBM Plex Sans" pitchFamily="34" charset="-122"/>
+                <a:cs typeface="IBM Plex Sans" pitchFamily="34" charset="-120"/>
+              </a:rPr>
+              <a:t>Each observed control gets a stable reference the model addresses by name.</a:t>
+            </a:r>
+            <a:endParaRPr lang="en-US" sz="1050" dirty="0"/>
+          </a:p>
+        </p:txBody>
+      </p:sp>
+      <p:sp>
+        <p:nvSpPr>
+          <p:cNvPr id="14" name="Text 12"/>
+          <p:cNvSpPr txBox="1"/>
+          <p:nvPr/>
+        </p:nvSpPr>
+        <p:spPr>
+          <a:xfrm>
+            <a:off x="8485632" y="3886200"/>
+            <a:ext cx="2697480" cy="512064"/>
+          </a:xfrm>
+          <a:prstGeom prst="rect">
+            <a:avLst/>
+          </a:prstGeom>
+          <a:noFill/>
+          <a:ln/>
+        </p:spPr>
+        <p:txBody>
+          <a:bodyPr wrap="square" lIns="0" tIns="0" rIns="0" bIns="0" rtlCol="0" anchor="ctr"/>
+          <a:lstStyle/>
+          <a:p>
+            <a:pPr marL="0" indent="0">
+              <a:lnSpc>
+                <a:spcPts val="1300"/>
+              </a:lnSpc>
+              <a:buNone/>
+            </a:pPr>
+            <a:r>
+              <a:rPr lang="en-US" sz="1050" dirty="0">
+                <a:solidFill>
+                  <a:srgbClr val="46596A"/>
+                </a:solidFill>
+                <a:latin typeface="IBM Plex Sans" pitchFamily="34" charset="0"/>
+                <a:ea typeface="IBM Plex Sans" pitchFamily="34" charset="-122"/>
+                <a:cs typeface="IBM Plex Sans" pitchFamily="34" charset="-120"/>
+              </a:rPr>
+              <a:t>Bangla is typed, stored and read back, then checked character for character.</a:t>
+            </a:r>
+            <a:endParaRPr lang="en-US" sz="1050" dirty="0"/>
+          </a:p>
+        </p:txBody>
+      </p:sp>
+      <p:sp>
+        <p:nvSpPr>
+          <p:cNvPr id="15" name="Text 13"/>
+          <p:cNvSpPr txBox="1"/>
+          <p:nvPr/>
+        </p:nvSpPr>
+        <p:spPr>
+          <a:xfrm>
+            <a:off x="8485632" y="5148072"/>
+            <a:ext cx="2697480" cy="512064"/>
+          </a:xfrm>
+          <a:prstGeom prst="rect">
+            <a:avLst/>
+          </a:prstGeom>
+          <a:noFill/>
+          <a:ln/>
+        </p:spPr>
+        <p:txBody>
+          <a:bodyPr wrap="square" lIns="0" tIns="0" rIns="0" bIns="0" rtlCol="0" anchor="ctr"/>
+          <a:lstStyle/>
+          <a:p>
+            <a:pPr marL="0" indent="0">
+              <a:lnSpc>
+                <a:spcPts val="1300"/>
+              </a:lnSpc>
+              <a:buNone/>
+            </a:pPr>
+            <a:r>
+              <a:rPr lang="en-US" sz="1050" dirty="0">
+                <a:solidFill>
+                  <a:srgbClr val="46596A"/>
+                </a:solidFill>
+                <a:latin typeface="IBM Plex Sans" pitchFamily="34" charset="0"/>
+                <a:ea typeface="IBM Plex Sans" pitchFamily="34" charset="-122"/>
+                <a:cs typeface="IBM Plex Sans" pitchFamily="34" charset="-120"/>
+              </a:rPr>
+              <a:t>Up to 80 steps, with guards that end a run repeating a dead action or wandering.</a:t>
+            </a:r>
+            <a:endParaRPr lang="en-US" sz="1050" dirty="0"/>
+          </a:p>
+        </p:txBody>
+      </p:sp>
+      <p:sp>
+        <p:nvSpPr>
+          <p:cNvPr id="18" name="Text 16"/>
+          <p:cNvSpPr txBox="1"/>
+          <p:nvPr/>
+        </p:nvSpPr>
+        <p:spPr>
+          <a:xfrm>
+            <a:off x="813816" y="6236208"/>
+            <a:ext cx="3456432" cy="237744"/>
+          </a:xfrm>
+          <a:prstGeom prst="rect">
+            <a:avLst/>
+          </a:prstGeom>
+          <a:noFill/>
+          <a:ln/>
+        </p:spPr>
+        <p:txBody>
+          <a:bodyPr wrap="square" lIns="0" tIns="0" rIns="0" bIns="0" rtlCol="0" anchor="ctr"/>
+          <a:lstStyle/>
+          <a:p>
+            <a:pPr marL="0" indent="0">
+              <a:buNone/>
+            </a:pPr>
+            <a:r>
+              <a:rPr lang="en-US" sz="1200" dirty="0">
+                <a:solidFill>
+                  <a:srgbClr val="55697A"/>
+                </a:solidFill>
+                <a:latin typeface="IBM Plex Sans" pitchFamily="34" charset="0"/>
+                <a:ea typeface="IBM Plex Sans" pitchFamily="34" charset="-122"/>
+                <a:cs typeface="IBM Plex Sans" pitchFamily="34" charset="-120"/>
+              </a:rPr>
+              <a:t>Exploratory Testing Automation · CSE 450 · BUET</a:t>
+            </a:r>
+            <a:endParaRPr lang="en-US" sz="1200" dirty="0"/>
+          </a:p>
+        </p:txBody>
+      </p:sp>
+      <p:sp>
+        <p:nvSpPr>
+          <p:cNvPr id="19" name="Text 17"/>
+          <p:cNvSpPr txBox="1"/>
+          <p:nvPr/>
+        </p:nvSpPr>
+        <p:spPr>
+          <a:xfrm>
+            <a:off x="11183112" y="6236208"/>
+            <a:ext cx="246888" cy="237744"/>
+          </a:xfrm>
+          <a:prstGeom prst="rect">
+            <a:avLst/>
+          </a:prstGeom>
+          <a:noFill/>
+          <a:ln/>
+        </p:spPr>
+        <p:txBody>
+          <a:bodyPr wrap="square" lIns="0" tIns="0" rIns="0" bIns="0" rtlCol="0" anchor="ctr"/>
+          <a:lstStyle/>
+          <a:p>
+            <a:pPr marL="0" indent="0" algn="r">
+              <a:buNone/>
+            </a:pPr>
+            <a:r>
+              <a:rPr lang="en-US" sz="1200" dirty="0">
+                <a:solidFill>
+                  <a:srgbClr val="55697A"/>
+                </a:solidFill>
+                <a:latin typeface="IBM Plex Sans" pitchFamily="34" charset="0"/>
+                <a:ea typeface="IBM Plex Sans" pitchFamily="34" charset="-122"/>
+                <a:cs typeface="IBM Plex Sans" pitchFamily="34" charset="-120"/>
+              </a:rPr>
+              <a:t>28</a:t>
             </a:r>
             <a:endParaRPr lang="en-US" sz="1200" dirty="0"/>
           </a:p>
@@ -5916,4 +9463,319 @@
     </a:ext>
   </a:extLst>
 </a:theme>
+</file>
+
+<file path=ppt/theme/theme2.xml><?xml version="1.0" encoding="utf-8"?>
+<a:theme xmlns:a="http://schemas.openxmlformats.org/drawingml/2006/main" name="Office Theme">
+  <a:themeElements>
+    <a:clrScheme name="Office">
+      <a:dk1>
+        <a:sysClr val="windowText" lastClr="000000"/>
+      </a:dk1>
+      <a:lt1>
+        <a:sysClr val="window" lastClr="FFFFFF"/>
+      </a:lt1>
+      <a:dk2>
+        <a:srgbClr val="0E2841"/>
+      </a:dk2>
+      <a:lt2>
+        <a:srgbClr val="E8E8E8"/>
+      </a:lt2>
+      <a:accent1>
+        <a:srgbClr val="156082"/>
+      </a:accent1>
+      <a:accent2>
+        <a:srgbClr val="E97132"/>
+      </a:accent2>
+      <a:accent3>
+        <a:srgbClr val="196B24"/>
+      </a:accent3>
+      <a:accent4>
+        <a:srgbClr val="0F9ED5"/>
+      </a:accent4>
+      <a:accent5>
+        <a:srgbClr val="A02B93"/>
+      </a:accent5>
+      <a:accent6>
+        <a:srgbClr val="4EA72E"/>
+      </a:accent6>
+      <a:hlink>
+        <a:srgbClr val="467886"/>
+      </a:hlink>
+      <a:folHlink>
+        <a:srgbClr val="96607D"/>
+      </a:folHlink>
+    </a:clrScheme>
+    <a:fontScheme name="Office">
+      <a:majorFont>
+        <a:latin typeface="Aptos Display" panose="02110004020202020204"/>
+        <a:ea typeface=""/>
+        <a:cs typeface=""/>
+        <a:font script="Jpan" typeface="游ゴシック Light"/>
+        <a:font script="Hang" typeface="맑은 고딕"/>
+        <a:font script="Hans" typeface="等线 Light"/>
+        <a:font script="Hant" typeface="新細明體"/>
+        <a:font script="Arab" typeface="Times New Roman"/>
+        <a:font script="Hebr" typeface="Times New Roman"/>
+        <a:font script="Thai" typeface="Angsana New"/>
+        <a:font script="Ethi" typeface="Nyala"/>
+        <a:font script="Beng" typeface="Vrinda"/>
+        <a:font script="Gujr" typeface="Shruti"/>
+        <a:font script="Khmr" typeface="MoolBoran"/>
+        <a:font script="Knda" typeface="Tunga"/>
+        <a:font script="Guru" typeface="Raavi"/>
+        <a:font script="Cans" typeface="Euphemia"/>
+        <a:font script="Cher" typeface="Plantagenet Cherokee"/>
+        <a:font script="Yiii" typeface="Microsoft Yi Baiti"/>
+        <a:font script="Tibt" typeface="Microsoft Himalaya"/>
+        <a:font script="Thaa" typeface="MV Boli"/>
+        <a:font script="Deva" typeface="Mangal"/>
+        <a:font script="Telu" typeface="Gautami"/>
+        <a:font script="Taml" typeface="Latha"/>
+        <a:font script="Syrc" typeface="Estrangelo Edessa"/>
+        <a:font script="Orya" typeface="Kalinga"/>
+        <a:font script="Mlym" typeface="Kartika"/>
+        <a:font script="Laoo" typeface="DokChampa"/>
+        <a:font script="Sinh" typeface="Iskoola Pota"/>
+        <a:font script="Mong" typeface="Mongolian Baiti"/>
+        <a:font script="Viet" typeface="Times New Roman"/>
+        <a:font script="Uigh" typeface="Microsoft Uighur"/>
+        <a:font script="Geor" typeface="Sylfaen"/>
+        <a:font script="Armn" typeface="Arial"/>
+        <a:font script="Bugi" typeface="Leelawadee UI"/>
+        <a:font script="Bopo" typeface="Microsoft JhengHei"/>
+        <a:font script="Java" typeface="Javanese Text"/>
+        <a:font script="Lisu" typeface="Segoe UI"/>
+        <a:font script="Mymr" typeface="Myanmar Text"/>
+        <a:font script="Nkoo" typeface="Ebrima"/>
+        <a:font script="Olck" typeface="Nirmala UI"/>
+        <a:font script="Osma" typeface="Ebrima"/>
+        <a:font script="Phag" typeface="Phagspa"/>
+        <a:font script="Syrn" typeface="Estrangelo Edessa"/>
+        <a:font script="Syrj" typeface="Estrangelo Edessa"/>
+        <a:font script="Syre" typeface="Estrangelo Edessa"/>
+        <a:font script="Sora" typeface="Nirmala UI"/>
+        <a:font script="Tale" typeface="Microsoft Tai Le"/>
+        <a:font script="Talu" typeface="Microsoft New Tai Lue"/>
+        <a:font script="Tfng" typeface="Ebrima"/>
+      </a:majorFont>
+      <a:minorFont>
+        <a:latin typeface="Aptos" panose="02110004020202020204"/>
+        <a:ea typeface=""/>
+        <a:cs typeface=""/>
+        <a:font script="Jpan" typeface="游ゴシック"/>
+        <a:font script="Hang" typeface="맑은 고딕"/>
+        <a:font script="Hans" typeface="等线"/>
+        <a:font script="Hant" typeface="新細明體"/>
+        <a:font script="Arab" typeface="Arial"/>
+        <a:font script="Hebr" typeface="Arial"/>
+        <a:font script="Thai" typeface="Cordia New"/>
+        <a:font script="Ethi" typeface="Nyala"/>
+        <a:font script="Beng" typeface="Vrinda"/>
+        <a:font script="Gujr" typeface="Shruti"/>
+        <a:font script="Khmr" typeface="DaunPenh"/>
+        <a:font script="Knda" typeface="Tunga"/>
+        <a:font script="Guru" typeface="Raavi"/>
+        <a:font script="Cans" typeface="Euphemia"/>
+        <a:font script="Cher" typeface="Plantagenet Cherokee"/>
+        <a:font script="Yiii" typeface="Microsoft Yi Baiti"/>
+        <a:font script="Tibt" typeface="Microsoft Himalaya"/>
+        <a:font script="Thaa" typeface="MV Boli"/>
+        <a:font script="Deva" typeface="Mangal"/>
+        <a:font script="Telu" typeface="Gautami"/>
+        <a:font script="Taml" typeface="Latha"/>
+        <a:font script="Syrc" typeface="Estrangelo Edessa"/>
+        <a:font script="Orya" typeface="Kalinga"/>
+        <a:font script="Mlym" typeface="Kartika"/>
+        <a:font script="Laoo" typeface="DokChampa"/>
+        <a:font script="Sinh" typeface="Iskoola Pota"/>
+        <a:font script="Mong" typeface="Mongolian Baiti"/>
+        <a:font script="Viet" typeface="Arial"/>
+        <a:font script="Uigh" typeface="Microsoft Uighur"/>
+        <a:font script="Geor" typeface="Sylfaen"/>
+        <a:font script="Armn" typeface="Arial"/>
+        <a:font script="Bugi" typeface="Leelawadee UI"/>
+        <a:font script="Bopo" typeface="Microsoft JhengHei"/>
+        <a:font script="Java" typeface="Javanese Text"/>
+        <a:font script="Lisu" typeface="Segoe UI"/>
+        <a:font script="Mymr" typeface="Myanmar Text"/>
+        <a:font script="Nkoo" typeface="Ebrima"/>
+        <a:font script="Olck" typeface="Nirmala UI"/>
+        <a:font script="Osma" typeface="Ebrima"/>
+        <a:font script="Phag" typeface="Phagspa"/>
+        <a:font script="Syrn" typeface="Estrangelo Edessa"/>
+        <a:font script="Syrj" typeface="Estrangelo Edessa"/>
+        <a:font script="Syre" typeface="Estrangelo Edessa"/>
+        <a:font script="Sora" typeface="Nirmala UI"/>
+        <a:font script="Tale" typeface="Microsoft Tai Le"/>
+        <a:font script="Talu" typeface="Microsoft New Tai Lue"/>
+        <a:font script="Tfng" typeface="Ebrima"/>
+      </a:minorFont>
+    </a:fontScheme>
+    <a:fmtScheme name="Office">
+      <a:fillStyleLst>
+        <a:solidFill>
+          <a:schemeClr val="phClr"/>
+        </a:solidFill>
+        <a:gradFill rotWithShape="1">
+          <a:gsLst>
+            <a:gs pos="0">
+              <a:schemeClr val="phClr">
+                <a:lumMod val="110000"/>
+                <a:satMod val="105000"/>
+                <a:tint val="67000"/>
+              </a:schemeClr>
+            </a:gs>
+            <a:gs pos="50000">
+              <a:schemeClr val="phClr">
+                <a:lumMod val="105000"/>
+                <a:satMod val="103000"/>
+                <a:tint val="73000"/>
+              </a:schemeClr>
+            </a:gs>
+            <a:gs pos="100000">
+              <a:schemeClr val="phClr">
+                <a:lumMod val="105000"/>
+                <a:satMod val="109000"/>
+                <a:tint val="81000"/>
+              </a:schemeClr>
+            </a:gs>
+          </a:gsLst>
+          <a:lin ang="5400000" scaled="0"/>
+        </a:gradFill>
+        <a:gradFill rotWithShape="1">
+          <a:gsLst>
+            <a:gs pos="0">
+              <a:schemeClr val="phClr">
+                <a:satMod val="103000"/>
+                <a:lumMod val="102000"/>
+                <a:tint val="94000"/>
+              </a:schemeClr>
+            </a:gs>
+            <a:gs pos="50000">
+              <a:schemeClr val="phClr">
+                <a:satMod val="110000"/>
+                <a:lumMod val="100000"/>
+                <a:shade val="100000"/>
+              </a:schemeClr>
+            </a:gs>
+            <a:gs pos="100000">
+              <a:schemeClr val="phClr">
+                <a:lumMod val="99000"/>
+                <a:satMod val="120000"/>
+                <a:shade val="78000"/>
+              </a:schemeClr>
+            </a:gs>
+          </a:gsLst>
+          <a:lin ang="5400000" scaled="0"/>
+        </a:gradFill>
+      </a:fillStyleLst>
+      <a:lnStyleLst>
+        <a:ln w="12700" cap="flat" cmpd="sng" algn="ctr">
+          <a:solidFill>
+            <a:schemeClr val="phClr"/>
+          </a:solidFill>
+          <a:prstDash val="solid"/>
+          <a:miter lim="800000"/>
+        </a:ln>
+        <a:ln w="19050" cap="flat" cmpd="sng" algn="ctr">
+          <a:solidFill>
+            <a:schemeClr val="phClr"/>
+          </a:solidFill>
+          <a:prstDash val="solid"/>
+          <a:miter lim="800000"/>
+        </a:ln>
+        <a:ln w="25400" cap="flat" cmpd="sng" algn="ctr">
+          <a:solidFill>
+            <a:schemeClr val="phClr"/>
+          </a:solidFill>
+          <a:prstDash val="solid"/>
+          <a:miter lim="800000"/>
+        </a:ln>
+      </a:lnStyleLst>
+      <a:effectStyleLst>
+        <a:effectStyle>
+          <a:effectLst/>
+        </a:effectStyle>
+        <a:effectStyle>
+          <a:effectLst/>
+        </a:effectStyle>
+        <a:effectStyle>
+          <a:effectLst>
+            <a:outerShdw blurRad="57150" dist="19050" dir="5400000" algn="ctr" rotWithShape="0">
+              <a:srgbClr val="000000">
+                <a:alpha val="63000"/>
+              </a:srgbClr>
+            </a:outerShdw>
+          </a:effectLst>
+        </a:effectStyle>
+      </a:effectStyleLst>
+      <a:bgFillStyleLst>
+        <a:solidFill>
+          <a:schemeClr val="phClr"/>
+        </a:solidFill>
+        <a:solidFill>
+          <a:schemeClr val="phClr">
+            <a:tint val="95000"/>
+            <a:satMod val="170000"/>
+          </a:schemeClr>
+        </a:solidFill>
+        <a:gradFill rotWithShape="1">
+          <a:gsLst>
+            <a:gs pos="0">
+              <a:schemeClr val="phClr">
+                <a:tint val="93000"/>
+                <a:satMod val="150000"/>
+                <a:shade val="98000"/>
+                <a:lumMod val="102000"/>
+              </a:schemeClr>
+            </a:gs>
+            <a:gs pos="50000">
+              <a:schemeClr val="phClr">
+                <a:tint val="98000"/>
+                <a:satMod val="130000"/>
+                <a:shade val="90000"/>
+                <a:lumMod val="103000"/>
+              </a:schemeClr>
+            </a:gs>
+            <a:gs pos="100000">
+              <a:schemeClr val="phClr">
+                <a:shade val="63000"/>
+                <a:satMod val="120000"/>
+              </a:schemeClr>
+            </a:gs>
+          </a:gsLst>
+          <a:lin ang="5400000" scaled="0"/>
+        </a:gradFill>
+      </a:bgFillStyleLst>
+    </a:fmtScheme>
+  </a:themeElements>
+  <a:objectDefaults>
+    <a:lnDef>
+      <a:spPr/>
+      <a:bodyPr/>
+      <a:lstStyle/>
+      <a:style>
+        <a:lnRef idx="2">
+          <a:schemeClr val="accent1"/>
+        </a:lnRef>
+        <a:fillRef idx="0">
+          <a:schemeClr val="accent1"/>
+        </a:fillRef>
+        <a:effectRef idx="1">
+          <a:schemeClr val="accent1"/>
+        </a:effectRef>
+        <a:fontRef idx="minor">
+          <a:schemeClr val="tx1"/>
+        </a:fontRef>
+      </a:style>
+    </a:lnDef>
+  </a:objectDefaults>
+  <a:extraClrSchemeLst/>
+  <a:extLst>
+    <a:ext uri="{05A4C25C-085E-4340-85A3-A5531E510DB2}">
+      <thm15:themeFamily xmlns:thm15="http://schemas.microsoft.com/office/thememl/2012/main" name="Office Theme" id="{2E142A2C-CD16-42D6-873A-C26D2A0506FA}" vid="{1BDDFF52-6CD6-40A5-AB3C-68EB2F1E4D0A}"/>
+    </a:ext>
+  </a:extLst>
+</a:theme>
 </file>
--- a/presentation/split/3-Jonayed.pptx
+++ b/presentation/split/3-Jonayed.pptx
@@ -5,18 +5,17 @@
     <p:sldMasterId id="2147483648" r:id="rId1"/>
   </p:sldMasterIdLst>
   <p:notesMasterIdLst>
-    <p:notesMasterId r:id="rId11"/>
+    <p:notesMasterId r:id="rId10"/>
   </p:notesMasterIdLst>
   <p:sldIdLst>
     <p:sldId id="275" r:id="rId2"/>
     <p:sldId id="276" r:id="rId3"/>
     <p:sldId id="280" r:id="rId4"/>
     <p:sldId id="281" r:id="rId5"/>
-    <p:sldId id="277" r:id="rId6"/>
+    <p:sldId id="279" r:id="rId6"/>
     <p:sldId id="278" r:id="rId7"/>
-    <p:sldId id="279" r:id="rId8"/>
-    <p:sldId id="282" r:id="rId9"/>
-    <p:sldId id="283" r:id="rId10"/>
+    <p:sldId id="282" r:id="rId8"/>
+    <p:sldId id="283" r:id="rId9"/>
   </p:sldIdLst>
   <p:sldSz cx="12192000" cy="6858000"/>
   <p:notesSz cx="6858000" cy="12192000"/>
@@ -465,7 +464,7 @@
           <a:p>
             <a:r>
               <a:rPr lang="en-US" dirty="0"/>
-              <a:t>About 40 seconds. Every screen the executor passes through is matched against the screens already seen, and this is how the agent builds its own map of an app with no documentation. The checks run cheapest first: an exact signature; then structural similarity, which tolerates counters and timestamps; then containment, for a screen captured before it finished drawing; and finally a perceptual hash of the screenshot, for screens whose accessibility tree says almost nothing. A match counts a visit; a miss creates a new screen and records how we got there. On the contacts app that is 79 distinct screens from over two thousand observations, and 797 transitions. The planner uses this map to ground its screen hints and find paths.</a:t>
+              <a:t>About 35 seconds. This is the result of the screen matching on the previous slide, as it appears on our dashboard. Every circle is one distinct screen of the contacts app, 79 in all, joined by 797 recorded transitions. Nothing here came from documentation; it is only what the agent reached. Every execution stores the ordered list of screens it passed through, so we can pick any run and see exactly where it went: in orange, the path of TC-088, which imported a vCard of duplicates and then searched: from the contact list through Organize, the import screen and the close sheet, and back. Clicking a screen shows the screenshot we stored for it, here Contact List number 12, visited 19 times, with 14 controls. The same map is what the planner draws on when it looks up a screen or a route to one.</a:t>
             </a:r>
           </a:p>
         </p:txBody>
@@ -575,93 +574,6 @@
             <a:fld id="{F7021451-1387-4CA6-816F-3879F97B5CBC}" type="slidenum">
               <a:rPr lang="en-US"/>
               <a:t>6</a:t>
-            </a:fld>
-            <a:endParaRPr lang="en-US"/>
-          </a:p>
-        </p:txBody>
-      </p:sp>
-    </p:spTree>
-    <p:extLst>
-      <p:ext uri="{BB962C8B-B14F-4D97-AF65-F5344CB8AC3E}">
-        <p14:creationId xmlns:p14="http://schemas.microsoft.com/office/powerpoint/2010/main" val="1024086991"/>
-      </p:ext>
-    </p:extLst>
-  </p:cSld>
-  <p:clrMapOvr>
-    <a:masterClrMapping/>
-  </p:clrMapOvr>
-</p:notes>
-</file>
-
-<file path=ppt/notesSlides/notesSlide5.xml><?xml version="1.0" encoding="utf-8"?>
-<p:notes xmlns:a="http://schemas.openxmlformats.org/drawingml/2006/main" xmlns:r="http://schemas.openxmlformats.org/officeDocument/2006/relationships" xmlns:p="http://schemas.openxmlformats.org/presentationml/2006/main">
-  <p:cSld>
-    <p:spTree>
-      <p:nvGrpSpPr>
-        <p:cNvPr id="1" name=""/>
-        <p:cNvGrpSpPr/>
-        <p:nvPr/>
-      </p:nvGrpSpPr>
-      <p:grpSpPr>
-        <a:xfrm>
-          <a:off x="0" y="0"/>
-          <a:ext cx="0" cy="0"/>
-          <a:chOff x="0" y="0"/>
-          <a:chExt cx="0" cy="0"/>
-        </a:xfrm>
-      </p:grpSpPr>
-      <p:sp>
-        <p:nvSpPr>
-          <p:cNvPr id="2" name="Slide Image Placeholder 1"/>
-          <p:cNvSpPr>
-            <a:spLocks noGrp="1" noRot="1" noChangeAspect="1"/>
-          </p:cNvSpPr>
-          <p:nvPr>
-            <p:ph type="sldImg"/>
-          </p:nvPr>
-        </p:nvSpPr>
-        <p:spPr/>
-      </p:sp>
-      <p:sp>
-        <p:nvSpPr>
-          <p:cNvPr id="3" name="Notes Placeholder 2"/>
-          <p:cNvSpPr>
-            <a:spLocks noGrp="1"/>
-          </p:cNvSpPr>
-          <p:nvPr>
-            <p:ph type="body" idx="1"/>
-          </p:nvPr>
-        </p:nvSpPr>
-        <p:spPr/>
-        <p:txBody>
-          <a:bodyPr/>
-          <a:lstStyle/>
-          <a:p>
-            <a:r>
-              <a:rPr lang="en-US" dirty="0"/>
-              <a:t>About 35 seconds. This is the result of the screen matching on the previous slide, as it appears on our dashboard. Every circle is one distinct screen of the contacts app, 79 in all, joined by 797 recorded transitions. Nothing here came from documentation; it is only what the agent reached. Every execution stores the ordered list of screens it passed through, so we can pick any run and see exactly where it went: in orange, the path of TC-088, which imported a vCard of duplicates and then searched: from the contact list through Organize, the import screen and the close sheet, and back. Clicking a screen shows the screenshot we stored for it, here Contact List number 12, visited 19 times, with 14 controls. The same map is what the planner draws on when it looks up a screen or a route to one.</a:t>
-            </a:r>
-          </a:p>
-        </p:txBody>
-      </p:sp>
-      <p:sp>
-        <p:nvSpPr>
-          <p:cNvPr id="4" name="Slide Number Placeholder 3"/>
-          <p:cNvSpPr>
-            <a:spLocks noGrp="1"/>
-          </p:cNvSpPr>
-          <p:nvPr>
-            <p:ph type="sldNum" sz="quarter" idx="10"/>
-          </p:nvPr>
-        </p:nvSpPr>
-        <p:spPr/>
-        <p:txBody>
-          <a:bodyPr/>
-          <a:lstStyle/>
-          <a:p>
-            <a:fld id="{F7021451-1387-4CA6-816F-3879F97B5CBC}" type="slidenum">
-              <a:rPr lang="en-US"/>
-              <a:t>7</a:t>
             </a:fld>
             <a:endParaRPr lang="en-US"/>
           </a:p>
@@ -3550,17 +3462,8 @@
                 <a:ea typeface="Courier New" pitchFamily="34" charset="-122"/>
                 <a:cs typeface="Courier New" pitchFamily="34" charset="-120"/>
               </a:rPr>
-              <a:t>Preconditions: App is open. No contacts exist.</a:t>
-            </a:r>
-            <a:endParaRPr lang="en-US" sz="1050" dirty="0"/>
-          </a:p>
-          <a:p>
-            <a:pPr marL="0" indent="0">
-              <a:lnSpc>
-                <a:spcPts val="1450"/>
-              </a:lnSpc>
-              <a:buNone/>
-            </a:pPr>
+              <a:t>Preconditions: App is open. </a:t>
+            </a:r>
             <a:endParaRPr lang="en-US" sz="1050" dirty="0"/>
           </a:p>
           <a:p>
@@ -3776,345 +3679,6 @@
       </p:sp>
       <p:sp>
         <p:nvSpPr>
-          <p:cNvPr id="7" name="Shape 5"/>
-          <p:cNvSpPr/>
-          <p:nvPr/>
-        </p:nvSpPr>
-        <p:spPr>
-          <a:xfrm>
-            <a:off x="8001000" y="2057400"/>
-            <a:ext cx="3383280" cy="1188720"/>
-          </a:xfrm>
-          <a:prstGeom prst="rect">
-            <a:avLst/>
-          </a:prstGeom>
-          <a:solidFill>
-            <a:srgbClr val="FFFFFF"/>
-          </a:solidFill>
-          <a:ln w="12700">
-            <a:solidFill>
-              <a:srgbClr val="D5E0E5"/>
-            </a:solidFill>
-            <a:prstDash val="solid"/>
-          </a:ln>
-        </p:spPr>
-        <p:txBody>
-          <a:bodyPr/>
-          <a:lstStyle/>
-          <a:p>
-            <a:endParaRPr lang="en-US"/>
-          </a:p>
-        </p:txBody>
-      </p:sp>
-      <p:sp>
-        <p:nvSpPr>
-          <p:cNvPr id="8" name="Text 6"/>
-          <p:cNvSpPr txBox="1"/>
-          <p:nvPr/>
-        </p:nvSpPr>
-        <p:spPr>
-          <a:xfrm>
-            <a:off x="8229600" y="2221992"/>
-            <a:ext cx="2971800" cy="274320"/>
-          </a:xfrm>
-          <a:prstGeom prst="rect">
-            <a:avLst/>
-          </a:prstGeom>
-          <a:noFill/>
-          <a:ln/>
-        </p:spPr>
-        <p:txBody>
-          <a:bodyPr wrap="square" lIns="0" tIns="0" rIns="0" bIns="0" rtlCol="0" anchor="ctr"/>
-          <a:lstStyle/>
-          <a:p>
-            <a:pPr marL="0" indent="0">
-              <a:buNone/>
-            </a:pPr>
-            <a:r>
-              <a:rPr lang="en-US" sz="1300" b="1" dirty="0">
-                <a:solidFill>
-                  <a:srgbClr val="14303D"/>
-                </a:solidFill>
-                <a:latin typeface="IBM Plex Sans" pitchFamily="34" charset="0"/>
-                <a:ea typeface="IBM Plex Sans" pitchFamily="34" charset="-122"/>
-                <a:cs typeface="IBM Plex Sans" pitchFamily="34" charset="-120"/>
-              </a:rPr>
-              <a:t>Plain language, never coordinates</a:t>
-            </a:r>
-            <a:endParaRPr lang="en-US" sz="1300" dirty="0"/>
-          </a:p>
-        </p:txBody>
-      </p:sp>
-      <p:sp>
-        <p:nvSpPr>
-          <p:cNvPr id="9" name="Text 7"/>
-          <p:cNvSpPr txBox="1"/>
-          <p:nvPr/>
-        </p:nvSpPr>
-        <p:spPr>
-          <a:xfrm>
-            <a:off x="8229600" y="2532888"/>
-            <a:ext cx="2971800" cy="603504"/>
-          </a:xfrm>
-          <a:prstGeom prst="rect">
-            <a:avLst/>
-          </a:prstGeom>
-          <a:noFill/>
-          <a:ln/>
-        </p:spPr>
-        <p:txBody>
-          <a:bodyPr wrap="square" lIns="0" tIns="0" rIns="0" bIns="0" rtlCol="0" anchor="ctr"/>
-          <a:lstStyle/>
-          <a:p>
-            <a:pPr marL="0" indent="0">
-              <a:lnSpc>
-                <a:spcPts val="1300"/>
-              </a:lnSpc>
-              <a:buNone/>
-            </a:pPr>
-            <a:r>
-              <a:rPr lang="en-US" sz="1050" dirty="0">
-                <a:solidFill>
-                  <a:srgbClr val="46596A"/>
-                </a:solidFill>
-                <a:latin typeface="IBM Plex Sans" pitchFamily="34" charset="0"/>
-                <a:ea typeface="IBM Plex Sans" pitchFamily="34" charset="-122"/>
-                <a:cs typeface="IBM Plex Sans" pitchFamily="34" charset="-120"/>
-              </a:rPr>
-              <a:t>The planner cannot see the screen, so it states intent. The executor resolves every control at runtime.</a:t>
-            </a:r>
-            <a:endParaRPr lang="en-US" sz="1050" dirty="0"/>
-          </a:p>
-        </p:txBody>
-      </p:sp>
-      <p:sp>
-        <p:nvSpPr>
-          <p:cNvPr id="10" name="Shape 8"/>
-          <p:cNvSpPr/>
-          <p:nvPr/>
-        </p:nvSpPr>
-        <p:spPr>
-          <a:xfrm>
-            <a:off x="8001000" y="3364992"/>
-            <a:ext cx="3383280" cy="1188720"/>
-          </a:xfrm>
-          <a:prstGeom prst="rect">
-            <a:avLst/>
-          </a:prstGeom>
-          <a:solidFill>
-            <a:srgbClr val="FFFFFF"/>
-          </a:solidFill>
-          <a:ln w="12700">
-            <a:solidFill>
-              <a:srgbClr val="D5E0E5"/>
-            </a:solidFill>
-            <a:prstDash val="solid"/>
-          </a:ln>
-        </p:spPr>
-        <p:txBody>
-          <a:bodyPr/>
-          <a:lstStyle/>
-          <a:p>
-            <a:endParaRPr lang="en-US"/>
-          </a:p>
-        </p:txBody>
-      </p:sp>
-      <p:sp>
-        <p:nvSpPr>
-          <p:cNvPr id="11" name="Text 9"/>
-          <p:cNvSpPr txBox="1"/>
-          <p:nvPr/>
-        </p:nvSpPr>
-        <p:spPr>
-          <a:xfrm>
-            <a:off x="8229600" y="3529584"/>
-            <a:ext cx="2971800" cy="274320"/>
-          </a:xfrm>
-          <a:prstGeom prst="rect">
-            <a:avLst/>
-          </a:prstGeom>
-          <a:noFill/>
-          <a:ln/>
-        </p:spPr>
-        <p:txBody>
-          <a:bodyPr wrap="square" lIns="0" tIns="0" rIns="0" bIns="0" rtlCol="0" anchor="ctr"/>
-          <a:lstStyle/>
-          <a:p>
-            <a:pPr marL="0" indent="0">
-              <a:buNone/>
-            </a:pPr>
-            <a:r>
-              <a:rPr lang="en-US" sz="1300" b="1" dirty="0">
-                <a:solidFill>
-                  <a:srgbClr val="14303D"/>
-                </a:solidFill>
-                <a:latin typeface="IBM Plex Sans" pitchFamily="34" charset="0"/>
-                <a:ea typeface="IBM Plex Sans" pitchFamily="34" charset="-122"/>
-                <a:cs typeface="IBM Plex Sans" pitchFamily="34" charset="-120"/>
-              </a:rPr>
-              <a:t>Preconditions come with it</a:t>
-            </a:r>
-            <a:endParaRPr lang="en-US" sz="1300" dirty="0"/>
-          </a:p>
-        </p:txBody>
-      </p:sp>
-      <p:sp>
-        <p:nvSpPr>
-          <p:cNvPr id="12" name="Text 10"/>
-          <p:cNvSpPr txBox="1"/>
-          <p:nvPr/>
-        </p:nvSpPr>
-        <p:spPr>
-          <a:xfrm>
-            <a:off x="8229600" y="3840480"/>
-            <a:ext cx="2971800" cy="603504"/>
-          </a:xfrm>
-          <a:prstGeom prst="rect">
-            <a:avLst/>
-          </a:prstGeom>
-          <a:noFill/>
-          <a:ln/>
-        </p:spPr>
-        <p:txBody>
-          <a:bodyPr wrap="square" lIns="0" tIns="0" rIns="0" bIns="0" rtlCol="0" anchor="ctr"/>
-          <a:lstStyle/>
-          <a:p>
-            <a:pPr marL="0" indent="0">
-              <a:lnSpc>
-                <a:spcPts val="1300"/>
-              </a:lnSpc>
-              <a:buNone/>
-            </a:pPr>
-            <a:r>
-              <a:rPr lang="en-US" sz="1050" dirty="0">
-                <a:solidFill>
-                  <a:srgbClr val="46596A"/>
-                </a:solidFill>
-                <a:latin typeface="IBM Plex Sans" pitchFamily="34" charset="0"/>
-                <a:ea typeface="IBM Plex Sans" pitchFamily="34" charset="-122"/>
-                <a:cs typeface="IBM Plex Sans" pitchFamily="34" charset="-120"/>
-              </a:rPr>
-              <a:t>If they cannot be created, the run stops and is attributed to the environment, not the app.</a:t>
-            </a:r>
-            <a:endParaRPr lang="en-US" sz="1050" dirty="0"/>
-          </a:p>
-        </p:txBody>
-      </p:sp>
-      <p:sp>
-        <p:nvSpPr>
-          <p:cNvPr id="13" name="Shape 11"/>
-          <p:cNvSpPr/>
-          <p:nvPr/>
-        </p:nvSpPr>
-        <p:spPr>
-          <a:xfrm>
-            <a:off x="8001000" y="4672584"/>
-            <a:ext cx="3383280" cy="1188720"/>
-          </a:xfrm>
-          <a:prstGeom prst="rect">
-            <a:avLst/>
-          </a:prstGeom>
-          <a:solidFill>
-            <a:srgbClr val="FFFFFF"/>
-          </a:solidFill>
-          <a:ln w="12700">
-            <a:solidFill>
-              <a:srgbClr val="D5E0E5"/>
-            </a:solidFill>
-            <a:prstDash val="solid"/>
-          </a:ln>
-        </p:spPr>
-        <p:txBody>
-          <a:bodyPr/>
-          <a:lstStyle/>
-          <a:p>
-            <a:endParaRPr lang="en-US"/>
-          </a:p>
-        </p:txBody>
-      </p:sp>
-      <p:sp>
-        <p:nvSpPr>
-          <p:cNvPr id="14" name="Text 12"/>
-          <p:cNvSpPr txBox="1"/>
-          <p:nvPr/>
-        </p:nvSpPr>
-        <p:spPr>
-          <a:xfrm>
-            <a:off x="8229600" y="4837176"/>
-            <a:ext cx="2971800" cy="274320"/>
-          </a:xfrm>
-          <a:prstGeom prst="rect">
-            <a:avLst/>
-          </a:prstGeom>
-          <a:noFill/>
-          <a:ln/>
-        </p:spPr>
-        <p:txBody>
-          <a:bodyPr wrap="square" lIns="0" tIns="0" rIns="0" bIns="0" rtlCol="0" anchor="ctr"/>
-          <a:lstStyle/>
-          <a:p>
-            <a:pPr marL="0" indent="0">
-              <a:buNone/>
-            </a:pPr>
-            <a:r>
-              <a:rPr lang="en-US" sz="1300" b="1" dirty="0">
-                <a:solidFill>
-                  <a:srgbClr val="14303D"/>
-                </a:solidFill>
-                <a:latin typeface="IBM Plex Sans" pitchFamily="34" charset="0"/>
-                <a:ea typeface="IBM Plex Sans" pitchFamily="34" charset="-122"/>
-                <a:cs typeface="IBM Plex Sans" pitchFamily="34" charset="-120"/>
-              </a:rPr>
-              <a:t>Secrets are added here</a:t>
-            </a:r>
-            <a:endParaRPr lang="en-US" sz="1300" dirty="0"/>
-          </a:p>
-        </p:txBody>
-      </p:sp>
-      <p:sp>
-        <p:nvSpPr>
-          <p:cNvPr id="15" name="Text 13"/>
-          <p:cNvSpPr txBox="1"/>
-          <p:nvPr/>
-        </p:nvSpPr>
-        <p:spPr>
-          <a:xfrm>
-            <a:off x="8229600" y="5148072"/>
-            <a:ext cx="2971800" cy="603504"/>
-          </a:xfrm>
-          <a:prstGeom prst="rect">
-            <a:avLst/>
-          </a:prstGeom>
-          <a:noFill/>
-          <a:ln/>
-        </p:spPr>
-        <p:txBody>
-          <a:bodyPr wrap="square" lIns="0" tIns="0" rIns="0" bIns="0" rtlCol="0" anchor="ctr"/>
-          <a:lstStyle/>
-          <a:p>
-            <a:pPr marL="0" indent="0">
-              <a:lnSpc>
-                <a:spcPts val="1300"/>
-              </a:lnSpc>
-              <a:buNone/>
-            </a:pPr>
-            <a:r>
-              <a:rPr lang="en-US" sz="1050" dirty="0">
-                <a:solidFill>
-                  <a:srgbClr val="46596A"/>
-                </a:solidFill>
-                <a:latin typeface="IBM Plex Sans" pitchFamily="34" charset="0"/>
-                <a:ea typeface="IBM Plex Sans" pitchFamily="34" charset="-122"/>
-                <a:cs typeface="IBM Plex Sans" pitchFamily="34" charset="-120"/>
-              </a:rPr>
-              <a:t>Login details come from the target profile and reach the executor only. The planner never sees them.</a:t>
-            </a:r>
-            <a:endParaRPr lang="en-US" sz="1050" dirty="0"/>
-          </a:p>
-        </p:txBody>
-      </p:sp>
-      <p:sp>
-        <p:nvSpPr>
           <p:cNvPr id="16" name="Text 14"/>
           <p:cNvSpPr txBox="1"/>
           <p:nvPr/>
@@ -4160,8 +3724,8 @@
         </p:nvSpPr>
         <p:spPr>
           <a:xfrm>
-            <a:off x="11201400" y="6236208"/>
-            <a:ext cx="228600" cy="256032"/>
+            <a:off x="11000792" y="6139543"/>
+            <a:ext cx="429208" cy="334409"/>
           </a:xfrm>
           <a:prstGeom prst="rect">
             <a:avLst/>
@@ -4304,53 +3868,14 @@
       </p:sp>
       <p:sp>
         <p:nvSpPr>
-          <p:cNvPr id="4" name="Text 2"/>
-          <p:cNvSpPr txBox="1"/>
-          <p:nvPr/>
-        </p:nvSpPr>
-        <p:spPr>
-          <a:xfrm>
-            <a:off x="813816" y="1645920"/>
-            <a:ext cx="10881360" cy="256032"/>
-          </a:xfrm>
-          <a:prstGeom prst="rect">
-            <a:avLst/>
-          </a:prstGeom>
-          <a:noFill/>
-          <a:ln/>
-        </p:spPr>
-        <p:txBody>
-          <a:bodyPr wrap="square" lIns="0" tIns="0" rIns="0" bIns="0" rtlCol="0" anchor="ctr"/>
-          <a:lstStyle/>
-          <a:p>
-            <a:pPr marL="0" indent="0">
-              <a:buNone/>
-            </a:pPr>
-            <a:r>
-              <a:rPr lang="en-US" sz="1200" dirty="0">
-                <a:solidFill>
-                  <a:srgbClr val="46596A"/>
-                </a:solidFill>
-                <a:latin typeface="IBM Plex Sans" pitchFamily="34" charset="0"/>
-                <a:ea typeface="IBM Plex Sans" pitchFamily="34" charset="-122"/>
-                <a:cs typeface="IBM Plex Sans" pitchFamily="34" charset="-120"/>
-              </a:rPr>
-              <a:t>The same run on a physical device. Every line below is from the trajectory log.</a:t>
-            </a:r>
-            <a:endParaRPr lang="en-US" sz="1200" dirty="0"/>
-          </a:p>
-        </p:txBody>
-      </p:sp>
-      <p:sp>
-        <p:nvSpPr>
           <p:cNvPr id="5" name="Shape 3"/>
           <p:cNvSpPr/>
           <p:nvPr/>
         </p:nvSpPr>
         <p:spPr>
           <a:xfrm>
-            <a:off x="813816" y="2057400"/>
-            <a:ext cx="6903720" cy="3246120"/>
+            <a:off x="813816" y="2150279"/>
+            <a:ext cx="6903720" cy="2584068"/>
           </a:xfrm>
           <a:prstGeom prst="rect">
             <a:avLst/>
@@ -4381,8 +3906,8 @@
         </p:nvSpPr>
         <p:spPr>
           <a:xfrm>
-            <a:off x="1069848" y="2267712"/>
-            <a:ext cx="6446520" cy="2834640"/>
+            <a:off x="1069848" y="2276669"/>
+            <a:ext cx="6446520" cy="2256510"/>
           </a:xfrm>
           <a:prstGeom prst="rect">
             <a:avLst/>
@@ -4561,7 +4086,7 @@
         </p:nvSpPr>
         <p:spPr>
           <a:xfrm>
-            <a:off x="813816" y="5440680"/>
+            <a:off x="813816" y="4871507"/>
             <a:ext cx="6903720" cy="731520"/>
           </a:xfrm>
           <a:prstGeom prst="rect">
@@ -4593,7 +4118,7 @@
         </p:nvSpPr>
         <p:spPr>
           <a:xfrm>
-            <a:off x="1069848" y="5440680"/>
+            <a:off x="1069848" y="4871507"/>
             <a:ext cx="6446520" cy="731520"/>
           </a:xfrm>
           <a:prstGeom prst="rect">
@@ -4607,13 +4132,10 @@
           <a:lstStyle/>
           <a:p>
             <a:pPr marL="0" indent="0">
-              <a:lnSpc>
-                <a:spcPts val="1500"/>
-              </a:lnSpc>
-              <a:buNone/>
-            </a:pPr>
-            <a:r>
-              <a:rPr lang="en-US" sz="1150" dirty="0">
+              <a:buNone/>
+            </a:pPr>
+            <a:r>
+              <a:rPr lang="en-US" sz="1400" dirty="0">
                 <a:solidFill>
                   <a:srgbClr val="14303D"/>
                 </a:solidFill>
@@ -4623,411 +4145,7 @@
               </a:rPr>
               <a:t>Result: the search area is empty, no contacts matching "Bob". The app did not crash and no error occurred.</a:t>
             </a:r>
-            <a:endParaRPr lang="en-US" sz="1150" dirty="0"/>
-          </a:p>
-        </p:txBody>
-      </p:sp>
-      <p:sp>
-        <p:nvSpPr>
-          <p:cNvPr id="9" name="Shape 7"/>
-          <p:cNvSpPr/>
-          <p:nvPr/>
-        </p:nvSpPr>
-        <p:spPr>
-          <a:xfrm>
-            <a:off x="8001000" y="2057400"/>
-            <a:ext cx="3383280" cy="960120"/>
-          </a:xfrm>
-          <a:prstGeom prst="rect">
-            <a:avLst/>
-          </a:prstGeom>
-          <a:solidFill>
-            <a:srgbClr val="FFFFFF"/>
-          </a:solidFill>
-          <a:ln w="12700">
-            <a:solidFill>
-              <a:srgbClr val="D5E0E5"/>
-            </a:solidFill>
-            <a:prstDash val="solid"/>
-          </a:ln>
-        </p:spPr>
-        <p:txBody>
-          <a:bodyPr/>
-          <a:lstStyle/>
-          <a:p>
-            <a:endParaRPr lang="en-US"/>
-          </a:p>
-        </p:txBody>
-      </p:sp>
-      <p:sp>
-        <p:nvSpPr>
-          <p:cNvPr id="10" name="Text 8"/>
-          <p:cNvSpPr txBox="1"/>
-          <p:nvPr/>
-        </p:nvSpPr>
-        <p:spPr>
-          <a:xfrm>
-            <a:off x="8229600" y="2203704"/>
-            <a:ext cx="2971800" cy="237744"/>
-          </a:xfrm>
-          <a:prstGeom prst="rect">
-            <a:avLst/>
-          </a:prstGeom>
-          <a:noFill/>
-          <a:ln/>
-        </p:spPr>
-        <p:txBody>
-          <a:bodyPr wrap="square" lIns="0" tIns="0" rIns="0" bIns="0" rtlCol="0" anchor="ctr"/>
-          <a:lstStyle/>
-          <a:p>
-            <a:pPr marL="0" indent="0">
-              <a:buNone/>
-            </a:pPr>
-            <a:r>
-              <a:rPr lang="en-US" sz="1050" b="1" kern="0" spc="120" dirty="0">
-                <a:solidFill>
-                  <a:srgbClr val="55697A"/>
-                </a:solidFill>
-                <a:latin typeface="IBM Plex Sans" pitchFamily="34" charset="0"/>
-                <a:ea typeface="IBM Plex Sans" pitchFamily="34" charset="-122"/>
-                <a:cs typeface="IBM Plex Sans" pitchFamily="34" charset="-120"/>
-              </a:rPr>
-              <a:t>VERDICT</a:t>
-            </a:r>
-            <a:endParaRPr lang="en-US" sz="1050" dirty="0"/>
-          </a:p>
-        </p:txBody>
-      </p:sp>
-      <p:sp>
-        <p:nvSpPr>
-          <p:cNvPr id="11" name="Text 9"/>
-          <p:cNvSpPr txBox="1"/>
-          <p:nvPr/>
-        </p:nvSpPr>
-        <p:spPr>
-          <a:xfrm>
-            <a:off x="8229600" y="2478024"/>
-            <a:ext cx="2971800" cy="384048"/>
-          </a:xfrm>
-          <a:prstGeom prst="rect">
-            <a:avLst/>
-          </a:prstGeom>
-          <a:noFill/>
-          <a:ln/>
-        </p:spPr>
-        <p:txBody>
-          <a:bodyPr wrap="square" lIns="0" tIns="0" rIns="0" bIns="0" rtlCol="0" anchor="ctr"/>
-          <a:lstStyle/>
-          <a:p>
-            <a:pPr marL="0" indent="0">
-              <a:buNone/>
-            </a:pPr>
-            <a:r>
-              <a:rPr lang="en-US" sz="1900" b="1" dirty="0">
-                <a:solidFill>
-                  <a:srgbClr val="1E6B45"/>
-                </a:solidFill>
-                <a:latin typeface="Source Serif 4" pitchFamily="34" charset="0"/>
-                <a:ea typeface="Source Serif 4" pitchFamily="34" charset="-122"/>
-                <a:cs typeface="Source Serif 4" pitchFamily="34" charset="-120"/>
-              </a:rPr>
-              <a:t>pass</a:t>
-            </a:r>
-            <a:endParaRPr lang="en-US" sz="1900" dirty="0"/>
-          </a:p>
-        </p:txBody>
-      </p:sp>
-      <p:sp>
-        <p:nvSpPr>
-          <p:cNvPr id="12" name="Shape 10"/>
-          <p:cNvSpPr/>
-          <p:nvPr/>
-        </p:nvSpPr>
-        <p:spPr>
-          <a:xfrm>
-            <a:off x="8001000" y="3136392"/>
-            <a:ext cx="3383280" cy="960120"/>
-          </a:xfrm>
-          <a:prstGeom prst="rect">
-            <a:avLst/>
-          </a:prstGeom>
-          <a:solidFill>
-            <a:srgbClr val="FFFFFF"/>
-          </a:solidFill>
-          <a:ln w="12700">
-            <a:solidFill>
-              <a:srgbClr val="D5E0E5"/>
-            </a:solidFill>
-            <a:prstDash val="solid"/>
-          </a:ln>
-        </p:spPr>
-        <p:txBody>
-          <a:bodyPr/>
-          <a:lstStyle/>
-          <a:p>
-            <a:endParaRPr lang="en-US"/>
-          </a:p>
-        </p:txBody>
-      </p:sp>
-      <p:sp>
-        <p:nvSpPr>
-          <p:cNvPr id="13" name="Text 11"/>
-          <p:cNvSpPr txBox="1"/>
-          <p:nvPr/>
-        </p:nvSpPr>
-        <p:spPr>
-          <a:xfrm>
-            <a:off x="8229600" y="3282696"/>
-            <a:ext cx="2971800" cy="237744"/>
-          </a:xfrm>
-          <a:prstGeom prst="rect">
-            <a:avLst/>
-          </a:prstGeom>
-          <a:noFill/>
-          <a:ln/>
-        </p:spPr>
-        <p:txBody>
-          <a:bodyPr wrap="square" lIns="0" tIns="0" rIns="0" bIns="0" rtlCol="0" anchor="ctr"/>
-          <a:lstStyle/>
-          <a:p>
-            <a:pPr marL="0" indent="0">
-              <a:buNone/>
-            </a:pPr>
-            <a:r>
-              <a:rPr lang="en-US" sz="1050" b="1" kern="0" spc="120" dirty="0">
-                <a:solidFill>
-                  <a:srgbClr val="55697A"/>
-                </a:solidFill>
-                <a:latin typeface="IBM Plex Sans" pitchFamily="34" charset="0"/>
-                <a:ea typeface="IBM Plex Sans" pitchFamily="34" charset="-122"/>
-                <a:cs typeface="IBM Plex Sans" pitchFamily="34" charset="-120"/>
-              </a:rPr>
-              <a:t>STEPS USED</a:t>
-            </a:r>
-            <a:endParaRPr lang="en-US" sz="1050" dirty="0"/>
-          </a:p>
-        </p:txBody>
-      </p:sp>
-      <p:sp>
-        <p:nvSpPr>
-          <p:cNvPr id="14" name="Text 12"/>
-          <p:cNvSpPr txBox="1"/>
-          <p:nvPr/>
-        </p:nvSpPr>
-        <p:spPr>
-          <a:xfrm>
-            <a:off x="8229600" y="3557016"/>
-            <a:ext cx="2971800" cy="384048"/>
-          </a:xfrm>
-          <a:prstGeom prst="rect">
-            <a:avLst/>
-          </a:prstGeom>
-          <a:noFill/>
-          <a:ln/>
-        </p:spPr>
-        <p:txBody>
-          <a:bodyPr wrap="square" lIns="0" tIns="0" rIns="0" bIns="0" rtlCol="0" anchor="ctr"/>
-          <a:lstStyle/>
-          <a:p>
-            <a:pPr marL="0" indent="0">
-              <a:buNone/>
-            </a:pPr>
-            <a:r>
-              <a:rPr lang="en-US" sz="1900" b="1" dirty="0">
-                <a:solidFill>
-                  <a:srgbClr val="0B6A8F"/>
-                </a:solidFill>
-                <a:latin typeface="Source Serif 4" pitchFamily="34" charset="0"/>
-                <a:ea typeface="Source Serif 4" pitchFamily="34" charset="-122"/>
-                <a:cs typeface="Source Serif 4" pitchFamily="34" charset="-120"/>
-              </a:rPr>
-              <a:t>8 of 30</a:t>
-            </a:r>
-            <a:endParaRPr lang="en-US" sz="1900" dirty="0"/>
-          </a:p>
-        </p:txBody>
-      </p:sp>
-      <p:sp>
-        <p:nvSpPr>
-          <p:cNvPr id="15" name="Shape 13"/>
-          <p:cNvSpPr/>
-          <p:nvPr/>
-        </p:nvSpPr>
-        <p:spPr>
-          <a:xfrm>
-            <a:off x="8001000" y="4215384"/>
-            <a:ext cx="3383280" cy="960120"/>
-          </a:xfrm>
-          <a:prstGeom prst="rect">
-            <a:avLst/>
-          </a:prstGeom>
-          <a:solidFill>
-            <a:srgbClr val="FFFFFF"/>
-          </a:solidFill>
-          <a:ln w="12700">
-            <a:solidFill>
-              <a:srgbClr val="D5E0E5"/>
-            </a:solidFill>
-            <a:prstDash val="solid"/>
-          </a:ln>
-        </p:spPr>
-        <p:txBody>
-          <a:bodyPr/>
-          <a:lstStyle/>
-          <a:p>
-            <a:endParaRPr lang="en-US"/>
-          </a:p>
-        </p:txBody>
-      </p:sp>
-      <p:sp>
-        <p:nvSpPr>
-          <p:cNvPr id="16" name="Text 14"/>
-          <p:cNvSpPr txBox="1"/>
-          <p:nvPr/>
-        </p:nvSpPr>
-        <p:spPr>
-          <a:xfrm>
-            <a:off x="8229600" y="4361688"/>
-            <a:ext cx="2971800" cy="237744"/>
-          </a:xfrm>
-          <a:prstGeom prst="rect">
-            <a:avLst/>
-          </a:prstGeom>
-          <a:noFill/>
-          <a:ln/>
-        </p:spPr>
-        <p:txBody>
-          <a:bodyPr wrap="square" lIns="0" tIns="0" rIns="0" bIns="0" rtlCol="0" anchor="ctr"/>
-          <a:lstStyle/>
-          <a:p>
-            <a:pPr marL="0" indent="0">
-              <a:buNone/>
-            </a:pPr>
-            <a:r>
-              <a:rPr lang="en-US" sz="1050" b="1" kern="0" spc="120" dirty="0">
-                <a:solidFill>
-                  <a:srgbClr val="55697A"/>
-                </a:solidFill>
-                <a:latin typeface="IBM Plex Sans" pitchFamily="34" charset="0"/>
-                <a:ea typeface="IBM Plex Sans" pitchFamily="34" charset="-122"/>
-                <a:cs typeface="IBM Plex Sans" pitchFamily="34" charset="-120"/>
-              </a:rPr>
-              <a:t>ATTRIBUTION</a:t>
-            </a:r>
-            <a:endParaRPr lang="en-US" sz="1050" dirty="0"/>
-          </a:p>
-        </p:txBody>
-      </p:sp>
-      <p:sp>
-        <p:nvSpPr>
-          <p:cNvPr id="17" name="Text 15"/>
-          <p:cNvSpPr txBox="1"/>
-          <p:nvPr/>
-        </p:nvSpPr>
-        <p:spPr>
-          <a:xfrm>
-            <a:off x="8229600" y="4636008"/>
-            <a:ext cx="2971800" cy="384048"/>
-          </a:xfrm>
-          <a:prstGeom prst="rect">
-            <a:avLst/>
-          </a:prstGeom>
-          <a:noFill/>
-          <a:ln/>
-        </p:spPr>
-        <p:txBody>
-          <a:bodyPr wrap="square" lIns="0" tIns="0" rIns="0" bIns="0" rtlCol="0" anchor="ctr"/>
-          <a:lstStyle/>
-          <a:p>
-            <a:pPr marL="0" indent="0">
-              <a:buNone/>
-            </a:pPr>
-            <a:r>
-              <a:rPr lang="en-US" sz="1900" b="1" dirty="0">
-                <a:solidFill>
-                  <a:srgbClr val="0B6A8F"/>
-                </a:solidFill>
-                <a:latin typeface="Source Serif 4" pitchFamily="34" charset="0"/>
-                <a:ea typeface="Source Serif 4" pitchFamily="34" charset="-122"/>
-                <a:cs typeface="Source Serif 4" pitchFamily="34" charset="-120"/>
-              </a:rPr>
-              <a:t>none, the app behaved</a:t>
-            </a:r>
-            <a:endParaRPr lang="en-US" sz="1900" dirty="0"/>
-          </a:p>
-        </p:txBody>
-      </p:sp>
-      <p:sp>
-        <p:nvSpPr>
-          <p:cNvPr id="18" name="Shape 16"/>
-          <p:cNvSpPr/>
-          <p:nvPr/>
-        </p:nvSpPr>
-        <p:spPr>
-          <a:xfrm>
-            <a:off x="8001000" y="5294376"/>
-            <a:ext cx="3383280" cy="877824"/>
-          </a:xfrm>
-          <a:prstGeom prst="rect">
-            <a:avLst/>
-          </a:prstGeom>
-          <a:solidFill>
-            <a:srgbClr val="FFFFFF"/>
-          </a:solidFill>
-          <a:ln w="12700">
-            <a:solidFill>
-              <a:srgbClr val="D5E0E5"/>
-            </a:solidFill>
-            <a:prstDash val="solid"/>
-          </a:ln>
-        </p:spPr>
-        <p:txBody>
-          <a:bodyPr/>
-          <a:lstStyle/>
-          <a:p>
-            <a:endParaRPr lang="en-US"/>
-          </a:p>
-        </p:txBody>
-      </p:sp>
-      <p:sp>
-        <p:nvSpPr>
-          <p:cNvPr id="19" name="Text 17"/>
-          <p:cNvSpPr txBox="1"/>
-          <p:nvPr/>
-        </p:nvSpPr>
-        <p:spPr>
-          <a:xfrm>
-            <a:off x="8229600" y="5294376"/>
-            <a:ext cx="2971800" cy="877824"/>
-          </a:xfrm>
-          <a:prstGeom prst="rect">
-            <a:avLst/>
-          </a:prstGeom>
-          <a:noFill/>
-          <a:ln/>
-        </p:spPr>
-        <p:txBody>
-          <a:bodyPr wrap="square" lIns="0" tIns="0" rIns="0" bIns="0" rtlCol="0" anchor="ctr"/>
-          <a:lstStyle/>
-          <a:p>
-            <a:pPr marL="0" indent="0">
-              <a:lnSpc>
-                <a:spcPts val="1300"/>
-              </a:lnSpc>
-              <a:buNone/>
-            </a:pPr>
-            <a:r>
-              <a:rPr lang="en-US" sz="1050" dirty="0">
-                <a:solidFill>
-                  <a:srgbClr val="46596A"/>
-                </a:solidFill>
-                <a:latin typeface="IBM Plex Sans" pitchFamily="34" charset="0"/>
-                <a:ea typeface="IBM Plex Sans" pitchFamily="34" charset="-122"/>
-                <a:cs typeface="IBM Plex Sans" pitchFamily="34" charset="-120"/>
-              </a:rPr>
-              <a:t>Every step, screenshot and UI tree is written to a trajectory folder, replayable after the run.</a:t>
-            </a:r>
-            <a:endParaRPr lang="en-US" sz="1050" dirty="0"/>
+            <a:endParaRPr lang="en-US" sz="1400" dirty="0"/>
           </a:p>
         </p:txBody>
       </p:sp>
@@ -5078,8 +4196,8 @@
         </p:nvSpPr>
         <p:spPr>
           <a:xfrm>
-            <a:off x="11115923" y="6236208"/>
-            <a:ext cx="314077" cy="237744"/>
+            <a:off x="11038114" y="6236208"/>
+            <a:ext cx="391886" cy="237744"/>
           </a:xfrm>
           <a:prstGeom prst="rect">
             <a:avLst/>
@@ -5119,11 +4237,11 @@
 
 <file path=ppt/slides/slide5.xml><?xml version="1.0" encoding="utf-8"?>
 <p:sld xmlns:a="http://schemas.openxmlformats.org/drawingml/2006/main" xmlns:r="http://schemas.openxmlformats.org/officeDocument/2006/relationships" xmlns:p="http://schemas.openxmlformats.org/presentationml/2006/main">
-  <p:cSld name="Slide 22">
+  <p:cSld name="Slide 24">
     <p:bg>
       <p:bgPr>
         <a:solidFill>
-          <a:srgbClr val="F6F8F7"/>
+          <a:srgbClr val="EDF2F4"/>
         </a:solidFill>
         <a:effectLst/>
       </p:bgPr>
@@ -5150,8 +4268,8 @@
         </p:nvSpPr>
         <p:spPr>
           <a:xfrm>
-            <a:off x="812800" y="812800"/>
-            <a:ext cx="10883392" cy="238720"/>
+            <a:off x="812800" y="508000"/>
+            <a:ext cx="10883392" cy="234454"/>
           </a:xfrm>
           <a:prstGeom prst="rect">
             <a:avLst/>
@@ -5167,12 +4285,12 @@
           <a:p>
             <a:pPr marL="0" indent="0" algn="l">
               <a:lnSpc>
-                <a:spcPts val="1680"/>
-              </a:lnSpc>
-              <a:buNone/>
-            </a:pPr>
-            <a:r>
-              <a:rPr lang="en-US" sz="1200" b="1" kern="0" spc="100" dirty="0">
+                <a:spcPts val="1675"/>
+              </a:lnSpc>
+              <a:buNone/>
+            </a:pPr>
+            <a:r>
+              <a:rPr lang="en-US" sz="1196" b="1" kern="0" spc="100" dirty="0">
                 <a:solidFill>
                   <a:srgbClr val="0B6A8F"/>
                 </a:solidFill>
@@ -5180,9 +4298,9 @@
                 <a:ea typeface="IBM Plex Sans" pitchFamily="34" charset="-122"/>
                 <a:cs typeface="IBM Plex Sans" pitchFamily="34" charset="-120"/>
               </a:rPr>
-              <a:t>EXECUTOR · MAPPING THE APP</a:t>
-            </a:r>
-            <a:endParaRPr lang="en-US" sz="1200" dirty="0"/>
+              <a:t>EXECUTOR · THE APP MAP</a:t>
+            </a:r>
+            <a:endParaRPr lang="en-US" sz="1196" dirty="0"/>
           </a:p>
         </p:txBody>
       </p:sp>
@@ -5194,8 +4312,8 @@
         </p:nvSpPr>
         <p:spPr>
           <a:xfrm>
-            <a:off x="812800" y="1102320"/>
-            <a:ext cx="10883392" cy="444500"/>
+            <a:off x="812800" y="793254"/>
+            <a:ext cx="10883392" cy="436066"/>
           </a:xfrm>
           <a:prstGeom prst="rect">
             <a:avLst/>
@@ -5211,12 +4329,12 @@
           <a:p>
             <a:pPr marL="0" indent="0" algn="l">
               <a:lnSpc>
-                <a:spcPts val="3300"/>
-              </a:lnSpc>
-              <a:buNone/>
-            </a:pPr>
-            <a:r>
-              <a:rPr lang="en-US" sz="3000" b="1" dirty="0">
+                <a:spcPts val="3269"/>
+              </a:lnSpc>
+              <a:buNone/>
+            </a:pPr>
+            <a:r>
+              <a:rPr lang="en-US" sz="2972" b="1" dirty="0">
                 <a:solidFill>
                   <a:srgbClr val="14303D"/>
                 </a:solidFill>
@@ -5224,75 +4342,82 @@
                 <a:ea typeface="Source Serif 4" pitchFamily="34" charset="-122"/>
                 <a:cs typeface="Source Serif 4" pitchFamily="34" charset="-120"/>
               </a:rPr>
-              <a:t>Mapping the app while the tests run</a:t>
-            </a:r>
-            <a:endParaRPr lang="en-US" sz="3000" dirty="0"/>
-          </a:p>
-        </p:txBody>
-      </p:sp>
-      <p:sp>
-        <p:nvSpPr>
-          <p:cNvPr id="4" name="Text 2"/>
-          <p:cNvSpPr/>
-          <p:nvPr/>
-        </p:nvSpPr>
-        <p:spPr>
-          <a:xfrm>
-            <a:off x="812800" y="1775420"/>
-            <a:ext cx="6802120" cy="238720"/>
-          </a:xfrm>
-          <a:prstGeom prst="rect">
-            <a:avLst/>
-          </a:prstGeom>
-          <a:noFill/>
-          <a:ln/>
-        </p:spPr>
-        <p:txBody>
-          <a:bodyPr wrap="square" lIns="0" tIns="0" rIns="0" bIns="0" rtlCol="0" anchor="t">
-            <a:normAutofit/>
-          </a:bodyPr>
-          <a:lstStyle/>
-          <a:p>
-            <a:pPr marL="0" indent="0" algn="l">
-              <a:lnSpc>
-                <a:spcPts val="1680"/>
-              </a:lnSpc>
-              <a:buNone/>
-            </a:pPr>
-            <a:r>
-              <a:rPr lang="en-US" sz="1200" dirty="0">
-                <a:solidFill>
-                  <a:srgbClr val="55697A"/>
-                </a:solidFill>
-                <a:latin typeface="IBM Plex Sans" pitchFamily="34" charset="0"/>
-                <a:ea typeface="IBM Plex Sans" pitchFamily="34" charset="-122"/>
-                <a:cs typeface="IBM Plex Sans" pitchFamily="34" charset="-120"/>
-              </a:rPr>
-              <a:t>Is this a screen we have seen? Checked in order, cheapest first:</a:t>
-            </a:r>
-            <a:endParaRPr lang="en-US" sz="1200" dirty="0"/>
-          </a:p>
-        </p:txBody>
-      </p:sp>
-      <p:sp>
-        <p:nvSpPr>
-          <p:cNvPr id="5" name="Shape 3"/>
-          <p:cNvSpPr/>
-          <p:nvPr/>
-        </p:nvSpPr>
-        <p:spPr>
-          <a:xfrm>
-            <a:off x="815975" y="2068116"/>
-            <a:ext cx="6597650" cy="697161"/>
+              <a:t>Every run's path through the map</a:t>
+            </a:r>
+            <a:endParaRPr lang="en-US" sz="2972" dirty="0"/>
+          </a:p>
+        </p:txBody>
+      </p:sp>
+      <p:sp>
+        <p:nvSpPr>
+          <p:cNvPr id="4" name="Shape 2"/>
+          <p:cNvSpPr/>
+          <p:nvPr/>
+        </p:nvSpPr>
+        <p:spPr>
+          <a:xfrm>
+            <a:off x="812800" y="1313160"/>
+            <a:ext cx="6350000" cy="4826000"/>
           </a:xfrm>
           <a:prstGeom prst="roundRect">
             <a:avLst>
-              <a:gd name="adj" fmla="val 12296"/>
+              <a:gd name="adj" fmla="val 2105"/>
             </a:avLst>
           </a:prstGeom>
           <a:solidFill>
             <a:srgbClr val="FDFEFE"/>
           </a:solidFill>
+          <a:ln/>
+        </p:spPr>
+        <p:txBody>
+          <a:bodyPr/>
+          <a:lstStyle/>
+          <a:p>
+            <a:endParaRPr lang="en-US"/>
+          </a:p>
+        </p:txBody>
+      </p:sp>
+      <p:pic>
+        <p:nvPicPr>
+          <p:cNvPr id="5" name="Image 0" descr="Dashboard panel Live App Model, 79 states and 797 transitions: a graph of screens with the path of test TC-088 highlighted in orange through Contact List, Option Menu Search, Organize, Import 88 contacts and Close sheet, and beside it the stored screenshot of Contact List number 12, 19 visits and 14 controls"/>
+          <p:cNvPicPr>
+            <a:picLocks noChangeAspect="1"/>
+          </p:cNvPicPr>
+          <p:nvPr/>
+        </p:nvPicPr>
+        <p:blipFill>
+          <a:blip r:embed="rId3"/>
+          <a:stretch>
+            <a:fillRect/>
+          </a:stretch>
+        </p:blipFill>
+        <p:spPr>
+          <a:xfrm>
+            <a:off x="937117" y="1319510"/>
+            <a:ext cx="6101366" cy="4813300"/>
+          </a:xfrm>
+          <a:prstGeom prst="rect">
+            <a:avLst/>
+          </a:prstGeom>
+        </p:spPr>
+      </p:pic>
+      <p:sp>
+        <p:nvSpPr>
+          <p:cNvPr id="6" name="Shape 3"/>
+          <p:cNvSpPr/>
+          <p:nvPr/>
+        </p:nvSpPr>
+        <p:spPr>
+          <a:xfrm>
+            <a:off x="815975" y="1316335"/>
+            <a:ext cx="6343650" cy="4819650"/>
+          </a:xfrm>
+          <a:prstGeom prst="roundRect">
+            <a:avLst>
+              <a:gd name="adj" fmla="val 2042"/>
+            </a:avLst>
+          </a:prstGeom>
+          <a:noFill/>
           <a:ln w="6350">
             <a:solidFill>
               <a:srgbClr val="D6E1E6"/>
@@ -5310,43 +4435,14 @@
       </p:sp>
       <p:sp>
         <p:nvSpPr>
-          <p:cNvPr id="6" name="Shape 4"/>
-          <p:cNvSpPr/>
-          <p:nvPr/>
-        </p:nvSpPr>
-        <p:spPr>
-          <a:xfrm>
-            <a:off x="971550" y="2284611"/>
-            <a:ext cx="294680" cy="264120"/>
-          </a:xfrm>
-          <a:prstGeom prst="roundRect">
-            <a:avLst>
-              <a:gd name="adj" fmla="val 50000"/>
-            </a:avLst>
-          </a:prstGeom>
-          <a:solidFill>
-            <a:srgbClr val="0F7EA8"/>
-          </a:solidFill>
-          <a:ln/>
-        </p:spPr>
-        <p:txBody>
-          <a:bodyPr/>
-          <a:lstStyle/>
-          <a:p>
-            <a:endParaRPr lang="en-US"/>
-          </a:p>
-        </p:txBody>
-      </p:sp>
-      <p:sp>
-        <p:nvSpPr>
-          <p:cNvPr id="7" name="Text 5"/>
-          <p:cNvSpPr/>
-          <p:nvPr/>
-        </p:nvSpPr>
-        <p:spPr>
-          <a:xfrm>
-            <a:off x="1073150" y="2310011"/>
-            <a:ext cx="142280" cy="238720"/>
+          <p:cNvPr id="7" name="Text 4"/>
+          <p:cNvSpPr/>
+          <p:nvPr/>
+        </p:nvSpPr>
+        <p:spPr>
+          <a:xfrm>
+            <a:off x="7416800" y="2496939"/>
+            <a:ext cx="4081272" cy="274290"/>
           </a:xfrm>
           <a:prstGeom prst="rect">
             <a:avLst/>
@@ -5362,35 +4458,35 @@
           <a:p>
             <a:pPr marL="0" indent="0" algn="l">
               <a:lnSpc>
-                <a:spcPts val="1680"/>
-              </a:lnSpc>
-              <a:buNone/>
-            </a:pPr>
-            <a:r>
-              <a:rPr lang="en-US" sz="1200" b="1" dirty="0">
-                <a:solidFill>
-                  <a:srgbClr val="F6F8F7"/>
-                </a:solidFill>
-                <a:latin typeface="IBM Plex Sans" pitchFamily="34" charset="0"/>
-                <a:ea typeface="IBM Plex Sans" pitchFamily="34" charset="-122"/>
-                <a:cs typeface="IBM Plex Sans" pitchFamily="34" charset="-120"/>
-              </a:rPr>
-              <a:t>1</a:t>
-            </a:r>
-            <a:endParaRPr lang="en-US" sz="1200" dirty="0"/>
-          </a:p>
-        </p:txBody>
-      </p:sp>
-      <p:sp>
-        <p:nvSpPr>
-          <p:cNvPr id="8" name="Text 6"/>
-          <p:cNvSpPr/>
-          <p:nvPr/>
-        </p:nvSpPr>
-        <p:spPr>
-          <a:xfrm>
-            <a:off x="1393230" y="2185591"/>
-            <a:ext cx="6040765" cy="274290"/>
+                <a:spcPts val="1960"/>
+              </a:lnSpc>
+              <a:buNone/>
+            </a:pPr>
+            <a:r>
+              <a:rPr lang="en-US" sz="1400" b="1" dirty="0">
+                <a:solidFill>
+                  <a:srgbClr val="0B6A8F"/>
+                </a:solidFill>
+                <a:latin typeface="IBM Plex Sans" pitchFamily="34" charset="0"/>
+                <a:ea typeface="IBM Plex Sans" pitchFamily="34" charset="-122"/>
+                <a:cs typeface="IBM Plex Sans" pitchFamily="34" charset="-120"/>
+              </a:rPr>
+              <a:t>79 screens · 797 transitions</a:t>
+            </a:r>
+            <a:endParaRPr lang="en-US" sz="1400" dirty="0"/>
+          </a:p>
+        </p:txBody>
+      </p:sp>
+      <p:sp>
+        <p:nvSpPr>
+          <p:cNvPr id="8" name="Text 5"/>
+          <p:cNvSpPr/>
+          <p:nvPr/>
+        </p:nvSpPr>
+        <p:spPr>
+          <a:xfrm>
+            <a:off x="7416800" y="2771229"/>
+            <a:ext cx="4081272" cy="452041"/>
           </a:xfrm>
           <a:prstGeom prst="rect">
             <a:avLst/>
@@ -5406,35 +4502,35 @@
           <a:p>
             <a:pPr marL="0" indent="0" algn="l">
               <a:lnSpc>
-                <a:spcPts val="1960"/>
-              </a:lnSpc>
-              <a:buNone/>
-            </a:pPr>
-            <a:r>
-              <a:rPr lang="en-US" sz="1400" b="1" dirty="0">
-                <a:solidFill>
-                  <a:srgbClr val="14303D"/>
-                </a:solidFill>
-                <a:latin typeface="IBM Plex Sans" pitchFamily="34" charset="0"/>
-                <a:ea typeface="IBM Plex Sans" pitchFamily="34" charset="-122"/>
-                <a:cs typeface="IBM Plex Sans" pitchFamily="34" charset="-120"/>
-              </a:rPr>
-              <a:t>Exact signature</a:t>
-            </a:r>
-            <a:endParaRPr lang="en-US" sz="1400" dirty="0"/>
-          </a:p>
-        </p:txBody>
-      </p:sp>
-      <p:sp>
-        <p:nvSpPr>
-          <p:cNvPr id="9" name="Text 7"/>
-          <p:cNvSpPr/>
-          <p:nvPr/>
-        </p:nvSpPr>
-        <p:spPr>
-          <a:xfrm>
-            <a:off x="1393230" y="2434481"/>
-            <a:ext cx="6040765" cy="238720"/>
+                <a:spcPts val="1680"/>
+              </a:lnSpc>
+              <a:buNone/>
+            </a:pPr>
+            <a:r>
+              <a:rPr lang="en-US" sz="1200" dirty="0">
+                <a:solidFill>
+                  <a:srgbClr val="46596A"/>
+                </a:solidFill>
+                <a:latin typeface="IBM Plex Sans" pitchFamily="34" charset="0"/>
+                <a:ea typeface="IBM Plex Sans" pitchFamily="34" charset="-122"/>
+                <a:cs typeface="IBM Plex Sans" pitchFamily="34" charset="-120"/>
+              </a:rPr>
+              <a:t>The contacts app, mapped only from screens the agent actually reached.</a:t>
+            </a:r>
+            <a:endParaRPr lang="en-US" sz="1200" dirty="0"/>
+          </a:p>
+        </p:txBody>
+      </p:sp>
+      <p:sp>
+        <p:nvSpPr>
+          <p:cNvPr id="9" name="Text 6"/>
+          <p:cNvSpPr/>
+          <p:nvPr/>
+        </p:nvSpPr>
+        <p:spPr>
+          <a:xfrm>
+            <a:off x="7416800" y="3375670"/>
+            <a:ext cx="4081272" cy="274290"/>
           </a:xfrm>
           <a:prstGeom prst="rect">
             <a:avLst/>
@@ -5450,98 +4546,35 @@
           <a:p>
             <a:pPr marL="0" indent="0" algn="l">
               <a:lnSpc>
-                <a:spcPts val="1680"/>
-              </a:lnSpc>
-              <a:buNone/>
-            </a:pPr>
-            <a:r>
-              <a:rPr lang="en-US" sz="1200" dirty="0">
-                <a:solidFill>
-                  <a:srgbClr val="46596A"/>
-                </a:solidFill>
-                <a:latin typeface="IBM Plex Sans" pitchFamily="34" charset="0"/>
-                <a:ea typeface="IBM Plex Sans" pitchFamily="34" charset="-122"/>
-                <a:cs typeface="IBM Plex Sans" pitchFamily="34" charset="-120"/>
-              </a:rPr>
-              <a:t>same package, activity, controls and dialog</a:t>
-            </a:r>
-            <a:endParaRPr lang="en-US" sz="1200" dirty="0"/>
-          </a:p>
-        </p:txBody>
-      </p:sp>
-      <p:sp>
-        <p:nvSpPr>
-          <p:cNvPr id="10" name="Shape 8"/>
-          <p:cNvSpPr/>
-          <p:nvPr/>
-        </p:nvSpPr>
-        <p:spPr>
-          <a:xfrm>
-            <a:off x="815975" y="2847826"/>
-            <a:ext cx="6597650" cy="697161"/>
-          </a:xfrm>
-          <a:prstGeom prst="roundRect">
-            <a:avLst>
-              <a:gd name="adj" fmla="val 12296"/>
-            </a:avLst>
-          </a:prstGeom>
-          <a:solidFill>
-            <a:srgbClr val="FDFEFE"/>
-          </a:solidFill>
-          <a:ln w="6350">
-            <a:solidFill>
-              <a:srgbClr val="D6E1E6"/>
-            </a:solidFill>
-            <a:prstDash val="solid"/>
-          </a:ln>
-        </p:spPr>
-        <p:txBody>
-          <a:bodyPr/>
-          <a:lstStyle/>
-          <a:p>
-            <a:endParaRPr lang="en-US"/>
-          </a:p>
-        </p:txBody>
-      </p:sp>
-      <p:sp>
-        <p:nvSpPr>
-          <p:cNvPr id="11" name="Shape 9"/>
-          <p:cNvSpPr/>
-          <p:nvPr/>
-        </p:nvSpPr>
-        <p:spPr>
-          <a:xfrm>
-            <a:off x="971550" y="3064321"/>
-            <a:ext cx="294680" cy="264120"/>
-          </a:xfrm>
-          <a:prstGeom prst="roundRect">
-            <a:avLst>
-              <a:gd name="adj" fmla="val 50000"/>
-            </a:avLst>
-          </a:prstGeom>
-          <a:solidFill>
-            <a:srgbClr val="0F7EA8"/>
-          </a:solidFill>
-          <a:ln/>
-        </p:spPr>
-        <p:txBody>
-          <a:bodyPr/>
-          <a:lstStyle/>
-          <a:p>
-            <a:endParaRPr lang="en-US"/>
-          </a:p>
-        </p:txBody>
-      </p:sp>
-      <p:sp>
-        <p:nvSpPr>
-          <p:cNvPr id="12" name="Text 10"/>
-          <p:cNvSpPr/>
-          <p:nvPr/>
-        </p:nvSpPr>
-        <p:spPr>
-          <a:xfrm>
-            <a:off x="1073150" y="3089721"/>
-            <a:ext cx="142280" cy="238720"/>
+                <a:spcPts val="1960"/>
+              </a:lnSpc>
+              <a:buNone/>
+            </a:pPr>
+            <a:r>
+              <a:rPr lang="en-US" sz="1400" b="1" dirty="0">
+                <a:solidFill>
+                  <a:srgbClr val="0B6A8F"/>
+                </a:solidFill>
+                <a:latin typeface="IBM Plex Sans" pitchFamily="34" charset="0"/>
+                <a:ea typeface="IBM Plex Sans" pitchFamily="34" charset="-122"/>
+                <a:cs typeface="IBM Plex Sans" pitchFamily="34" charset="-120"/>
+              </a:rPr>
+              <a:t>Pick a run, see its path</a:t>
+            </a:r>
+            <a:endParaRPr lang="en-US" sz="1400" dirty="0"/>
+          </a:p>
+        </p:txBody>
+      </p:sp>
+      <p:sp>
+        <p:nvSpPr>
+          <p:cNvPr id="10" name="Text 7"/>
+          <p:cNvSpPr/>
+          <p:nvPr/>
+        </p:nvSpPr>
+        <p:spPr>
+          <a:xfrm>
+            <a:off x="7416800" y="3649960"/>
+            <a:ext cx="4081272" cy="452041"/>
           </a:xfrm>
           <a:prstGeom prst="rect">
             <a:avLst/>
@@ -5562,15 +4595,15 @@
               <a:buNone/>
             </a:pPr>
             <a:r>
-              <a:rPr lang="en-US" sz="1200" b="1" dirty="0">
-                <a:solidFill>
-                  <a:srgbClr val="F6F8F7"/>
-                </a:solidFill>
-                <a:latin typeface="IBM Plex Sans" pitchFamily="34" charset="0"/>
-                <a:ea typeface="IBM Plex Sans" pitchFamily="34" charset="-122"/>
-                <a:cs typeface="IBM Plex Sans" pitchFamily="34" charset="-120"/>
-              </a:rPr>
-              <a:t>2</a:t>
+              <a:rPr lang="en-US" sz="1200" dirty="0">
+                <a:solidFill>
+                  <a:srgbClr val="46596A"/>
+                </a:solidFill>
+                <a:latin typeface="IBM Plex Sans" pitchFamily="34" charset="0"/>
+                <a:ea typeface="IBM Plex Sans" pitchFamily="34" charset="-122"/>
+                <a:cs typeface="IBM Plex Sans" pitchFamily="34" charset="-120"/>
+              </a:rPr>
+              <a:t>In orange, the screens TC-088 visited, in order, read from that run's log.</a:t>
             </a:r>
             <a:endParaRPr lang="en-US" sz="1200" dirty="0"/>
           </a:p>
@@ -5578,14 +4611,14 @@
       </p:sp>
       <p:sp>
         <p:nvSpPr>
-          <p:cNvPr id="13" name="Text 11"/>
-          <p:cNvSpPr/>
-          <p:nvPr/>
-        </p:nvSpPr>
-        <p:spPr>
-          <a:xfrm>
-            <a:off x="1393230" y="2965301"/>
-            <a:ext cx="6040765" cy="274290"/>
+          <p:cNvPr id="11" name="Text 8"/>
+          <p:cNvSpPr/>
+          <p:nvPr/>
+        </p:nvSpPr>
+        <p:spPr>
+          <a:xfrm>
+            <a:off x="7416800" y="4254401"/>
+            <a:ext cx="4081272" cy="274290"/>
           </a:xfrm>
           <a:prstGeom prst="rect">
             <a:avLst/>
@@ -5608,13 +4641,13 @@
             <a:r>
               <a:rPr lang="en-US" sz="1400" b="1" dirty="0">
                 <a:solidFill>
-                  <a:srgbClr val="14303D"/>
-                </a:solidFill>
-                <a:latin typeface="IBM Plex Sans" pitchFamily="34" charset="0"/>
-                <a:ea typeface="IBM Plex Sans" pitchFamily="34" charset="-122"/>
-                <a:cs typeface="IBM Plex Sans" pitchFamily="34" charset="-120"/>
-              </a:rPr>
-              <a:t>Structural similarity of at least 0.90</a:t>
+                  <a:srgbClr val="0B6A8F"/>
+                </a:solidFill>
+                <a:latin typeface="IBM Plex Sans" pitchFamily="34" charset="0"/>
+                <a:ea typeface="IBM Plex Sans" pitchFamily="34" charset="-122"/>
+                <a:cs typeface="IBM Plex Sans" pitchFamily="34" charset="-120"/>
+              </a:rPr>
+              <a:t>Click a screen</a:t>
             </a:r>
             <a:endParaRPr lang="en-US" sz="1400" dirty="0"/>
           </a:p>
@@ -5622,14 +4655,14 @@
       </p:sp>
       <p:sp>
         <p:nvSpPr>
-          <p:cNvPr id="14" name="Text 12"/>
-          <p:cNvSpPr/>
-          <p:nvPr/>
-        </p:nvSpPr>
-        <p:spPr>
-          <a:xfrm>
-            <a:off x="1393230" y="3214191"/>
-            <a:ext cx="6040765" cy="238720"/>
+          <p:cNvPr id="12" name="Text 9"/>
+          <p:cNvSpPr/>
+          <p:nvPr/>
+        </p:nvSpPr>
+        <p:spPr>
+          <a:xfrm>
+            <a:off x="7416800" y="4528691"/>
+            <a:ext cx="4081272" cy="452041"/>
           </a:xfrm>
           <a:prstGeom prst="rect">
             <a:avLst/>
@@ -5658,7 +4691,7 @@
                 <a:ea typeface="IBM Plex Sans" pitchFamily="34" charset="-122"/>
                 <a:cs typeface="IBM Plex Sans" pitchFamily="34" charset="-120"/>
               </a:rPr>
-              <a:t>tolerates counters, timestamps and changing list data</a:t>
+              <a:t>Its stored screenshot, how often it was visited, and its controls.</a:t>
             </a:r>
             <a:endParaRPr lang="en-US" sz="1200" dirty="0"/>
           </a:p>
@@ -5666,77 +4699,14 @@
       </p:sp>
       <p:sp>
         <p:nvSpPr>
-          <p:cNvPr id="15" name="Shape 13"/>
-          <p:cNvSpPr/>
-          <p:nvPr/>
-        </p:nvSpPr>
-        <p:spPr>
-          <a:xfrm>
-            <a:off x="815975" y="3627537"/>
-            <a:ext cx="6597650" cy="697161"/>
-          </a:xfrm>
-          <a:prstGeom prst="roundRect">
-            <a:avLst>
-              <a:gd name="adj" fmla="val 12296"/>
-            </a:avLst>
-          </a:prstGeom>
-          <a:solidFill>
-            <a:srgbClr val="FDFEFE"/>
-          </a:solidFill>
-          <a:ln w="6350">
-            <a:solidFill>
-              <a:srgbClr val="D6E1E6"/>
-            </a:solidFill>
-            <a:prstDash val="solid"/>
-          </a:ln>
-        </p:spPr>
-        <p:txBody>
-          <a:bodyPr/>
-          <a:lstStyle/>
-          <a:p>
-            <a:endParaRPr lang="en-US"/>
-          </a:p>
-        </p:txBody>
-      </p:sp>
-      <p:sp>
-        <p:nvSpPr>
-          <p:cNvPr id="16" name="Shape 14"/>
-          <p:cNvSpPr/>
-          <p:nvPr/>
-        </p:nvSpPr>
-        <p:spPr>
-          <a:xfrm>
-            <a:off x="971550" y="3844032"/>
-            <a:ext cx="294680" cy="264120"/>
-          </a:xfrm>
-          <a:prstGeom prst="roundRect">
-            <a:avLst>
-              <a:gd name="adj" fmla="val 50000"/>
-            </a:avLst>
-          </a:prstGeom>
-          <a:solidFill>
-            <a:srgbClr val="0F7EA8"/>
-          </a:solidFill>
-          <a:ln/>
-        </p:spPr>
-        <p:txBody>
-          <a:bodyPr/>
-          <a:lstStyle/>
-          <a:p>
-            <a:endParaRPr lang="en-US"/>
-          </a:p>
-        </p:txBody>
-      </p:sp>
-      <p:sp>
-        <p:nvSpPr>
-          <p:cNvPr id="17" name="Text 15"/>
-          <p:cNvSpPr/>
-          <p:nvPr/>
-        </p:nvSpPr>
-        <p:spPr>
-          <a:xfrm>
-            <a:off x="1073150" y="3869432"/>
-            <a:ext cx="142280" cy="238720"/>
+          <p:cNvPr id="13" name="Text 10"/>
+          <p:cNvSpPr/>
+          <p:nvPr/>
+        </p:nvSpPr>
+        <p:spPr>
+          <a:xfrm>
+            <a:off x="812800" y="6238280"/>
+            <a:ext cx="3459976" cy="238720"/>
           </a:xfrm>
           <a:prstGeom prst="rect">
             <a:avLst/>
@@ -5757,15 +4727,15 @@
               <a:buNone/>
             </a:pPr>
             <a:r>
-              <a:rPr lang="en-US" sz="1200" b="1" dirty="0">
-                <a:solidFill>
-                  <a:srgbClr val="F6F8F7"/>
-                </a:solidFill>
-                <a:latin typeface="IBM Plex Sans" pitchFamily="34" charset="0"/>
-                <a:ea typeface="IBM Plex Sans" pitchFamily="34" charset="-122"/>
-                <a:cs typeface="IBM Plex Sans" pitchFamily="34" charset="-120"/>
-              </a:rPr>
-              <a:t>3</a:t>
+              <a:rPr lang="en-US" sz="1200" dirty="0">
+                <a:solidFill>
+                  <a:srgbClr val="55697A"/>
+                </a:solidFill>
+                <a:latin typeface="IBM Plex Sans" pitchFamily="34" charset="0"/>
+                <a:ea typeface="IBM Plex Sans" pitchFamily="34" charset="-122"/>
+                <a:cs typeface="IBM Plex Sans" pitchFamily="34" charset="-120"/>
+              </a:rPr>
+              <a:t>Exploratory Testing Automation · CSE 450 · BUET</a:t>
             </a:r>
             <a:endParaRPr lang="en-US" sz="1200" dirty="0"/>
           </a:p>
@@ -5773,14 +4743,14 @@
       </p:sp>
       <p:sp>
         <p:nvSpPr>
-          <p:cNvPr id="18" name="Text 16"/>
-          <p:cNvSpPr/>
-          <p:nvPr/>
-        </p:nvSpPr>
-        <p:spPr>
-          <a:xfrm>
-            <a:off x="1393230" y="3745012"/>
-            <a:ext cx="6040765" cy="274290"/>
+          <p:cNvPr id="14" name="Text 11"/>
+          <p:cNvSpPr/>
+          <p:nvPr/>
+        </p:nvSpPr>
+        <p:spPr>
+          <a:xfrm>
+            <a:off x="11196290" y="6238280"/>
+            <a:ext cx="233710" cy="238720"/>
           </a:xfrm>
           <a:prstGeom prst="rect">
             <a:avLst/>
@@ -5796,50 +4766,6 @@
           <a:p>
             <a:pPr marL="0" indent="0" algn="l">
               <a:lnSpc>
-                <a:spcPts val="1960"/>
-              </a:lnSpc>
-              <a:buNone/>
-            </a:pPr>
-            <a:r>
-              <a:rPr lang="en-US" sz="1400" b="1" dirty="0">
-                <a:solidFill>
-                  <a:srgbClr val="14303D"/>
-                </a:solidFill>
-                <a:latin typeface="IBM Plex Sans" pitchFamily="34" charset="0"/>
-                <a:ea typeface="IBM Plex Sans" pitchFamily="34" charset="-122"/>
-                <a:cs typeface="IBM Plex Sans" pitchFamily="34" charset="-120"/>
-              </a:rPr>
-              <a:t>Containment of at least 0.95</a:t>
-            </a:r>
-            <a:endParaRPr lang="en-US" sz="1400" dirty="0"/>
-          </a:p>
-        </p:txBody>
-      </p:sp>
-      <p:sp>
-        <p:nvSpPr>
-          <p:cNvPr id="19" name="Text 17"/>
-          <p:cNvSpPr/>
-          <p:nvPr/>
-        </p:nvSpPr>
-        <p:spPr>
-          <a:xfrm>
-            <a:off x="1393230" y="3993902"/>
-            <a:ext cx="6040765" cy="238720"/>
-          </a:xfrm>
-          <a:prstGeom prst="rect">
-            <a:avLst/>
-          </a:prstGeom>
-          <a:noFill/>
-          <a:ln/>
-        </p:spPr>
-        <p:txBody>
-          <a:bodyPr wrap="square" lIns="0" tIns="0" rIns="0" bIns="0" rtlCol="0" anchor="t">
-            <a:normAutofit/>
-          </a:bodyPr>
-          <a:lstStyle/>
-          <a:p>
-            <a:pPr marL="0" indent="0" algn="l">
-              <a:lnSpc>
                 <a:spcPts val="1680"/>
               </a:lnSpc>
               <a:buNone/>
@@ -5847,637 +4773,13 @@
             <a:r>
               <a:rPr lang="en-US" sz="1200" dirty="0">
                 <a:solidFill>
-                  <a:srgbClr val="46596A"/>
-                </a:solidFill>
-                <a:latin typeface="IBM Plex Sans" pitchFamily="34" charset="0"/>
-                <a:ea typeface="IBM Plex Sans" pitchFamily="34" charset="-122"/>
-                <a:cs typeface="IBM Plex Sans" pitchFamily="34" charset="-120"/>
-              </a:rPr>
-              <a:t>a screen captured before it finished drawing</a:t>
-            </a:r>
-            <a:endParaRPr lang="en-US" sz="1200" dirty="0"/>
-          </a:p>
-        </p:txBody>
-      </p:sp>
-      <p:sp>
-        <p:nvSpPr>
-          <p:cNvPr id="20" name="Shape 18"/>
-          <p:cNvSpPr/>
-          <p:nvPr/>
-        </p:nvSpPr>
-        <p:spPr>
-          <a:xfrm>
-            <a:off x="815975" y="4407247"/>
-            <a:ext cx="6597650" cy="697161"/>
-          </a:xfrm>
-          <a:prstGeom prst="roundRect">
-            <a:avLst>
-              <a:gd name="adj" fmla="val 12296"/>
-            </a:avLst>
-          </a:prstGeom>
-          <a:solidFill>
-            <a:srgbClr val="FDFEFE"/>
-          </a:solidFill>
-          <a:ln w="6350">
-            <a:solidFill>
-              <a:srgbClr val="D6E1E6"/>
-            </a:solidFill>
-            <a:prstDash val="solid"/>
-          </a:ln>
-        </p:spPr>
-        <p:txBody>
-          <a:bodyPr/>
-          <a:lstStyle/>
-          <a:p>
-            <a:endParaRPr lang="en-US"/>
-          </a:p>
-        </p:txBody>
-      </p:sp>
-      <p:sp>
-        <p:nvSpPr>
-          <p:cNvPr id="21" name="Shape 19"/>
-          <p:cNvSpPr/>
-          <p:nvPr/>
-        </p:nvSpPr>
-        <p:spPr>
-          <a:xfrm>
-            <a:off x="971550" y="4623743"/>
-            <a:ext cx="294680" cy="264120"/>
-          </a:xfrm>
-          <a:prstGeom prst="roundRect">
-            <a:avLst>
-              <a:gd name="adj" fmla="val 50000"/>
-            </a:avLst>
-          </a:prstGeom>
-          <a:solidFill>
-            <a:srgbClr val="0F7EA8"/>
-          </a:solidFill>
-          <a:ln/>
-        </p:spPr>
-        <p:txBody>
-          <a:bodyPr/>
-          <a:lstStyle/>
-          <a:p>
-            <a:endParaRPr lang="en-US"/>
-          </a:p>
-        </p:txBody>
-      </p:sp>
-      <p:sp>
-        <p:nvSpPr>
-          <p:cNvPr id="22" name="Text 20"/>
-          <p:cNvSpPr/>
-          <p:nvPr/>
-        </p:nvSpPr>
-        <p:spPr>
-          <a:xfrm>
-            <a:off x="1073150" y="4649143"/>
-            <a:ext cx="142280" cy="238720"/>
-          </a:xfrm>
-          <a:prstGeom prst="rect">
-            <a:avLst/>
-          </a:prstGeom>
-          <a:noFill/>
-          <a:ln/>
-        </p:spPr>
-        <p:txBody>
-          <a:bodyPr wrap="square" lIns="0" tIns="0" rIns="0" bIns="0" rtlCol="0" anchor="t">
-            <a:normAutofit/>
-          </a:bodyPr>
-          <a:lstStyle/>
-          <a:p>
-            <a:pPr marL="0" indent="0" algn="l">
-              <a:lnSpc>
-                <a:spcPts val="1680"/>
-              </a:lnSpc>
-              <a:buNone/>
-            </a:pPr>
-            <a:r>
-              <a:rPr lang="en-US" sz="1200" b="1" dirty="0">
-                <a:solidFill>
-                  <a:srgbClr val="F6F8F7"/>
-                </a:solidFill>
-                <a:latin typeface="IBM Plex Sans" pitchFamily="34" charset="0"/>
-                <a:ea typeface="IBM Plex Sans" pitchFamily="34" charset="-122"/>
-                <a:cs typeface="IBM Plex Sans" pitchFamily="34" charset="-120"/>
-              </a:rPr>
-              <a:t>4</a:t>
-            </a:r>
-            <a:endParaRPr lang="en-US" sz="1200" dirty="0"/>
-          </a:p>
-        </p:txBody>
-      </p:sp>
-      <p:sp>
-        <p:nvSpPr>
-          <p:cNvPr id="23" name="Text 21"/>
-          <p:cNvSpPr/>
-          <p:nvPr/>
-        </p:nvSpPr>
-        <p:spPr>
-          <a:xfrm>
-            <a:off x="1393230" y="4524722"/>
-            <a:ext cx="6040765" cy="274290"/>
-          </a:xfrm>
-          <a:prstGeom prst="rect">
-            <a:avLst/>
-          </a:prstGeom>
-          <a:noFill/>
-          <a:ln/>
-        </p:spPr>
-        <p:txBody>
-          <a:bodyPr wrap="square" lIns="0" tIns="0" rIns="0" bIns="0" rtlCol="0" anchor="t">
-            <a:normAutofit/>
-          </a:bodyPr>
-          <a:lstStyle/>
-          <a:p>
-            <a:pPr marL="0" indent="0" algn="l">
-              <a:lnSpc>
-                <a:spcPts val="1960"/>
-              </a:lnSpc>
-              <a:buNone/>
-            </a:pPr>
-            <a:r>
-              <a:rPr lang="en-US" sz="1400" b="1" dirty="0">
-                <a:solidFill>
-                  <a:srgbClr val="14303D"/>
-                </a:solidFill>
-                <a:latin typeface="IBM Plex Sans" pitchFamily="34" charset="0"/>
-                <a:ea typeface="IBM Plex Sans" pitchFamily="34" charset="-122"/>
-                <a:cs typeface="IBM Plex Sans" pitchFamily="34" charset="-120"/>
-              </a:rPr>
-              <a:t>Perceptual image hash, distance of 6 or less</a:t>
-            </a:r>
-            <a:endParaRPr lang="en-US" sz="1400" dirty="0"/>
-          </a:p>
-        </p:txBody>
-      </p:sp>
-      <p:sp>
-        <p:nvSpPr>
-          <p:cNvPr id="24" name="Text 22"/>
-          <p:cNvSpPr/>
-          <p:nvPr/>
-        </p:nvSpPr>
-        <p:spPr>
-          <a:xfrm>
-            <a:off x="1393230" y="4773613"/>
-            <a:ext cx="6040765" cy="238720"/>
-          </a:xfrm>
-          <a:prstGeom prst="rect">
-            <a:avLst/>
-          </a:prstGeom>
-          <a:noFill/>
-          <a:ln/>
-        </p:spPr>
-        <p:txBody>
-          <a:bodyPr wrap="square" lIns="0" tIns="0" rIns="0" bIns="0" rtlCol="0" anchor="t">
-            <a:normAutofit/>
-          </a:bodyPr>
-          <a:lstStyle/>
-          <a:p>
-            <a:pPr marL="0" indent="0" algn="l">
-              <a:lnSpc>
-                <a:spcPts val="1680"/>
-              </a:lnSpc>
-              <a:buNone/>
-            </a:pPr>
-            <a:r>
-              <a:rPr lang="en-US" sz="1200" dirty="0">
-                <a:solidFill>
-                  <a:srgbClr val="46596A"/>
-                </a:solidFill>
-                <a:latin typeface="IBM Plex Sans" pitchFamily="34" charset="0"/>
-                <a:ea typeface="IBM Plex Sans" pitchFamily="34" charset="-122"/>
-                <a:cs typeface="IBM Plex Sans" pitchFamily="34" charset="-120"/>
-              </a:rPr>
-              <a:t>the last resort when the accessibility tree is thin</a:t>
-            </a:r>
-            <a:endParaRPr lang="en-US" sz="1200" dirty="0"/>
-          </a:p>
-        </p:txBody>
-      </p:sp>
-      <p:sp>
-        <p:nvSpPr>
-          <p:cNvPr id="25" name="Text 23"/>
-          <p:cNvSpPr/>
-          <p:nvPr/>
-        </p:nvSpPr>
-        <p:spPr>
-          <a:xfrm>
-            <a:off x="812800" y="5183783"/>
-            <a:ext cx="6802120" cy="452041"/>
-          </a:xfrm>
-          <a:prstGeom prst="rect">
-            <a:avLst/>
-          </a:prstGeom>
-          <a:noFill/>
-          <a:ln/>
-        </p:spPr>
-        <p:txBody>
-          <a:bodyPr wrap="square" lIns="0" tIns="0" rIns="0" bIns="0" rtlCol="0" anchor="t">
-            <a:normAutofit/>
-          </a:bodyPr>
-          <a:lstStyle/>
-          <a:p>
-            <a:pPr marL="0" indent="0" algn="l">
-              <a:lnSpc>
-                <a:spcPts val="1680"/>
-              </a:lnSpc>
-              <a:buNone/>
-            </a:pPr>
-            <a:r>
-              <a:rPr lang="en-US" sz="1200" b="1" dirty="0">
-                <a:solidFill>
-                  <a:srgbClr val="46596A"/>
-                </a:solidFill>
-                <a:latin typeface="IBM Plex Sans" pitchFamily="34" charset="0"/>
-                <a:ea typeface="IBM Plex Sans" pitchFamily="34" charset="-122"/>
-                <a:cs typeface="IBM Plex Sans" pitchFamily="34" charset="-120"/>
-              </a:rPr>
-              <a:t>Match:</a:t>
-            </a:r>
-            <a:r>
-              <a:rPr lang="en-US" sz="1200" dirty="0">
-                <a:solidFill>
-                  <a:srgbClr val="46596A"/>
-                </a:solidFill>
-                <a:latin typeface="IBM Plex Sans" pitchFamily="34" charset="0"/>
-                <a:ea typeface="IBM Plex Sans" pitchFamily="34" charset="-122"/>
-                <a:cs typeface="IBM Plex Sans" pitchFamily="34" charset="-120"/>
-              </a:rPr>
-              <a:t> a known screen, its visit counted. </a:t>
-            </a:r>
-            <a:r>
-              <a:rPr lang="en-US" sz="1200" b="1" dirty="0">
-                <a:solidFill>
-                  <a:srgbClr val="46596A"/>
-                </a:solidFill>
-                <a:latin typeface="IBM Plex Sans" pitchFamily="34" charset="0"/>
-                <a:ea typeface="IBM Plex Sans" pitchFamily="34" charset="-122"/>
-                <a:cs typeface="IBM Plex Sans" pitchFamily="34" charset="-120"/>
-              </a:rPr>
-              <a:t>No match:</a:t>
-            </a:r>
-            <a:r>
-              <a:rPr lang="en-US" sz="1200" dirty="0">
-                <a:solidFill>
-                  <a:srgbClr val="46596A"/>
-                </a:solidFill>
-                <a:latin typeface="IBM Plex Sans" pitchFamily="34" charset="0"/>
-                <a:ea typeface="IBM Plex Sans" pitchFamily="34" charset="-122"/>
-                <a:cs typeface="IBM Plex Sans" pitchFamily="34" charset="-120"/>
-              </a:rPr>
-              <a:t> a new screen, with its screenshot and the transition that led to it.</a:t>
-            </a:r>
-            <a:endParaRPr lang="en-US" sz="1200" dirty="0"/>
-          </a:p>
-        </p:txBody>
-      </p:sp>
-      <p:sp>
-        <p:nvSpPr>
-          <p:cNvPr id="26" name="Text 24"/>
-          <p:cNvSpPr/>
-          <p:nvPr/>
-        </p:nvSpPr>
-        <p:spPr>
-          <a:xfrm>
-            <a:off x="7721600" y="1775420"/>
-            <a:ext cx="3767328" cy="772120"/>
-          </a:xfrm>
-          <a:prstGeom prst="rect">
-            <a:avLst/>
-          </a:prstGeom>
-          <a:noFill/>
-          <a:ln/>
-        </p:spPr>
-        <p:txBody>
-          <a:bodyPr wrap="square" lIns="0" tIns="0" rIns="0" bIns="0" rtlCol="0" anchor="t">
-            <a:normAutofit/>
-          </a:bodyPr>
-          <a:lstStyle/>
-          <a:p>
-            <a:pPr marL="0" indent="0" algn="l">
-              <a:lnSpc>
-                <a:spcPts val="5880"/>
-              </a:lnSpc>
-              <a:buNone/>
-            </a:pPr>
-            <a:r>
-              <a:rPr lang="en-US" sz="5600" b="1" dirty="0">
-                <a:solidFill>
-                  <a:srgbClr val="0F7EA8"/>
-                </a:solidFill>
-                <a:latin typeface="Source Serif 4" pitchFamily="34" charset="0"/>
-                <a:ea typeface="Source Serif 4" pitchFamily="34" charset="-122"/>
-                <a:cs typeface="Source Serif 4" pitchFamily="34" charset="-120"/>
-              </a:rPr>
-              <a:t>79</a:t>
-            </a:r>
-            <a:endParaRPr lang="en-US" sz="5600" dirty="0"/>
-          </a:p>
-        </p:txBody>
-      </p:sp>
-      <p:sp>
-        <p:nvSpPr>
-          <p:cNvPr id="27" name="Text 25"/>
-          <p:cNvSpPr/>
-          <p:nvPr/>
-        </p:nvSpPr>
-        <p:spPr>
-          <a:xfrm>
-            <a:off x="7721600" y="2522141"/>
-            <a:ext cx="3767328" cy="238720"/>
-          </a:xfrm>
-          <a:prstGeom prst="rect">
-            <a:avLst/>
-          </a:prstGeom>
-          <a:noFill/>
-          <a:ln/>
-        </p:spPr>
-        <p:txBody>
-          <a:bodyPr wrap="square" lIns="0" tIns="0" rIns="0" bIns="0" rtlCol="0" anchor="t">
-            <a:normAutofit/>
-          </a:bodyPr>
-          <a:lstStyle/>
-          <a:p>
-            <a:pPr marL="0" indent="0" algn="l">
-              <a:lnSpc>
-                <a:spcPts val="1680"/>
-              </a:lnSpc>
-              <a:buNone/>
-            </a:pPr>
-            <a:r>
-              <a:rPr lang="en-US" sz="1200" dirty="0">
-                <a:solidFill>
-                  <a:srgbClr val="46596A"/>
-                </a:solidFill>
-                <a:latin typeface="IBM Plex Sans" pitchFamily="34" charset="0"/>
-                <a:ea typeface="IBM Plex Sans" pitchFamily="34" charset="-122"/>
-                <a:cs typeface="IBM Plex Sans" pitchFamily="34" charset="-120"/>
-              </a:rPr>
-              <a:t>distinct screens</a:t>
-            </a:r>
-            <a:endParaRPr lang="en-US" sz="1200" dirty="0"/>
-          </a:p>
-        </p:txBody>
-      </p:sp>
-      <p:sp>
-        <p:nvSpPr>
-          <p:cNvPr id="28" name="Text 26"/>
-          <p:cNvSpPr/>
-          <p:nvPr/>
-        </p:nvSpPr>
-        <p:spPr>
-          <a:xfrm>
-            <a:off x="7721600" y="2887861"/>
-            <a:ext cx="3767328" cy="772120"/>
-          </a:xfrm>
-          <a:prstGeom prst="rect">
-            <a:avLst/>
-          </a:prstGeom>
-          <a:noFill/>
-          <a:ln/>
-        </p:spPr>
-        <p:txBody>
-          <a:bodyPr wrap="square" lIns="0" tIns="0" rIns="0" bIns="0" rtlCol="0" anchor="t">
-            <a:normAutofit/>
-          </a:bodyPr>
-          <a:lstStyle/>
-          <a:p>
-            <a:pPr marL="0" indent="0" algn="l">
-              <a:lnSpc>
-                <a:spcPts val="5880"/>
-              </a:lnSpc>
-              <a:buNone/>
-            </a:pPr>
-            <a:r>
-              <a:rPr lang="en-US" sz="5600" b="1" dirty="0">
-                <a:solidFill>
-                  <a:srgbClr val="14303D"/>
-                </a:solidFill>
-                <a:latin typeface="Source Serif 4" pitchFamily="34" charset="0"/>
-                <a:ea typeface="Source Serif 4" pitchFamily="34" charset="-122"/>
-                <a:cs typeface="Source Serif 4" pitchFamily="34" charset="-120"/>
-              </a:rPr>
-              <a:t>2,149</a:t>
-            </a:r>
-            <a:endParaRPr lang="en-US" sz="5600" dirty="0"/>
-          </a:p>
-        </p:txBody>
-      </p:sp>
-      <p:sp>
-        <p:nvSpPr>
-          <p:cNvPr id="29" name="Text 27"/>
-          <p:cNvSpPr/>
-          <p:nvPr/>
-        </p:nvSpPr>
-        <p:spPr>
-          <a:xfrm>
-            <a:off x="7721600" y="3634581"/>
-            <a:ext cx="3767328" cy="238720"/>
-          </a:xfrm>
-          <a:prstGeom prst="rect">
-            <a:avLst/>
-          </a:prstGeom>
-          <a:noFill/>
-          <a:ln/>
-        </p:spPr>
-        <p:txBody>
-          <a:bodyPr wrap="square" lIns="0" tIns="0" rIns="0" bIns="0" rtlCol="0" anchor="t">
-            <a:normAutofit/>
-          </a:bodyPr>
-          <a:lstStyle/>
-          <a:p>
-            <a:pPr marL="0" indent="0" algn="l">
-              <a:lnSpc>
-                <a:spcPts val="1680"/>
-              </a:lnSpc>
-              <a:buNone/>
-            </a:pPr>
-            <a:r>
-              <a:rPr lang="en-US" sz="1200" dirty="0">
-                <a:solidFill>
-                  <a:srgbClr val="46596A"/>
-                </a:solidFill>
-                <a:latin typeface="IBM Plex Sans" pitchFamily="34" charset="0"/>
-                <a:ea typeface="IBM Plex Sans" pitchFamily="34" charset="-122"/>
-                <a:cs typeface="IBM Plex Sans" pitchFamily="34" charset="-120"/>
-              </a:rPr>
-              <a:t>screen observations</a:t>
-            </a:r>
-            <a:endParaRPr lang="en-US" sz="1200" dirty="0"/>
-          </a:p>
-        </p:txBody>
-      </p:sp>
-      <p:sp>
-        <p:nvSpPr>
-          <p:cNvPr id="30" name="Text 28"/>
-          <p:cNvSpPr/>
-          <p:nvPr/>
-        </p:nvSpPr>
-        <p:spPr>
-          <a:xfrm>
-            <a:off x="7721600" y="4000302"/>
-            <a:ext cx="3767328" cy="772120"/>
-          </a:xfrm>
-          <a:prstGeom prst="rect">
-            <a:avLst/>
-          </a:prstGeom>
-          <a:noFill/>
-          <a:ln/>
-        </p:spPr>
-        <p:txBody>
-          <a:bodyPr wrap="square" lIns="0" tIns="0" rIns="0" bIns="0" rtlCol="0" anchor="t">
-            <a:normAutofit/>
-          </a:bodyPr>
-          <a:lstStyle/>
-          <a:p>
-            <a:pPr marL="0" indent="0" algn="l">
-              <a:lnSpc>
-                <a:spcPts val="5880"/>
-              </a:lnSpc>
-              <a:buNone/>
-            </a:pPr>
-            <a:r>
-              <a:rPr lang="en-US" sz="5600" b="1" dirty="0">
-                <a:solidFill>
-                  <a:srgbClr val="14303D"/>
-                </a:solidFill>
-                <a:latin typeface="Source Serif 4" pitchFamily="34" charset="0"/>
-                <a:ea typeface="Source Serif 4" pitchFamily="34" charset="-122"/>
-                <a:cs typeface="Source Serif 4" pitchFamily="34" charset="-120"/>
-              </a:rPr>
-              <a:t>797</a:t>
-            </a:r>
-            <a:endParaRPr lang="en-US" sz="5600" dirty="0"/>
-          </a:p>
-        </p:txBody>
-      </p:sp>
-      <p:sp>
-        <p:nvSpPr>
-          <p:cNvPr id="31" name="Text 29"/>
-          <p:cNvSpPr/>
-          <p:nvPr/>
-        </p:nvSpPr>
-        <p:spPr>
-          <a:xfrm>
-            <a:off x="7721600" y="4747022"/>
-            <a:ext cx="3767328" cy="238720"/>
-          </a:xfrm>
-          <a:prstGeom prst="rect">
-            <a:avLst/>
-          </a:prstGeom>
-          <a:noFill/>
-          <a:ln/>
-        </p:spPr>
-        <p:txBody>
-          <a:bodyPr wrap="square" lIns="0" tIns="0" rIns="0" bIns="0" rtlCol="0" anchor="t">
-            <a:normAutofit/>
-          </a:bodyPr>
-          <a:lstStyle/>
-          <a:p>
-            <a:pPr marL="0" indent="0" algn="l">
-              <a:lnSpc>
-                <a:spcPts val="1680"/>
-              </a:lnSpc>
-              <a:buNone/>
-            </a:pPr>
-            <a:r>
-              <a:rPr lang="en-US" sz="1200" dirty="0">
-                <a:solidFill>
-                  <a:srgbClr val="46596A"/>
-                </a:solidFill>
-                <a:latin typeface="IBM Plex Sans" pitchFamily="34" charset="0"/>
-                <a:ea typeface="IBM Plex Sans" pitchFamily="34" charset="-122"/>
-                <a:cs typeface="IBM Plex Sans" pitchFamily="34" charset="-120"/>
-              </a:rPr>
-              <a:t>transitions between screens · contacts app</a:t>
-            </a:r>
-            <a:endParaRPr lang="en-US" sz="1200" dirty="0"/>
-          </a:p>
-        </p:txBody>
-      </p:sp>
-      <p:sp>
-        <p:nvSpPr>
-          <p:cNvPr id="32" name="Text 30"/>
-          <p:cNvSpPr/>
-          <p:nvPr/>
-        </p:nvSpPr>
-        <p:spPr>
-          <a:xfrm>
-            <a:off x="812800" y="6238280"/>
-            <a:ext cx="3459976" cy="238720"/>
-          </a:xfrm>
-          <a:prstGeom prst="rect">
-            <a:avLst/>
-          </a:prstGeom>
-          <a:noFill/>
-          <a:ln/>
-        </p:spPr>
-        <p:txBody>
-          <a:bodyPr wrap="square" lIns="0" tIns="0" rIns="0" bIns="0" rtlCol="0" anchor="t">
-            <a:normAutofit/>
-          </a:bodyPr>
-          <a:lstStyle/>
-          <a:p>
-            <a:pPr marL="0" indent="0" algn="l">
-              <a:lnSpc>
-                <a:spcPts val="1680"/>
-              </a:lnSpc>
-              <a:buNone/>
-            </a:pPr>
-            <a:r>
-              <a:rPr lang="en-US" sz="1200" dirty="0">
-                <a:solidFill>
                   <a:srgbClr val="55697A"/>
                 </a:solidFill>
                 <a:latin typeface="IBM Plex Sans" pitchFamily="34" charset="0"/>
                 <a:ea typeface="IBM Plex Sans" pitchFamily="34" charset="-122"/>
                 <a:cs typeface="IBM Plex Sans" pitchFamily="34" charset="-120"/>
               </a:rPr>
-              <a:t>Exploratory Testing Automation · CSE 450 · BUET</a:t>
-            </a:r>
-            <a:endParaRPr lang="en-US" sz="1200" dirty="0"/>
-          </a:p>
-        </p:txBody>
-      </p:sp>
-      <p:sp>
-        <p:nvSpPr>
-          <p:cNvPr id="33" name="Text 31"/>
-          <p:cNvSpPr/>
-          <p:nvPr/>
-        </p:nvSpPr>
-        <p:spPr>
-          <a:xfrm>
-            <a:off x="11196290" y="6238280"/>
-            <a:ext cx="233710" cy="238720"/>
-          </a:xfrm>
-          <a:prstGeom prst="rect">
-            <a:avLst/>
-          </a:prstGeom>
-          <a:noFill/>
-          <a:ln/>
-        </p:spPr>
-        <p:txBody>
-          <a:bodyPr wrap="square" lIns="0" tIns="0" rIns="0" bIns="0" rtlCol="0" anchor="t">
-            <a:normAutofit/>
-          </a:bodyPr>
-          <a:lstStyle/>
-          <a:p>
-            <a:pPr marL="0" indent="0" algn="l">
-              <a:lnSpc>
-                <a:spcPts val="1680"/>
-              </a:lnSpc>
-              <a:buNone/>
-            </a:pPr>
-            <a:r>
-              <a:rPr lang="en-US" sz="1200" dirty="0">
-                <a:solidFill>
-                  <a:srgbClr val="55697A"/>
-                </a:solidFill>
-                <a:latin typeface="IBM Plex Sans" pitchFamily="34" charset="0"/>
-                <a:ea typeface="IBM Plex Sans" pitchFamily="34" charset="-122"/>
-                <a:cs typeface="IBM Plex Sans" pitchFamily="34" charset="-120"/>
-              </a:rPr>
-              <a:t>24</a:t>
+              <a:t>26</a:t>
             </a:r>
             <a:endParaRPr lang="en-US" sz="1200" dirty="0"/>
           </a:p>
@@ -6633,9 +4935,129 @@
           </a:p>
         </p:txBody>
       </p:sp>
+      <p:sp>
+        <p:nvSpPr>
+          <p:cNvPr id="6" name="Shape 3"/>
+          <p:cNvSpPr/>
+          <p:nvPr/>
+        </p:nvSpPr>
+        <p:spPr>
+          <a:xfrm>
+            <a:off x="815975" y="1715542"/>
+            <a:ext cx="10560050" cy="3500834"/>
+          </a:xfrm>
+          <a:prstGeom prst="roundRect">
+            <a:avLst>
+              <a:gd name="adj" fmla="val 2811"/>
+            </a:avLst>
+          </a:prstGeom>
+          <a:noFill/>
+          <a:ln w="6350">
+            <a:solidFill>
+              <a:srgbClr val="D6E1E6"/>
+            </a:solidFill>
+            <a:prstDash val="solid"/>
+          </a:ln>
+        </p:spPr>
+        <p:txBody>
+          <a:bodyPr/>
+          <a:lstStyle/>
+          <a:p>
+            <a:endParaRPr lang="en-US"/>
+          </a:p>
+        </p:txBody>
+      </p:sp>
+      <p:sp>
+        <p:nvSpPr>
+          <p:cNvPr id="8" name="Text 5"/>
+          <p:cNvSpPr/>
+          <p:nvPr/>
+        </p:nvSpPr>
+        <p:spPr>
+          <a:xfrm>
+            <a:off x="812800" y="6238280"/>
+            <a:ext cx="3459976" cy="238720"/>
+          </a:xfrm>
+          <a:prstGeom prst="rect">
+            <a:avLst/>
+          </a:prstGeom>
+          <a:noFill/>
+          <a:ln/>
+        </p:spPr>
+        <p:txBody>
+          <a:bodyPr wrap="square" lIns="0" tIns="0" rIns="0" bIns="0" rtlCol="0" anchor="t">
+            <a:normAutofit/>
+          </a:bodyPr>
+          <a:lstStyle/>
+          <a:p>
+            <a:pPr marL="0" indent="0" algn="l">
+              <a:lnSpc>
+                <a:spcPts val="1680"/>
+              </a:lnSpc>
+              <a:buNone/>
+            </a:pPr>
+            <a:r>
+              <a:rPr lang="en-US" sz="1200" dirty="0">
+                <a:solidFill>
+                  <a:srgbClr val="55697A"/>
+                </a:solidFill>
+                <a:latin typeface="IBM Plex Sans" pitchFamily="34" charset="0"/>
+                <a:ea typeface="IBM Plex Sans" pitchFamily="34" charset="-122"/>
+                <a:cs typeface="IBM Plex Sans" pitchFamily="34" charset="-120"/>
+              </a:rPr>
+              <a:t>Exploratory Testing Automation · CSE 450 · BUET</a:t>
+            </a:r>
+            <a:endParaRPr lang="en-US" sz="1200" dirty="0"/>
+          </a:p>
+        </p:txBody>
+      </p:sp>
+      <p:sp>
+        <p:nvSpPr>
+          <p:cNvPr id="9" name="Text 6"/>
+          <p:cNvSpPr/>
+          <p:nvPr/>
+        </p:nvSpPr>
+        <p:spPr>
+          <a:xfrm>
+            <a:off x="11196290" y="6238280"/>
+            <a:ext cx="233710" cy="238720"/>
+          </a:xfrm>
+          <a:prstGeom prst="rect">
+            <a:avLst/>
+          </a:prstGeom>
+          <a:noFill/>
+          <a:ln/>
+        </p:spPr>
+        <p:txBody>
+          <a:bodyPr wrap="square" lIns="0" tIns="0" rIns="0" bIns="0" rtlCol="0" anchor="t">
+            <a:normAutofit/>
+          </a:bodyPr>
+          <a:lstStyle/>
+          <a:p>
+            <a:pPr marL="0" indent="0" algn="l">
+              <a:lnSpc>
+                <a:spcPts val="1680"/>
+              </a:lnSpc>
+              <a:buNone/>
+            </a:pPr>
+            <a:r>
+              <a:rPr lang="en-US" sz="1200" dirty="0">
+                <a:solidFill>
+                  <a:srgbClr val="55697A"/>
+                </a:solidFill>
+                <a:latin typeface="IBM Plex Sans" pitchFamily="34" charset="0"/>
+                <a:ea typeface="IBM Plex Sans" pitchFamily="34" charset="-122"/>
+                <a:cs typeface="IBM Plex Sans" pitchFamily="34" charset="-120"/>
+              </a:rPr>
+              <a:t>25</a:t>
+            </a:r>
+            <a:endParaRPr lang="en-US" sz="1200" dirty="0"/>
+          </a:p>
+        </p:txBody>
+      </p:sp>
       <p:pic>
         <p:nvPicPr>
-          <p:cNvPr id="5" name="Image 0" descr="Screen identity cascade, left to right: an observation is tested by exact signature, then structural Jaccard of at least 0.9, containment of at least 0.95, skeleton containment, and a perceptual hash within Hamming distance 6; any match is a known state, otherwise a new state is stored with its transition"/>
+          <p:cNvPr id="10" name="Picture 9" descr="state-identity.png"/>
           <p:cNvPicPr>
             <a:picLocks noChangeAspect="1"/>
           </p:cNvPicPr>
@@ -6657,170 +5079,6 @@
           </a:prstGeom>
         </p:spPr>
       </p:pic>
-      <p:sp>
-        <p:nvSpPr>
-          <p:cNvPr id="6" name="Shape 3"/>
-          <p:cNvSpPr/>
-          <p:nvPr/>
-        </p:nvSpPr>
-        <p:spPr>
-          <a:xfrm>
-            <a:off x="815975" y="1715542"/>
-            <a:ext cx="10560050" cy="3500834"/>
-          </a:xfrm>
-          <a:prstGeom prst="roundRect">
-            <a:avLst>
-              <a:gd name="adj" fmla="val 2811"/>
-            </a:avLst>
-          </a:prstGeom>
-          <a:noFill/>
-          <a:ln w="6350">
-            <a:solidFill>
-              <a:srgbClr val="D6E1E6"/>
-            </a:solidFill>
-            <a:prstDash val="solid"/>
-          </a:ln>
-        </p:spPr>
-        <p:txBody>
-          <a:bodyPr/>
-          <a:lstStyle/>
-          <a:p>
-            <a:endParaRPr lang="en-US"/>
-          </a:p>
-        </p:txBody>
-      </p:sp>
-      <p:sp>
-        <p:nvSpPr>
-          <p:cNvPr id="7" name="Text 4"/>
-          <p:cNvSpPr/>
-          <p:nvPr/>
-        </p:nvSpPr>
-        <p:spPr>
-          <a:xfrm>
-            <a:off x="812800" y="5422751"/>
-            <a:ext cx="10883392" cy="444649"/>
-          </a:xfrm>
-          <a:prstGeom prst="rect">
-            <a:avLst/>
-          </a:prstGeom>
-          <a:noFill/>
-          <a:ln/>
-        </p:spPr>
-        <p:txBody>
-          <a:bodyPr wrap="square" lIns="0" tIns="0" rIns="0" bIns="0" rtlCol="0" anchor="t">
-            <a:normAutofit/>
-          </a:bodyPr>
-          <a:lstStyle/>
-          <a:p>
-            <a:pPr marL="0" indent="0" algn="l">
-              <a:lnSpc>
-                <a:spcPts val="1659"/>
-              </a:lnSpc>
-              <a:buNone/>
-            </a:pPr>
-            <a:r>
-              <a:rPr lang="en-US" sz="1185" dirty="0">
-                <a:solidFill>
-                  <a:srgbClr val="46596A"/>
-                </a:solidFill>
-                <a:latin typeface="IBM Plex Sans" pitchFamily="34" charset="0"/>
-                <a:ea typeface="IBM Plex Sans" pitchFamily="34" charset="-122"/>
-                <a:cs typeface="IBM Plex Sans" pitchFamily="34" charset="-120"/>
-              </a:rPr>
-              <a:t>Checked left to right, cheapest first. Any match counts a visit to a known screen; no match stores a new screen and the transition that led to it. The grey notes say why each check exists.</a:t>
-            </a:r>
-            <a:endParaRPr lang="en-US" sz="1185" dirty="0"/>
-          </a:p>
-        </p:txBody>
-      </p:sp>
-      <p:sp>
-        <p:nvSpPr>
-          <p:cNvPr id="8" name="Text 5"/>
-          <p:cNvSpPr/>
-          <p:nvPr/>
-        </p:nvSpPr>
-        <p:spPr>
-          <a:xfrm>
-            <a:off x="812800" y="6238280"/>
-            <a:ext cx="3459976" cy="238720"/>
-          </a:xfrm>
-          <a:prstGeom prst="rect">
-            <a:avLst/>
-          </a:prstGeom>
-          <a:noFill/>
-          <a:ln/>
-        </p:spPr>
-        <p:txBody>
-          <a:bodyPr wrap="square" lIns="0" tIns="0" rIns="0" bIns="0" rtlCol="0" anchor="t">
-            <a:normAutofit/>
-          </a:bodyPr>
-          <a:lstStyle/>
-          <a:p>
-            <a:pPr marL="0" indent="0" algn="l">
-              <a:lnSpc>
-                <a:spcPts val="1680"/>
-              </a:lnSpc>
-              <a:buNone/>
-            </a:pPr>
-            <a:r>
-              <a:rPr lang="en-US" sz="1200" dirty="0">
-                <a:solidFill>
-                  <a:srgbClr val="55697A"/>
-                </a:solidFill>
-                <a:latin typeface="IBM Plex Sans" pitchFamily="34" charset="0"/>
-                <a:ea typeface="IBM Plex Sans" pitchFamily="34" charset="-122"/>
-                <a:cs typeface="IBM Plex Sans" pitchFamily="34" charset="-120"/>
-              </a:rPr>
-              <a:t>Exploratory Testing Automation · CSE 450 · BUET</a:t>
-            </a:r>
-            <a:endParaRPr lang="en-US" sz="1200" dirty="0"/>
-          </a:p>
-        </p:txBody>
-      </p:sp>
-      <p:sp>
-        <p:nvSpPr>
-          <p:cNvPr id="9" name="Text 6"/>
-          <p:cNvSpPr/>
-          <p:nvPr/>
-        </p:nvSpPr>
-        <p:spPr>
-          <a:xfrm>
-            <a:off x="11196290" y="6238280"/>
-            <a:ext cx="233710" cy="238720"/>
-          </a:xfrm>
-          <a:prstGeom prst="rect">
-            <a:avLst/>
-          </a:prstGeom>
-          <a:noFill/>
-          <a:ln/>
-        </p:spPr>
-        <p:txBody>
-          <a:bodyPr wrap="square" lIns="0" tIns="0" rIns="0" bIns="0" rtlCol="0" anchor="t">
-            <a:normAutofit/>
-          </a:bodyPr>
-          <a:lstStyle/>
-          <a:p>
-            <a:pPr marL="0" indent="0" algn="l">
-              <a:lnSpc>
-                <a:spcPts val="1680"/>
-              </a:lnSpc>
-              <a:buNone/>
-            </a:pPr>
-            <a:r>
-              <a:rPr lang="en-US" sz="1200" dirty="0">
-                <a:solidFill>
-                  <a:srgbClr val="55697A"/>
-                </a:solidFill>
-                <a:latin typeface="IBM Plex Sans" pitchFamily="34" charset="0"/>
-                <a:ea typeface="IBM Plex Sans" pitchFamily="34" charset="-122"/>
-                <a:cs typeface="IBM Plex Sans" pitchFamily="34" charset="-120"/>
-              </a:rPr>
-              <a:t>25</a:t>
-            </a:r>
-            <a:endParaRPr lang="en-US" sz="1200" dirty="0"/>
-          </a:p>
-        </p:txBody>
-      </p:sp>
     </p:spTree>
   </p:cSld>
   <p:clrMapOvr>
@@ -6830,564 +5088,6 @@
 </file>
 
 <file path=ppt/slides/slide7.xml><?xml version="1.0" encoding="utf-8"?>
-<p:sld xmlns:a="http://schemas.openxmlformats.org/drawingml/2006/main" xmlns:r="http://schemas.openxmlformats.org/officeDocument/2006/relationships" xmlns:p="http://schemas.openxmlformats.org/presentationml/2006/main">
-  <p:cSld name="Slide 24">
-    <p:bg>
-      <p:bgPr>
-        <a:solidFill>
-          <a:srgbClr val="EDF2F4"/>
-        </a:solidFill>
-        <a:effectLst/>
-      </p:bgPr>
-    </p:bg>
-    <p:spTree>
-      <p:nvGrpSpPr>
-        <p:cNvPr id="1" name=""/>
-        <p:cNvGrpSpPr/>
-        <p:nvPr/>
-      </p:nvGrpSpPr>
-      <p:grpSpPr>
-        <a:xfrm>
-          <a:off x="0" y="0"/>
-          <a:ext cx="0" cy="0"/>
-          <a:chOff x="0" y="0"/>
-          <a:chExt cx="0" cy="0"/>
-        </a:xfrm>
-      </p:grpSpPr>
-      <p:sp>
-        <p:nvSpPr>
-          <p:cNvPr id="2" name="Text 0"/>
-          <p:cNvSpPr/>
-          <p:nvPr/>
-        </p:nvSpPr>
-        <p:spPr>
-          <a:xfrm>
-            <a:off x="812800" y="508000"/>
-            <a:ext cx="10883392" cy="234454"/>
-          </a:xfrm>
-          <a:prstGeom prst="rect">
-            <a:avLst/>
-          </a:prstGeom>
-          <a:noFill/>
-          <a:ln/>
-        </p:spPr>
-        <p:txBody>
-          <a:bodyPr wrap="square" lIns="0" tIns="0" rIns="0" bIns="0" rtlCol="0" anchor="t">
-            <a:normAutofit/>
-          </a:bodyPr>
-          <a:lstStyle/>
-          <a:p>
-            <a:pPr marL="0" indent="0" algn="l">
-              <a:lnSpc>
-                <a:spcPts val="1675"/>
-              </a:lnSpc>
-              <a:buNone/>
-            </a:pPr>
-            <a:r>
-              <a:rPr lang="en-US" sz="1196" b="1" kern="0" spc="100" dirty="0">
-                <a:solidFill>
-                  <a:srgbClr val="0B6A8F"/>
-                </a:solidFill>
-                <a:latin typeface="IBM Plex Sans" pitchFamily="34" charset="0"/>
-                <a:ea typeface="IBM Plex Sans" pitchFamily="34" charset="-122"/>
-                <a:cs typeface="IBM Plex Sans" pitchFamily="34" charset="-120"/>
-              </a:rPr>
-              <a:t>EXECUTOR · THE APP MAP</a:t>
-            </a:r>
-            <a:endParaRPr lang="en-US" sz="1196" dirty="0"/>
-          </a:p>
-        </p:txBody>
-      </p:sp>
-      <p:sp>
-        <p:nvSpPr>
-          <p:cNvPr id="3" name="Text 1"/>
-          <p:cNvSpPr/>
-          <p:nvPr/>
-        </p:nvSpPr>
-        <p:spPr>
-          <a:xfrm>
-            <a:off x="812800" y="793254"/>
-            <a:ext cx="10883392" cy="436066"/>
-          </a:xfrm>
-          <a:prstGeom prst="rect">
-            <a:avLst/>
-          </a:prstGeom>
-          <a:noFill/>
-          <a:ln/>
-        </p:spPr>
-        <p:txBody>
-          <a:bodyPr wrap="square" lIns="0" tIns="0" rIns="0" bIns="0" rtlCol="0" anchor="t">
-            <a:normAutofit/>
-          </a:bodyPr>
-          <a:lstStyle/>
-          <a:p>
-            <a:pPr marL="0" indent="0" algn="l">
-              <a:lnSpc>
-                <a:spcPts val="3269"/>
-              </a:lnSpc>
-              <a:buNone/>
-            </a:pPr>
-            <a:r>
-              <a:rPr lang="en-US" sz="2972" b="1" dirty="0">
-                <a:solidFill>
-                  <a:srgbClr val="14303D"/>
-                </a:solidFill>
-                <a:latin typeface="Source Serif 4" pitchFamily="34" charset="0"/>
-                <a:ea typeface="Source Serif 4" pitchFamily="34" charset="-122"/>
-                <a:cs typeface="Source Serif 4" pitchFamily="34" charset="-120"/>
-              </a:rPr>
-              <a:t>Every run's path through the map</a:t>
-            </a:r>
-            <a:endParaRPr lang="en-US" sz="2972" dirty="0"/>
-          </a:p>
-        </p:txBody>
-      </p:sp>
-      <p:sp>
-        <p:nvSpPr>
-          <p:cNvPr id="4" name="Shape 2"/>
-          <p:cNvSpPr/>
-          <p:nvPr/>
-        </p:nvSpPr>
-        <p:spPr>
-          <a:xfrm>
-            <a:off x="812800" y="1313160"/>
-            <a:ext cx="6350000" cy="4826000"/>
-          </a:xfrm>
-          <a:prstGeom prst="roundRect">
-            <a:avLst>
-              <a:gd name="adj" fmla="val 2105"/>
-            </a:avLst>
-          </a:prstGeom>
-          <a:solidFill>
-            <a:srgbClr val="FDFEFE"/>
-          </a:solidFill>
-          <a:ln/>
-        </p:spPr>
-        <p:txBody>
-          <a:bodyPr/>
-          <a:lstStyle/>
-          <a:p>
-            <a:endParaRPr lang="en-US"/>
-          </a:p>
-        </p:txBody>
-      </p:sp>
-      <p:pic>
-        <p:nvPicPr>
-          <p:cNvPr id="5" name="Image 0" descr="Dashboard panel Live App Model, 79 states and 797 transitions: a graph of screens with the path of test TC-088 highlighted in orange through Contact List, Option Menu Search, Organize, Import 88 contacts and Close sheet, and beside it the stored screenshot of Contact List number 12, 19 visits and 14 controls"/>
-          <p:cNvPicPr>
-            <a:picLocks noChangeAspect="1"/>
-          </p:cNvPicPr>
-          <p:nvPr/>
-        </p:nvPicPr>
-        <p:blipFill>
-          <a:blip r:embed="rId3"/>
-          <a:stretch>
-            <a:fillRect/>
-          </a:stretch>
-        </p:blipFill>
-        <p:spPr>
-          <a:xfrm>
-            <a:off x="937117" y="1319510"/>
-            <a:ext cx="6101366" cy="4813300"/>
-          </a:xfrm>
-          <a:prstGeom prst="rect">
-            <a:avLst/>
-          </a:prstGeom>
-        </p:spPr>
-      </p:pic>
-      <p:sp>
-        <p:nvSpPr>
-          <p:cNvPr id="6" name="Shape 3"/>
-          <p:cNvSpPr/>
-          <p:nvPr/>
-        </p:nvSpPr>
-        <p:spPr>
-          <a:xfrm>
-            <a:off x="815975" y="1316335"/>
-            <a:ext cx="6343650" cy="4819650"/>
-          </a:xfrm>
-          <a:prstGeom prst="roundRect">
-            <a:avLst>
-              <a:gd name="adj" fmla="val 2042"/>
-            </a:avLst>
-          </a:prstGeom>
-          <a:noFill/>
-          <a:ln w="6350">
-            <a:solidFill>
-              <a:srgbClr val="D6E1E6"/>
-            </a:solidFill>
-            <a:prstDash val="solid"/>
-          </a:ln>
-        </p:spPr>
-        <p:txBody>
-          <a:bodyPr/>
-          <a:lstStyle/>
-          <a:p>
-            <a:endParaRPr lang="en-US"/>
-          </a:p>
-        </p:txBody>
-      </p:sp>
-      <p:sp>
-        <p:nvSpPr>
-          <p:cNvPr id="7" name="Text 4"/>
-          <p:cNvSpPr/>
-          <p:nvPr/>
-        </p:nvSpPr>
-        <p:spPr>
-          <a:xfrm>
-            <a:off x="7416800" y="2496939"/>
-            <a:ext cx="4081272" cy="274290"/>
-          </a:xfrm>
-          <a:prstGeom prst="rect">
-            <a:avLst/>
-          </a:prstGeom>
-          <a:noFill/>
-          <a:ln/>
-        </p:spPr>
-        <p:txBody>
-          <a:bodyPr wrap="square" lIns="0" tIns="0" rIns="0" bIns="0" rtlCol="0" anchor="t">
-            <a:normAutofit/>
-          </a:bodyPr>
-          <a:lstStyle/>
-          <a:p>
-            <a:pPr marL="0" indent="0" algn="l">
-              <a:lnSpc>
-                <a:spcPts val="1960"/>
-              </a:lnSpc>
-              <a:buNone/>
-            </a:pPr>
-            <a:r>
-              <a:rPr lang="en-US" sz="1400" b="1" dirty="0">
-                <a:solidFill>
-                  <a:srgbClr val="0B6A8F"/>
-                </a:solidFill>
-                <a:latin typeface="IBM Plex Sans" pitchFamily="34" charset="0"/>
-                <a:ea typeface="IBM Plex Sans" pitchFamily="34" charset="-122"/>
-                <a:cs typeface="IBM Plex Sans" pitchFamily="34" charset="-120"/>
-              </a:rPr>
-              <a:t>79 screens · 797 transitions</a:t>
-            </a:r>
-            <a:endParaRPr lang="en-US" sz="1400" dirty="0"/>
-          </a:p>
-        </p:txBody>
-      </p:sp>
-      <p:sp>
-        <p:nvSpPr>
-          <p:cNvPr id="8" name="Text 5"/>
-          <p:cNvSpPr/>
-          <p:nvPr/>
-        </p:nvSpPr>
-        <p:spPr>
-          <a:xfrm>
-            <a:off x="7416800" y="2771229"/>
-            <a:ext cx="4081272" cy="452041"/>
-          </a:xfrm>
-          <a:prstGeom prst="rect">
-            <a:avLst/>
-          </a:prstGeom>
-          <a:noFill/>
-          <a:ln/>
-        </p:spPr>
-        <p:txBody>
-          <a:bodyPr wrap="square" lIns="0" tIns="0" rIns="0" bIns="0" rtlCol="0" anchor="t">
-            <a:normAutofit/>
-          </a:bodyPr>
-          <a:lstStyle/>
-          <a:p>
-            <a:pPr marL="0" indent="0" algn="l">
-              <a:lnSpc>
-                <a:spcPts val="1680"/>
-              </a:lnSpc>
-              <a:buNone/>
-            </a:pPr>
-            <a:r>
-              <a:rPr lang="en-US" sz="1200" dirty="0">
-                <a:solidFill>
-                  <a:srgbClr val="46596A"/>
-                </a:solidFill>
-                <a:latin typeface="IBM Plex Sans" pitchFamily="34" charset="0"/>
-                <a:ea typeface="IBM Plex Sans" pitchFamily="34" charset="-122"/>
-                <a:cs typeface="IBM Plex Sans" pitchFamily="34" charset="-120"/>
-              </a:rPr>
-              <a:t>The contacts app, mapped only from screens the agent actually reached.</a:t>
-            </a:r>
-            <a:endParaRPr lang="en-US" sz="1200" dirty="0"/>
-          </a:p>
-        </p:txBody>
-      </p:sp>
-      <p:sp>
-        <p:nvSpPr>
-          <p:cNvPr id="9" name="Text 6"/>
-          <p:cNvSpPr/>
-          <p:nvPr/>
-        </p:nvSpPr>
-        <p:spPr>
-          <a:xfrm>
-            <a:off x="7416800" y="3375670"/>
-            <a:ext cx="4081272" cy="274290"/>
-          </a:xfrm>
-          <a:prstGeom prst="rect">
-            <a:avLst/>
-          </a:prstGeom>
-          <a:noFill/>
-          <a:ln/>
-        </p:spPr>
-        <p:txBody>
-          <a:bodyPr wrap="square" lIns="0" tIns="0" rIns="0" bIns="0" rtlCol="0" anchor="t">
-            <a:normAutofit/>
-          </a:bodyPr>
-          <a:lstStyle/>
-          <a:p>
-            <a:pPr marL="0" indent="0" algn="l">
-              <a:lnSpc>
-                <a:spcPts val="1960"/>
-              </a:lnSpc>
-              <a:buNone/>
-            </a:pPr>
-            <a:r>
-              <a:rPr lang="en-US" sz="1400" b="1" dirty="0">
-                <a:solidFill>
-                  <a:srgbClr val="0B6A8F"/>
-                </a:solidFill>
-                <a:latin typeface="IBM Plex Sans" pitchFamily="34" charset="0"/>
-                <a:ea typeface="IBM Plex Sans" pitchFamily="34" charset="-122"/>
-                <a:cs typeface="IBM Plex Sans" pitchFamily="34" charset="-120"/>
-              </a:rPr>
-              <a:t>Pick a run, see its path</a:t>
-            </a:r>
-            <a:endParaRPr lang="en-US" sz="1400" dirty="0"/>
-          </a:p>
-        </p:txBody>
-      </p:sp>
-      <p:sp>
-        <p:nvSpPr>
-          <p:cNvPr id="10" name="Text 7"/>
-          <p:cNvSpPr/>
-          <p:nvPr/>
-        </p:nvSpPr>
-        <p:spPr>
-          <a:xfrm>
-            <a:off x="7416800" y="3649960"/>
-            <a:ext cx="4081272" cy="452041"/>
-          </a:xfrm>
-          <a:prstGeom prst="rect">
-            <a:avLst/>
-          </a:prstGeom>
-          <a:noFill/>
-          <a:ln/>
-        </p:spPr>
-        <p:txBody>
-          <a:bodyPr wrap="square" lIns="0" tIns="0" rIns="0" bIns="0" rtlCol="0" anchor="t">
-            <a:normAutofit/>
-          </a:bodyPr>
-          <a:lstStyle/>
-          <a:p>
-            <a:pPr marL="0" indent="0" algn="l">
-              <a:lnSpc>
-                <a:spcPts val="1680"/>
-              </a:lnSpc>
-              <a:buNone/>
-            </a:pPr>
-            <a:r>
-              <a:rPr lang="en-US" sz="1200" dirty="0">
-                <a:solidFill>
-                  <a:srgbClr val="46596A"/>
-                </a:solidFill>
-                <a:latin typeface="IBM Plex Sans" pitchFamily="34" charset="0"/>
-                <a:ea typeface="IBM Plex Sans" pitchFamily="34" charset="-122"/>
-                <a:cs typeface="IBM Plex Sans" pitchFamily="34" charset="-120"/>
-              </a:rPr>
-              <a:t>In orange, the screens TC-088 visited, in order, read from that run's log.</a:t>
-            </a:r>
-            <a:endParaRPr lang="en-US" sz="1200" dirty="0"/>
-          </a:p>
-        </p:txBody>
-      </p:sp>
-      <p:sp>
-        <p:nvSpPr>
-          <p:cNvPr id="11" name="Text 8"/>
-          <p:cNvSpPr/>
-          <p:nvPr/>
-        </p:nvSpPr>
-        <p:spPr>
-          <a:xfrm>
-            <a:off x="7416800" y="4254401"/>
-            <a:ext cx="4081272" cy="274290"/>
-          </a:xfrm>
-          <a:prstGeom prst="rect">
-            <a:avLst/>
-          </a:prstGeom>
-          <a:noFill/>
-          <a:ln/>
-        </p:spPr>
-        <p:txBody>
-          <a:bodyPr wrap="square" lIns="0" tIns="0" rIns="0" bIns="0" rtlCol="0" anchor="t">
-            <a:normAutofit/>
-          </a:bodyPr>
-          <a:lstStyle/>
-          <a:p>
-            <a:pPr marL="0" indent="0" algn="l">
-              <a:lnSpc>
-                <a:spcPts val="1960"/>
-              </a:lnSpc>
-              <a:buNone/>
-            </a:pPr>
-            <a:r>
-              <a:rPr lang="en-US" sz="1400" b="1" dirty="0">
-                <a:solidFill>
-                  <a:srgbClr val="0B6A8F"/>
-                </a:solidFill>
-                <a:latin typeface="IBM Plex Sans" pitchFamily="34" charset="0"/>
-                <a:ea typeface="IBM Plex Sans" pitchFamily="34" charset="-122"/>
-                <a:cs typeface="IBM Plex Sans" pitchFamily="34" charset="-120"/>
-              </a:rPr>
-              <a:t>Click a screen</a:t>
-            </a:r>
-            <a:endParaRPr lang="en-US" sz="1400" dirty="0"/>
-          </a:p>
-        </p:txBody>
-      </p:sp>
-      <p:sp>
-        <p:nvSpPr>
-          <p:cNvPr id="12" name="Text 9"/>
-          <p:cNvSpPr/>
-          <p:nvPr/>
-        </p:nvSpPr>
-        <p:spPr>
-          <a:xfrm>
-            <a:off x="7416800" y="4528691"/>
-            <a:ext cx="4081272" cy="452041"/>
-          </a:xfrm>
-          <a:prstGeom prst="rect">
-            <a:avLst/>
-          </a:prstGeom>
-          <a:noFill/>
-          <a:ln/>
-        </p:spPr>
-        <p:txBody>
-          <a:bodyPr wrap="square" lIns="0" tIns="0" rIns="0" bIns="0" rtlCol="0" anchor="t">
-            <a:normAutofit/>
-          </a:bodyPr>
-          <a:lstStyle/>
-          <a:p>
-            <a:pPr marL="0" indent="0" algn="l">
-              <a:lnSpc>
-                <a:spcPts val="1680"/>
-              </a:lnSpc>
-              <a:buNone/>
-            </a:pPr>
-            <a:r>
-              <a:rPr lang="en-US" sz="1200" dirty="0">
-                <a:solidFill>
-                  <a:srgbClr val="46596A"/>
-                </a:solidFill>
-                <a:latin typeface="IBM Plex Sans" pitchFamily="34" charset="0"/>
-                <a:ea typeface="IBM Plex Sans" pitchFamily="34" charset="-122"/>
-                <a:cs typeface="IBM Plex Sans" pitchFamily="34" charset="-120"/>
-              </a:rPr>
-              <a:t>Its stored screenshot, how often it was visited, and its controls.</a:t>
-            </a:r>
-            <a:endParaRPr lang="en-US" sz="1200" dirty="0"/>
-          </a:p>
-        </p:txBody>
-      </p:sp>
-      <p:sp>
-        <p:nvSpPr>
-          <p:cNvPr id="13" name="Text 10"/>
-          <p:cNvSpPr/>
-          <p:nvPr/>
-        </p:nvSpPr>
-        <p:spPr>
-          <a:xfrm>
-            <a:off x="812800" y="6238280"/>
-            <a:ext cx="3459976" cy="238720"/>
-          </a:xfrm>
-          <a:prstGeom prst="rect">
-            <a:avLst/>
-          </a:prstGeom>
-          <a:noFill/>
-          <a:ln/>
-        </p:spPr>
-        <p:txBody>
-          <a:bodyPr wrap="square" lIns="0" tIns="0" rIns="0" bIns="0" rtlCol="0" anchor="t">
-            <a:normAutofit/>
-          </a:bodyPr>
-          <a:lstStyle/>
-          <a:p>
-            <a:pPr marL="0" indent="0" algn="l">
-              <a:lnSpc>
-                <a:spcPts val="1680"/>
-              </a:lnSpc>
-              <a:buNone/>
-            </a:pPr>
-            <a:r>
-              <a:rPr lang="en-US" sz="1200" dirty="0">
-                <a:solidFill>
-                  <a:srgbClr val="55697A"/>
-                </a:solidFill>
-                <a:latin typeface="IBM Plex Sans" pitchFamily="34" charset="0"/>
-                <a:ea typeface="IBM Plex Sans" pitchFamily="34" charset="-122"/>
-                <a:cs typeface="IBM Plex Sans" pitchFamily="34" charset="-120"/>
-              </a:rPr>
-              <a:t>Exploratory Testing Automation · CSE 450 · BUET</a:t>
-            </a:r>
-            <a:endParaRPr lang="en-US" sz="1200" dirty="0"/>
-          </a:p>
-        </p:txBody>
-      </p:sp>
-      <p:sp>
-        <p:nvSpPr>
-          <p:cNvPr id="14" name="Text 11"/>
-          <p:cNvSpPr/>
-          <p:nvPr/>
-        </p:nvSpPr>
-        <p:spPr>
-          <a:xfrm>
-            <a:off x="11196290" y="6238280"/>
-            <a:ext cx="233710" cy="238720"/>
-          </a:xfrm>
-          <a:prstGeom prst="rect">
-            <a:avLst/>
-          </a:prstGeom>
-          <a:noFill/>
-          <a:ln/>
-        </p:spPr>
-        <p:txBody>
-          <a:bodyPr wrap="square" lIns="0" tIns="0" rIns="0" bIns="0" rtlCol="0" anchor="t">
-            <a:normAutofit/>
-          </a:bodyPr>
-          <a:lstStyle/>
-          <a:p>
-            <a:pPr marL="0" indent="0" algn="l">
-              <a:lnSpc>
-                <a:spcPts val="1680"/>
-              </a:lnSpc>
-              <a:buNone/>
-            </a:pPr>
-            <a:r>
-              <a:rPr lang="en-US" sz="1200" dirty="0">
-                <a:solidFill>
-                  <a:srgbClr val="55697A"/>
-                </a:solidFill>
-                <a:latin typeface="IBM Plex Sans" pitchFamily="34" charset="0"/>
-                <a:ea typeface="IBM Plex Sans" pitchFamily="34" charset="-122"/>
-                <a:cs typeface="IBM Plex Sans" pitchFamily="34" charset="-120"/>
-              </a:rPr>
-              <a:t>26</a:t>
-            </a:r>
-            <a:endParaRPr lang="en-US" sz="1200" dirty="0"/>
-          </a:p>
-        </p:txBody>
-      </p:sp>
-    </p:spTree>
-  </p:cSld>
-  <p:clrMapOvr>
-    <a:masterClrMapping/>
-  </p:clrMapOvr>
-</p:sld>
-</file>
-
-<file path=ppt/slides/slide8.xml><?xml version="1.0" encoding="utf-8"?>
 <p:sld xmlns:a="http://schemas.openxmlformats.org/drawingml/2006/main" xmlns:r="http://schemas.openxmlformats.org/officeDocument/2006/relationships" xmlns:p="http://schemas.openxmlformats.org/presentationml/2006/main">
   <p:cSld name="Slide 3">
     <p:bg>
@@ -7622,6 +5322,9 @@
           <a:lstStyle/>
           <a:p>
             <a:pPr marL="342900" indent="-342900">
+              <a:lnSpc>
+                <a:spcPts val="1400"/>
+              </a:lnSpc>
               <a:spcAft>
                 <a:spcPts val="800"/>
               </a:spcAft>
@@ -7629,7 +5332,7 @@
               <a:buChar char="•"/>
             </a:pPr>
             <a:r>
-              <a:rPr lang="en-US" sz="1600" dirty="0">
+              <a:rPr lang="en-US" sz="1100" dirty="0">
                 <a:solidFill>
                   <a:srgbClr val="46596A"/>
                 </a:solidFill>
@@ -7639,10 +5342,13 @@
               </a:rPr>
               <a:t>An accessibility style description of the DOM, not screenshots</a:t>
             </a:r>
-            <a:endParaRPr lang="en-US" sz="1600" dirty="0"/>
+            <a:endParaRPr lang="en-US" sz="1100" dirty="0"/>
           </a:p>
           <a:p>
             <a:pPr marL="342900" indent="-342900">
+              <a:lnSpc>
+                <a:spcPts val="1400"/>
+              </a:lnSpc>
               <a:spcAft>
                 <a:spcPts val="800"/>
               </a:spcAft>
@@ -7650,7 +5356,7 @@
               <a:buChar char="•"/>
             </a:pPr>
             <a:r>
-              <a:rPr lang="en-US" sz="1600" dirty="0">
+              <a:rPr lang="en-US" sz="1100" dirty="0">
                 <a:solidFill>
                   <a:srgbClr val="46596A"/>
                 </a:solidFill>
@@ -7660,10 +5366,13 @@
               </a:rPr>
               <a:t>role and name, the same vocabulary the Android executor uses</a:t>
             </a:r>
-            <a:endParaRPr lang="en-US" sz="1600" dirty="0"/>
+            <a:endParaRPr lang="en-US" sz="1100" dirty="0"/>
           </a:p>
           <a:p>
             <a:pPr marL="342900" indent="-342900">
+              <a:lnSpc>
+                <a:spcPts val="1400"/>
+              </a:lnSpc>
               <a:spcAft>
                 <a:spcPts val="800"/>
               </a:spcAft>
@@ -7671,7 +5380,7 @@
               <a:buChar char="•"/>
             </a:pPr>
             <a:r>
-              <a:rPr lang="en-US" sz="1600" dirty="0">
+              <a:rPr lang="en-US" sz="1100" dirty="0">
                 <a:solidFill>
                   <a:srgbClr val="46596A"/>
                 </a:solidFill>
@@ -7681,7 +5390,31 @@
               </a:rPr>
               <a:t>native HTML5 validation, including the browser's own message</a:t>
             </a:r>
-            <a:endParaRPr lang="en-US" sz="1600" dirty="0"/>
+            <a:endParaRPr lang="en-US" sz="1100" dirty="0"/>
+          </a:p>
+          <a:p>
+            <a:pPr marL="342900" indent="-342900">
+              <a:lnSpc>
+                <a:spcPts val="1400"/>
+              </a:lnSpc>
+              <a:spcAft>
+                <a:spcPts val="800"/>
+              </a:spcAft>
+              <a:buSzPct val="100000"/>
+              <a:buChar char="•"/>
+            </a:pPr>
+            <a:r>
+              <a:rPr lang="en-US" sz="1100" dirty="0">
+                <a:solidFill>
+                  <a:srgbClr val="46596A"/>
+                </a:solidFill>
+                <a:latin typeface="IBM Plex Sans" pitchFamily="34" charset="0"/>
+                <a:ea typeface="IBM Plex Sans" pitchFamily="34" charset="-122"/>
+                <a:cs typeface="IBM Plex Sans" pitchFamily="34" charset="-120"/>
+              </a:rPr>
+              <a:t>a password is described, never echoed</a:t>
+            </a:r>
+            <a:endParaRPr lang="en-US" sz="1100" dirty="0"/>
           </a:p>
         </p:txBody>
       </p:sp>
@@ -7778,6 +5511,9 @@
           <a:lstStyle/>
           <a:p>
             <a:pPr marL="342900" indent="-342900">
+              <a:lnSpc>
+                <a:spcPts val="1400"/>
+              </a:lnSpc>
               <a:spcAft>
                 <a:spcPts val="800"/>
               </a:spcAft>
@@ -7785,7 +5521,7 @@
               <a:buChar char="•"/>
             </a:pPr>
             <a:r>
-              <a:rPr lang="en-US" sz="1600" dirty="0">
+              <a:rPr lang="en-US" sz="1100" dirty="0">
                 <a:solidFill>
                   <a:srgbClr val="46596A"/>
                 </a:solidFill>
@@ -7793,47 +5529,15 @@
                 <a:ea typeface="IBM Plex Sans" pitchFamily="34" charset="-122"/>
                 <a:cs typeface="IBM Plex Sans" pitchFamily="34" charset="-120"/>
               </a:rPr>
-              <a:t>Click, fill, press, select</a:t>
-            </a:r>
-            <a:r>
-              <a:rPr lang="en-US" sz="1600" dirty="0"/>
-              <a:t>, </a:t>
-            </a:r>
-            <a:r>
-              <a:rPr lang="en-US" sz="1600" dirty="0" err="1">
-                <a:solidFill>
-                  <a:srgbClr val="46596A"/>
-                </a:solidFill>
-                <a:latin typeface="IBM Plex Sans" pitchFamily="34" charset="0"/>
-              </a:rPr>
-              <a:t>g</a:t>
-            </a:r>
-            <a:r>
-              <a:rPr lang="en-US" sz="1600" dirty="0" err="1">
-                <a:solidFill>
-                  <a:srgbClr val="46596A"/>
-                </a:solidFill>
-                <a:latin typeface="IBM Plex Sans" pitchFamily="34" charset="0"/>
-                <a:ea typeface="IBM Plex Sans" pitchFamily="34" charset="-122"/>
-                <a:cs typeface="IBM Plex Sans" pitchFamily="34" charset="-120"/>
-              </a:rPr>
-              <a:t>oto</a:t>
-            </a:r>
-            <a:r>
-              <a:rPr lang="en-US" sz="1600" dirty="0">
-                <a:solidFill>
-                  <a:srgbClr val="46596A"/>
-                </a:solidFill>
-                <a:latin typeface="IBM Plex Sans" pitchFamily="34" charset="0"/>
-                <a:ea typeface="IBM Plex Sans" pitchFamily="34" charset="-122"/>
-                <a:cs typeface="IBM Plex Sans" pitchFamily="34" charset="-120"/>
-              </a:rPr>
-              <a:t>, back, scroll, wait, finish</a:t>
-            </a:r>
-            <a:endParaRPr lang="en-US" sz="1600" dirty="0"/>
+              <a:t>click   fill   press   select</a:t>
+            </a:r>
+            <a:endParaRPr lang="en-US" sz="1100" dirty="0"/>
           </a:p>
           <a:p>
             <a:pPr marL="342900" indent="-342900">
+              <a:lnSpc>
+                <a:spcPts val="1400"/>
+              </a:lnSpc>
               <a:spcAft>
                 <a:spcPts val="800"/>
               </a:spcAft>
@@ -7841,7 +5545,7 @@
               <a:buChar char="•"/>
             </a:pPr>
             <a:r>
-              <a:rPr lang="en-US" sz="1600" dirty="0">
+              <a:rPr lang="en-US" sz="1100" dirty="0">
                 <a:solidFill>
                   <a:srgbClr val="46596A"/>
                 </a:solidFill>
@@ -7849,11 +5553,15 @@
                 <a:ea typeface="IBM Plex Sans" pitchFamily="34" charset="-122"/>
                 <a:cs typeface="IBM Plex Sans" pitchFamily="34" charset="-120"/>
               </a:rPr>
-              <a:t>9 actions</a:t>
-            </a:r>
+              <a:t>goto   back   scroll   wait   finish</a:t>
+            </a:r>
+            <a:endParaRPr lang="en-US" sz="1100" dirty="0"/>
           </a:p>
           <a:p>
             <a:pPr marL="342900" indent="-342900">
+              <a:lnSpc>
+                <a:spcPts val="1400"/>
+              </a:lnSpc>
               <a:spcAft>
                 <a:spcPts val="800"/>
               </a:spcAft>
@@ -7861,7 +5569,7 @@
               <a:buChar char="•"/>
             </a:pPr>
             <a:r>
-              <a:rPr lang="en-US" sz="1600" dirty="0">
+              <a:rPr lang="en-US" sz="1100" dirty="0">
                 <a:solidFill>
                   <a:srgbClr val="46596A"/>
                 </a:solidFill>
@@ -7869,9 +5577,33 @@
                 <a:ea typeface="IBM Plex Sans" pitchFamily="34" charset="-122"/>
                 <a:cs typeface="IBM Plex Sans" pitchFamily="34" charset="-120"/>
               </a:rPr>
-              <a:t>CAPTCHA escalates to a person</a:t>
-            </a:r>
-            <a:endParaRPr lang="en-US" sz="1600" dirty="0"/>
+              <a:t>nine actions, each checked against the target's guardrails</a:t>
+            </a:r>
+            <a:endParaRPr lang="en-US" sz="1100" dirty="0"/>
+          </a:p>
+          <a:p>
+            <a:pPr marL="342900" indent="-342900">
+              <a:lnSpc>
+                <a:spcPts val="1400"/>
+              </a:lnSpc>
+              <a:spcAft>
+                <a:spcPts val="800"/>
+              </a:spcAft>
+              <a:buSzPct val="100000"/>
+              <a:buChar char="•"/>
+            </a:pPr>
+            <a:r>
+              <a:rPr lang="en-US" sz="1100" dirty="0">
+                <a:solidFill>
+                  <a:srgbClr val="46596A"/>
+                </a:solidFill>
+                <a:latin typeface="IBM Plex Sans" pitchFamily="34" charset="0"/>
+                <a:ea typeface="IBM Plex Sans" pitchFamily="34" charset="-122"/>
+                <a:cs typeface="IBM Plex Sans" pitchFamily="34" charset="-120"/>
+              </a:rPr>
+              <a:t>CAPTCHA escalates to a person when visible, fails cleanly when headless</a:t>
+            </a:r>
+            <a:endParaRPr lang="en-US" sz="1100" dirty="0"/>
           </a:p>
         </p:txBody>
       </p:sp>
@@ -7968,6 +5700,9 @@
           <a:lstStyle/>
           <a:p>
             <a:pPr marL="342900" indent="-342900">
+              <a:lnSpc>
+                <a:spcPts val="1400"/>
+              </a:lnSpc>
               <a:spcAft>
                 <a:spcPts val="800"/>
               </a:spcAft>
@@ -7975,7 +5710,7 @@
               <a:buChar char="•"/>
             </a:pPr>
             <a:r>
-              <a:rPr lang="en-US" sz="1600" dirty="0">
+              <a:rPr lang="en-US" sz="1100" dirty="0">
                 <a:solidFill>
                   <a:srgbClr val="46596A"/>
                 </a:solidFill>
@@ -7985,10 +5720,13 @@
               </a:rPr>
               <a:t>console errors</a:t>
             </a:r>
-            <a:endParaRPr lang="en-US" sz="1600" dirty="0"/>
+            <a:endParaRPr lang="en-US" sz="1100" dirty="0"/>
           </a:p>
           <a:p>
             <a:pPr marL="342900" indent="-342900">
+              <a:lnSpc>
+                <a:spcPts val="1400"/>
+              </a:lnSpc>
               <a:spcAft>
                 <a:spcPts val="800"/>
               </a:spcAft>
@@ -7996,7 +5734,7 @@
               <a:buChar char="•"/>
             </a:pPr>
             <a:r>
-              <a:rPr lang="en-US" sz="1600" dirty="0">
+              <a:rPr lang="en-US" sz="1100" dirty="0">
                 <a:solidFill>
                   <a:srgbClr val="46596A"/>
                 </a:solidFill>
@@ -8006,10 +5744,13 @@
               </a:rPr>
               <a:t>uncaught page errors</a:t>
             </a:r>
-            <a:endParaRPr lang="en-US" sz="1600" dirty="0"/>
+            <a:endParaRPr lang="en-US" sz="1100" dirty="0"/>
           </a:p>
           <a:p>
             <a:pPr marL="342900" indent="-342900">
+              <a:lnSpc>
+                <a:spcPts val="1400"/>
+              </a:lnSpc>
               <a:spcAft>
                 <a:spcPts val="800"/>
               </a:spcAft>
@@ -8017,7 +5758,7 @@
               <a:buChar char="•"/>
             </a:pPr>
             <a:r>
-              <a:rPr lang="en-US" sz="1600" dirty="0">
+              <a:rPr lang="en-US" sz="1100" dirty="0">
                 <a:solidFill>
                   <a:srgbClr val="46596A"/>
                 </a:solidFill>
@@ -8027,10 +5768,13 @@
               </a:rPr>
               <a:t>HTTP 4xx and 5xx responses</a:t>
             </a:r>
-            <a:endParaRPr lang="en-US" sz="1600" dirty="0"/>
+            <a:endParaRPr lang="en-US" sz="1100" dirty="0"/>
           </a:p>
           <a:p>
             <a:pPr marL="342900" indent="-342900">
+              <a:lnSpc>
+                <a:spcPts val="1400"/>
+              </a:lnSpc>
               <a:spcAft>
                 <a:spcPts val="800"/>
               </a:spcAft>
@@ -8038,7 +5782,7 @@
               <a:buChar char="•"/>
             </a:pPr>
             <a:r>
-              <a:rPr lang="en-US" sz="1600" dirty="0">
+              <a:rPr lang="en-US" sz="1100" dirty="0">
                 <a:solidFill>
                   <a:srgbClr val="46596A"/>
                 </a:solidFill>
@@ -8048,7 +5792,7 @@
               </a:rPr>
               <a:t>dialogs the page never showed</a:t>
             </a:r>
-            <a:endParaRPr lang="en-US" sz="1600" dirty="0"/>
+            <a:endParaRPr lang="en-US" sz="1100" dirty="0"/>
           </a:p>
         </p:txBody>
       </p:sp>
@@ -8170,8 +5914,8 @@
         </p:nvSpPr>
         <p:spPr>
           <a:xfrm>
-            <a:off x="11128248" y="6236208"/>
-            <a:ext cx="301752" cy="237744"/>
+            <a:off x="11247120" y="6236208"/>
+            <a:ext cx="182880" cy="237744"/>
           </a:xfrm>
           <a:prstGeom prst="rect">
             <a:avLst/>
@@ -8233,7 +5977,7 @@
 </p:sld>
 </file>
 
-<file path=ppt/slides/slide9.xml><?xml version="1.0" encoding="utf-8"?>
+<file path=ppt/slides/slide8.xml><?xml version="1.0" encoding="utf-8"?>
 <p:sld xmlns:a="http://schemas.openxmlformats.org/drawingml/2006/main" xmlns:r="http://schemas.openxmlformats.org/officeDocument/2006/relationships" xmlns:p="http://schemas.openxmlformats.org/presentationml/2006/main">
   <p:cSld name="Slide 4">
     <p:bg>
@@ -9086,6 +6830,77 @@
       </p:sp>
       <p:sp>
         <p:nvSpPr>
+          <p:cNvPr id="16" name="Shape 14"/>
+          <p:cNvSpPr/>
+          <p:nvPr/>
+        </p:nvSpPr>
+        <p:spPr>
+          <a:xfrm>
+            <a:off x="8275320" y="5843016"/>
+            <a:ext cx="3108960" cy="329184"/>
+          </a:xfrm>
+          <a:prstGeom prst="rect">
+            <a:avLst/>
+          </a:prstGeom>
+          <a:solidFill>
+            <a:srgbClr val="FFFFFF"/>
+          </a:solidFill>
+          <a:ln w="12700">
+            <a:solidFill>
+              <a:srgbClr val="D5E0E5"/>
+            </a:solidFill>
+            <a:prstDash val="solid"/>
+          </a:ln>
+        </p:spPr>
+        <p:txBody>
+          <a:bodyPr/>
+          <a:lstStyle/>
+          <a:p>
+            <a:endParaRPr lang="en-US"/>
+          </a:p>
+        </p:txBody>
+      </p:sp>
+      <p:sp>
+        <p:nvSpPr>
+          <p:cNvPr id="17" name="Text 15"/>
+          <p:cNvSpPr txBox="1"/>
+          <p:nvPr/>
+        </p:nvSpPr>
+        <p:spPr>
+          <a:xfrm>
+            <a:off x="8275320" y="5843016"/>
+            <a:ext cx="3108960" cy="329184"/>
+          </a:xfrm>
+          <a:prstGeom prst="rect">
+            <a:avLst/>
+          </a:prstGeom>
+          <a:noFill/>
+          <a:ln/>
+        </p:spPr>
+        <p:txBody>
+          <a:bodyPr wrap="square" lIns="0" tIns="0" rIns="0" bIns="0" rtlCol="0" anchor="ctr"/>
+          <a:lstStyle/>
+          <a:p>
+            <a:pPr marL="0" indent="0" algn="ctr">
+              <a:buNone/>
+            </a:pPr>
+            <a:r>
+              <a:rPr lang="en-US" sz="1100" b="1" dirty="0">
+                <a:solidFill>
+                  <a:srgbClr val="0B6A8F"/>
+                </a:solidFill>
+                <a:latin typeface="IBM Plex Sans" pitchFamily="34" charset="0"/>
+                <a:ea typeface="IBM Plex Sans" pitchFamily="34" charset="-122"/>
+                <a:cs typeface="IBM Plex Sans" pitchFamily="34" charset="-120"/>
+              </a:rPr>
+              <a:t>5 targets · 2 platforms · 1 planner</a:t>
+            </a:r>
+            <a:endParaRPr lang="en-US" sz="1100" dirty="0"/>
+          </a:p>
+        </p:txBody>
+      </p:sp>
+      <p:sp>
+        <p:nvSpPr>
           <p:cNvPr id="18" name="Text 16"/>
           <p:cNvSpPr txBox="1"/>
           <p:nvPr/>
@@ -9131,8 +6946,8 @@
         </p:nvSpPr>
         <p:spPr>
           <a:xfrm>
-            <a:off x="11183112" y="6236208"/>
-            <a:ext cx="246888" cy="237744"/>
+            <a:off x="11247120" y="6236208"/>
+            <a:ext cx="182880" cy="237744"/>
           </a:xfrm>
           <a:prstGeom prst="rect">
             <a:avLst/>
